--- a/docs/DreamOS-Project-Monitoring-II.pptx
+++ b/docs/DreamOS-Project-Monitoring-II.pptx
@@ -25,9 +25,11 @@
     <p:sldId id="273" r:id="rId19"/>
     <p:sldId id="274" r:id="rId20"/>
     <p:sldId id="275" r:id="rId21"/>
+    <p:sldId id="276" r:id="rId22"/>
+    <p:sldId id="277" r:id="rId23"/>
   </p:sldIdLst>
   <p:notesMasterIdLst>
-    <p:notesMasterId r:id="rId22"/>
+    <p:notesMasterId r:id="rId24"/>
   </p:notesMasterIdLst>
   <p:sldSz cx="12192000" cy="6858000"/>
   <p:notesSz cx="6858000" cy="12192000"/>
@@ -1601,6 +1603,182 @@
             <a:fld id="{F7021451-1387-4CA6-816F-3879F97B5CBC}" type="slidenum">
               <a:rPr lang="en-US"/>
               <a:t>20</a:t>
+            </a:fld>
+            <a:endParaRPr lang="en-US"/>
+          </a:p>
+        </p:txBody>
+      </p:sp>
+    </p:spTree>
+    <p:extLst>
+      <p:ext uri="{BB962C8B-B14F-4D97-AF65-F5344CB8AC3E}">
+        <p14:creationId xmlns:p14="http://schemas.microsoft.com/office/powerpoint/2010/main" val="1024086991"/>
+      </p:ext>
+    </p:extLst>
+  </p:cSld>
+  <p:clrMapOvr>
+    <a:masterClrMapping/>
+  </p:clrMapOvr>
+</p:notes>
+</file>
+
+<file path=ppt/notesSlides/notesSlide21.xml><?xml version="1.0" encoding="utf-8"?>
+<p:notes xmlns:a="http://schemas.openxmlformats.org/drawingml/2006/main" xmlns:r="http://schemas.openxmlformats.org/officeDocument/2006/relationships" xmlns:p="http://schemas.openxmlformats.org/presentationml/2006/main">
+  <p:cSld>
+    <p:spTree>
+      <p:nvGrpSpPr>
+        <p:cNvPr id="1" name=""/>
+        <p:cNvGrpSpPr/>
+        <p:nvPr/>
+      </p:nvGrpSpPr>
+      <p:grpSpPr>
+        <a:xfrm>
+          <a:off x="0" y="0"/>
+          <a:ext cx="0" cy="0"/>
+          <a:chOff x="0" y="0"/>
+          <a:chExt cx="0" cy="0"/>
+        </a:xfrm>
+      </p:grpSpPr>
+      <p:sp>
+        <p:nvSpPr>
+          <p:cNvPr id="2" name="Slide Image Placeholder 1"/>
+          <p:cNvSpPr>
+            <a:spLocks noGrp="1" noRot="1" noChangeAspect="1"/>
+          </p:cNvSpPr>
+          <p:nvPr>
+            <p:ph type="sldImg"/>
+          </p:nvPr>
+        </p:nvSpPr>
+        <p:spPr/>
+      </p:sp>
+      <p:sp>
+        <p:nvSpPr>
+          <p:cNvPr id="3" name="Notes Placeholder 2"/>
+          <p:cNvSpPr>
+            <a:spLocks noGrp="1"/>
+          </p:cNvSpPr>
+          <p:nvPr>
+            <p:ph type="body" idx="1"/>
+          </p:nvPr>
+        </p:nvSpPr>
+        <p:spPr/>
+        <p:txBody>
+          <a:bodyPr/>
+          <a:lstStyle/>
+          <a:p>
+            <a:r>
+              <a:rPr lang="en-US" dirty="0"/>
+              <a:t/>
+            </a:r>
+            <a:endParaRPr lang="en-US" dirty="0"/>
+          </a:p>
+        </p:txBody>
+      </p:sp>
+      <p:sp>
+        <p:nvSpPr>
+          <p:cNvPr id="4" name="Slide Number Placeholder 3"/>
+          <p:cNvSpPr>
+            <a:spLocks noGrp="1"/>
+          </p:cNvSpPr>
+          <p:nvPr>
+            <p:ph type="sldNum" sz="quarter" idx="10"/>
+          </p:nvPr>
+        </p:nvSpPr>
+        <p:spPr/>
+        <p:txBody>
+          <a:bodyPr/>
+          <a:lstStyle/>
+          <a:p>
+            <a:fld id="{F7021451-1387-4CA6-816F-3879F97B5CBC}" type="slidenum">
+              <a:rPr lang="en-US"/>
+              <a:t>21</a:t>
+            </a:fld>
+            <a:endParaRPr lang="en-US"/>
+          </a:p>
+        </p:txBody>
+      </p:sp>
+    </p:spTree>
+    <p:extLst>
+      <p:ext uri="{BB962C8B-B14F-4D97-AF65-F5344CB8AC3E}">
+        <p14:creationId xmlns:p14="http://schemas.microsoft.com/office/powerpoint/2010/main" val="1024086991"/>
+      </p:ext>
+    </p:extLst>
+  </p:cSld>
+  <p:clrMapOvr>
+    <a:masterClrMapping/>
+  </p:clrMapOvr>
+</p:notes>
+</file>
+
+<file path=ppt/notesSlides/notesSlide22.xml><?xml version="1.0" encoding="utf-8"?>
+<p:notes xmlns:a="http://schemas.openxmlformats.org/drawingml/2006/main" xmlns:r="http://schemas.openxmlformats.org/officeDocument/2006/relationships" xmlns:p="http://schemas.openxmlformats.org/presentationml/2006/main">
+  <p:cSld>
+    <p:spTree>
+      <p:nvGrpSpPr>
+        <p:cNvPr id="1" name=""/>
+        <p:cNvGrpSpPr/>
+        <p:nvPr/>
+      </p:nvGrpSpPr>
+      <p:grpSpPr>
+        <a:xfrm>
+          <a:off x="0" y="0"/>
+          <a:ext cx="0" cy="0"/>
+          <a:chOff x="0" y="0"/>
+          <a:chExt cx="0" cy="0"/>
+        </a:xfrm>
+      </p:grpSpPr>
+      <p:sp>
+        <p:nvSpPr>
+          <p:cNvPr id="2" name="Slide Image Placeholder 1"/>
+          <p:cNvSpPr>
+            <a:spLocks noGrp="1" noRot="1" noChangeAspect="1"/>
+          </p:cNvSpPr>
+          <p:nvPr>
+            <p:ph type="sldImg"/>
+          </p:nvPr>
+        </p:nvSpPr>
+        <p:spPr/>
+      </p:sp>
+      <p:sp>
+        <p:nvSpPr>
+          <p:cNvPr id="3" name="Notes Placeholder 2"/>
+          <p:cNvSpPr>
+            <a:spLocks noGrp="1"/>
+          </p:cNvSpPr>
+          <p:nvPr>
+            <p:ph type="body" idx="1"/>
+          </p:nvPr>
+        </p:nvSpPr>
+        <p:spPr/>
+        <p:txBody>
+          <a:bodyPr/>
+          <a:lstStyle/>
+          <a:p>
+            <a:r>
+              <a:rPr lang="en-US" dirty="0"/>
+              <a:t/>
+            </a:r>
+            <a:endParaRPr lang="en-US" dirty="0"/>
+          </a:p>
+        </p:txBody>
+      </p:sp>
+      <p:sp>
+        <p:nvSpPr>
+          <p:cNvPr id="4" name="Slide Number Placeholder 3"/>
+          <p:cNvSpPr>
+            <a:spLocks noGrp="1"/>
+          </p:cNvSpPr>
+          <p:nvPr>
+            <p:ph type="sldNum" sz="quarter" idx="10"/>
+          </p:nvPr>
+        </p:nvSpPr>
+        <p:spPr/>
+        <p:txBody>
+          <a:bodyPr/>
+          <a:lstStyle/>
+          <a:p>
+            <a:fld id="{F7021451-1387-4CA6-816F-3879F97B5CBC}" type="slidenum">
+              <a:rPr lang="en-US"/>
+              <a:t>22</a:t>
             </a:fld>
             <a:endParaRPr lang="en-US"/>
           </a:p>
@@ -5319,7 +5497,7 @@
                 <a:ea typeface="Trebuchet MS" pitchFamily="34" charset="-122"/>
                 <a:cs typeface="Trebuchet MS" pitchFamily="34" charset="-120"/>
               </a:rPr>
-              <a:t>97</a:t>
+              <a:t>107</a:t>
             </a:r>
             <a:endParaRPr lang="en-US" sz="4400" dirty="0"/>
           </a:p>
@@ -5918,7 +6096,7 @@
                 <a:ea typeface="Trebuchet MS" pitchFamily="34" charset="-122"/>
                 <a:cs typeface="Trebuchet MS" pitchFamily="34" charset="-120"/>
               </a:rPr>
-              <a:t>Key engineering findings</a:t>
+              <a:t>Knowledge graph: three edge kinds, two measured fixes</a:t>
             </a:r>
             <a:endParaRPr lang="en-US" sz="2800" dirty="0"/>
           </a:p>
@@ -5957,7 +6135,7 @@
                 <a:ea typeface="Calibri" pitchFamily="34" charset="-122"/>
                 <a:cs typeface="Calibri" pitchFamily="34" charset="-120"/>
               </a:rPr>
-              <a:t>Each was measured on the real models and the demo vault, not assumed</a:t>
+              <a:t>Report section 5.2 - measured on the real models and the 37-file demo vault</a:t>
             </a:r>
             <a:endParaRPr lang="en-US" sz="1400" dirty="0"/>
           </a:p>
@@ -6050,7 +6228,7 @@
         <p:spPr>
           <a:xfrm>
             <a:off x="548640" y="1371600"/>
-            <a:ext cx="5440680" cy="2286000"/>
+            <a:ext cx="3566160" cy="4846320"/>
           </a:xfrm>
           <a:prstGeom prst="rect">
             <a:avLst/>
@@ -6077,7 +6255,7 @@
         <p:spPr>
           <a:xfrm>
             <a:off x="548640" y="1371600"/>
-            <a:ext cx="64008" cy="2286000"/>
+            <a:ext cx="64008" cy="4846320"/>
           </a:xfrm>
           <a:prstGeom prst="rect">
             <a:avLst/>
@@ -6097,7 +6275,7 @@
         <p:spPr>
           <a:xfrm>
             <a:off x="822960" y="1508760"/>
-            <a:ext cx="4983480" cy="365760"/>
+            <a:ext cx="3108960" cy="365760"/>
           </a:xfrm>
           <a:prstGeom prst="rect">
             <a:avLst/>
@@ -6121,7 +6299,7 @@
                 <a:ea typeface="Trebuchet MS" pitchFamily="34" charset="-122"/>
                 <a:cs typeface="Trebuchet MS" pitchFamily="34" charset="-120"/>
               </a:rPr>
-              <a:t>Raw embedding similarity misled the graph</a:t>
+              <a:t>Edge kinds</a:t>
             </a:r>
             <a:endParaRPr lang="en-US" sz="1700" dirty="0"/>
           </a:p>
@@ -6136,7 +6314,7 @@
         <p:spPr>
           <a:xfrm>
             <a:off x="822960" y="1965960"/>
-            <a:ext cx="4937760" cy="1554480"/>
+            <a:ext cx="3063240" cy="4114800"/>
           </a:xfrm>
           <a:prstGeom prst="rect">
             <a:avLst/>
@@ -6156,7 +6334,7 @@
               <a:buChar char="•"/>
             </a:pPr>
             <a:r>
-              <a:rPr lang="en-US" sz="1450" dirty="0">
+              <a:rPr lang="en-US" sz="1400" dirty="0">
                 <a:solidFill>
                   <a:srgbClr val="1C2333"/>
                 </a:solidFill>
@@ -6164,9 +6342,9 @@
                 <a:ea typeface="Calibri" pitchFamily="34" charset="-122"/>
                 <a:cs typeface="Calibri" pitchFamily="34" charset="-120"/>
               </a:rPr>
-              <a:t>Doc-vs-doc cosine with nomic-embed-text has median 0.52 and max 0.83.</a:t>
-            </a:r>
-            <a:endParaRPr lang="en-US" sz="1450" dirty="0"/>
+              <a:t>similar: files whose embeddings are close; each file nominates its 3 strongest neighbours</a:t>
+            </a:r>
+            <a:endParaRPr lang="en-US" sz="1400" dirty="0"/>
           </a:p>
           <a:p>
             <a:pPr marL="342900" indent="-342900">
@@ -6177,7 +6355,7 @@
               <a:buChar char="•"/>
             </a:pPr>
             <a:r>
-              <a:rPr lang="en-US" sz="1450" dirty="0">
+              <a:rPr lang="en-US" sz="1400" dirty="0">
                 <a:solidFill>
                   <a:srgbClr val="1C2333"/>
                 </a:solidFill>
@@ -6185,9 +6363,9 @@
                 <a:ea typeface="Calibri" pitchFamily="34" charset="-122"/>
                 <a:cs typeface="Calibri" pitchFamily="34" charset="-120"/>
               </a:rPr>
-              <a:t>An unrelated pair (notes / spec_v1, 0.72) outscored a real invoice pair (0.67).</a:t>
-            </a:r>
-            <a:endParaRPr lang="en-US" sz="1450" dirty="0"/>
+              <a:t>references: directed - a file names another file (final_final_v3 -&gt; resume_final)</a:t>
+            </a:r>
+            <a:endParaRPr lang="en-US" sz="1400" dirty="0"/>
           </a:p>
           <a:p>
             <a:pPr marL="342900" indent="-342900">
@@ -6198,7 +6376,7 @@
               <a:buChar char="•"/>
             </a:pPr>
             <a:r>
-              <a:rPr lang="en-US" sz="1450" dirty="0">
+              <a:rPr lang="en-US" sz="1400" dirty="0">
                 <a:solidFill>
                   <a:srgbClr val="1C2333"/>
                 </a:solidFill>
@@ -6206,9 +6384,30 @@
                 <a:ea typeface="Calibri" pitchFamily="34" charset="-122"/>
                 <a:cs typeface="Calibri" pitchFamily="34" charset="-120"/>
               </a:rPr>
-              <a:t>Fix: mean-center the vectors; real groups then rank at the top.</a:t>
-            </a:r>
-            <a:endParaRPr lang="en-US" sz="1450" dirty="0"/>
+              <a:t>shared_tag: at least two AI-generated tags in common</a:t>
+            </a:r>
+            <a:endParaRPr lang="en-US" sz="1400" dirty="0"/>
+          </a:p>
+          <a:p>
+            <a:pPr marL="342900" indent="-342900">
+              <a:spcAft>
+                <a:spcPts val="500"/>
+              </a:spcAft>
+              <a:buSzPct val="100000"/>
+              <a:buChar char="•"/>
+            </a:pPr>
+            <a:r>
+              <a:rPr lang="en-US" sz="1400" dirty="0">
+                <a:solidFill>
+                  <a:srgbClr val="1C2333"/>
+                </a:solidFill>
+                <a:latin typeface="Calibri" pitchFamily="34" charset="0"/>
+                <a:ea typeface="Calibri" pitchFamily="34" charset="-122"/>
+                <a:cs typeface="Calibri" pitchFamily="34" charset="-120"/>
+              </a:rPr>
+              <a:t>37 files, 24 links, 12 unlinked</a:t>
+            </a:r>
+            <a:endParaRPr lang="en-US" sz="1400" dirty="0"/>
           </a:p>
         </p:txBody>
       </p:sp>
@@ -6220,8 +6419,8 @@
         </p:nvSpPr>
         <p:spPr>
           <a:xfrm>
-            <a:off x="6217920" y="1371600"/>
-            <a:ext cx="5440680" cy="2286000"/>
+            <a:off x="4251960" y="1371600"/>
+            <a:ext cx="3611880" cy="4846320"/>
           </a:xfrm>
           <a:prstGeom prst="rect">
             <a:avLst/>
@@ -6247,8 +6446,8 @@
         </p:nvSpPr>
         <p:spPr>
           <a:xfrm>
-            <a:off x="6217920" y="1371600"/>
-            <a:ext cx="64008" cy="2286000"/>
+            <a:off x="4251960" y="1371600"/>
+            <a:ext cx="64008" cy="4846320"/>
           </a:xfrm>
           <a:prstGeom prst="rect">
             <a:avLst/>
@@ -6267,8 +6466,8 @@
         </p:nvSpPr>
         <p:spPr>
           <a:xfrm>
-            <a:off x="6492240" y="1508760"/>
-            <a:ext cx="4983480" cy="365760"/>
+            <a:off x="4526280" y="1508760"/>
+            <a:ext cx="3154680" cy="365760"/>
           </a:xfrm>
           <a:prstGeom prst="rect">
             <a:avLst/>
@@ -6292,7 +6491,7 @@
                 <a:ea typeface="Trebuchet MS" pitchFamily="34" charset="-122"/>
                 <a:cs typeface="Trebuchet MS" pitchFamily="34" charset="-120"/>
               </a:rPr>
-              <a:t>Clusters must not chain</a:t>
+              <a:t>Fix 1: raw similarity misleads</a:t>
             </a:r>
             <a:endParaRPr lang="en-US" sz="1700" dirty="0"/>
           </a:p>
@@ -6306,8 +6505,8 @@
         </p:nvSpPr>
         <p:spPr>
           <a:xfrm>
-            <a:off x="6492240" y="1965960"/>
-            <a:ext cx="4937760" cy="1554480"/>
+            <a:off x="4526280" y="1965960"/>
+            <a:ext cx="3108960" cy="4114800"/>
           </a:xfrm>
           <a:prstGeom prst="rect">
             <a:avLst/>
@@ -6327,7 +6526,7 @@
               <a:buChar char="•"/>
             </a:pPr>
             <a:r>
-              <a:rPr lang="en-US" sz="1450" dirty="0">
+              <a:rPr lang="en-US" sz="1400" dirty="0">
                 <a:solidFill>
                   <a:srgbClr val="1C2333"/>
                 </a:solidFill>
@@ -6335,9 +6534,9 @@
                 <a:ea typeface="Calibri" pitchFamily="34" charset="-122"/>
                 <a:cs typeface="Calibri" pitchFamily="34" charset="-120"/>
               </a:rPr>
-              <a:t>Connected components merged resumes with unrelated proposals through two weak edges (a 7-file group).</a:t>
-            </a:r>
-            <a:endParaRPr lang="en-US" sz="1450" dirty="0"/>
+              <a:t>Across 666 file pairs: median cosine 0.52, max 0.83</a:t>
+            </a:r>
+            <a:endParaRPr lang="en-US" sz="1400" dirty="0"/>
           </a:p>
           <a:p>
             <a:pPr marL="342900" indent="-342900">
@@ -6348,7 +6547,7 @@
               <a:buChar char="•"/>
             </a:pPr>
             <a:r>
-              <a:rPr lang="en-US" sz="1450" dirty="0">
+              <a:rPr lang="en-US" sz="1400" dirty="0">
                 <a:solidFill>
                   <a:srgbClr val="1C2333"/>
                 </a:solidFill>
@@ -6356,9 +6555,9 @@
                 <a:ea typeface="Calibri" pitchFamily="34" charset="-122"/>
                 <a:cs typeface="Calibri" pitchFamily="34" charset="-120"/>
               </a:rPr>
-              <a:t>Fix: average-linkage merging - a lone bridge edge averages to near zero.</a:t>
-            </a:r>
-            <a:endParaRPr lang="en-US" sz="1450" dirty="0"/>
+              <a:t>An unrelated pair (notes / spec_v1, 0.72) outscored a real invoice pair (0.67)</a:t>
+            </a:r>
+            <a:endParaRPr lang="en-US" sz="1400" dirty="0"/>
           </a:p>
           <a:p>
             <a:pPr marL="342900" indent="-342900">
@@ -6369,7 +6568,7 @@
               <a:buChar char="•"/>
             </a:pPr>
             <a:r>
-              <a:rPr lang="en-US" sz="1450" dirty="0">
+              <a:rPr lang="en-US" sz="1400" dirty="0">
                 <a:solidFill>
                   <a:srgbClr val="1C2333"/>
                 </a:solidFill>
@@ -6377,9 +6576,9 @@
                 <a:ea typeface="Calibri" pitchFamily="34" charset="-122"/>
                 <a:cs typeface="Calibri" pitchFamily="34" charset="-120"/>
               </a:rPr>
-              <a:t>Result: Resumes (4), Invoices (4), Code (3), Project Docs (3).</a:t>
-            </a:r>
-            <a:endParaRPr lang="en-US" sz="1450" dirty="0"/>
+              <a:t>Fix: subtract the corpus mean before comparing; real groups then rank at the top and a 0.25 threshold works</a:t>
+            </a:r>
+            <a:endParaRPr lang="en-US" sz="1400" dirty="0"/>
           </a:p>
         </p:txBody>
       </p:sp>
@@ -6391,8 +6590,8 @@
         </p:nvSpPr>
         <p:spPr>
           <a:xfrm>
-            <a:off x="548640" y="3840480"/>
-            <a:ext cx="5440680" cy="2377440"/>
+            <a:off x="8001000" y="1371600"/>
+            <a:ext cx="3657600" cy="4846320"/>
           </a:xfrm>
           <a:prstGeom prst="rect">
             <a:avLst/>
@@ -6418,8 +6617,8 @@
         </p:nvSpPr>
         <p:spPr>
           <a:xfrm>
-            <a:off x="548640" y="3840480"/>
-            <a:ext cx="64008" cy="2377440"/>
+            <a:off x="8001000" y="1371600"/>
+            <a:ext cx="64008" cy="4846320"/>
           </a:xfrm>
           <a:prstGeom prst="rect">
             <a:avLst/>
@@ -6438,8 +6637,8 @@
         </p:nvSpPr>
         <p:spPr>
           <a:xfrm>
-            <a:off x="822960" y="3977640"/>
-            <a:ext cx="4983480" cy="365760"/>
+            <a:off x="8275320" y="1508760"/>
+            <a:ext cx="3200400" cy="365760"/>
           </a:xfrm>
           <a:prstGeom prst="rect">
             <a:avLst/>
@@ -6463,7 +6662,7 @@
                 <a:ea typeface="Trebuchet MS" pitchFamily="34" charset="-122"/>
                 <a:cs typeface="Trebuchet MS" pitchFamily="34" charset="-120"/>
               </a:rPr>
-              <a:t>Follow-ups are rules first, model second</a:t>
+              <a:t>Fix 2: clusters must not chain</a:t>
             </a:r>
             <a:endParaRPr lang="en-US" sz="1700" dirty="0"/>
           </a:p>
@@ -6477,8 +6676,8 @@
         </p:nvSpPr>
         <p:spPr>
           <a:xfrm>
-            <a:off x="822960" y="4434840"/>
-            <a:ext cx="4937760" cy="1645920"/>
+            <a:off x="8275320" y="1965960"/>
+            <a:ext cx="3154680" cy="4114800"/>
           </a:xfrm>
           <a:prstGeom prst="rect">
             <a:avLst/>
@@ -6498,7 +6697,7 @@
               <a:buChar char="•"/>
             </a:pPr>
             <a:r>
-              <a:rPr lang="en-US" sz="1450" dirty="0">
+              <a:rPr lang="en-US" sz="1400" dirty="0">
                 <a:solidFill>
                   <a:srgbClr val="1C2333"/>
                 </a:solidFill>
@@ -6506,9 +6705,9 @@
                 <a:ea typeface="Calibri" pitchFamily="34" charset="-122"/>
                 <a:cs typeface="Calibri" pitchFamily="34" charset="-120"/>
               </a:rPr>
-              <a:t>Ordinals and bare pronouns are matched deterministically, so they are testable.</a:t>
-            </a:r>
-            <a:endParaRPr lang="en-US" sz="1450" dirty="0"/>
+              <a:t>Connected components merged 4 resumes with 3 unrelated files through two weak edges (a 7-file group)</a:t>
+            </a:r>
+            <a:endParaRPr lang="en-US" sz="1400" dirty="0"/>
           </a:p>
           <a:p>
             <a:pPr marL="342900" indent="-342900">
@@ -6519,7 +6718,7 @@
               <a:buChar char="•"/>
             </a:pPr>
             <a:r>
-              <a:rPr lang="en-US" sz="1450" dirty="0">
+              <a:rPr lang="en-US" sz="1400" dirty="0">
                 <a:solidFill>
                   <a:srgbClr val="1C2333"/>
                 </a:solidFill>
@@ -6527,9 +6726,9 @@
                 <a:ea typeface="Calibri" pitchFamily="34" charset="-122"/>
                 <a:cs typeface="Calibri" pitchFamily="34" charset="-120"/>
               </a:rPr>
-              <a:t>The 3B model's own "refers to previous" flag is only a fallback.</a:t>
-            </a:r>
-            <a:endParaRPr lang="en-US" sz="1450" dirty="0"/>
+              <a:t>Fix: average-linkage - merge only while the average pair weight stays above 0.12</a:t>
+            </a:r>
+            <a:endParaRPr lang="en-US" sz="1400" dirty="0"/>
           </a:p>
           <a:p>
             <a:pPr marL="342900" indent="-342900">
@@ -6540,7 +6739,7 @@
               <a:buChar char="•"/>
             </a:pPr>
             <a:r>
-              <a:rPr lang="en-US" sz="1450" dirty="0">
+              <a:rPr lang="en-US" sz="1400" dirty="0">
                 <a:solidFill>
                   <a:srgbClr val="1C2333"/>
                 </a:solidFill>
@@ -6548,180 +6747,9 @@
                 <a:ea typeface="Calibri" pitchFamily="34" charset="-122"/>
                 <a:cs typeface="Calibri" pitchFamily="34" charset="-120"/>
               </a:rPr>
-              <a:t>"open it" is forced to open even if the model calls it a search.</a:t>
-            </a:r>
-            <a:endParaRPr lang="en-US" sz="1450" dirty="0"/>
-          </a:p>
-        </p:txBody>
-      </p:sp>
-      <p:sp>
-        <p:nvSpPr>
-          <p:cNvPr id="18" name="Shape 16"/>
-          <p:cNvSpPr/>
-          <p:nvPr/>
-        </p:nvSpPr>
-        <p:spPr>
-          <a:xfrm>
-            <a:off x="6217920" y="3840480"/>
-            <a:ext cx="5440680" cy="2377440"/>
-          </a:xfrm>
-          <a:prstGeom prst="rect">
-            <a:avLst/>
-          </a:prstGeom>
-          <a:solidFill>
-            <a:srgbClr val="FFFFFF"/>
-          </a:solidFill>
-          <a:ln/>
-          <a:effectLst>
-            <a:outerShdw sx="100000" sy="100000" kx="0" ky="0" algn="bl" rotWithShape="0" blurRad="76200" dist="25400" dir="8100000">
-              <a:srgbClr val="000000">
-                <a:alpha val="10000"/>
-              </a:srgbClr>
-            </a:outerShdw>
-          </a:effectLst>
-        </p:spPr>
-      </p:sp>
-      <p:sp>
-        <p:nvSpPr>
-          <p:cNvPr id="19" name="Shape 17"/>
-          <p:cNvSpPr/>
-          <p:nvPr/>
-        </p:nvSpPr>
-        <p:spPr>
-          <a:xfrm>
-            <a:off x="6217920" y="3840480"/>
-            <a:ext cx="64008" cy="2377440"/>
-          </a:xfrm>
-          <a:prstGeom prst="rect">
-            <a:avLst/>
-          </a:prstGeom>
-          <a:solidFill>
-            <a:srgbClr val="00C2A8"/>
-          </a:solidFill>
-          <a:ln/>
-        </p:spPr>
-      </p:sp>
-      <p:sp>
-        <p:nvSpPr>
-          <p:cNvPr id="20" name="Text 18"/>
-          <p:cNvSpPr/>
-          <p:nvPr/>
-        </p:nvSpPr>
-        <p:spPr>
-          <a:xfrm>
-            <a:off x="6492240" y="3977640"/>
-            <a:ext cx="4983480" cy="365760"/>
-          </a:xfrm>
-          <a:prstGeom prst="rect">
-            <a:avLst/>
-          </a:prstGeom>
-          <a:noFill/>
-          <a:ln/>
-        </p:spPr>
-        <p:txBody>
-          <a:bodyPr wrap="square" lIns="0" tIns="0" rIns="0" bIns="0" rtlCol="0" anchor="ctr"/>
-          <a:lstStyle/>
-          <a:p>
-            <a:pPr indent="0" marL="0">
-              <a:buNone/>
-            </a:pPr>
-            <a:r>
-              <a:rPr lang="en-US" sz="1700" b="1" dirty="0">
-                <a:solidFill>
-                  <a:srgbClr val="1C2333"/>
-                </a:solidFill>
-                <a:latin typeface="Trebuchet MS" pitchFamily="34" charset="0"/>
-                <a:ea typeface="Trebuchet MS" pitchFamily="34" charset="-122"/>
-                <a:cs typeface="Trebuchet MS" pitchFamily="34" charset="-120"/>
-              </a:rPr>
-              <a:t>Usage memory breaks near-ties</a:t>
-            </a:r>
-            <a:endParaRPr lang="en-US" sz="1700" dirty="0"/>
-          </a:p>
-        </p:txBody>
-      </p:sp>
-      <p:sp>
-        <p:nvSpPr>
-          <p:cNvPr id="21" name="Text 19"/>
-          <p:cNvSpPr/>
-          <p:nvPr/>
-        </p:nvSpPr>
-        <p:spPr>
-          <a:xfrm>
-            <a:off x="6492240" y="4434840"/>
-            <a:ext cx="4937760" cy="1645920"/>
-          </a:xfrm>
-          <a:prstGeom prst="rect">
-            <a:avLst/>
-          </a:prstGeom>
-          <a:noFill/>
-          <a:ln/>
-        </p:spPr>
-        <p:txBody>
-          <a:bodyPr wrap="square" lIns="0" tIns="0" rIns="0" bIns="0" rtlCol="0" anchor="t"/>
-          <a:lstStyle/>
-          <a:p>
-            <a:pPr marL="342900" indent="-342900">
-              <a:spcAft>
-                <a:spcPts val="500"/>
-              </a:spcAft>
-              <a:buSzPct val="100000"/>
-              <a:buChar char="•"/>
-            </a:pPr>
-            <a:r>
-              <a:rPr lang="en-US" sz="1450" dirty="0">
-                <a:solidFill>
-                  <a:srgbClr val="1C2333"/>
-                </a:solidFill>
-                <a:latin typeface="Calibri" pitchFamily="34" charset="0"/>
-                <a:ea typeface="Calibri" pitchFamily="34" charset="-122"/>
-                <a:cs typeface="Calibri" pitchFamily="34" charset="-120"/>
-              </a:rPr>
-              <a:t>Two close candidates (two resumes): DreamOS asks instead of guessing.</a:t>
-            </a:r>
-            <a:endParaRPr lang="en-US" sz="1450" dirty="0"/>
-          </a:p>
-          <a:p>
-            <a:pPr marL="342900" indent="-342900">
-              <a:spcAft>
-                <a:spcPts val="500"/>
-              </a:spcAft>
-              <a:buSzPct val="100000"/>
-              <a:buChar char="•"/>
-            </a:pPr>
-            <a:r>
-              <a:rPr lang="en-US" sz="1450" dirty="0">
-                <a:solidFill>
-                  <a:srgbClr val="1C2333"/>
-                </a:solidFill>
-                <a:latin typeface="Calibri" pitchFamily="34" charset="0"/>
-                <a:ea typeface="Calibri" pitchFamily="34" charset="-122"/>
-                <a:cs typeface="Calibri" pitchFamily="34" charset="-120"/>
-              </a:rPr>
-              <a:t>After the user picks one, the next ask opens it directly.</a:t>
-            </a:r>
-            <a:endParaRPr lang="en-US" sz="1450" dirty="0"/>
-          </a:p>
-          <a:p>
-            <a:pPr marL="342900" indent="-342900">
-              <a:spcAft>
-                <a:spcPts val="500"/>
-              </a:spcAft>
-              <a:buSzPct val="100000"/>
-              <a:buChar char="•"/>
-            </a:pPr>
-            <a:r>
-              <a:rPr lang="en-US" sz="1450" dirty="0">
-                <a:solidFill>
-                  <a:srgbClr val="1C2333"/>
-                </a:solidFill>
-                <a:latin typeface="Calibri" pitchFamily="34" charset="0"/>
-                <a:ea typeface="Calibri" pitchFamily="34" charset="-122"/>
-                <a:cs typeface="Calibri" pitchFamily="34" charset="-120"/>
-              </a:rPr>
-              <a:t>Recommendations are rule-based on purpose: reproducible and explainable.</a:t>
-            </a:r>
-            <a:endParaRPr lang="en-US" sz="1450" dirty="0"/>
+              <a:t>Result: Resumes 4, Invoices 4, Code 3, Project Docs 3</a:t>
+            </a:r>
+            <a:endParaRPr lang="en-US" sz="1400" dirty="0"/>
           </a:p>
         </p:txBody>
       </p:sp>
@@ -6790,7 +6818,7 @@
                 <a:ea typeface="Trebuchet MS" pitchFamily="34" charset="-122"/>
                 <a:cs typeface="Trebuchet MS" pitchFamily="34" charset="-120"/>
               </a:rPr>
-              <a:t>Testing and verification</a:t>
+              <a:t>Context memory and workspace manager</a:t>
             </a:r>
             <a:endParaRPr lang="en-US" sz="2800" dirty="0"/>
           </a:p>
@@ -6804,8 +6832,8 @@
         </p:nvSpPr>
         <p:spPr>
           <a:xfrm>
-            <a:off x="548640" y="6473952"/>
-            <a:ext cx="5486400" cy="274320"/>
+            <a:off x="548640" y="914400"/>
+            <a:ext cx="11064240" cy="365760"/>
           </a:xfrm>
           <a:prstGeom prst="rect">
             <a:avLst/>
@@ -6821,17 +6849,17 @@
               <a:buNone/>
             </a:pPr>
             <a:r>
-              <a:rPr lang="en-US" sz="1000" dirty="0">
-                <a:solidFill>
-                  <a:srgbClr val="8A93AA"/>
+              <a:rPr lang="en-US" sz="1400" dirty="0">
+                <a:solidFill>
+                  <a:srgbClr val="5B6478"/>
                 </a:solidFill>
                 <a:latin typeface="Calibri" pitchFamily="34" charset="0"/>
                 <a:ea typeface="Calibri" pitchFamily="34" charset="-122"/>
                 <a:cs typeface="Calibri" pitchFamily="34" charset="-120"/>
               </a:rPr>
-              <a:t>DreamOS - Project Monitoring II</a:t>
-            </a:r>
-            <a:endParaRPr lang="en-US" sz="1000" dirty="0"/>
+              <a:t>Report sections 5.3 and 5.4</a:t>
+            </a:r>
+            <a:endParaRPr lang="en-US" sz="1400" dirty="0"/>
           </a:p>
         </p:txBody>
       </p:sp>
@@ -6843,8 +6871,8 @@
         </p:nvSpPr>
         <p:spPr>
           <a:xfrm>
-            <a:off x="11064240" y="6473952"/>
-            <a:ext cx="594360" cy="274320"/>
+            <a:off x="548640" y="6473952"/>
+            <a:ext cx="5486400" cy="274320"/>
           </a:xfrm>
           <a:prstGeom prst="rect">
             <a:avLst/>
@@ -6856,7 +6884,7 @@
           <a:bodyPr wrap="square" lIns="0" tIns="0" rIns="0" bIns="0" rtlCol="0" anchor="ctr"/>
           <a:lstStyle/>
           <a:p>
-            <a:pPr algn="r" indent="0" marL="0">
+            <a:pPr indent="0" marL="0">
               <a:buNone/>
             </a:pPr>
             <a:r>
@@ -6868,9 +6896,279 @@
                 <a:ea typeface="Calibri" pitchFamily="34" charset="-122"/>
                 <a:cs typeface="Calibri" pitchFamily="34" charset="-120"/>
               </a:rPr>
+              <a:t>DreamOS - Project Monitoring II</a:t>
+            </a:r>
+            <a:endParaRPr lang="en-US" sz="1000" dirty="0"/>
+          </a:p>
+        </p:txBody>
+      </p:sp>
+      <p:sp>
+        <p:nvSpPr>
+          <p:cNvPr id="5" name="Text 3"/>
+          <p:cNvSpPr/>
+          <p:nvPr/>
+        </p:nvSpPr>
+        <p:spPr>
+          <a:xfrm>
+            <a:off x="11064240" y="6473952"/>
+            <a:ext cx="594360" cy="274320"/>
+          </a:xfrm>
+          <a:prstGeom prst="rect">
+            <a:avLst/>
+          </a:prstGeom>
+          <a:noFill/>
+          <a:ln/>
+        </p:spPr>
+        <p:txBody>
+          <a:bodyPr wrap="square" lIns="0" tIns="0" rIns="0" bIns="0" rtlCol="0" anchor="ctr"/>
+          <a:lstStyle/>
+          <a:p>
+            <a:pPr algn="r" indent="0" marL="0">
+              <a:buNone/>
+            </a:pPr>
+            <a:r>
+              <a:rPr lang="en-US" sz="1000" dirty="0">
+                <a:solidFill>
+                  <a:srgbClr val="8A93AA"/>
+                </a:solidFill>
+                <a:latin typeface="Calibri" pitchFamily="34" charset="0"/>
+                <a:ea typeface="Calibri" pitchFamily="34" charset="-122"/>
+                <a:cs typeface="Calibri" pitchFamily="34" charset="-120"/>
+              </a:rPr>
               <a:t>18</a:t>
             </a:r>
             <a:endParaRPr lang="en-US" sz="1000" dirty="0"/>
+          </a:p>
+        </p:txBody>
+      </p:sp>
+      <p:sp>
+        <p:nvSpPr>
+          <p:cNvPr id="6" name="Shape 4"/>
+          <p:cNvSpPr/>
+          <p:nvPr/>
+        </p:nvSpPr>
+        <p:spPr>
+          <a:xfrm>
+            <a:off x="548640" y="1371600"/>
+            <a:ext cx="5120640" cy="4846320"/>
+          </a:xfrm>
+          <a:prstGeom prst="rect">
+            <a:avLst/>
+          </a:prstGeom>
+          <a:solidFill>
+            <a:srgbClr val="FFFFFF"/>
+          </a:solidFill>
+          <a:ln/>
+          <a:effectLst>
+            <a:outerShdw sx="100000" sy="100000" kx="0" ky="0" algn="bl" rotWithShape="0" blurRad="76200" dist="25400" dir="8100000">
+              <a:srgbClr val="000000">
+                <a:alpha val="10000"/>
+              </a:srgbClr>
+            </a:outerShdw>
+          </a:effectLst>
+        </p:spPr>
+      </p:sp>
+      <p:sp>
+        <p:nvSpPr>
+          <p:cNvPr id="7" name="Shape 5"/>
+          <p:cNvSpPr/>
+          <p:nvPr/>
+        </p:nvSpPr>
+        <p:spPr>
+          <a:xfrm>
+            <a:off x="548640" y="1371600"/>
+            <a:ext cx="64008" cy="4846320"/>
+          </a:xfrm>
+          <a:prstGeom prst="rect">
+            <a:avLst/>
+          </a:prstGeom>
+          <a:solidFill>
+            <a:srgbClr val="00C2A8"/>
+          </a:solidFill>
+          <a:ln/>
+        </p:spPr>
+      </p:sp>
+      <p:sp>
+        <p:nvSpPr>
+          <p:cNvPr id="8" name="Text 6"/>
+          <p:cNvSpPr/>
+          <p:nvPr/>
+        </p:nvSpPr>
+        <p:spPr>
+          <a:xfrm>
+            <a:off x="822960" y="1508760"/>
+            <a:ext cx="4663440" cy="365760"/>
+          </a:xfrm>
+          <a:prstGeom prst="rect">
+            <a:avLst/>
+          </a:prstGeom>
+          <a:noFill/>
+          <a:ln/>
+        </p:spPr>
+        <p:txBody>
+          <a:bodyPr wrap="square" lIns="0" tIns="0" rIns="0" bIns="0" rtlCol="0" anchor="ctr"/>
+          <a:lstStyle/>
+          <a:p>
+            <a:pPr indent="0" marL="0">
+              <a:buNone/>
+            </a:pPr>
+            <a:r>
+              <a:rPr lang="en-US" sz="1700" b="1" dirty="0">
+                <a:solidFill>
+                  <a:srgbClr val="1C2333"/>
+                </a:solidFill>
+                <a:latin typeface="Trebuchet MS" pitchFamily="34" charset="0"/>
+                <a:ea typeface="Trebuchet MS" pitchFamily="34" charset="-122"/>
+                <a:cs typeface="Trebuchet MS" pitchFamily="34" charset="-120"/>
+              </a:rPr>
+              <a:t>Context Memory Engine</a:t>
+            </a:r>
+            <a:endParaRPr lang="en-US" sz="1700" dirty="0"/>
+          </a:p>
+        </p:txBody>
+      </p:sp>
+      <p:sp>
+        <p:nvSpPr>
+          <p:cNvPr id="9" name="Text 7"/>
+          <p:cNvSpPr/>
+          <p:nvPr/>
+        </p:nvSpPr>
+        <p:spPr>
+          <a:xfrm>
+            <a:off x="822960" y="1965960"/>
+            <a:ext cx="4617720" cy="4114800"/>
+          </a:xfrm>
+          <a:prstGeom prst="rect">
+            <a:avLst/>
+          </a:prstGeom>
+          <a:noFill/>
+          <a:ln/>
+        </p:spPr>
+        <p:txBody>
+          <a:bodyPr wrap="square" lIns="0" tIns="0" rIns="0" bIns="0" rtlCol="0" anchor="t"/>
+          <a:lstStyle/>
+          <a:p>
+            <a:pPr marL="342900" indent="-342900">
+              <a:spcAft>
+                <a:spcPts val="500"/>
+              </a:spcAft>
+              <a:buSzPct val="100000"/>
+              <a:buChar char="•"/>
+            </a:pPr>
+            <a:r>
+              <a:rPr lang="en-US" sz="1400" dirty="0">
+                <a:solidFill>
+                  <a:srgbClr val="1C2333"/>
+                </a:solidFill>
+                <a:latin typeface="Calibri" pitchFamily="34" charset="0"/>
+                <a:ea typeface="Calibri" pitchFamily="34" charset="-122"/>
+                <a:cs typeface="Calibri" pitchFamily="34" charset="-120"/>
+              </a:rPr>
+              <a:t>Every turn is stored with the ids of the files it showed, so follow-ups survive a restart and a file move</a:t>
+            </a:r>
+            <a:endParaRPr lang="en-US" sz="1400" dirty="0"/>
+          </a:p>
+          <a:p>
+            <a:pPr marL="342900" indent="-342900">
+              <a:spcAft>
+                <a:spcPts val="500"/>
+              </a:spcAft>
+              <a:buSzPct val="100000"/>
+              <a:buChar char="•"/>
+            </a:pPr>
+            <a:r>
+              <a:rPr lang="en-US" sz="1400" dirty="0">
+                <a:solidFill>
+                  <a:srgbClr val="1C2333"/>
+                </a:solidFill>
+                <a:latin typeface="Calibri" pitchFamily="34" charset="0"/>
+                <a:ea typeface="Calibri" pitchFamily="34" charset="-122"/>
+                <a:cs typeface="Calibri" pitchFamily="34" charset="-120"/>
+              </a:rPr>
+              <a:t>"the second one" and "open it" are resolved by rules; the 3B model's own flag is only a fallback</a:t>
+            </a:r>
+            <a:endParaRPr lang="en-US" sz="1400" dirty="0"/>
+          </a:p>
+          <a:p>
+            <a:pPr marL="342900" indent="-342900">
+              <a:spcAft>
+                <a:spcPts val="500"/>
+              </a:spcAft>
+              <a:buSzPct val="100000"/>
+              <a:buChar char="•"/>
+            </a:pPr>
+            <a:r>
+              <a:rPr lang="en-US" sz="1400" dirty="0">
+                <a:solidFill>
+                  <a:srgbClr val="1C2333"/>
+                </a:solidFill>
+                <a:latin typeface="Calibri" pitchFamily="34" charset="0"/>
+                <a:ea typeface="Calibri" pitchFamily="34" charset="-122"/>
+                <a:cs typeface="Calibri" pitchFamily="34" charset="-120"/>
+              </a:rPr>
+              <a:t>Two candidates within 0.05 similarity: show both instead of guessing</a:t>
+            </a:r>
+            <a:endParaRPr lang="en-US" sz="1400" dirty="0"/>
+          </a:p>
+          <a:p>
+            <a:pPr marL="342900" indent="-342900">
+              <a:spcAft>
+                <a:spcPts val="500"/>
+              </a:spcAft>
+              <a:buSzPct val="100000"/>
+              <a:buChar char="•"/>
+            </a:pPr>
+            <a:r>
+              <a:rPr lang="en-US" sz="1400" dirty="0">
+                <a:solidFill>
+                  <a:srgbClr val="1C2333"/>
+                </a:solidFill>
+                <a:latin typeface="Calibri" pitchFamily="34" charset="0"/>
+                <a:ea typeface="Calibri" pitchFamily="34" charset="-122"/>
+                <a:cs typeface="Calibri" pitchFamily="34" charset="-120"/>
+              </a:rPr>
+              <a:t>Once the user opens one, it wins the next tie</a:t>
+            </a:r>
+            <a:endParaRPr lang="en-US" sz="1400" dirty="0"/>
+          </a:p>
+        </p:txBody>
+      </p:sp>
+      <p:sp>
+        <p:nvSpPr>
+          <p:cNvPr id="10" name="Text 8"/>
+          <p:cNvSpPr/>
+          <p:nvPr/>
+        </p:nvSpPr>
+        <p:spPr>
+          <a:xfrm>
+            <a:off x="5943600" y="1371600"/>
+            <a:ext cx="5715000" cy="365760"/>
+          </a:xfrm>
+          <a:prstGeom prst="rect">
+            <a:avLst/>
+          </a:prstGeom>
+          <a:noFill/>
+          <a:ln/>
+        </p:spPr>
+        <p:txBody>
+          <a:bodyPr wrap="square" lIns="0" tIns="0" rIns="0" bIns="0" rtlCol="0" anchor="ctr"/>
+          <a:lstStyle/>
+          <a:p>
+            <a:pPr indent="0" marL="0">
+              <a:buNone/>
+            </a:pPr>
+            <a:r>
+              <a:rPr lang="en-US" sz="1500" b="1" dirty="0">
+                <a:solidFill>
+                  <a:srgbClr val="1C2333"/>
+                </a:solidFill>
+                <a:latin typeface="Trebuchet MS" pitchFamily="34" charset="0"/>
+                <a:ea typeface="Trebuchet MS" pitchFamily="34" charset="-122"/>
+                <a:cs typeface="Trebuchet MS" pitchFamily="34" charset="-120"/>
+              </a:rPr>
+              <a:t>Workspace recommendations (rule-based, explainable)</a:t>
+            </a:r>
+            <a:endParaRPr lang="en-US" sz="1500" dirty="0"/>
           </a:p>
         </p:txBody>
       </p:sp>
@@ -6889,7 +7187,3607 @@
           </p:nvPr>
         </p:nvGraphicFramePr>
         <p:xfrm>
-          <a:off x="548640" y="1280160"/>
+          <a:off x="5943600" y="1874520"/>
+          <a:ext cx="5715000" cy="914400"/>
+        </p:xfrm>
+        <a:graphic>
+          <a:graphicData uri="http://schemas.openxmlformats.org/drawingml/2006/table">
+            <a:tbl>
+              <a:tblPr/>
+              <a:tblGrid>
+                <a:gridCol w="2011680"/>
+                <a:gridCol w="3703320"/>
+              </a:tblGrid>
+              <a:tr h="566928">
+                <a:tc>
+                  <a:txBody>
+                    <a:bodyPr/>
+                    <a:lstStyle/>
+                    <a:p>
+                      <a:pPr indent="0" marL="0">
+                        <a:buNone/>
+                      </a:pPr>
+                      <a:r>
+                        <a:rPr lang="en-US" sz="1250" b="1" dirty="0">
+                          <a:solidFill>
+                            <a:srgbClr val="FFFFFF"/>
+                          </a:solidFill>
+                          <a:latin typeface="Trebuchet MS" pitchFamily="34" charset="0"/>
+                          <a:ea typeface="Trebuchet MS" pitchFamily="34" charset="-122"/>
+                          <a:cs typeface="Trebuchet MS" pitchFamily="34" charset="-120"/>
+                        </a:rPr>
+                        <a:t>Recommendation</a:t>
+                      </a:r>
+                      <a:endParaRPr lang="en-US" sz="1250" dirty="0">
+                        <a:latin typeface="Trebuchet MS" charset="0"/>
+                        <a:ea typeface="Trebuchet MS" charset="0"/>
+                        <a:cs typeface="Trebuchet MS" charset="0"/>
+                      </a:endParaRPr>
+                    </a:p>
+                  </a:txBody>
+                  <a:tcPr marL="91440" marR="91440" marT="45720" marB="45720" anchor="ctr">
+                    <a:lnL w="6350" cap="flat" cmpd="sng" algn="ctr">
+                      <a:solidFill>
+                        <a:srgbClr val="D6DCEA"/>
+                      </a:solidFill>
+                      <a:prstDash val="solid"/>
+                      <a:round/>
+                      <a:headEnd type="none" w="med" len="med"/>
+                      <a:tailEnd type="none" w="med" len="med"/>
+                    </a:lnL>
+                    <a:lnR w="6350" cap="flat" cmpd="sng" algn="ctr">
+                      <a:solidFill>
+                        <a:srgbClr val="D6DCEA"/>
+                      </a:solidFill>
+                      <a:prstDash val="solid"/>
+                      <a:round/>
+                      <a:headEnd type="none" w="med" len="med"/>
+                      <a:tailEnd type="none" w="med" len="med"/>
+                    </a:lnR>
+                    <a:lnT w="6350" cap="flat" cmpd="sng" algn="ctr">
+                      <a:solidFill>
+                        <a:srgbClr val="D6DCEA"/>
+                      </a:solidFill>
+                      <a:prstDash val="solid"/>
+                      <a:round/>
+                      <a:headEnd type="none" w="med" len="med"/>
+                      <a:tailEnd type="none" w="med" len="med"/>
+                    </a:lnT>
+                    <a:lnB w="6350" cap="flat" cmpd="sng" algn="ctr">
+                      <a:solidFill>
+                        <a:srgbClr val="D6DCEA"/>
+                      </a:solidFill>
+                      <a:prstDash val="solid"/>
+                      <a:round/>
+                      <a:headEnd type="none" w="med" len="med"/>
+                      <a:tailEnd type="none" w="med" len="med"/>
+                    </a:lnB>
+                    <a:solidFill>
+                      <a:srgbClr val="1E2761"/>
+                    </a:solidFill>
+                  </a:tcPr>
+                </a:tc>
+                <a:tc>
+                  <a:txBody>
+                    <a:bodyPr/>
+                    <a:lstStyle/>
+                    <a:p>
+                      <a:pPr indent="0" marL="0">
+                        <a:buNone/>
+                      </a:pPr>
+                      <a:r>
+                        <a:rPr lang="en-US" sz="1250" b="1" dirty="0">
+                          <a:solidFill>
+                            <a:srgbClr val="FFFFFF"/>
+                          </a:solidFill>
+                          <a:latin typeface="Trebuchet MS" pitchFamily="34" charset="0"/>
+                          <a:ea typeface="Trebuchet MS" pitchFamily="34" charset="-122"/>
+                          <a:cs typeface="Trebuchet MS" pitchFamily="34" charset="-120"/>
+                        </a:rPr>
+                        <a:t>Trigger</a:t>
+                      </a:r>
+                      <a:endParaRPr lang="en-US" sz="1250" dirty="0">
+                        <a:latin typeface="Trebuchet MS" charset="0"/>
+                        <a:ea typeface="Trebuchet MS" charset="0"/>
+                        <a:cs typeface="Trebuchet MS" charset="0"/>
+                      </a:endParaRPr>
+                    </a:p>
+                  </a:txBody>
+                  <a:tcPr marL="91440" marR="91440" marT="45720" marB="45720" anchor="ctr">
+                    <a:lnL w="6350" cap="flat" cmpd="sng" algn="ctr">
+                      <a:solidFill>
+                        <a:srgbClr val="D6DCEA"/>
+                      </a:solidFill>
+                      <a:prstDash val="solid"/>
+                      <a:round/>
+                      <a:headEnd type="none" w="med" len="med"/>
+                      <a:tailEnd type="none" w="med" len="med"/>
+                    </a:lnL>
+                    <a:lnR w="6350" cap="flat" cmpd="sng" algn="ctr">
+                      <a:solidFill>
+                        <a:srgbClr val="D6DCEA"/>
+                      </a:solidFill>
+                      <a:prstDash val="solid"/>
+                      <a:round/>
+                      <a:headEnd type="none" w="med" len="med"/>
+                      <a:tailEnd type="none" w="med" len="med"/>
+                    </a:lnR>
+                    <a:lnT w="6350" cap="flat" cmpd="sng" algn="ctr">
+                      <a:solidFill>
+                        <a:srgbClr val="D6DCEA"/>
+                      </a:solidFill>
+                      <a:prstDash val="solid"/>
+                      <a:round/>
+                      <a:headEnd type="none" w="med" len="med"/>
+                      <a:tailEnd type="none" w="med" len="med"/>
+                    </a:lnT>
+                    <a:lnB w="6350" cap="flat" cmpd="sng" algn="ctr">
+                      <a:solidFill>
+                        <a:srgbClr val="D6DCEA"/>
+                      </a:solidFill>
+                      <a:prstDash val="solid"/>
+                      <a:round/>
+                      <a:headEnd type="none" w="med" len="med"/>
+                      <a:tailEnd type="none" w="med" len="med"/>
+                    </a:lnB>
+                    <a:solidFill>
+                      <a:srgbClr val="1E2761"/>
+                    </a:solidFill>
+                  </a:tcPr>
+                </a:tc>
+              </a:tr>
+              <a:tr h="566928">
+                <a:tc>
+                  <a:txBody>
+                    <a:bodyPr/>
+                    <a:lstStyle/>
+                    <a:p>
+                      <a:pPr indent="0" marL="0">
+                        <a:buNone/>
+                      </a:pPr>
+                      <a:r>
+                        <a:rPr lang="en-US" sz="1250" dirty="0">
+                          <a:solidFill>
+                            <a:srgbClr val="1C2333"/>
+                          </a:solidFill>
+                          <a:latin typeface="Calibri" pitchFamily="34" charset="0"/>
+                          <a:ea typeface="Calibri" pitchFamily="34" charset="-122"/>
+                          <a:cs typeface="Calibri" pitchFamily="34" charset="-120"/>
+                        </a:rPr>
+                        <a:t>Related group</a:t>
+                      </a:r>
+                      <a:endParaRPr lang="en-US" sz="1250" dirty="0">
+                        <a:latin typeface="Calibri" charset="0"/>
+                        <a:ea typeface="Calibri" charset="0"/>
+                        <a:cs typeface="Calibri" charset="0"/>
+                      </a:endParaRPr>
+                    </a:p>
+                  </a:txBody>
+                  <a:tcPr marL="91440" marR="91440" marT="45720" marB="45720" anchor="ctr">
+                    <a:lnL w="6350" cap="flat" cmpd="sng" algn="ctr">
+                      <a:solidFill>
+                        <a:srgbClr val="D6DCEA"/>
+                      </a:solidFill>
+                      <a:prstDash val="solid"/>
+                      <a:round/>
+                      <a:headEnd type="none" w="med" len="med"/>
+                      <a:tailEnd type="none" w="med" len="med"/>
+                    </a:lnL>
+                    <a:lnR w="6350" cap="flat" cmpd="sng" algn="ctr">
+                      <a:solidFill>
+                        <a:srgbClr val="D6DCEA"/>
+                      </a:solidFill>
+                      <a:prstDash val="solid"/>
+                      <a:round/>
+                      <a:headEnd type="none" w="med" len="med"/>
+                      <a:tailEnd type="none" w="med" len="med"/>
+                    </a:lnR>
+                    <a:lnT w="6350" cap="flat" cmpd="sng" algn="ctr">
+                      <a:solidFill>
+                        <a:srgbClr val="D6DCEA"/>
+                      </a:solidFill>
+                      <a:prstDash val="solid"/>
+                      <a:round/>
+                      <a:headEnd type="none" w="med" len="med"/>
+                      <a:tailEnd type="none" w="med" len="med"/>
+                    </a:lnT>
+                    <a:lnB w="6350" cap="flat" cmpd="sng" algn="ctr">
+                      <a:solidFill>
+                        <a:srgbClr val="D6DCEA"/>
+                      </a:solidFill>
+                      <a:prstDash val="solid"/>
+                      <a:round/>
+                      <a:headEnd type="none" w="med" len="med"/>
+                      <a:tailEnd type="none" w="med" len="med"/>
+                    </a:lnB>
+                  </a:tcPr>
+                </a:tc>
+                <a:tc>
+                  <a:txBody>
+                    <a:bodyPr/>
+                    <a:lstStyle/>
+                    <a:p>
+                      <a:pPr indent="0" marL="0">
+                        <a:buNone/>
+                      </a:pPr>
+                      <a:r>
+                        <a:rPr lang="en-US" sz="1250" dirty="0">
+                          <a:solidFill>
+                            <a:srgbClr val="1C2333"/>
+                          </a:solidFill>
+                          <a:latin typeface="Calibri" pitchFamily="34" charset="0"/>
+                          <a:ea typeface="Calibri" pitchFamily="34" charset="-122"/>
+                          <a:cs typeface="Calibri" pitchFamily="34" charset="-120"/>
+                        </a:rPr>
+                        <a:t>Cluster of 3 to 12 files not already in a workspace</a:t>
+                      </a:r>
+                      <a:endParaRPr lang="en-US" sz="1250" dirty="0">
+                        <a:latin typeface="Calibri" charset="0"/>
+                        <a:ea typeface="Calibri" charset="0"/>
+                        <a:cs typeface="Calibri" charset="0"/>
+                      </a:endParaRPr>
+                    </a:p>
+                  </a:txBody>
+                  <a:tcPr marL="91440" marR="91440" marT="45720" marB="45720" anchor="ctr">
+                    <a:lnL w="6350" cap="flat" cmpd="sng" algn="ctr">
+                      <a:solidFill>
+                        <a:srgbClr val="D6DCEA"/>
+                      </a:solidFill>
+                      <a:prstDash val="solid"/>
+                      <a:round/>
+                      <a:headEnd type="none" w="med" len="med"/>
+                      <a:tailEnd type="none" w="med" len="med"/>
+                    </a:lnL>
+                    <a:lnR w="6350" cap="flat" cmpd="sng" algn="ctr">
+                      <a:solidFill>
+                        <a:srgbClr val="D6DCEA"/>
+                      </a:solidFill>
+                      <a:prstDash val="solid"/>
+                      <a:round/>
+                      <a:headEnd type="none" w="med" len="med"/>
+                      <a:tailEnd type="none" w="med" len="med"/>
+                    </a:lnR>
+                    <a:lnT w="6350" cap="flat" cmpd="sng" algn="ctr">
+                      <a:solidFill>
+                        <a:srgbClr val="D6DCEA"/>
+                      </a:solidFill>
+                      <a:prstDash val="solid"/>
+                      <a:round/>
+                      <a:headEnd type="none" w="med" len="med"/>
+                      <a:tailEnd type="none" w="med" len="med"/>
+                    </a:lnT>
+                    <a:lnB w="6350" cap="flat" cmpd="sng" algn="ctr">
+                      <a:solidFill>
+                        <a:srgbClr val="D6DCEA"/>
+                      </a:solidFill>
+                      <a:prstDash val="solid"/>
+                      <a:round/>
+                      <a:headEnd type="none" w="med" len="med"/>
+                      <a:tailEnd type="none" w="med" len="med"/>
+                    </a:lnB>
+                  </a:tcPr>
+                </a:tc>
+              </a:tr>
+              <a:tr h="566928">
+                <a:tc>
+                  <a:txBody>
+                    <a:bodyPr/>
+                    <a:lstStyle/>
+                    <a:p>
+                      <a:pPr indent="0" marL="0">
+                        <a:buNone/>
+                      </a:pPr>
+                      <a:r>
+                        <a:rPr lang="en-US" sz="1250" dirty="0">
+                          <a:solidFill>
+                            <a:srgbClr val="1C2333"/>
+                          </a:solidFill>
+                          <a:latin typeface="Calibri" pitchFamily="34" charset="0"/>
+                          <a:ea typeface="Calibri" pitchFamily="34" charset="-122"/>
+                          <a:cs typeface="Calibri" pitchFamily="34" charset="-120"/>
+                        </a:rPr>
+                        <a:t>Frequently used</a:t>
+                      </a:r>
+                      <a:endParaRPr lang="en-US" sz="1250" dirty="0">
+                        <a:latin typeface="Calibri" charset="0"/>
+                        <a:ea typeface="Calibri" charset="0"/>
+                        <a:cs typeface="Calibri" charset="0"/>
+                      </a:endParaRPr>
+                    </a:p>
+                  </a:txBody>
+                  <a:tcPr marL="91440" marR="91440" marT="45720" marB="45720" anchor="ctr">
+                    <a:lnL w="6350" cap="flat" cmpd="sng" algn="ctr">
+                      <a:solidFill>
+                        <a:srgbClr val="D6DCEA"/>
+                      </a:solidFill>
+                      <a:prstDash val="solid"/>
+                      <a:round/>
+                      <a:headEnd type="none" w="med" len="med"/>
+                      <a:tailEnd type="none" w="med" len="med"/>
+                    </a:lnL>
+                    <a:lnR w="6350" cap="flat" cmpd="sng" algn="ctr">
+                      <a:solidFill>
+                        <a:srgbClr val="D6DCEA"/>
+                      </a:solidFill>
+                      <a:prstDash val="solid"/>
+                      <a:round/>
+                      <a:headEnd type="none" w="med" len="med"/>
+                      <a:tailEnd type="none" w="med" len="med"/>
+                    </a:lnR>
+                    <a:lnT w="6350" cap="flat" cmpd="sng" algn="ctr">
+                      <a:solidFill>
+                        <a:srgbClr val="D6DCEA"/>
+                      </a:solidFill>
+                      <a:prstDash val="solid"/>
+                      <a:round/>
+                      <a:headEnd type="none" w="med" len="med"/>
+                      <a:tailEnd type="none" w="med" len="med"/>
+                    </a:lnT>
+                    <a:lnB w="6350" cap="flat" cmpd="sng" algn="ctr">
+                      <a:solidFill>
+                        <a:srgbClr val="D6DCEA"/>
+                      </a:solidFill>
+                      <a:prstDash val="solid"/>
+                      <a:round/>
+                      <a:headEnd type="none" w="med" len="med"/>
+                      <a:tailEnd type="none" w="med" len="med"/>
+                    </a:lnB>
+                  </a:tcPr>
+                </a:tc>
+                <a:tc>
+                  <a:txBody>
+                    <a:bodyPr/>
+                    <a:lstStyle/>
+                    <a:p>
+                      <a:pPr indent="0" marL="0">
+                        <a:buNone/>
+                      </a:pPr>
+                      <a:r>
+                        <a:rPr lang="en-US" sz="1250" dirty="0">
+                          <a:solidFill>
+                            <a:srgbClr val="1C2333"/>
+                          </a:solidFill>
+                          <a:latin typeface="Calibri" pitchFamily="34" charset="0"/>
+                          <a:ea typeface="Calibri" pitchFamily="34" charset="-122"/>
+                          <a:cs typeface="Calibri" pitchFamily="34" charset="-120"/>
+                        </a:rPr>
+                        <a:t>Files opened at least 3 times</a:t>
+                      </a:r>
+                      <a:endParaRPr lang="en-US" sz="1250" dirty="0">
+                        <a:latin typeface="Calibri" charset="0"/>
+                        <a:ea typeface="Calibri" charset="0"/>
+                        <a:cs typeface="Calibri" charset="0"/>
+                      </a:endParaRPr>
+                    </a:p>
+                  </a:txBody>
+                  <a:tcPr marL="91440" marR="91440" marT="45720" marB="45720" anchor="ctr">
+                    <a:lnL w="6350" cap="flat" cmpd="sng" algn="ctr">
+                      <a:solidFill>
+                        <a:srgbClr val="D6DCEA"/>
+                      </a:solidFill>
+                      <a:prstDash val="solid"/>
+                      <a:round/>
+                      <a:headEnd type="none" w="med" len="med"/>
+                      <a:tailEnd type="none" w="med" len="med"/>
+                    </a:lnL>
+                    <a:lnR w="6350" cap="flat" cmpd="sng" algn="ctr">
+                      <a:solidFill>
+                        <a:srgbClr val="D6DCEA"/>
+                      </a:solidFill>
+                      <a:prstDash val="solid"/>
+                      <a:round/>
+                      <a:headEnd type="none" w="med" len="med"/>
+                      <a:tailEnd type="none" w="med" len="med"/>
+                    </a:lnR>
+                    <a:lnT w="6350" cap="flat" cmpd="sng" algn="ctr">
+                      <a:solidFill>
+                        <a:srgbClr val="D6DCEA"/>
+                      </a:solidFill>
+                      <a:prstDash val="solid"/>
+                      <a:round/>
+                      <a:headEnd type="none" w="med" len="med"/>
+                      <a:tailEnd type="none" w="med" len="med"/>
+                    </a:lnT>
+                    <a:lnB w="6350" cap="flat" cmpd="sng" algn="ctr">
+                      <a:solidFill>
+                        <a:srgbClr val="D6DCEA"/>
+                      </a:solidFill>
+                      <a:prstDash val="solid"/>
+                      <a:round/>
+                      <a:headEnd type="none" w="med" len="med"/>
+                      <a:tailEnd type="none" w="med" len="med"/>
+                    </a:lnB>
+                  </a:tcPr>
+                </a:tc>
+              </a:tr>
+              <a:tr h="566928">
+                <a:tc>
+                  <a:txBody>
+                    <a:bodyPr/>
+                    <a:lstStyle/>
+                    <a:p>
+                      <a:pPr indent="0" marL="0">
+                        <a:buNone/>
+                      </a:pPr>
+                      <a:r>
+                        <a:rPr lang="en-US" sz="1250" dirty="0">
+                          <a:solidFill>
+                            <a:srgbClr val="1C2333"/>
+                          </a:solidFill>
+                          <a:latin typeface="Calibri" pitchFamily="34" charset="0"/>
+                          <a:ea typeface="Calibri" pitchFamily="34" charset="-122"/>
+                          <a:cs typeface="Calibri" pitchFamily="34" charset="-120"/>
+                        </a:rPr>
+                        <a:t>Possible duplicate</a:t>
+                      </a:r>
+                      <a:endParaRPr lang="en-US" sz="1250" dirty="0">
+                        <a:latin typeface="Calibri" charset="0"/>
+                        <a:ea typeface="Calibri" charset="0"/>
+                        <a:cs typeface="Calibri" charset="0"/>
+                      </a:endParaRPr>
+                    </a:p>
+                  </a:txBody>
+                  <a:tcPr marL="91440" marR="91440" marT="45720" marB="45720" anchor="ctr">
+                    <a:lnL w="6350" cap="flat" cmpd="sng" algn="ctr">
+                      <a:solidFill>
+                        <a:srgbClr val="D6DCEA"/>
+                      </a:solidFill>
+                      <a:prstDash val="solid"/>
+                      <a:round/>
+                      <a:headEnd type="none" w="med" len="med"/>
+                      <a:tailEnd type="none" w="med" len="med"/>
+                    </a:lnL>
+                    <a:lnR w="6350" cap="flat" cmpd="sng" algn="ctr">
+                      <a:solidFill>
+                        <a:srgbClr val="D6DCEA"/>
+                      </a:solidFill>
+                      <a:prstDash val="solid"/>
+                      <a:round/>
+                      <a:headEnd type="none" w="med" len="med"/>
+                      <a:tailEnd type="none" w="med" len="med"/>
+                    </a:lnR>
+                    <a:lnT w="6350" cap="flat" cmpd="sng" algn="ctr">
+                      <a:solidFill>
+                        <a:srgbClr val="D6DCEA"/>
+                      </a:solidFill>
+                      <a:prstDash val="solid"/>
+                      <a:round/>
+                      <a:headEnd type="none" w="med" len="med"/>
+                      <a:tailEnd type="none" w="med" len="med"/>
+                    </a:lnT>
+                    <a:lnB w="6350" cap="flat" cmpd="sng" algn="ctr">
+                      <a:solidFill>
+                        <a:srgbClr val="D6DCEA"/>
+                      </a:solidFill>
+                      <a:prstDash val="solid"/>
+                      <a:round/>
+                      <a:headEnd type="none" w="med" len="med"/>
+                      <a:tailEnd type="none" w="med" len="med"/>
+                    </a:lnB>
+                  </a:tcPr>
+                </a:tc>
+                <a:tc>
+                  <a:txBody>
+                    <a:bodyPr/>
+                    <a:lstStyle/>
+                    <a:p>
+                      <a:pPr indent="0" marL="0">
+                        <a:buNone/>
+                      </a:pPr>
+                      <a:r>
+                        <a:rPr lang="en-US" sz="1250" dirty="0">
+                          <a:solidFill>
+                            <a:srgbClr val="1C2333"/>
+                          </a:solidFill>
+                          <a:latin typeface="Calibri" pitchFamily="34" charset="0"/>
+                          <a:ea typeface="Calibri" pitchFamily="34" charset="-122"/>
+                          <a:cs typeface="Calibri" pitchFamily="34" charset="-120"/>
+                        </a:rPr>
+                        <a:t>Similarity of 0.9 or more, or identical content hash</a:t>
+                      </a:r>
+                      <a:endParaRPr lang="en-US" sz="1250" dirty="0">
+                        <a:latin typeface="Calibri" charset="0"/>
+                        <a:ea typeface="Calibri" charset="0"/>
+                        <a:cs typeface="Calibri" charset="0"/>
+                      </a:endParaRPr>
+                    </a:p>
+                  </a:txBody>
+                  <a:tcPr marL="91440" marR="91440" marT="45720" marB="45720" anchor="ctr">
+                    <a:lnL w="6350" cap="flat" cmpd="sng" algn="ctr">
+                      <a:solidFill>
+                        <a:srgbClr val="D6DCEA"/>
+                      </a:solidFill>
+                      <a:prstDash val="solid"/>
+                      <a:round/>
+                      <a:headEnd type="none" w="med" len="med"/>
+                      <a:tailEnd type="none" w="med" len="med"/>
+                    </a:lnL>
+                    <a:lnR w="6350" cap="flat" cmpd="sng" algn="ctr">
+                      <a:solidFill>
+                        <a:srgbClr val="D6DCEA"/>
+                      </a:solidFill>
+                      <a:prstDash val="solid"/>
+                      <a:round/>
+                      <a:headEnd type="none" w="med" len="med"/>
+                      <a:tailEnd type="none" w="med" len="med"/>
+                    </a:lnR>
+                    <a:lnT w="6350" cap="flat" cmpd="sng" algn="ctr">
+                      <a:solidFill>
+                        <a:srgbClr val="D6DCEA"/>
+                      </a:solidFill>
+                      <a:prstDash val="solid"/>
+                      <a:round/>
+                      <a:headEnd type="none" w="med" len="med"/>
+                      <a:tailEnd type="none" w="med" len="med"/>
+                    </a:lnT>
+                    <a:lnB w="6350" cap="flat" cmpd="sng" algn="ctr">
+                      <a:solidFill>
+                        <a:srgbClr val="D6DCEA"/>
+                      </a:solidFill>
+                      <a:prstDash val="solid"/>
+                      <a:round/>
+                      <a:headEnd type="none" w="med" len="med"/>
+                      <a:tailEnd type="none" w="med" len="med"/>
+                    </a:lnB>
+                  </a:tcPr>
+                </a:tc>
+              </a:tr>
+              <a:tr h="566928">
+                <a:tc>
+                  <a:txBody>
+                    <a:bodyPr/>
+                    <a:lstStyle/>
+                    <a:p>
+                      <a:pPr indent="0" marL="0">
+                        <a:buNone/>
+                      </a:pPr>
+                      <a:r>
+                        <a:rPr lang="en-US" sz="1250" dirty="0">
+                          <a:solidFill>
+                            <a:srgbClr val="1C2333"/>
+                          </a:solidFill>
+                          <a:latin typeface="Calibri" pitchFamily="34" charset="0"/>
+                          <a:ea typeface="Calibri" pitchFamily="34" charset="-122"/>
+                          <a:cs typeface="Calibri" pitchFamily="34" charset="-120"/>
+                        </a:rPr>
+                        <a:t>Needs organizing</a:t>
+                      </a:r>
+                      <a:endParaRPr lang="en-US" sz="1250" dirty="0">
+                        <a:latin typeface="Calibri" charset="0"/>
+                        <a:ea typeface="Calibri" charset="0"/>
+                        <a:cs typeface="Calibri" charset="0"/>
+                      </a:endParaRPr>
+                    </a:p>
+                  </a:txBody>
+                  <a:tcPr marL="91440" marR="91440" marT="45720" marB="45720" anchor="ctr">
+                    <a:lnL w="6350" cap="flat" cmpd="sng" algn="ctr">
+                      <a:solidFill>
+                        <a:srgbClr val="D6DCEA"/>
+                      </a:solidFill>
+                      <a:prstDash val="solid"/>
+                      <a:round/>
+                      <a:headEnd type="none" w="med" len="med"/>
+                      <a:tailEnd type="none" w="med" len="med"/>
+                    </a:lnL>
+                    <a:lnR w="6350" cap="flat" cmpd="sng" algn="ctr">
+                      <a:solidFill>
+                        <a:srgbClr val="D6DCEA"/>
+                      </a:solidFill>
+                      <a:prstDash val="solid"/>
+                      <a:round/>
+                      <a:headEnd type="none" w="med" len="med"/>
+                      <a:tailEnd type="none" w="med" len="med"/>
+                    </a:lnR>
+                    <a:lnT w="6350" cap="flat" cmpd="sng" algn="ctr">
+                      <a:solidFill>
+                        <a:srgbClr val="D6DCEA"/>
+                      </a:solidFill>
+                      <a:prstDash val="solid"/>
+                      <a:round/>
+                      <a:headEnd type="none" w="med" len="med"/>
+                      <a:tailEnd type="none" w="med" len="med"/>
+                    </a:lnT>
+                    <a:lnB w="6350" cap="flat" cmpd="sng" algn="ctr">
+                      <a:solidFill>
+                        <a:srgbClr val="D6DCEA"/>
+                      </a:solidFill>
+                      <a:prstDash val="solid"/>
+                      <a:round/>
+                      <a:headEnd type="none" w="med" len="med"/>
+                      <a:tailEnd type="none" w="med" len="med"/>
+                    </a:lnB>
+                  </a:tcPr>
+                </a:tc>
+                <a:tc>
+                  <a:txBody>
+                    <a:bodyPr/>
+                    <a:lstStyle/>
+                    <a:p>
+                      <a:pPr indent="0" marL="0">
+                        <a:buNone/>
+                      </a:pPr>
+                      <a:r>
+                        <a:rPr lang="en-US" sz="1250" dirty="0">
+                          <a:solidFill>
+                            <a:srgbClr val="1C2333"/>
+                          </a:solidFill>
+                          <a:latin typeface="Calibri" pitchFamily="34" charset="0"/>
+                          <a:ea typeface="Calibri" pitchFamily="34" charset="-122"/>
+                          <a:cs typeface="Calibri" pitchFamily="34" charset="-120"/>
+                        </a:rPr>
+                        <a:t>Indexed files with no category</a:t>
+                      </a:r>
+                      <a:endParaRPr lang="en-US" sz="1250" dirty="0">
+                        <a:latin typeface="Calibri" charset="0"/>
+                        <a:ea typeface="Calibri" charset="0"/>
+                        <a:cs typeface="Calibri" charset="0"/>
+                      </a:endParaRPr>
+                    </a:p>
+                  </a:txBody>
+                  <a:tcPr marL="91440" marR="91440" marT="45720" marB="45720" anchor="ctr">
+                    <a:lnL w="6350" cap="flat" cmpd="sng" algn="ctr">
+                      <a:solidFill>
+                        <a:srgbClr val="D6DCEA"/>
+                      </a:solidFill>
+                      <a:prstDash val="solid"/>
+                      <a:round/>
+                      <a:headEnd type="none" w="med" len="med"/>
+                      <a:tailEnd type="none" w="med" len="med"/>
+                    </a:lnL>
+                    <a:lnR w="6350" cap="flat" cmpd="sng" algn="ctr">
+                      <a:solidFill>
+                        <a:srgbClr val="D6DCEA"/>
+                      </a:solidFill>
+                      <a:prstDash val="solid"/>
+                      <a:round/>
+                      <a:headEnd type="none" w="med" len="med"/>
+                      <a:tailEnd type="none" w="med" len="med"/>
+                    </a:lnR>
+                    <a:lnT w="6350" cap="flat" cmpd="sng" algn="ctr">
+                      <a:solidFill>
+                        <a:srgbClr val="D6DCEA"/>
+                      </a:solidFill>
+                      <a:prstDash val="solid"/>
+                      <a:round/>
+                      <a:headEnd type="none" w="med" len="med"/>
+                      <a:tailEnd type="none" w="med" len="med"/>
+                    </a:lnT>
+                    <a:lnB w="6350" cap="flat" cmpd="sng" algn="ctr">
+                      <a:solidFill>
+                        <a:srgbClr val="D6DCEA"/>
+                      </a:solidFill>
+                      <a:prstDash val="solid"/>
+                      <a:round/>
+                      <a:headEnd type="none" w="med" len="med"/>
+                      <a:tailEnd type="none" w="med" len="med"/>
+                    </a:lnB>
+                  </a:tcPr>
+                </a:tc>
+              </a:tr>
+              <a:tr h="566928">
+                <a:tc>
+                  <a:txBody>
+                    <a:bodyPr/>
+                    <a:lstStyle/>
+                    <a:p>
+                      <a:pPr indent="0" marL="0">
+                        <a:buNone/>
+                      </a:pPr>
+                      <a:r>
+                        <a:rPr lang="en-US" sz="1250" dirty="0">
+                          <a:solidFill>
+                            <a:srgbClr val="1C2333"/>
+                          </a:solidFill>
+                          <a:latin typeface="Calibri" pitchFamily="34" charset="0"/>
+                          <a:ea typeface="Calibri" pitchFamily="34" charset="-122"/>
+                          <a:cs typeface="Calibri" pitchFamily="34" charset="-120"/>
+                        </a:rPr>
+                        <a:t>Stale files</a:t>
+                      </a:r>
+                      <a:endParaRPr lang="en-US" sz="1250" dirty="0">
+                        <a:latin typeface="Calibri" charset="0"/>
+                        <a:ea typeface="Calibri" charset="0"/>
+                        <a:cs typeface="Calibri" charset="0"/>
+                      </a:endParaRPr>
+                    </a:p>
+                  </a:txBody>
+                  <a:tcPr marL="91440" marR="91440" marT="45720" marB="45720" anchor="ctr">
+                    <a:lnL w="6350" cap="flat" cmpd="sng" algn="ctr">
+                      <a:solidFill>
+                        <a:srgbClr val="D6DCEA"/>
+                      </a:solidFill>
+                      <a:prstDash val="solid"/>
+                      <a:round/>
+                      <a:headEnd type="none" w="med" len="med"/>
+                      <a:tailEnd type="none" w="med" len="med"/>
+                    </a:lnL>
+                    <a:lnR w="6350" cap="flat" cmpd="sng" algn="ctr">
+                      <a:solidFill>
+                        <a:srgbClr val="D6DCEA"/>
+                      </a:solidFill>
+                      <a:prstDash val="solid"/>
+                      <a:round/>
+                      <a:headEnd type="none" w="med" len="med"/>
+                      <a:tailEnd type="none" w="med" len="med"/>
+                    </a:lnR>
+                    <a:lnT w="6350" cap="flat" cmpd="sng" algn="ctr">
+                      <a:solidFill>
+                        <a:srgbClr val="D6DCEA"/>
+                      </a:solidFill>
+                      <a:prstDash val="solid"/>
+                      <a:round/>
+                      <a:headEnd type="none" w="med" len="med"/>
+                      <a:tailEnd type="none" w="med" len="med"/>
+                    </a:lnT>
+                    <a:lnB w="6350" cap="flat" cmpd="sng" algn="ctr">
+                      <a:solidFill>
+                        <a:srgbClr val="D6DCEA"/>
+                      </a:solidFill>
+                      <a:prstDash val="solid"/>
+                      <a:round/>
+                      <a:headEnd type="none" w="med" len="med"/>
+                      <a:tailEnd type="none" w="med" len="med"/>
+                    </a:lnB>
+                  </a:tcPr>
+                </a:tc>
+                <a:tc>
+                  <a:txBody>
+                    <a:bodyPr/>
+                    <a:lstStyle/>
+                    <a:p>
+                      <a:pPr indent="0" marL="0">
+                        <a:buNone/>
+                      </a:pPr>
+                      <a:r>
+                        <a:rPr lang="en-US" sz="1250" dirty="0">
+                          <a:solidFill>
+                            <a:srgbClr val="1C2333"/>
+                          </a:solidFill>
+                          <a:latin typeface="Calibri" pitchFamily="34" charset="0"/>
+                          <a:ea typeface="Calibri" pitchFamily="34" charset="-122"/>
+                          <a:cs typeface="Calibri" pitchFamily="34" charset="-120"/>
+                        </a:rPr>
+                        <a:t>Untouched for 90+ days and never opened</a:t>
+                      </a:r>
+                      <a:endParaRPr lang="en-US" sz="1250" dirty="0">
+                        <a:latin typeface="Calibri" charset="0"/>
+                        <a:ea typeface="Calibri" charset="0"/>
+                        <a:cs typeface="Calibri" charset="0"/>
+                      </a:endParaRPr>
+                    </a:p>
+                  </a:txBody>
+                  <a:tcPr marL="91440" marR="91440" marT="45720" marB="45720" anchor="ctr">
+                    <a:lnL w="6350" cap="flat" cmpd="sng" algn="ctr">
+                      <a:solidFill>
+                        <a:srgbClr val="D6DCEA"/>
+                      </a:solidFill>
+                      <a:prstDash val="solid"/>
+                      <a:round/>
+                      <a:headEnd type="none" w="med" len="med"/>
+                      <a:tailEnd type="none" w="med" len="med"/>
+                    </a:lnL>
+                    <a:lnR w="6350" cap="flat" cmpd="sng" algn="ctr">
+                      <a:solidFill>
+                        <a:srgbClr val="D6DCEA"/>
+                      </a:solidFill>
+                      <a:prstDash val="solid"/>
+                      <a:round/>
+                      <a:headEnd type="none" w="med" len="med"/>
+                      <a:tailEnd type="none" w="med" len="med"/>
+                    </a:lnR>
+                    <a:lnT w="6350" cap="flat" cmpd="sng" algn="ctr">
+                      <a:solidFill>
+                        <a:srgbClr val="D6DCEA"/>
+                      </a:solidFill>
+                      <a:prstDash val="solid"/>
+                      <a:round/>
+                      <a:headEnd type="none" w="med" len="med"/>
+                      <a:tailEnd type="none" w="med" len="med"/>
+                    </a:lnT>
+                    <a:lnB w="6350" cap="flat" cmpd="sng" algn="ctr">
+                      <a:solidFill>
+                        <a:srgbClr val="D6DCEA"/>
+                      </a:solidFill>
+                      <a:prstDash val="solid"/>
+                      <a:round/>
+                      <a:headEnd type="none" w="med" len="med"/>
+                      <a:tailEnd type="none" w="med" len="med"/>
+                    </a:lnB>
+                  </a:tcPr>
+                </a:tc>
+              </a:tr>
+            </a:tbl>
+          </a:graphicData>
+        </a:graphic>
+      </p:graphicFrame>
+      <p:sp>
+        <p:nvSpPr>
+          <p:cNvPr id="12" name="Text 9"/>
+          <p:cNvSpPr/>
+          <p:nvPr/>
+        </p:nvSpPr>
+        <p:spPr>
+          <a:xfrm>
+            <a:off x="5943600" y="5440680"/>
+            <a:ext cx="5715000" cy="731520"/>
+          </a:xfrm>
+          <a:prstGeom prst="rect">
+            <a:avLst/>
+          </a:prstGeom>
+          <a:noFill/>
+          <a:ln/>
+        </p:spPr>
+        <p:txBody>
+          <a:bodyPr wrap="square" lIns="0" tIns="0" rIns="0" bIns="0" rtlCol="0" anchor="t"/>
+          <a:lstStyle/>
+          <a:p>
+            <a:pPr indent="0" marL="0">
+              <a:buNone/>
+            </a:pPr>
+            <a:r>
+              <a:rPr lang="en-US" sz="1250" i="1" dirty="0">
+                <a:solidFill>
+                  <a:srgbClr val="5B6478"/>
+                </a:solidFill>
+                <a:latin typeface="Calibri" pitchFamily="34" charset="0"/>
+                <a:ea typeface="Calibri" pitchFamily="34" charset="-122"/>
+                <a:cs typeface="Calibri" pitchFamily="34" charset="-120"/>
+              </a:rPr>
+              <a:t>Rules, not the language model: reproducible, explainable, and no extra model calls. A workspace opens all its files in one click.</a:t>
+            </a:r>
+            <a:endParaRPr lang="en-US" sz="1250" dirty="0"/>
+          </a:p>
+        </p:txBody>
+      </p:sp>
+    </p:spTree>
+  </p:cSld>
+  <p:clrMapOvr>
+    <a:masterClrMapping/>
+  </p:clrMapOvr>
+</p:sld>
+</file>
+
+<file path=ppt/slides/slide19.xml><?xml version="1.0" encoding="utf-8"?>
+<p:sld xmlns:a="http://schemas.openxmlformats.org/drawingml/2006/main" xmlns:r="http://schemas.openxmlformats.org/officeDocument/2006/relationships" xmlns:p="http://schemas.openxmlformats.org/presentationml/2006/main">
+  <p:cSld name="Slide 19">
+    <p:bg>
+      <p:bgPr>
+        <a:solidFill>
+          <a:srgbClr val="F4F6FB"/>
+        </a:solidFill>
+      </p:bgPr>
+    </p:bg>
+    <p:spTree>
+      <p:nvGrpSpPr>
+        <p:cNvPr id="1" name=""/>
+        <p:cNvGrpSpPr/>
+        <p:nvPr/>
+      </p:nvGrpSpPr>
+      <p:grpSpPr>
+        <a:xfrm>
+          <a:off x="0" y="0"/>
+          <a:ext cx="0" cy="0"/>
+          <a:chOff x="0" y="0"/>
+          <a:chExt cx="0" cy="0"/>
+        </a:xfrm>
+      </p:grpSpPr>
+      <p:sp>
+        <p:nvSpPr>
+          <p:cNvPr id="2" name="Text 0"/>
+          <p:cNvSpPr/>
+          <p:nvPr/>
+        </p:nvSpPr>
+        <p:spPr>
+          <a:xfrm>
+            <a:off x="548640" y="320040"/>
+            <a:ext cx="11064240" cy="640080"/>
+          </a:xfrm>
+          <a:prstGeom prst="rect">
+            <a:avLst/>
+          </a:prstGeom>
+          <a:noFill/>
+          <a:ln/>
+        </p:spPr>
+        <p:txBody>
+          <a:bodyPr wrap="square" lIns="0" tIns="0" rIns="0" bIns="0" rtlCol="0" anchor="ctr"/>
+          <a:lstStyle/>
+          <a:p>
+            <a:pPr indent="0" marL="0">
+              <a:buNone/>
+            </a:pPr>
+            <a:r>
+              <a:rPr lang="en-US" sz="2800" b="1" dirty="0">
+                <a:solidFill>
+                  <a:srgbClr val="1C2333"/>
+                </a:solidFill>
+                <a:latin typeface="Trebuchet MS" pitchFamily="34" charset="0"/>
+                <a:ea typeface="Trebuchet MS" pitchFamily="34" charset="-122"/>
+                <a:cs typeface="Trebuchet MS" pitchFamily="34" charset="-120"/>
+              </a:rPr>
+              <a:t>Retrieval quality: measurement and fix</a:t>
+            </a:r>
+            <a:endParaRPr lang="en-US" sz="2800" dirty="0"/>
+          </a:p>
+        </p:txBody>
+      </p:sp>
+      <p:sp>
+        <p:nvSpPr>
+          <p:cNvPr id="3" name="Text 1"/>
+          <p:cNvSpPr/>
+          <p:nvPr/>
+        </p:nvSpPr>
+        <p:spPr>
+          <a:xfrm>
+            <a:off x="548640" y="914400"/>
+            <a:ext cx="11064240" cy="365760"/>
+          </a:xfrm>
+          <a:prstGeom prst="rect">
+            <a:avLst/>
+          </a:prstGeom>
+          <a:noFill/>
+          <a:ln/>
+        </p:spPr>
+        <p:txBody>
+          <a:bodyPr wrap="square" lIns="0" tIns="0" rIns="0" bIns="0" rtlCol="0" anchor="ctr"/>
+          <a:lstStyle/>
+          <a:p>
+            <a:pPr indent="0" marL="0">
+              <a:buNone/>
+            </a:pPr>
+            <a:r>
+              <a:rPr lang="en-US" sz="1400" dirty="0">
+                <a:solidFill>
+                  <a:srgbClr val="5B6478"/>
+                </a:solidFill>
+                <a:latin typeface="Calibri" pitchFamily="34" charset="0"/>
+                <a:ea typeface="Calibri" pitchFamily="34" charset="-122"/>
+                <a:cs typeface="Calibri" pitchFamily="34" charset="-120"/>
+              </a:rPr>
+              <a:t>Report section 5.5 - 27 labelled queries plus 4 off-topic ones, split into tuning and held-out halves</a:t>
+            </a:r>
+            <a:endParaRPr lang="en-US" sz="1400" dirty="0"/>
+          </a:p>
+        </p:txBody>
+      </p:sp>
+      <p:sp>
+        <p:nvSpPr>
+          <p:cNvPr id="4" name="Text 2"/>
+          <p:cNvSpPr/>
+          <p:nvPr/>
+        </p:nvSpPr>
+        <p:spPr>
+          <a:xfrm>
+            <a:off x="548640" y="6473952"/>
+            <a:ext cx="5486400" cy="274320"/>
+          </a:xfrm>
+          <a:prstGeom prst="rect">
+            <a:avLst/>
+          </a:prstGeom>
+          <a:noFill/>
+          <a:ln/>
+        </p:spPr>
+        <p:txBody>
+          <a:bodyPr wrap="square" lIns="0" tIns="0" rIns="0" bIns="0" rtlCol="0" anchor="ctr"/>
+          <a:lstStyle/>
+          <a:p>
+            <a:pPr indent="0" marL="0">
+              <a:buNone/>
+            </a:pPr>
+            <a:r>
+              <a:rPr lang="en-US" sz="1000" dirty="0">
+                <a:solidFill>
+                  <a:srgbClr val="8A93AA"/>
+                </a:solidFill>
+                <a:latin typeface="Calibri" pitchFamily="34" charset="0"/>
+                <a:ea typeface="Calibri" pitchFamily="34" charset="-122"/>
+                <a:cs typeface="Calibri" pitchFamily="34" charset="-120"/>
+              </a:rPr>
+              <a:t>DreamOS - Project Monitoring II</a:t>
+            </a:r>
+            <a:endParaRPr lang="en-US" sz="1000" dirty="0"/>
+          </a:p>
+        </p:txBody>
+      </p:sp>
+      <p:sp>
+        <p:nvSpPr>
+          <p:cNvPr id="5" name="Text 3"/>
+          <p:cNvSpPr/>
+          <p:nvPr/>
+        </p:nvSpPr>
+        <p:spPr>
+          <a:xfrm>
+            <a:off x="11064240" y="6473952"/>
+            <a:ext cx="594360" cy="274320"/>
+          </a:xfrm>
+          <a:prstGeom prst="rect">
+            <a:avLst/>
+          </a:prstGeom>
+          <a:noFill/>
+          <a:ln/>
+        </p:spPr>
+        <p:txBody>
+          <a:bodyPr wrap="square" lIns="0" tIns="0" rIns="0" bIns="0" rtlCol="0" anchor="ctr"/>
+          <a:lstStyle/>
+          <a:p>
+            <a:pPr algn="r" indent="0" marL="0">
+              <a:buNone/>
+            </a:pPr>
+            <a:r>
+              <a:rPr lang="en-US" sz="1000" dirty="0">
+                <a:solidFill>
+                  <a:srgbClr val="8A93AA"/>
+                </a:solidFill>
+                <a:latin typeface="Calibri" pitchFamily="34" charset="0"/>
+                <a:ea typeface="Calibri" pitchFamily="34" charset="-122"/>
+                <a:cs typeface="Calibri" pitchFamily="34" charset="-120"/>
+              </a:rPr>
+              <a:t>19</a:t>
+            </a:r>
+            <a:endParaRPr lang="en-US" sz="1000" dirty="0"/>
+          </a:p>
+        </p:txBody>
+      </p:sp>
+      <p:graphicFrame>
+        <p:nvGraphicFramePr>
+          <p:cNvPr id="20" name="Table 0"/>
+          <p:cNvGraphicFramePr>
+            <a:graphicFrameLocks noGrp="1"/>
+          </p:cNvGraphicFramePr>
+          <p:nvPr>
+            <p:extLst>
+              <p:ext uri="{D42A27DB-BD31-4B8C-83A1-F6EECF244321}">
+                <p14:modId xmlns:p14="http://schemas.microsoft.com/office/powerpoint/2010/main" val="1579011935"/>
+              </p:ext>
+            </p:extLst>
+          </p:nvPr>
+        </p:nvGraphicFramePr>
+        <p:xfrm>
+          <a:off x="548640" y="1417320"/>
+          <a:ext cx="11109960" cy="914400"/>
+        </p:xfrm>
+        <a:graphic>
+          <a:graphicData uri="http://schemas.openxmlformats.org/drawingml/2006/table">
+            <a:tbl>
+              <a:tblPr/>
+              <a:tblGrid>
+                <a:gridCol w="3017520"/>
+                <a:gridCol w="6263640"/>
+                <a:gridCol w="1828800"/>
+              </a:tblGrid>
+              <a:tr h="640080">
+                <a:tc>
+                  <a:txBody>
+                    <a:bodyPr/>
+                    <a:lstStyle/>
+                    <a:p>
+                      <a:pPr indent="0" marL="0">
+                        <a:buNone/>
+                      </a:pPr>
+                      <a:r>
+                        <a:rPr lang="en-US" sz="1250" b="1" dirty="0">
+                          <a:solidFill>
+                            <a:srgbClr val="FFFFFF"/>
+                          </a:solidFill>
+                          <a:latin typeface="Trebuchet MS" pitchFamily="34" charset="0"/>
+                          <a:ea typeface="Trebuchet MS" pitchFamily="34" charset="-122"/>
+                          <a:cs typeface="Trebuchet MS" pitchFamily="34" charset="-120"/>
+                        </a:rPr>
+                        <a:t>Approach</a:t>
+                      </a:r>
+                      <a:endParaRPr lang="en-US" sz="1250" dirty="0">
+                        <a:latin typeface="Trebuchet MS" charset="0"/>
+                        <a:ea typeface="Trebuchet MS" charset="0"/>
+                        <a:cs typeface="Trebuchet MS" charset="0"/>
+                      </a:endParaRPr>
+                    </a:p>
+                  </a:txBody>
+                  <a:tcPr marL="91440" marR="91440" marT="45720" marB="45720" anchor="ctr">
+                    <a:lnL w="6350" cap="flat" cmpd="sng" algn="ctr">
+                      <a:solidFill>
+                        <a:srgbClr val="D6DCEA"/>
+                      </a:solidFill>
+                      <a:prstDash val="solid"/>
+                      <a:round/>
+                      <a:headEnd type="none" w="med" len="med"/>
+                      <a:tailEnd type="none" w="med" len="med"/>
+                    </a:lnL>
+                    <a:lnR w="6350" cap="flat" cmpd="sng" algn="ctr">
+                      <a:solidFill>
+                        <a:srgbClr val="D6DCEA"/>
+                      </a:solidFill>
+                      <a:prstDash val="solid"/>
+                      <a:round/>
+                      <a:headEnd type="none" w="med" len="med"/>
+                      <a:tailEnd type="none" w="med" len="med"/>
+                    </a:lnR>
+                    <a:lnT w="6350" cap="flat" cmpd="sng" algn="ctr">
+                      <a:solidFill>
+                        <a:srgbClr val="D6DCEA"/>
+                      </a:solidFill>
+                      <a:prstDash val="solid"/>
+                      <a:round/>
+                      <a:headEnd type="none" w="med" len="med"/>
+                      <a:tailEnd type="none" w="med" len="med"/>
+                    </a:lnT>
+                    <a:lnB w="6350" cap="flat" cmpd="sng" algn="ctr">
+                      <a:solidFill>
+                        <a:srgbClr val="D6DCEA"/>
+                      </a:solidFill>
+                      <a:prstDash val="solid"/>
+                      <a:round/>
+                      <a:headEnd type="none" w="med" len="med"/>
+                      <a:tailEnd type="none" w="med" len="med"/>
+                    </a:lnB>
+                    <a:solidFill>
+                      <a:srgbClr val="1E2761"/>
+                    </a:solidFill>
+                  </a:tcPr>
+                </a:tc>
+                <a:tc>
+                  <a:txBody>
+                    <a:bodyPr/>
+                    <a:lstStyle/>
+                    <a:p>
+                      <a:pPr indent="0" marL="0">
+                        <a:buNone/>
+                      </a:pPr>
+                      <a:r>
+                        <a:rPr lang="en-US" sz="1250" b="1" dirty="0">
+                          <a:solidFill>
+                            <a:srgbClr val="FFFFFF"/>
+                          </a:solidFill>
+                          <a:latin typeface="Trebuchet MS" pitchFamily="34" charset="0"/>
+                          <a:ea typeface="Trebuchet MS" pitchFamily="34" charset="-122"/>
+                          <a:cs typeface="Trebuchet MS" pitchFamily="34" charset="-120"/>
+                        </a:rPr>
+                        <a:t>Result</a:t>
+                      </a:r>
+                      <a:endParaRPr lang="en-US" sz="1250" dirty="0">
+                        <a:latin typeface="Trebuchet MS" charset="0"/>
+                        <a:ea typeface="Trebuchet MS" charset="0"/>
+                        <a:cs typeface="Trebuchet MS" charset="0"/>
+                      </a:endParaRPr>
+                    </a:p>
+                  </a:txBody>
+                  <a:tcPr marL="91440" marR="91440" marT="45720" marB="45720" anchor="ctr">
+                    <a:lnL w="6350" cap="flat" cmpd="sng" algn="ctr">
+                      <a:solidFill>
+                        <a:srgbClr val="D6DCEA"/>
+                      </a:solidFill>
+                      <a:prstDash val="solid"/>
+                      <a:round/>
+                      <a:headEnd type="none" w="med" len="med"/>
+                      <a:tailEnd type="none" w="med" len="med"/>
+                    </a:lnL>
+                    <a:lnR w="6350" cap="flat" cmpd="sng" algn="ctr">
+                      <a:solidFill>
+                        <a:srgbClr val="D6DCEA"/>
+                      </a:solidFill>
+                      <a:prstDash val="solid"/>
+                      <a:round/>
+                      <a:headEnd type="none" w="med" len="med"/>
+                      <a:tailEnd type="none" w="med" len="med"/>
+                    </a:lnR>
+                    <a:lnT w="6350" cap="flat" cmpd="sng" algn="ctr">
+                      <a:solidFill>
+                        <a:srgbClr val="D6DCEA"/>
+                      </a:solidFill>
+                      <a:prstDash val="solid"/>
+                      <a:round/>
+                      <a:headEnd type="none" w="med" len="med"/>
+                      <a:tailEnd type="none" w="med" len="med"/>
+                    </a:lnT>
+                    <a:lnB w="6350" cap="flat" cmpd="sng" algn="ctr">
+                      <a:solidFill>
+                        <a:srgbClr val="D6DCEA"/>
+                      </a:solidFill>
+                      <a:prstDash val="solid"/>
+                      <a:round/>
+                      <a:headEnd type="none" w="med" len="med"/>
+                      <a:tailEnd type="none" w="med" len="med"/>
+                    </a:lnB>
+                    <a:solidFill>
+                      <a:srgbClr val="1E2761"/>
+                    </a:solidFill>
+                  </a:tcPr>
+                </a:tc>
+                <a:tc>
+                  <a:txBody>
+                    <a:bodyPr/>
+                    <a:lstStyle/>
+                    <a:p>
+                      <a:pPr indent="0" marL="0">
+                        <a:buNone/>
+                      </a:pPr>
+                      <a:r>
+                        <a:rPr lang="en-US" sz="1250" b="1" dirty="0">
+                          <a:solidFill>
+                            <a:srgbClr val="FFFFFF"/>
+                          </a:solidFill>
+                          <a:latin typeface="Trebuchet MS" pitchFamily="34" charset="0"/>
+                          <a:ea typeface="Trebuchet MS" pitchFamily="34" charset="-122"/>
+                          <a:cs typeface="Trebuchet MS" pitchFamily="34" charset="-120"/>
+                        </a:rPr>
+                        <a:t>Decision</a:t>
+                      </a:r>
+                      <a:endParaRPr lang="en-US" sz="1250" dirty="0">
+                        <a:latin typeface="Trebuchet MS" charset="0"/>
+                        <a:ea typeface="Trebuchet MS" charset="0"/>
+                        <a:cs typeface="Trebuchet MS" charset="0"/>
+                      </a:endParaRPr>
+                    </a:p>
+                  </a:txBody>
+                  <a:tcPr marL="91440" marR="91440" marT="45720" marB="45720" anchor="ctr">
+                    <a:lnL w="6350" cap="flat" cmpd="sng" algn="ctr">
+                      <a:solidFill>
+                        <a:srgbClr val="D6DCEA"/>
+                      </a:solidFill>
+                      <a:prstDash val="solid"/>
+                      <a:round/>
+                      <a:headEnd type="none" w="med" len="med"/>
+                      <a:tailEnd type="none" w="med" len="med"/>
+                    </a:lnL>
+                    <a:lnR w="6350" cap="flat" cmpd="sng" algn="ctr">
+                      <a:solidFill>
+                        <a:srgbClr val="D6DCEA"/>
+                      </a:solidFill>
+                      <a:prstDash val="solid"/>
+                      <a:round/>
+                      <a:headEnd type="none" w="med" len="med"/>
+                      <a:tailEnd type="none" w="med" len="med"/>
+                    </a:lnR>
+                    <a:lnT w="6350" cap="flat" cmpd="sng" algn="ctr">
+                      <a:solidFill>
+                        <a:srgbClr val="D6DCEA"/>
+                      </a:solidFill>
+                      <a:prstDash val="solid"/>
+                      <a:round/>
+                      <a:headEnd type="none" w="med" len="med"/>
+                      <a:tailEnd type="none" w="med" len="med"/>
+                    </a:lnT>
+                    <a:lnB w="6350" cap="flat" cmpd="sng" algn="ctr">
+                      <a:solidFill>
+                        <a:srgbClr val="D6DCEA"/>
+                      </a:solidFill>
+                      <a:prstDash val="solid"/>
+                      <a:round/>
+                      <a:headEnd type="none" w="med" len="med"/>
+                      <a:tailEnd type="none" w="med" len="med"/>
+                    </a:lnB>
+                    <a:solidFill>
+                      <a:srgbClr val="1E2761"/>
+                    </a:solidFill>
+                  </a:tcPr>
+                </a:tc>
+              </a:tr>
+              <a:tr h="640080">
+                <a:tc>
+                  <a:txBody>
+                    <a:bodyPr/>
+                    <a:lstStyle/>
+                    <a:p>
+                      <a:pPr indent="0" marL="0">
+                        <a:buNone/>
+                      </a:pPr>
+                      <a:r>
+                        <a:rPr lang="en-US" sz="1300" dirty="0">
+                          <a:solidFill>
+                            <a:srgbClr val="1C2333"/>
+                          </a:solidFill>
+                          <a:latin typeface="Calibri" pitchFamily="34" charset="0"/>
+                          <a:ea typeface="Calibri" pitchFamily="34" charset="-122"/>
+                          <a:cs typeface="Calibri" pitchFamily="34" charset="-120"/>
+                        </a:rPr>
+                        <a:t>Fixed cutoff of 0.55 (original)</a:t>
+                      </a:r>
+                      <a:endParaRPr lang="en-US" sz="1300" dirty="0">
+                        <a:latin typeface="Calibri" charset="0"/>
+                        <a:ea typeface="Calibri" charset="0"/>
+                        <a:cs typeface="Calibri" charset="0"/>
+                      </a:endParaRPr>
+                    </a:p>
+                  </a:txBody>
+                  <a:tcPr marL="91440" marR="91440" marT="45720" marB="45720" anchor="ctr">
+                    <a:lnL w="6350" cap="flat" cmpd="sng" algn="ctr">
+                      <a:solidFill>
+                        <a:srgbClr val="D6DCEA"/>
+                      </a:solidFill>
+                      <a:prstDash val="solid"/>
+                      <a:round/>
+                      <a:headEnd type="none" w="med" len="med"/>
+                      <a:tailEnd type="none" w="med" len="med"/>
+                    </a:lnL>
+                    <a:lnR w="6350" cap="flat" cmpd="sng" algn="ctr">
+                      <a:solidFill>
+                        <a:srgbClr val="D6DCEA"/>
+                      </a:solidFill>
+                      <a:prstDash val="solid"/>
+                      <a:round/>
+                      <a:headEnd type="none" w="med" len="med"/>
+                      <a:tailEnd type="none" w="med" len="med"/>
+                    </a:lnR>
+                    <a:lnT w="6350" cap="flat" cmpd="sng" algn="ctr">
+                      <a:solidFill>
+                        <a:srgbClr val="D6DCEA"/>
+                      </a:solidFill>
+                      <a:prstDash val="solid"/>
+                      <a:round/>
+                      <a:headEnd type="none" w="med" len="med"/>
+                      <a:tailEnd type="none" w="med" len="med"/>
+                    </a:lnT>
+                    <a:lnB w="6350" cap="flat" cmpd="sng" algn="ctr">
+                      <a:solidFill>
+                        <a:srgbClr val="D6DCEA"/>
+                      </a:solidFill>
+                      <a:prstDash val="solid"/>
+                      <a:round/>
+                      <a:headEnd type="none" w="med" len="med"/>
+                      <a:tailEnd type="none" w="med" len="med"/>
+                    </a:lnB>
+                  </a:tcPr>
+                </a:tc>
+                <a:tc>
+                  <a:txBody>
+                    <a:bodyPr/>
+                    <a:lstStyle/>
+                    <a:p>
+                      <a:pPr indent="0" marL="0">
+                        <a:buNone/>
+                      </a:pPr>
+                      <a:r>
+                        <a:rPr lang="en-US" sz="1300" dirty="0">
+                          <a:solidFill>
+                            <a:srgbClr val="1C2333"/>
+                          </a:solidFill>
+                          <a:latin typeface="Calibri" pitchFamily="34" charset="0"/>
+                          <a:ea typeface="Calibri" pitchFamily="34" charset="-122"/>
+                          <a:cs typeface="Calibri" pitchFamily="34" charset="-120"/>
+                        </a:rPr>
+                        <a:t>Correct file found for 20 of 27 queries; precision 0.63 ("meeting" returned nothing)</a:t>
+                      </a:r>
+                      <a:endParaRPr lang="en-US" sz="1300" dirty="0">
+                        <a:latin typeface="Calibri" charset="0"/>
+                        <a:ea typeface="Calibri" charset="0"/>
+                        <a:cs typeface="Calibri" charset="0"/>
+                      </a:endParaRPr>
+                    </a:p>
+                  </a:txBody>
+                  <a:tcPr marL="91440" marR="91440" marT="45720" marB="45720" anchor="ctr">
+                    <a:lnL w="6350" cap="flat" cmpd="sng" algn="ctr">
+                      <a:solidFill>
+                        <a:srgbClr val="D6DCEA"/>
+                      </a:solidFill>
+                      <a:prstDash val="solid"/>
+                      <a:round/>
+                      <a:headEnd type="none" w="med" len="med"/>
+                      <a:tailEnd type="none" w="med" len="med"/>
+                    </a:lnL>
+                    <a:lnR w="6350" cap="flat" cmpd="sng" algn="ctr">
+                      <a:solidFill>
+                        <a:srgbClr val="D6DCEA"/>
+                      </a:solidFill>
+                      <a:prstDash val="solid"/>
+                      <a:round/>
+                      <a:headEnd type="none" w="med" len="med"/>
+                      <a:tailEnd type="none" w="med" len="med"/>
+                    </a:lnR>
+                    <a:lnT w="6350" cap="flat" cmpd="sng" algn="ctr">
+                      <a:solidFill>
+                        <a:srgbClr val="D6DCEA"/>
+                      </a:solidFill>
+                      <a:prstDash val="solid"/>
+                      <a:round/>
+                      <a:headEnd type="none" w="med" len="med"/>
+                      <a:tailEnd type="none" w="med" len="med"/>
+                    </a:lnT>
+                    <a:lnB w="6350" cap="flat" cmpd="sng" algn="ctr">
+                      <a:solidFill>
+                        <a:srgbClr val="D6DCEA"/>
+                      </a:solidFill>
+                      <a:prstDash val="solid"/>
+                      <a:round/>
+                      <a:headEnd type="none" w="med" len="med"/>
+                      <a:tailEnd type="none" w="med" len="med"/>
+                    </a:lnB>
+                  </a:tcPr>
+                </a:tc>
+                <a:tc>
+                  <a:txBody>
+                    <a:bodyPr/>
+                    <a:lstStyle/>
+                    <a:p>
+                      <a:pPr indent="0" marL="0">
+                        <a:buNone/>
+                      </a:pPr>
+                      <a:r>
+                        <a:rPr lang="en-US" sz="1300" dirty="0">
+                          <a:solidFill>
+                            <a:srgbClr val="1C2333"/>
+                          </a:solidFill>
+                          <a:latin typeface="Calibri" pitchFamily="34" charset="0"/>
+                          <a:ea typeface="Calibri" pitchFamily="34" charset="-122"/>
+                          <a:cs typeface="Calibri" pitchFamily="34" charset="-120"/>
+                        </a:rPr>
+                        <a:t>Replaced</a:t>
+                      </a:r>
+                      <a:endParaRPr lang="en-US" sz="1300" dirty="0">
+                        <a:latin typeface="Calibri" charset="0"/>
+                        <a:ea typeface="Calibri" charset="0"/>
+                        <a:cs typeface="Calibri" charset="0"/>
+                      </a:endParaRPr>
+                    </a:p>
+                  </a:txBody>
+                  <a:tcPr marL="91440" marR="91440" marT="45720" marB="45720" anchor="ctr">
+                    <a:lnL w="6350" cap="flat" cmpd="sng" algn="ctr">
+                      <a:solidFill>
+                        <a:srgbClr val="D6DCEA"/>
+                      </a:solidFill>
+                      <a:prstDash val="solid"/>
+                      <a:round/>
+                      <a:headEnd type="none" w="med" len="med"/>
+                      <a:tailEnd type="none" w="med" len="med"/>
+                    </a:lnL>
+                    <a:lnR w="6350" cap="flat" cmpd="sng" algn="ctr">
+                      <a:solidFill>
+                        <a:srgbClr val="D6DCEA"/>
+                      </a:solidFill>
+                      <a:prstDash val="solid"/>
+                      <a:round/>
+                      <a:headEnd type="none" w="med" len="med"/>
+                      <a:tailEnd type="none" w="med" len="med"/>
+                    </a:lnR>
+                    <a:lnT w="6350" cap="flat" cmpd="sng" algn="ctr">
+                      <a:solidFill>
+                        <a:srgbClr val="D6DCEA"/>
+                      </a:solidFill>
+                      <a:prstDash val="solid"/>
+                      <a:round/>
+                      <a:headEnd type="none" w="med" len="med"/>
+                      <a:tailEnd type="none" w="med" len="med"/>
+                    </a:lnT>
+                    <a:lnB w="6350" cap="flat" cmpd="sng" algn="ctr">
+                      <a:solidFill>
+                        <a:srgbClr val="D6DCEA"/>
+                      </a:solidFill>
+                      <a:prstDash val="solid"/>
+                      <a:round/>
+                      <a:headEnd type="none" w="med" len="med"/>
+                      <a:tailEnd type="none" w="med" len="med"/>
+                    </a:lnB>
+                  </a:tcPr>
+                </a:tc>
+              </a:tr>
+              <a:tr h="640080">
+                <a:tc>
+                  <a:txBody>
+                    <a:bodyPr/>
+                    <a:lstStyle/>
+                    <a:p>
+                      <a:pPr indent="0" marL="0">
+                        <a:buNone/>
+                      </a:pPr>
+                      <a:r>
+                        <a:rPr lang="en-US" sz="1300" dirty="0">
+                          <a:solidFill>
+                            <a:srgbClr val="1C2333"/>
+                          </a:solidFill>
+                          <a:latin typeface="Calibri" pitchFamily="34" charset="0"/>
+                          <a:ea typeface="Calibri" pitchFamily="34" charset="-122"/>
+                          <a:cs typeface="Calibri" pitchFamily="34" charset="-120"/>
+                        </a:rPr>
+                        <a:t>nomic task prefixes</a:t>
+                      </a:r>
+                      <a:endParaRPr lang="en-US" sz="1300" dirty="0">
+                        <a:latin typeface="Calibri" charset="0"/>
+                        <a:ea typeface="Calibri" charset="0"/>
+                        <a:cs typeface="Calibri" charset="0"/>
+                      </a:endParaRPr>
+                    </a:p>
+                  </a:txBody>
+                  <a:tcPr marL="91440" marR="91440" marT="45720" marB="45720" anchor="ctr">
+                    <a:lnL w="6350" cap="flat" cmpd="sng" algn="ctr">
+                      <a:solidFill>
+                        <a:srgbClr val="D6DCEA"/>
+                      </a:solidFill>
+                      <a:prstDash val="solid"/>
+                      <a:round/>
+                      <a:headEnd type="none" w="med" len="med"/>
+                      <a:tailEnd type="none" w="med" len="med"/>
+                    </a:lnL>
+                    <a:lnR w="6350" cap="flat" cmpd="sng" algn="ctr">
+                      <a:solidFill>
+                        <a:srgbClr val="D6DCEA"/>
+                      </a:solidFill>
+                      <a:prstDash val="solid"/>
+                      <a:round/>
+                      <a:headEnd type="none" w="med" len="med"/>
+                      <a:tailEnd type="none" w="med" len="med"/>
+                    </a:lnR>
+                    <a:lnT w="6350" cap="flat" cmpd="sng" algn="ctr">
+                      <a:solidFill>
+                        <a:srgbClr val="D6DCEA"/>
+                      </a:solidFill>
+                      <a:prstDash val="solid"/>
+                      <a:round/>
+                      <a:headEnd type="none" w="med" len="med"/>
+                      <a:tailEnd type="none" w="med" len="med"/>
+                    </a:lnT>
+                    <a:lnB w="6350" cap="flat" cmpd="sng" algn="ctr">
+                      <a:solidFill>
+                        <a:srgbClr val="D6DCEA"/>
+                      </a:solidFill>
+                      <a:prstDash val="solid"/>
+                      <a:round/>
+                      <a:headEnd type="none" w="med" len="med"/>
+                      <a:tailEnd type="none" w="med" len="med"/>
+                    </a:lnB>
+                  </a:tcPr>
+                </a:tc>
+                <a:tc>
+                  <a:txBody>
+                    <a:bodyPr/>
+                    <a:lstStyle/>
+                    <a:p>
+                      <a:pPr indent="0" marL="0">
+                        <a:buNone/>
+                      </a:pPr>
+                      <a:r>
+                        <a:rPr lang="en-US" sz="1300" dirty="0">
+                          <a:solidFill>
+                            <a:srgbClr val="1C2333"/>
+                          </a:solidFill>
+                          <a:latin typeface="Calibri" pitchFamily="34" charset="0"/>
+                          <a:ea typeface="Calibri" pitchFamily="34" charset="-122"/>
+                          <a:cs typeface="Calibri" pitchFamily="34" charset="-120"/>
+                        </a:rPr>
+                        <a:t>Top-1 21 to 24 of 27, but no cutoff separates a weak right answer (0.56) from junk (0.57); needs re-embedding</a:t>
+                      </a:r>
+                      <a:endParaRPr lang="en-US" sz="1300" dirty="0">
+                        <a:latin typeface="Calibri" charset="0"/>
+                        <a:ea typeface="Calibri" charset="0"/>
+                        <a:cs typeface="Calibri" charset="0"/>
+                      </a:endParaRPr>
+                    </a:p>
+                  </a:txBody>
+                  <a:tcPr marL="91440" marR="91440" marT="45720" marB="45720" anchor="ctr">
+                    <a:lnL w="6350" cap="flat" cmpd="sng" algn="ctr">
+                      <a:solidFill>
+                        <a:srgbClr val="D6DCEA"/>
+                      </a:solidFill>
+                      <a:prstDash val="solid"/>
+                      <a:round/>
+                      <a:headEnd type="none" w="med" len="med"/>
+                      <a:tailEnd type="none" w="med" len="med"/>
+                    </a:lnL>
+                    <a:lnR w="6350" cap="flat" cmpd="sng" algn="ctr">
+                      <a:solidFill>
+                        <a:srgbClr val="D6DCEA"/>
+                      </a:solidFill>
+                      <a:prstDash val="solid"/>
+                      <a:round/>
+                      <a:headEnd type="none" w="med" len="med"/>
+                      <a:tailEnd type="none" w="med" len="med"/>
+                    </a:lnR>
+                    <a:lnT w="6350" cap="flat" cmpd="sng" algn="ctr">
+                      <a:solidFill>
+                        <a:srgbClr val="D6DCEA"/>
+                      </a:solidFill>
+                      <a:prstDash val="solid"/>
+                      <a:round/>
+                      <a:headEnd type="none" w="med" len="med"/>
+                      <a:tailEnd type="none" w="med" len="med"/>
+                    </a:lnT>
+                    <a:lnB w="6350" cap="flat" cmpd="sng" algn="ctr">
+                      <a:solidFill>
+                        <a:srgbClr val="D6DCEA"/>
+                      </a:solidFill>
+                      <a:prstDash val="solid"/>
+                      <a:round/>
+                      <a:headEnd type="none" w="med" len="med"/>
+                      <a:tailEnd type="none" w="med" len="med"/>
+                    </a:lnB>
+                  </a:tcPr>
+                </a:tc>
+                <a:tc>
+                  <a:txBody>
+                    <a:bodyPr/>
+                    <a:lstStyle/>
+                    <a:p>
+                      <a:pPr indent="0" marL="0">
+                        <a:buNone/>
+                      </a:pPr>
+                      <a:r>
+                        <a:rPr lang="en-US" sz="1300" dirty="0">
+                          <a:solidFill>
+                            <a:srgbClr val="1C2333"/>
+                          </a:solidFill>
+                          <a:latin typeface="Calibri" pitchFamily="34" charset="0"/>
+                          <a:ea typeface="Calibri" pitchFamily="34" charset="-122"/>
+                          <a:cs typeface="Calibri" pitchFamily="34" charset="-120"/>
+                        </a:rPr>
+                        <a:t>Not adopted</a:t>
+                      </a:r>
+                      <a:endParaRPr lang="en-US" sz="1300" dirty="0">
+                        <a:latin typeface="Calibri" charset="0"/>
+                        <a:ea typeface="Calibri" charset="0"/>
+                        <a:cs typeface="Calibri" charset="0"/>
+                      </a:endParaRPr>
+                    </a:p>
+                  </a:txBody>
+                  <a:tcPr marL="91440" marR="91440" marT="45720" marB="45720" anchor="ctr">
+                    <a:lnL w="6350" cap="flat" cmpd="sng" algn="ctr">
+                      <a:solidFill>
+                        <a:srgbClr val="D6DCEA"/>
+                      </a:solidFill>
+                      <a:prstDash val="solid"/>
+                      <a:round/>
+                      <a:headEnd type="none" w="med" len="med"/>
+                      <a:tailEnd type="none" w="med" len="med"/>
+                    </a:lnL>
+                    <a:lnR w="6350" cap="flat" cmpd="sng" algn="ctr">
+                      <a:solidFill>
+                        <a:srgbClr val="D6DCEA"/>
+                      </a:solidFill>
+                      <a:prstDash val="solid"/>
+                      <a:round/>
+                      <a:headEnd type="none" w="med" len="med"/>
+                      <a:tailEnd type="none" w="med" len="med"/>
+                    </a:lnR>
+                    <a:lnT w="6350" cap="flat" cmpd="sng" algn="ctr">
+                      <a:solidFill>
+                        <a:srgbClr val="D6DCEA"/>
+                      </a:solidFill>
+                      <a:prstDash val="solid"/>
+                      <a:round/>
+                      <a:headEnd type="none" w="med" len="med"/>
+                      <a:tailEnd type="none" w="med" len="med"/>
+                    </a:lnT>
+                    <a:lnB w="6350" cap="flat" cmpd="sng" algn="ctr">
+                      <a:solidFill>
+                        <a:srgbClr val="D6DCEA"/>
+                      </a:solidFill>
+                      <a:prstDash val="solid"/>
+                      <a:round/>
+                      <a:headEnd type="none" w="med" len="med"/>
+                      <a:tailEnd type="none" w="med" len="med"/>
+                    </a:lnB>
+                  </a:tcPr>
+                </a:tc>
+              </a:tr>
+              <a:tr h="640080">
+                <a:tc>
+                  <a:txBody>
+                    <a:bodyPr/>
+                    <a:lstStyle/>
+                    <a:p>
+                      <a:pPr indent="0" marL="0">
+                        <a:buNone/>
+                      </a:pPr>
+                      <a:r>
+                        <a:rPr lang="en-US" sz="1300" dirty="0">
+                          <a:solidFill>
+                            <a:srgbClr val="1C2333"/>
+                          </a:solidFill>
+                          <a:latin typeface="Calibri" pitchFamily="34" charset="0"/>
+                          <a:ea typeface="Calibri" pitchFamily="34" charset="-122"/>
+                          <a:cs typeface="Calibri" pitchFamily="34" charset="-120"/>
+                        </a:rPr>
+                        <a:t>LLM query expansion</a:t>
+                      </a:r>
+                      <a:endParaRPr lang="en-US" sz="1300" dirty="0">
+                        <a:latin typeface="Calibri" charset="0"/>
+                        <a:ea typeface="Calibri" charset="0"/>
+                        <a:cs typeface="Calibri" charset="0"/>
+                      </a:endParaRPr>
+                    </a:p>
+                  </a:txBody>
+                  <a:tcPr marL="91440" marR="91440" marT="45720" marB="45720" anchor="ctr">
+                    <a:lnL w="6350" cap="flat" cmpd="sng" algn="ctr">
+                      <a:solidFill>
+                        <a:srgbClr val="D6DCEA"/>
+                      </a:solidFill>
+                      <a:prstDash val="solid"/>
+                      <a:round/>
+                      <a:headEnd type="none" w="med" len="med"/>
+                      <a:tailEnd type="none" w="med" len="med"/>
+                    </a:lnL>
+                    <a:lnR w="6350" cap="flat" cmpd="sng" algn="ctr">
+                      <a:solidFill>
+                        <a:srgbClr val="D6DCEA"/>
+                      </a:solidFill>
+                      <a:prstDash val="solid"/>
+                      <a:round/>
+                      <a:headEnd type="none" w="med" len="med"/>
+                      <a:tailEnd type="none" w="med" len="med"/>
+                    </a:lnR>
+                    <a:lnT w="6350" cap="flat" cmpd="sng" algn="ctr">
+                      <a:solidFill>
+                        <a:srgbClr val="D6DCEA"/>
+                      </a:solidFill>
+                      <a:prstDash val="solid"/>
+                      <a:round/>
+                      <a:headEnd type="none" w="med" len="med"/>
+                      <a:tailEnd type="none" w="med" len="med"/>
+                    </a:lnT>
+                    <a:lnB w="6350" cap="flat" cmpd="sng" algn="ctr">
+                      <a:solidFill>
+                        <a:srgbClr val="D6DCEA"/>
+                      </a:solidFill>
+                      <a:prstDash val="solid"/>
+                      <a:round/>
+                      <a:headEnd type="none" w="med" len="med"/>
+                      <a:tailEnd type="none" w="med" len="med"/>
+                    </a:lnB>
+                  </a:tcPr>
+                </a:tc>
+                <a:tc>
+                  <a:txBody>
+                    <a:bodyPr/>
+                    <a:lstStyle/>
+                    <a:p>
+                      <a:pPr indent="0" marL="0">
+                        <a:buNone/>
+                      </a:pPr>
+                      <a:r>
+                        <a:rPr lang="en-US" sz="1300" dirty="0">
+                          <a:solidFill>
+                            <a:srgbClr val="1C2333"/>
+                          </a:solidFill>
+                          <a:latin typeface="Calibri" pitchFamily="34" charset="0"/>
+                          <a:ea typeface="Calibri" pitchFamily="34" charset="-122"/>
+                          <a:cs typeface="Calibri" pitchFamily="34" charset="-120"/>
+                        </a:rPr>
+                        <a:t>Top-1 fell to 13 of 27: the 3B model's descriptions drift</a:t>
+                      </a:r>
+                      <a:endParaRPr lang="en-US" sz="1300" dirty="0">
+                        <a:latin typeface="Calibri" charset="0"/>
+                        <a:ea typeface="Calibri" charset="0"/>
+                        <a:cs typeface="Calibri" charset="0"/>
+                      </a:endParaRPr>
+                    </a:p>
+                  </a:txBody>
+                  <a:tcPr marL="91440" marR="91440" marT="45720" marB="45720" anchor="ctr">
+                    <a:lnL w="6350" cap="flat" cmpd="sng" algn="ctr">
+                      <a:solidFill>
+                        <a:srgbClr val="D6DCEA"/>
+                      </a:solidFill>
+                      <a:prstDash val="solid"/>
+                      <a:round/>
+                      <a:headEnd type="none" w="med" len="med"/>
+                      <a:tailEnd type="none" w="med" len="med"/>
+                    </a:lnL>
+                    <a:lnR w="6350" cap="flat" cmpd="sng" algn="ctr">
+                      <a:solidFill>
+                        <a:srgbClr val="D6DCEA"/>
+                      </a:solidFill>
+                      <a:prstDash val="solid"/>
+                      <a:round/>
+                      <a:headEnd type="none" w="med" len="med"/>
+                      <a:tailEnd type="none" w="med" len="med"/>
+                    </a:lnR>
+                    <a:lnT w="6350" cap="flat" cmpd="sng" algn="ctr">
+                      <a:solidFill>
+                        <a:srgbClr val="D6DCEA"/>
+                      </a:solidFill>
+                      <a:prstDash val="solid"/>
+                      <a:round/>
+                      <a:headEnd type="none" w="med" len="med"/>
+                      <a:tailEnd type="none" w="med" len="med"/>
+                    </a:lnT>
+                    <a:lnB w="6350" cap="flat" cmpd="sng" algn="ctr">
+                      <a:solidFill>
+                        <a:srgbClr val="D6DCEA"/>
+                      </a:solidFill>
+                      <a:prstDash val="solid"/>
+                      <a:round/>
+                      <a:headEnd type="none" w="med" len="med"/>
+                      <a:tailEnd type="none" w="med" len="med"/>
+                    </a:lnB>
+                  </a:tcPr>
+                </a:tc>
+                <a:tc>
+                  <a:txBody>
+                    <a:bodyPr/>
+                    <a:lstStyle/>
+                    <a:p>
+                      <a:pPr indent="0" marL="0">
+                        <a:buNone/>
+                      </a:pPr>
+                      <a:r>
+                        <a:rPr lang="en-US" sz="1300" dirty="0">
+                          <a:solidFill>
+                            <a:srgbClr val="1C2333"/>
+                          </a:solidFill>
+                          <a:latin typeface="Calibri" pitchFamily="34" charset="0"/>
+                          <a:ea typeface="Calibri" pitchFamily="34" charset="-122"/>
+                          <a:cs typeface="Calibri" pitchFamily="34" charset="-120"/>
+                        </a:rPr>
+                        <a:t>Rejected</a:t>
+                      </a:r>
+                      <a:endParaRPr lang="en-US" sz="1300" dirty="0">
+                        <a:latin typeface="Calibri" charset="0"/>
+                        <a:ea typeface="Calibri" charset="0"/>
+                        <a:cs typeface="Calibri" charset="0"/>
+                      </a:endParaRPr>
+                    </a:p>
+                  </a:txBody>
+                  <a:tcPr marL="91440" marR="91440" marT="45720" marB="45720" anchor="ctr">
+                    <a:lnL w="6350" cap="flat" cmpd="sng" algn="ctr">
+                      <a:solidFill>
+                        <a:srgbClr val="D6DCEA"/>
+                      </a:solidFill>
+                      <a:prstDash val="solid"/>
+                      <a:round/>
+                      <a:headEnd type="none" w="med" len="med"/>
+                      <a:tailEnd type="none" w="med" len="med"/>
+                    </a:lnL>
+                    <a:lnR w="6350" cap="flat" cmpd="sng" algn="ctr">
+                      <a:solidFill>
+                        <a:srgbClr val="D6DCEA"/>
+                      </a:solidFill>
+                      <a:prstDash val="solid"/>
+                      <a:round/>
+                      <a:headEnd type="none" w="med" len="med"/>
+                      <a:tailEnd type="none" w="med" len="med"/>
+                    </a:lnR>
+                    <a:lnT w="6350" cap="flat" cmpd="sng" algn="ctr">
+                      <a:solidFill>
+                        <a:srgbClr val="D6DCEA"/>
+                      </a:solidFill>
+                      <a:prstDash val="solid"/>
+                      <a:round/>
+                      <a:headEnd type="none" w="med" len="med"/>
+                      <a:tailEnd type="none" w="med" len="med"/>
+                    </a:lnT>
+                    <a:lnB w="6350" cap="flat" cmpd="sng" algn="ctr">
+                      <a:solidFill>
+                        <a:srgbClr val="D6DCEA"/>
+                      </a:solidFill>
+                      <a:prstDash val="solid"/>
+                      <a:round/>
+                      <a:headEnd type="none" w="med" len="med"/>
+                      <a:tailEnd type="none" w="med" len="med"/>
+                    </a:lnB>
+                  </a:tcPr>
+                </a:tc>
+              </a:tr>
+              <a:tr h="640080">
+                <a:tc>
+                  <a:txBody>
+                    <a:bodyPr/>
+                    <a:lstStyle/>
+                    <a:p>
+                      <a:pPr indent="0" marL="0">
+                        <a:buNone/>
+                      </a:pPr>
+                      <a:r>
+                        <a:rPr lang="en-US" sz="1300" dirty="0">
+                          <a:solidFill>
+                            <a:srgbClr val="1C2333"/>
+                          </a:solidFill>
+                          <a:latin typeface="Calibri" pitchFamily="34" charset="0"/>
+                          <a:ea typeface="Calibri" pitchFamily="34" charset="-122"/>
+                          <a:cs typeface="Calibri" pitchFamily="34" charset="-120"/>
+                        </a:rPr>
+                        <a:t>Near-best cutoff + keyword boost</a:t>
+                      </a:r>
+                      <a:endParaRPr lang="en-US" sz="1300" dirty="0">
+                        <a:latin typeface="Calibri" charset="0"/>
+                        <a:ea typeface="Calibri" charset="0"/>
+                        <a:cs typeface="Calibri" charset="0"/>
+                      </a:endParaRPr>
+                    </a:p>
+                  </a:txBody>
+                  <a:tcPr marL="91440" marR="91440" marT="45720" marB="45720" anchor="ctr">
+                    <a:lnL w="6350" cap="flat" cmpd="sng" algn="ctr">
+                      <a:solidFill>
+                        <a:srgbClr val="D6DCEA"/>
+                      </a:solidFill>
+                      <a:prstDash val="solid"/>
+                      <a:round/>
+                      <a:headEnd type="none" w="med" len="med"/>
+                      <a:tailEnd type="none" w="med" len="med"/>
+                    </a:lnL>
+                    <a:lnR w="6350" cap="flat" cmpd="sng" algn="ctr">
+                      <a:solidFill>
+                        <a:srgbClr val="D6DCEA"/>
+                      </a:solidFill>
+                      <a:prstDash val="solid"/>
+                      <a:round/>
+                      <a:headEnd type="none" w="med" len="med"/>
+                      <a:tailEnd type="none" w="med" len="med"/>
+                    </a:lnR>
+                    <a:lnT w="6350" cap="flat" cmpd="sng" algn="ctr">
+                      <a:solidFill>
+                        <a:srgbClr val="D6DCEA"/>
+                      </a:solidFill>
+                      <a:prstDash val="solid"/>
+                      <a:round/>
+                      <a:headEnd type="none" w="med" len="med"/>
+                      <a:tailEnd type="none" w="med" len="med"/>
+                    </a:lnT>
+                    <a:lnB w="6350" cap="flat" cmpd="sng" algn="ctr">
+                      <a:solidFill>
+                        <a:srgbClr val="D6DCEA"/>
+                      </a:solidFill>
+                      <a:prstDash val="solid"/>
+                      <a:round/>
+                      <a:headEnd type="none" w="med" len="med"/>
+                      <a:tailEnd type="none" w="med" len="med"/>
+                    </a:lnB>
+                  </a:tcPr>
+                </a:tc>
+                <a:tc>
+                  <a:txBody>
+                    <a:bodyPr/>
+                    <a:lstStyle/>
+                    <a:p>
+                      <a:pPr indent="0" marL="0">
+                        <a:buNone/>
+                      </a:pPr>
+                      <a:r>
+                        <a:rPr lang="en-US" sz="1300" dirty="0">
+                          <a:solidFill>
+                            <a:srgbClr val="1C2333"/>
+                          </a:solidFill>
+                          <a:latin typeface="Calibri" pitchFamily="34" charset="0"/>
+                          <a:ea typeface="Calibri" pitchFamily="34" charset="-122"/>
+                          <a:cs typeface="Calibri" pitchFamily="34" charset="-120"/>
+                        </a:rPr>
+                        <a:t>27 of 27 found (14 of 14 held-out); top-1 24 of 27 (13 of 14 held-out); precision 0.82; no re-embedding</a:t>
+                      </a:r>
+                      <a:endParaRPr lang="en-US" sz="1300" dirty="0">
+                        <a:latin typeface="Calibri" charset="0"/>
+                        <a:ea typeface="Calibri" charset="0"/>
+                        <a:cs typeface="Calibri" charset="0"/>
+                      </a:endParaRPr>
+                    </a:p>
+                  </a:txBody>
+                  <a:tcPr marL="91440" marR="91440" marT="45720" marB="45720" anchor="ctr">
+                    <a:lnL w="6350" cap="flat" cmpd="sng" algn="ctr">
+                      <a:solidFill>
+                        <a:srgbClr val="D6DCEA"/>
+                      </a:solidFill>
+                      <a:prstDash val="solid"/>
+                      <a:round/>
+                      <a:headEnd type="none" w="med" len="med"/>
+                      <a:tailEnd type="none" w="med" len="med"/>
+                    </a:lnL>
+                    <a:lnR w="6350" cap="flat" cmpd="sng" algn="ctr">
+                      <a:solidFill>
+                        <a:srgbClr val="D6DCEA"/>
+                      </a:solidFill>
+                      <a:prstDash val="solid"/>
+                      <a:round/>
+                      <a:headEnd type="none" w="med" len="med"/>
+                      <a:tailEnd type="none" w="med" len="med"/>
+                    </a:lnR>
+                    <a:lnT w="6350" cap="flat" cmpd="sng" algn="ctr">
+                      <a:solidFill>
+                        <a:srgbClr val="D6DCEA"/>
+                      </a:solidFill>
+                      <a:prstDash val="solid"/>
+                      <a:round/>
+                      <a:headEnd type="none" w="med" len="med"/>
+                      <a:tailEnd type="none" w="med" len="med"/>
+                    </a:lnT>
+                    <a:lnB w="6350" cap="flat" cmpd="sng" algn="ctr">
+                      <a:solidFill>
+                        <a:srgbClr val="D6DCEA"/>
+                      </a:solidFill>
+                      <a:prstDash val="solid"/>
+                      <a:round/>
+                      <a:headEnd type="none" w="med" len="med"/>
+                      <a:tailEnd type="none" w="med" len="med"/>
+                    </a:lnB>
+                  </a:tcPr>
+                </a:tc>
+                <a:tc>
+                  <a:txBody>
+                    <a:bodyPr/>
+                    <a:lstStyle/>
+                    <a:p>
+                      <a:pPr indent="0" marL="0">
+                        <a:buNone/>
+                      </a:pPr>
+                      <a:r>
+                        <a:rPr lang="en-US" sz="1300" dirty="0">
+                          <a:solidFill>
+                            <a:srgbClr val="1C2333"/>
+                          </a:solidFill>
+                          <a:latin typeface="Calibri" pitchFamily="34" charset="0"/>
+                          <a:ea typeface="Calibri" pitchFamily="34" charset="-122"/>
+                          <a:cs typeface="Calibri" pitchFamily="34" charset="-120"/>
+                        </a:rPr>
+                        <a:t>Adopted</a:t>
+                      </a:r>
+                      <a:endParaRPr lang="en-US" sz="1300" dirty="0">
+                        <a:latin typeface="Calibri" charset="0"/>
+                        <a:ea typeface="Calibri" charset="0"/>
+                        <a:cs typeface="Calibri" charset="0"/>
+                      </a:endParaRPr>
+                    </a:p>
+                  </a:txBody>
+                  <a:tcPr marL="91440" marR="91440" marT="45720" marB="45720" anchor="ctr">
+                    <a:lnL w="6350" cap="flat" cmpd="sng" algn="ctr">
+                      <a:solidFill>
+                        <a:srgbClr val="D6DCEA"/>
+                      </a:solidFill>
+                      <a:prstDash val="solid"/>
+                      <a:round/>
+                      <a:headEnd type="none" w="med" len="med"/>
+                      <a:tailEnd type="none" w="med" len="med"/>
+                    </a:lnL>
+                    <a:lnR w="6350" cap="flat" cmpd="sng" algn="ctr">
+                      <a:solidFill>
+                        <a:srgbClr val="D6DCEA"/>
+                      </a:solidFill>
+                      <a:prstDash val="solid"/>
+                      <a:round/>
+                      <a:headEnd type="none" w="med" len="med"/>
+                      <a:tailEnd type="none" w="med" len="med"/>
+                    </a:lnR>
+                    <a:lnT w="6350" cap="flat" cmpd="sng" algn="ctr">
+                      <a:solidFill>
+                        <a:srgbClr val="D6DCEA"/>
+                      </a:solidFill>
+                      <a:prstDash val="solid"/>
+                      <a:round/>
+                      <a:headEnd type="none" w="med" len="med"/>
+                      <a:tailEnd type="none" w="med" len="med"/>
+                    </a:lnT>
+                    <a:lnB w="6350" cap="flat" cmpd="sng" algn="ctr">
+                      <a:solidFill>
+                        <a:srgbClr val="D6DCEA"/>
+                      </a:solidFill>
+                      <a:prstDash val="solid"/>
+                      <a:round/>
+                      <a:headEnd type="none" w="med" len="med"/>
+                      <a:tailEnd type="none" w="med" len="med"/>
+                    </a:lnB>
+                  </a:tcPr>
+                </a:tc>
+              </a:tr>
+            </a:tbl>
+          </a:graphicData>
+        </a:graphic>
+      </p:graphicFrame>
+      <p:sp>
+        <p:nvSpPr>
+          <p:cNvPr id="7" name="Shape 4"/>
+          <p:cNvSpPr/>
+          <p:nvPr/>
+        </p:nvSpPr>
+        <p:spPr>
+          <a:xfrm>
+            <a:off x="548640" y="4846320"/>
+            <a:ext cx="11109960" cy="1371600"/>
+          </a:xfrm>
+          <a:prstGeom prst="rect">
+            <a:avLst/>
+          </a:prstGeom>
+          <a:solidFill>
+            <a:srgbClr val="FFFFFF"/>
+          </a:solidFill>
+          <a:ln/>
+          <a:effectLst>
+            <a:outerShdw sx="100000" sy="100000" kx="0" ky="0" algn="bl" rotWithShape="0" blurRad="76200" dist="25400" dir="8100000">
+              <a:srgbClr val="000000">
+                <a:alpha val="10000"/>
+              </a:srgbClr>
+            </a:outerShdw>
+          </a:effectLst>
+        </p:spPr>
+      </p:sp>
+      <p:sp>
+        <p:nvSpPr>
+          <p:cNvPr id="8" name="Shape 5"/>
+          <p:cNvSpPr/>
+          <p:nvPr/>
+        </p:nvSpPr>
+        <p:spPr>
+          <a:xfrm>
+            <a:off x="548640" y="4846320"/>
+            <a:ext cx="64008" cy="1371600"/>
+          </a:xfrm>
+          <a:prstGeom prst="rect">
+            <a:avLst/>
+          </a:prstGeom>
+          <a:solidFill>
+            <a:srgbClr val="00C2A8"/>
+          </a:solidFill>
+          <a:ln/>
+        </p:spPr>
+      </p:sp>
+      <p:sp>
+        <p:nvSpPr>
+          <p:cNvPr id="9" name="Text 6"/>
+          <p:cNvSpPr/>
+          <p:nvPr/>
+        </p:nvSpPr>
+        <p:spPr>
+          <a:xfrm>
+            <a:off x="868680" y="4937760"/>
+            <a:ext cx="10561320" cy="1188720"/>
+          </a:xfrm>
+          <a:prstGeom prst="rect">
+            <a:avLst/>
+          </a:prstGeom>
+          <a:noFill/>
+          <a:ln/>
+        </p:spPr>
+        <p:txBody>
+          <a:bodyPr wrap="square" lIns="0" tIns="0" rIns="0" bIns="0" rtlCol="0" anchor="ctr"/>
+          <a:lstStyle/>
+          <a:p>
+            <a:pPr indent="0" marL="0">
+              <a:buNone/>
+            </a:pPr>
+            <a:r>
+              <a:rPr lang="en-US" sz="1350" dirty="0">
+                <a:solidFill>
+                  <a:srgbClr val="1C2333"/>
+                </a:solidFill>
+                <a:latin typeface="Calibri" pitchFamily="34" charset="0"/>
+                <a:ea typeface="Calibri" pitchFamily="34" charset="-122"/>
+                <a:cs typeface="Calibri" pitchFamily="34" charset="-120"/>
+              </a:rPr>
+              <a:t>Re-measured through the production endpoint: identical numbers. Weak matches are labelled low confidence and open never launches below 0.55. Residual: "meeting notes" still ranks workout_log first (it mentions "the project meeting"), and 3 of 4 off-topic file-shaped queries return labelled guesses.</a:t>
+            </a:r>
+            <a:endParaRPr lang="en-US" sz="1350" dirty="0"/>
+          </a:p>
+        </p:txBody>
+      </p:sp>
+    </p:spTree>
+  </p:cSld>
+  <p:clrMapOvr>
+    <a:masterClrMapping/>
+  </p:clrMapOvr>
+</p:sld>
+</file>
+
+<file path=ppt/slides/slide2.xml><?xml version="1.0" encoding="utf-8"?>
+<p:sld xmlns:a="http://schemas.openxmlformats.org/drawingml/2006/main" xmlns:r="http://schemas.openxmlformats.org/officeDocument/2006/relationships" xmlns:p="http://schemas.openxmlformats.org/presentationml/2006/main">
+  <p:cSld name="Slide 2">
+    <p:bg>
+      <p:bgPr>
+        <a:solidFill>
+          <a:srgbClr val="F4F6FB"/>
+        </a:solidFill>
+      </p:bgPr>
+    </p:bg>
+    <p:spTree>
+      <p:nvGrpSpPr>
+        <p:cNvPr id="1" name=""/>
+        <p:cNvGrpSpPr/>
+        <p:nvPr/>
+      </p:nvGrpSpPr>
+      <p:grpSpPr>
+        <a:xfrm>
+          <a:off x="0" y="0"/>
+          <a:ext cx="0" cy="0"/>
+          <a:chOff x="0" y="0"/>
+          <a:chExt cx="0" cy="0"/>
+        </a:xfrm>
+      </p:grpSpPr>
+      <p:sp>
+        <p:nvSpPr>
+          <p:cNvPr id="2" name="Text 0"/>
+          <p:cNvSpPr/>
+          <p:nvPr/>
+        </p:nvSpPr>
+        <p:spPr>
+          <a:xfrm>
+            <a:off x="548640" y="320040"/>
+            <a:ext cx="11064240" cy="640080"/>
+          </a:xfrm>
+          <a:prstGeom prst="rect">
+            <a:avLst/>
+          </a:prstGeom>
+          <a:noFill/>
+          <a:ln/>
+        </p:spPr>
+        <p:txBody>
+          <a:bodyPr wrap="square" lIns="0" tIns="0" rIns="0" bIns="0" rtlCol="0" anchor="ctr"/>
+          <a:lstStyle/>
+          <a:p>
+            <a:pPr indent="0" marL="0">
+              <a:buNone/>
+            </a:pPr>
+            <a:r>
+              <a:rPr lang="en-US" sz="2800" b="1" dirty="0">
+                <a:solidFill>
+                  <a:srgbClr val="1C2333"/>
+                </a:solidFill>
+                <a:latin typeface="Trebuchet MS" pitchFamily="34" charset="0"/>
+                <a:ea typeface="Trebuchet MS" pitchFamily="34" charset="-122"/>
+                <a:cs typeface="Trebuchet MS" pitchFamily="34" charset="-120"/>
+              </a:rPr>
+              <a:t>Problem statement and objectives</a:t>
+            </a:r>
+            <a:endParaRPr lang="en-US" sz="2800" dirty="0"/>
+          </a:p>
+        </p:txBody>
+      </p:sp>
+      <p:sp>
+        <p:nvSpPr>
+          <p:cNvPr id="3" name="Text 1"/>
+          <p:cNvSpPr/>
+          <p:nvPr/>
+        </p:nvSpPr>
+        <p:spPr>
+          <a:xfrm>
+            <a:off x="548640" y="6473952"/>
+            <a:ext cx="5486400" cy="274320"/>
+          </a:xfrm>
+          <a:prstGeom prst="rect">
+            <a:avLst/>
+          </a:prstGeom>
+          <a:noFill/>
+          <a:ln/>
+        </p:spPr>
+        <p:txBody>
+          <a:bodyPr wrap="square" lIns="0" tIns="0" rIns="0" bIns="0" rtlCol="0" anchor="ctr"/>
+          <a:lstStyle/>
+          <a:p>
+            <a:pPr indent="0" marL="0">
+              <a:buNone/>
+            </a:pPr>
+            <a:r>
+              <a:rPr lang="en-US" sz="1000" dirty="0">
+                <a:solidFill>
+                  <a:srgbClr val="8A93AA"/>
+                </a:solidFill>
+                <a:latin typeface="Calibri" pitchFamily="34" charset="0"/>
+                <a:ea typeface="Calibri" pitchFamily="34" charset="-122"/>
+                <a:cs typeface="Calibri" pitchFamily="34" charset="-120"/>
+              </a:rPr>
+              <a:t>DreamOS - Project Monitoring II</a:t>
+            </a:r>
+            <a:endParaRPr lang="en-US" sz="1000" dirty="0"/>
+          </a:p>
+        </p:txBody>
+      </p:sp>
+      <p:sp>
+        <p:nvSpPr>
+          <p:cNvPr id="4" name="Text 2"/>
+          <p:cNvSpPr/>
+          <p:nvPr/>
+        </p:nvSpPr>
+        <p:spPr>
+          <a:xfrm>
+            <a:off x="11064240" y="6473952"/>
+            <a:ext cx="594360" cy="274320"/>
+          </a:xfrm>
+          <a:prstGeom prst="rect">
+            <a:avLst/>
+          </a:prstGeom>
+          <a:noFill/>
+          <a:ln/>
+        </p:spPr>
+        <p:txBody>
+          <a:bodyPr wrap="square" lIns="0" tIns="0" rIns="0" bIns="0" rtlCol="0" anchor="ctr"/>
+          <a:lstStyle/>
+          <a:p>
+            <a:pPr algn="r" indent="0" marL="0">
+              <a:buNone/>
+            </a:pPr>
+            <a:r>
+              <a:rPr lang="en-US" sz="1000" dirty="0">
+                <a:solidFill>
+                  <a:srgbClr val="8A93AA"/>
+                </a:solidFill>
+                <a:latin typeface="Calibri" pitchFamily="34" charset="0"/>
+                <a:ea typeface="Calibri" pitchFamily="34" charset="-122"/>
+                <a:cs typeface="Calibri" pitchFamily="34" charset="-120"/>
+              </a:rPr>
+              <a:t>2</a:t>
+            </a:r>
+            <a:endParaRPr lang="en-US" sz="1000" dirty="0"/>
+          </a:p>
+        </p:txBody>
+      </p:sp>
+      <p:sp>
+        <p:nvSpPr>
+          <p:cNvPr id="5" name="Shape 3"/>
+          <p:cNvSpPr/>
+          <p:nvPr/>
+        </p:nvSpPr>
+        <p:spPr>
+          <a:xfrm>
+            <a:off x="548640" y="1280160"/>
+            <a:ext cx="4937760" cy="4892040"/>
+          </a:xfrm>
+          <a:prstGeom prst="rect">
+            <a:avLst/>
+          </a:prstGeom>
+          <a:solidFill>
+            <a:srgbClr val="FFFFFF"/>
+          </a:solidFill>
+          <a:ln/>
+          <a:effectLst>
+            <a:outerShdw sx="100000" sy="100000" kx="0" ky="0" algn="bl" rotWithShape="0" blurRad="76200" dist="25400" dir="8100000">
+              <a:srgbClr val="000000">
+                <a:alpha val="10000"/>
+              </a:srgbClr>
+            </a:outerShdw>
+          </a:effectLst>
+        </p:spPr>
+      </p:sp>
+      <p:sp>
+        <p:nvSpPr>
+          <p:cNvPr id="6" name="Shape 4"/>
+          <p:cNvSpPr/>
+          <p:nvPr/>
+        </p:nvSpPr>
+        <p:spPr>
+          <a:xfrm>
+            <a:off x="548640" y="1280160"/>
+            <a:ext cx="64008" cy="4892040"/>
+          </a:xfrm>
+          <a:prstGeom prst="rect">
+            <a:avLst/>
+          </a:prstGeom>
+          <a:solidFill>
+            <a:srgbClr val="C0475B"/>
+          </a:solidFill>
+          <a:ln/>
+        </p:spPr>
+      </p:sp>
+      <p:sp>
+        <p:nvSpPr>
+          <p:cNvPr id="7" name="Text 5"/>
+          <p:cNvSpPr/>
+          <p:nvPr/>
+        </p:nvSpPr>
+        <p:spPr>
+          <a:xfrm>
+            <a:off x="822960" y="1417320"/>
+            <a:ext cx="4389120" cy="320040"/>
+          </a:xfrm>
+          <a:prstGeom prst="rect">
+            <a:avLst/>
+          </a:prstGeom>
+          <a:noFill/>
+          <a:ln/>
+        </p:spPr>
+        <p:txBody>
+          <a:bodyPr wrap="square" lIns="0" tIns="0" rIns="0" bIns="0" rtlCol="0" anchor="ctr"/>
+          <a:lstStyle/>
+          <a:p>
+            <a:pPr indent="0" marL="0">
+              <a:buNone/>
+            </a:pPr>
+            <a:r>
+              <a:rPr lang="en-US" sz="1250" b="1" dirty="0">
+                <a:solidFill>
+                  <a:srgbClr val="C0475B"/>
+                </a:solidFill>
+                <a:latin typeface="Trebuchet MS" pitchFamily="34" charset="0"/>
+                <a:ea typeface="Trebuchet MS" pitchFamily="34" charset="-122"/>
+                <a:cs typeface="Trebuchet MS" pitchFamily="34" charset="-120"/>
+              </a:rPr>
+              <a:t>THE PROBLEM</a:t>
+            </a:r>
+            <a:endParaRPr lang="en-US" sz="1250" dirty="0"/>
+          </a:p>
+        </p:txBody>
+      </p:sp>
+      <p:sp>
+        <p:nvSpPr>
+          <p:cNvPr id="8" name="Text 6"/>
+          <p:cNvSpPr/>
+          <p:nvPr/>
+        </p:nvSpPr>
+        <p:spPr>
+          <a:xfrm>
+            <a:off x="822960" y="1783080"/>
+            <a:ext cx="4389120" cy="1828800"/>
+          </a:xfrm>
+          <a:prstGeom prst="rect">
+            <a:avLst/>
+          </a:prstGeom>
+          <a:noFill/>
+          <a:ln/>
+        </p:spPr>
+        <p:txBody>
+          <a:bodyPr wrap="square" lIns="0" tIns="0" rIns="0" bIns="0" rtlCol="0" anchor="t"/>
+          <a:lstStyle/>
+          <a:p>
+            <a:pPr indent="0" marL="0">
+              <a:buNone/>
+            </a:pPr>
+            <a:r>
+              <a:rPr lang="en-US" sz="1400" dirty="0">
+                <a:solidFill>
+                  <a:srgbClr val="1C2333"/>
+                </a:solidFill>
+                <a:latin typeface="Calibri" pitchFamily="34" charset="0"/>
+                <a:ea typeface="Calibri" pitchFamily="34" charset="-122"/>
+                <a:cs typeface="Calibri" pitchFamily="34" charset="-120"/>
+              </a:rPr>
+              <a:t>Desktop operating systems organize files around folders and filenames chosen at the moment of saving. As a machine grows to thousands of files, this breaks down: the name chosen months ago rarely matches how the file is described today.</a:t>
+            </a:r>
+            <a:endParaRPr lang="en-US" sz="1400" dirty="0"/>
+          </a:p>
+        </p:txBody>
+      </p:sp>
+      <p:sp>
+        <p:nvSpPr>
+          <p:cNvPr id="9" name="Text 7"/>
+          <p:cNvSpPr/>
+          <p:nvPr/>
+        </p:nvSpPr>
+        <p:spPr>
+          <a:xfrm>
+            <a:off x="822960" y="3703320"/>
+            <a:ext cx="4389120" cy="2286000"/>
+          </a:xfrm>
+          <a:prstGeom prst="rect">
+            <a:avLst/>
+          </a:prstGeom>
+          <a:noFill/>
+          <a:ln/>
+        </p:spPr>
+        <p:txBody>
+          <a:bodyPr wrap="square" lIns="0" tIns="0" rIns="0" bIns="0" rtlCol="0" anchor="t"/>
+          <a:lstStyle/>
+          <a:p>
+            <a:pPr indent="0" marL="0">
+              <a:buNone/>
+            </a:pPr>
+            <a:r>
+              <a:rPr lang="en-US" sz="1350" i="1" dirty="0">
+                <a:solidFill>
+                  <a:srgbClr val="5B6478"/>
+                </a:solidFill>
+                <a:latin typeface="Calibri" pitchFamily="34" charset="0"/>
+                <a:ea typeface="Calibri" pitchFamily="34" charset="-122"/>
+                <a:cs typeface="Calibri" pitchFamily="34" charset="-120"/>
+              </a:rPr>
+              <a:t>Design and implement a locally-run, AI-native file management layer that retrieves, opens and organizes files by describing their meaning in natural language - without exact names, folder locations or a cloud service.</a:t>
+            </a:r>
+            <a:endParaRPr lang="en-US" sz="1350" dirty="0"/>
+          </a:p>
+        </p:txBody>
+      </p:sp>
+      <p:sp>
+        <p:nvSpPr>
+          <p:cNvPr id="10" name="Text 8"/>
+          <p:cNvSpPr/>
+          <p:nvPr/>
+        </p:nvSpPr>
+        <p:spPr>
+          <a:xfrm>
+            <a:off x="5852160" y="1280160"/>
+            <a:ext cx="5486400" cy="320040"/>
+          </a:xfrm>
+          <a:prstGeom prst="rect">
+            <a:avLst/>
+          </a:prstGeom>
+          <a:noFill/>
+          <a:ln/>
+        </p:spPr>
+        <p:txBody>
+          <a:bodyPr wrap="square" lIns="0" tIns="0" rIns="0" bIns="0" rtlCol="0" anchor="ctr"/>
+          <a:lstStyle/>
+          <a:p>
+            <a:pPr indent="0" marL="0">
+              <a:buNone/>
+            </a:pPr>
+            <a:r>
+              <a:rPr lang="en-US" sz="1250" b="1" dirty="0">
+                <a:solidFill>
+                  <a:srgbClr val="2E7D32"/>
+                </a:solidFill>
+                <a:latin typeface="Trebuchet MS" pitchFamily="34" charset="0"/>
+                <a:ea typeface="Trebuchet MS" pitchFamily="34" charset="-122"/>
+                <a:cs typeface="Trebuchet MS" pitchFamily="34" charset="-120"/>
+              </a:rPr>
+              <a:t>OBJECTIVES - ALL DELIVERED</a:t>
+            </a:r>
+            <a:endParaRPr lang="en-US" sz="1250" dirty="0"/>
+          </a:p>
+        </p:txBody>
+      </p:sp>
+      <p:sp>
+        <p:nvSpPr>
+          <p:cNvPr id="11" name="Shape 9"/>
+          <p:cNvSpPr/>
+          <p:nvPr/>
+        </p:nvSpPr>
+        <p:spPr>
+          <a:xfrm>
+            <a:off x="5852160" y="1737360"/>
+            <a:ext cx="5806440" cy="621792"/>
+          </a:xfrm>
+          <a:prstGeom prst="rect">
+            <a:avLst/>
+          </a:prstGeom>
+          <a:solidFill>
+            <a:srgbClr val="FFFFFF"/>
+          </a:solidFill>
+          <a:ln/>
+          <a:effectLst>
+            <a:outerShdw sx="100000" sy="100000" kx="0" ky="0" algn="bl" rotWithShape="0" blurRad="76200" dist="25400" dir="8100000">
+              <a:srgbClr val="000000">
+                <a:alpha val="10000"/>
+              </a:srgbClr>
+            </a:outerShdw>
+          </a:effectLst>
+        </p:spPr>
+      </p:sp>
+      <p:sp>
+        <p:nvSpPr>
+          <p:cNvPr id="12" name="Shape 10"/>
+          <p:cNvSpPr/>
+          <p:nvPr/>
+        </p:nvSpPr>
+        <p:spPr>
+          <a:xfrm>
+            <a:off x="5852160" y="1737360"/>
+            <a:ext cx="64008" cy="621792"/>
+          </a:xfrm>
+          <a:prstGeom prst="rect">
+            <a:avLst/>
+          </a:prstGeom>
+          <a:solidFill>
+            <a:srgbClr val="2E7D32"/>
+          </a:solidFill>
+          <a:ln/>
+        </p:spPr>
+      </p:sp>
+      <p:sp>
+        <p:nvSpPr>
+          <p:cNvPr id="13" name="Text 11"/>
+          <p:cNvSpPr/>
+          <p:nvPr/>
+        </p:nvSpPr>
+        <p:spPr>
+          <a:xfrm>
+            <a:off x="6035040" y="1737360"/>
+            <a:ext cx="365760" cy="621792"/>
+          </a:xfrm>
+          <a:prstGeom prst="rect">
+            <a:avLst/>
+          </a:prstGeom>
+          <a:noFill/>
+          <a:ln/>
+        </p:spPr>
+        <p:txBody>
+          <a:bodyPr wrap="square" lIns="0" tIns="0" rIns="0" bIns="0" rtlCol="0" anchor="ctr"/>
+          <a:lstStyle/>
+          <a:p>
+            <a:pPr indent="0" marL="0">
+              <a:buNone/>
+            </a:pPr>
+            <a:r>
+              <a:rPr lang="en-US" sz="1600" b="1" dirty="0">
+                <a:solidFill>
+                  <a:srgbClr val="2E7D32"/>
+                </a:solidFill>
+                <a:latin typeface="Trebuchet MS" pitchFamily="34" charset="0"/>
+                <a:ea typeface="Trebuchet MS" pitchFamily="34" charset="-122"/>
+                <a:cs typeface="Trebuchet MS" pitchFamily="34" charset="-120"/>
+              </a:rPr>
+              <a:t>1</a:t>
+            </a:r>
+            <a:endParaRPr lang="en-US" sz="1600" dirty="0"/>
+          </a:p>
+        </p:txBody>
+      </p:sp>
+      <p:sp>
+        <p:nvSpPr>
+          <p:cNvPr id="14" name="Text 12"/>
+          <p:cNvSpPr/>
+          <p:nvPr/>
+        </p:nvSpPr>
+        <p:spPr>
+          <a:xfrm>
+            <a:off x="6446520" y="1737360"/>
+            <a:ext cx="4846320" cy="621792"/>
+          </a:xfrm>
+          <a:prstGeom prst="rect">
+            <a:avLst/>
+          </a:prstGeom>
+          <a:noFill/>
+          <a:ln/>
+        </p:spPr>
+        <p:txBody>
+          <a:bodyPr wrap="square" lIns="0" tIns="0" rIns="0" bIns="0" rtlCol="0" anchor="ctr"/>
+          <a:lstStyle/>
+          <a:p>
+            <a:pPr indent="0" marL="0">
+              <a:buNone/>
+            </a:pPr>
+            <a:r>
+              <a:rPr lang="en-US" sz="1250" dirty="0">
+                <a:solidFill>
+                  <a:srgbClr val="1C2333"/>
+                </a:solidFill>
+                <a:latin typeface="Calibri" pitchFamily="34" charset="0"/>
+                <a:ea typeface="Calibri" pitchFamily="34" charset="-122"/>
+                <a:cs typeface="Calibri" pitchFamily="34" charset="-120"/>
+              </a:rPr>
+              <a:t>Semantic index of a file vault using local embedding models</a:t>
+            </a:r>
+            <a:endParaRPr lang="en-US" sz="1250" dirty="0"/>
+          </a:p>
+        </p:txBody>
+      </p:sp>
+      <p:pic>
+        <p:nvPicPr>
+          <p:cNvPr id="15" name="Image 0" descr="preencoded.png">    </p:cNvPr>
+          <p:cNvPicPr>
+            <a:picLocks noChangeAspect="1"/>
+          </p:cNvPicPr>
+          <p:nvPr/>
+        </p:nvPicPr>
+        <p:blipFill>
+          <a:blip r:embed="rId1"/>
+          <a:stretch>
+            <a:fillRect/>
+          </a:stretch>
+        </p:blipFill>
+        <p:spPr>
+          <a:xfrm>
+            <a:off x="11247120" y="1920240"/>
+            <a:ext cx="256032" cy="256032"/>
+          </a:xfrm>
+          <a:prstGeom prst="rect">
+            <a:avLst/>
+          </a:prstGeom>
+        </p:spPr>
+      </p:pic>
+      <p:sp>
+        <p:nvSpPr>
+          <p:cNvPr id="16" name="Shape 13"/>
+          <p:cNvSpPr/>
+          <p:nvPr/>
+        </p:nvSpPr>
+        <p:spPr>
+          <a:xfrm>
+            <a:off x="5852160" y="2468880"/>
+            <a:ext cx="5806440" cy="621792"/>
+          </a:xfrm>
+          <a:prstGeom prst="rect">
+            <a:avLst/>
+          </a:prstGeom>
+          <a:solidFill>
+            <a:srgbClr val="FFFFFF"/>
+          </a:solidFill>
+          <a:ln/>
+          <a:effectLst>
+            <a:outerShdw sx="100000" sy="100000" kx="0" ky="0" algn="bl" rotWithShape="0" blurRad="76200" dist="25400" dir="8100000">
+              <a:srgbClr val="000000">
+                <a:alpha val="10000"/>
+              </a:srgbClr>
+            </a:outerShdw>
+          </a:effectLst>
+        </p:spPr>
+      </p:sp>
+      <p:sp>
+        <p:nvSpPr>
+          <p:cNvPr id="17" name="Shape 14"/>
+          <p:cNvSpPr/>
+          <p:nvPr/>
+        </p:nvSpPr>
+        <p:spPr>
+          <a:xfrm>
+            <a:off x="5852160" y="2468880"/>
+            <a:ext cx="64008" cy="621792"/>
+          </a:xfrm>
+          <a:prstGeom prst="rect">
+            <a:avLst/>
+          </a:prstGeom>
+          <a:solidFill>
+            <a:srgbClr val="2E7D32"/>
+          </a:solidFill>
+          <a:ln/>
+        </p:spPr>
+      </p:sp>
+      <p:sp>
+        <p:nvSpPr>
+          <p:cNvPr id="18" name="Text 15"/>
+          <p:cNvSpPr/>
+          <p:nvPr/>
+        </p:nvSpPr>
+        <p:spPr>
+          <a:xfrm>
+            <a:off x="6035040" y="2468880"/>
+            <a:ext cx="365760" cy="621792"/>
+          </a:xfrm>
+          <a:prstGeom prst="rect">
+            <a:avLst/>
+          </a:prstGeom>
+          <a:noFill/>
+          <a:ln/>
+        </p:spPr>
+        <p:txBody>
+          <a:bodyPr wrap="square" lIns="0" tIns="0" rIns="0" bIns="0" rtlCol="0" anchor="ctr"/>
+          <a:lstStyle/>
+          <a:p>
+            <a:pPr indent="0" marL="0">
+              <a:buNone/>
+            </a:pPr>
+            <a:r>
+              <a:rPr lang="en-US" sz="1600" b="1" dirty="0">
+                <a:solidFill>
+                  <a:srgbClr val="2E7D32"/>
+                </a:solidFill>
+                <a:latin typeface="Trebuchet MS" pitchFamily="34" charset="0"/>
+                <a:ea typeface="Trebuchet MS" pitchFamily="34" charset="-122"/>
+                <a:cs typeface="Trebuchet MS" pitchFamily="34" charset="-120"/>
+              </a:rPr>
+              <a:t>2</a:t>
+            </a:r>
+            <a:endParaRPr lang="en-US" sz="1600" dirty="0"/>
+          </a:p>
+        </p:txBody>
+      </p:sp>
+      <p:sp>
+        <p:nvSpPr>
+          <p:cNvPr id="19" name="Text 16"/>
+          <p:cNvSpPr/>
+          <p:nvPr/>
+        </p:nvSpPr>
+        <p:spPr>
+          <a:xfrm>
+            <a:off x="6446520" y="2468880"/>
+            <a:ext cx="4846320" cy="621792"/>
+          </a:xfrm>
+          <a:prstGeom prst="rect">
+            <a:avLst/>
+          </a:prstGeom>
+          <a:noFill/>
+          <a:ln/>
+        </p:spPr>
+        <p:txBody>
+          <a:bodyPr wrap="square" lIns="0" tIns="0" rIns="0" bIns="0" rtlCol="0" anchor="ctr"/>
+          <a:lstStyle/>
+          <a:p>
+            <a:pPr indent="0" marL="0">
+              <a:buNone/>
+            </a:pPr>
+            <a:r>
+              <a:rPr lang="en-US" sz="1250" dirty="0">
+                <a:solidFill>
+                  <a:srgbClr val="1C2333"/>
+                </a:solidFill>
+                <a:latin typeface="Calibri" pitchFamily="34" charset="0"/>
+                <a:ea typeface="Calibri" pitchFamily="34" charset="-122"/>
+                <a:cs typeface="Calibri" pitchFamily="34" charset="-120"/>
+              </a:rPr>
+              <a:t>One natural-language interface that classifies intent and routes it</a:t>
+            </a:r>
+            <a:endParaRPr lang="en-US" sz="1250" dirty="0"/>
+          </a:p>
+        </p:txBody>
+      </p:sp>
+      <p:pic>
+        <p:nvPicPr>
+          <p:cNvPr id="20" name="Image 1" descr="preencoded.png">    </p:cNvPr>
+          <p:cNvPicPr>
+            <a:picLocks noChangeAspect="1"/>
+          </p:cNvPicPr>
+          <p:nvPr/>
+        </p:nvPicPr>
+        <p:blipFill>
+          <a:blip r:embed="rId2"/>
+          <a:stretch>
+            <a:fillRect/>
+          </a:stretch>
+        </p:blipFill>
+        <p:spPr>
+          <a:xfrm>
+            <a:off x="11247120" y="2651760"/>
+            <a:ext cx="256032" cy="256032"/>
+          </a:xfrm>
+          <a:prstGeom prst="rect">
+            <a:avLst/>
+          </a:prstGeom>
+        </p:spPr>
+      </p:pic>
+      <p:sp>
+        <p:nvSpPr>
+          <p:cNvPr id="21" name="Shape 17"/>
+          <p:cNvSpPr/>
+          <p:nvPr/>
+        </p:nvSpPr>
+        <p:spPr>
+          <a:xfrm>
+            <a:off x="5852160" y="3200400"/>
+            <a:ext cx="5806440" cy="621792"/>
+          </a:xfrm>
+          <a:prstGeom prst="rect">
+            <a:avLst/>
+          </a:prstGeom>
+          <a:solidFill>
+            <a:srgbClr val="FFFFFF"/>
+          </a:solidFill>
+          <a:ln/>
+          <a:effectLst>
+            <a:outerShdw sx="100000" sy="100000" kx="0" ky="0" algn="bl" rotWithShape="0" blurRad="76200" dist="25400" dir="8100000">
+              <a:srgbClr val="000000">
+                <a:alpha val="10000"/>
+              </a:srgbClr>
+            </a:outerShdw>
+          </a:effectLst>
+        </p:spPr>
+      </p:sp>
+      <p:sp>
+        <p:nvSpPr>
+          <p:cNvPr id="22" name="Shape 18"/>
+          <p:cNvSpPr/>
+          <p:nvPr/>
+        </p:nvSpPr>
+        <p:spPr>
+          <a:xfrm>
+            <a:off x="5852160" y="3200400"/>
+            <a:ext cx="64008" cy="621792"/>
+          </a:xfrm>
+          <a:prstGeom prst="rect">
+            <a:avLst/>
+          </a:prstGeom>
+          <a:solidFill>
+            <a:srgbClr val="2E7D32"/>
+          </a:solidFill>
+          <a:ln/>
+        </p:spPr>
+      </p:sp>
+      <p:sp>
+        <p:nvSpPr>
+          <p:cNvPr id="23" name="Text 19"/>
+          <p:cNvSpPr/>
+          <p:nvPr/>
+        </p:nvSpPr>
+        <p:spPr>
+          <a:xfrm>
+            <a:off x="6035040" y="3200400"/>
+            <a:ext cx="365760" cy="621792"/>
+          </a:xfrm>
+          <a:prstGeom prst="rect">
+            <a:avLst/>
+          </a:prstGeom>
+          <a:noFill/>
+          <a:ln/>
+        </p:spPr>
+        <p:txBody>
+          <a:bodyPr wrap="square" lIns="0" tIns="0" rIns="0" bIns="0" rtlCol="0" anchor="ctr"/>
+          <a:lstStyle/>
+          <a:p>
+            <a:pPr indent="0" marL="0">
+              <a:buNone/>
+            </a:pPr>
+            <a:r>
+              <a:rPr lang="en-US" sz="1600" b="1" dirty="0">
+                <a:solidFill>
+                  <a:srgbClr val="2E7D32"/>
+                </a:solidFill>
+                <a:latin typeface="Trebuchet MS" pitchFamily="34" charset="0"/>
+                <a:ea typeface="Trebuchet MS" pitchFamily="34" charset="-122"/>
+                <a:cs typeface="Trebuchet MS" pitchFamily="34" charset="-120"/>
+              </a:rPr>
+              <a:t>3</a:t>
+            </a:r>
+            <a:endParaRPr lang="en-US" sz="1600" dirty="0"/>
+          </a:p>
+        </p:txBody>
+      </p:sp>
+      <p:sp>
+        <p:nvSpPr>
+          <p:cNvPr id="24" name="Text 20"/>
+          <p:cNvSpPr/>
+          <p:nvPr/>
+        </p:nvSpPr>
+        <p:spPr>
+          <a:xfrm>
+            <a:off x="6446520" y="3200400"/>
+            <a:ext cx="4846320" cy="621792"/>
+          </a:xfrm>
+          <a:prstGeom prst="rect">
+            <a:avLst/>
+          </a:prstGeom>
+          <a:noFill/>
+          <a:ln/>
+        </p:spPr>
+        <p:txBody>
+          <a:bodyPr wrap="square" lIns="0" tIns="0" rIns="0" bIns="0" rtlCol="0" anchor="ctr"/>
+          <a:lstStyle/>
+          <a:p>
+            <a:pPr indent="0" marL="0">
+              <a:buNone/>
+            </a:pPr>
+            <a:r>
+              <a:rPr lang="en-US" sz="1250" dirty="0">
+                <a:solidFill>
+                  <a:srgbClr val="1C2333"/>
+                </a:solidFill>
+                <a:latin typeface="Calibri" pitchFamily="34" charset="0"/>
+                <a:ea typeface="Calibri" pitchFamily="34" charset="-122"/>
+                <a:cs typeface="Calibri" pitchFamily="34" charset="-120"/>
+              </a:rPr>
+              <a:t>Retrieve by meaning, ranked by similarity; open the top match directly</a:t>
+            </a:r>
+            <a:endParaRPr lang="en-US" sz="1250" dirty="0"/>
+          </a:p>
+        </p:txBody>
+      </p:sp>
+      <p:pic>
+        <p:nvPicPr>
+          <p:cNvPr id="25" name="Image 2" descr="preencoded.png">    </p:cNvPr>
+          <p:cNvPicPr>
+            <a:picLocks noChangeAspect="1"/>
+          </p:cNvPicPr>
+          <p:nvPr/>
+        </p:nvPicPr>
+        <p:blipFill>
+          <a:blip r:embed="rId3"/>
+          <a:stretch>
+            <a:fillRect/>
+          </a:stretch>
+        </p:blipFill>
+        <p:spPr>
+          <a:xfrm>
+            <a:off x="11247120" y="3383280"/>
+            <a:ext cx="256032" cy="256032"/>
+          </a:xfrm>
+          <a:prstGeom prst="rect">
+            <a:avLst/>
+          </a:prstGeom>
+        </p:spPr>
+      </p:pic>
+      <p:sp>
+        <p:nvSpPr>
+          <p:cNvPr id="26" name="Shape 21"/>
+          <p:cNvSpPr/>
+          <p:nvPr/>
+        </p:nvSpPr>
+        <p:spPr>
+          <a:xfrm>
+            <a:off x="5852160" y="3931920"/>
+            <a:ext cx="5806440" cy="621792"/>
+          </a:xfrm>
+          <a:prstGeom prst="rect">
+            <a:avLst/>
+          </a:prstGeom>
+          <a:solidFill>
+            <a:srgbClr val="FFFFFF"/>
+          </a:solidFill>
+          <a:ln/>
+          <a:effectLst>
+            <a:outerShdw sx="100000" sy="100000" kx="0" ky="0" algn="bl" rotWithShape="0" blurRad="76200" dist="25400" dir="8100000">
+              <a:srgbClr val="000000">
+                <a:alpha val="10000"/>
+              </a:srgbClr>
+            </a:outerShdw>
+          </a:effectLst>
+        </p:spPr>
+      </p:sp>
+      <p:sp>
+        <p:nvSpPr>
+          <p:cNvPr id="27" name="Shape 22"/>
+          <p:cNvSpPr/>
+          <p:nvPr/>
+        </p:nvSpPr>
+        <p:spPr>
+          <a:xfrm>
+            <a:off x="5852160" y="3931920"/>
+            <a:ext cx="64008" cy="621792"/>
+          </a:xfrm>
+          <a:prstGeom prst="rect">
+            <a:avLst/>
+          </a:prstGeom>
+          <a:solidFill>
+            <a:srgbClr val="2E7D32"/>
+          </a:solidFill>
+          <a:ln/>
+        </p:spPr>
+      </p:sp>
+      <p:sp>
+        <p:nvSpPr>
+          <p:cNvPr id="28" name="Text 23"/>
+          <p:cNvSpPr/>
+          <p:nvPr/>
+        </p:nvSpPr>
+        <p:spPr>
+          <a:xfrm>
+            <a:off x="6035040" y="3931920"/>
+            <a:ext cx="365760" cy="621792"/>
+          </a:xfrm>
+          <a:prstGeom prst="rect">
+            <a:avLst/>
+          </a:prstGeom>
+          <a:noFill/>
+          <a:ln/>
+        </p:spPr>
+        <p:txBody>
+          <a:bodyPr wrap="square" lIns="0" tIns="0" rIns="0" bIns="0" rtlCol="0" anchor="ctr"/>
+          <a:lstStyle/>
+          <a:p>
+            <a:pPr indent="0" marL="0">
+              <a:buNone/>
+            </a:pPr>
+            <a:r>
+              <a:rPr lang="en-US" sz="1600" b="1" dirty="0">
+                <a:solidFill>
+                  <a:srgbClr val="2E7D32"/>
+                </a:solidFill>
+                <a:latin typeface="Trebuchet MS" pitchFamily="34" charset="0"/>
+                <a:ea typeface="Trebuchet MS" pitchFamily="34" charset="-122"/>
+                <a:cs typeface="Trebuchet MS" pitchFamily="34" charset="-120"/>
+              </a:rPr>
+              <a:t>4</a:t>
+            </a:r>
+            <a:endParaRPr lang="en-US" sz="1600" dirty="0"/>
+          </a:p>
+        </p:txBody>
+      </p:sp>
+      <p:sp>
+        <p:nvSpPr>
+          <p:cNvPr id="29" name="Text 24"/>
+          <p:cNvSpPr/>
+          <p:nvPr/>
+        </p:nvSpPr>
+        <p:spPr>
+          <a:xfrm>
+            <a:off x="6446520" y="3931920"/>
+            <a:ext cx="4846320" cy="621792"/>
+          </a:xfrm>
+          <a:prstGeom prst="rect">
+            <a:avLst/>
+          </a:prstGeom>
+          <a:noFill/>
+          <a:ln/>
+        </p:spPr>
+        <p:txBody>
+          <a:bodyPr wrap="square" lIns="0" tIns="0" rIns="0" bIns="0" rtlCol="0" anchor="ctr"/>
+          <a:lstStyle/>
+          <a:p>
+            <a:pPr indent="0" marL="0">
+              <a:buNone/>
+            </a:pPr>
+            <a:r>
+              <a:rPr lang="en-US" sz="1250" dirty="0">
+                <a:solidFill>
+                  <a:srgbClr val="1C2333"/>
+                </a:solidFill>
+                <a:latin typeface="Calibri" pitchFamily="34" charset="0"/>
+                <a:ea typeface="Calibri" pitchFamily="34" charset="-122"/>
+                <a:cs typeface="Calibri" pitchFamily="34" charset="-120"/>
+              </a:rPr>
+              <a:t>Local LLM summary, tags and category, applied reversibly</a:t>
+            </a:r>
+            <a:endParaRPr lang="en-US" sz="1250" dirty="0"/>
+          </a:p>
+        </p:txBody>
+      </p:sp>
+      <p:pic>
+        <p:nvPicPr>
+          <p:cNvPr id="30" name="Image 3" descr="preencoded.png">    </p:cNvPr>
+          <p:cNvPicPr>
+            <a:picLocks noChangeAspect="1"/>
+          </p:cNvPicPr>
+          <p:nvPr/>
+        </p:nvPicPr>
+        <p:blipFill>
+          <a:blip r:embed="rId4"/>
+          <a:stretch>
+            <a:fillRect/>
+          </a:stretch>
+        </p:blipFill>
+        <p:spPr>
+          <a:xfrm>
+            <a:off x="11247120" y="4114800"/>
+            <a:ext cx="256032" cy="256032"/>
+          </a:xfrm>
+          <a:prstGeom prst="rect">
+            <a:avLst/>
+          </a:prstGeom>
+        </p:spPr>
+      </p:pic>
+      <p:sp>
+        <p:nvSpPr>
+          <p:cNvPr id="31" name="Shape 25"/>
+          <p:cNvSpPr/>
+          <p:nvPr/>
+        </p:nvSpPr>
+        <p:spPr>
+          <a:xfrm>
+            <a:off x="5852160" y="4663440"/>
+            <a:ext cx="5806440" cy="621792"/>
+          </a:xfrm>
+          <a:prstGeom prst="rect">
+            <a:avLst/>
+          </a:prstGeom>
+          <a:solidFill>
+            <a:srgbClr val="FFFFFF"/>
+          </a:solidFill>
+          <a:ln/>
+          <a:effectLst>
+            <a:outerShdw sx="100000" sy="100000" kx="0" ky="0" algn="bl" rotWithShape="0" blurRad="76200" dist="25400" dir="8100000">
+              <a:srgbClr val="000000">
+                <a:alpha val="10000"/>
+              </a:srgbClr>
+            </a:outerShdw>
+          </a:effectLst>
+        </p:spPr>
+      </p:sp>
+      <p:sp>
+        <p:nvSpPr>
+          <p:cNvPr id="32" name="Shape 26"/>
+          <p:cNvSpPr/>
+          <p:nvPr/>
+        </p:nvSpPr>
+        <p:spPr>
+          <a:xfrm>
+            <a:off x="5852160" y="4663440"/>
+            <a:ext cx="64008" cy="621792"/>
+          </a:xfrm>
+          <a:prstGeom prst="rect">
+            <a:avLst/>
+          </a:prstGeom>
+          <a:solidFill>
+            <a:srgbClr val="2E7D32"/>
+          </a:solidFill>
+          <a:ln/>
+        </p:spPr>
+      </p:sp>
+      <p:sp>
+        <p:nvSpPr>
+          <p:cNvPr id="33" name="Text 27"/>
+          <p:cNvSpPr/>
+          <p:nvPr/>
+        </p:nvSpPr>
+        <p:spPr>
+          <a:xfrm>
+            <a:off x="6035040" y="4663440"/>
+            <a:ext cx="365760" cy="621792"/>
+          </a:xfrm>
+          <a:prstGeom prst="rect">
+            <a:avLst/>
+          </a:prstGeom>
+          <a:noFill/>
+          <a:ln/>
+        </p:spPr>
+        <p:txBody>
+          <a:bodyPr wrap="square" lIns="0" tIns="0" rIns="0" bIns="0" rtlCol="0" anchor="ctr"/>
+          <a:lstStyle/>
+          <a:p>
+            <a:pPr indent="0" marL="0">
+              <a:buNone/>
+            </a:pPr>
+            <a:r>
+              <a:rPr lang="en-US" sz="1600" b="1" dirty="0">
+                <a:solidFill>
+                  <a:srgbClr val="2E7D32"/>
+                </a:solidFill>
+                <a:latin typeface="Trebuchet MS" pitchFamily="34" charset="0"/>
+                <a:ea typeface="Trebuchet MS" pitchFamily="34" charset="-122"/>
+                <a:cs typeface="Trebuchet MS" pitchFamily="34" charset="-120"/>
+              </a:rPr>
+              <a:t>5</a:t>
+            </a:r>
+            <a:endParaRPr lang="en-US" sz="1600" dirty="0"/>
+          </a:p>
+        </p:txBody>
+      </p:sp>
+      <p:sp>
+        <p:nvSpPr>
+          <p:cNvPr id="34" name="Text 28"/>
+          <p:cNvSpPr/>
+          <p:nvPr/>
+        </p:nvSpPr>
+        <p:spPr>
+          <a:xfrm>
+            <a:off x="6446520" y="4663440"/>
+            <a:ext cx="4846320" cy="621792"/>
+          </a:xfrm>
+          <a:prstGeom prst="rect">
+            <a:avLst/>
+          </a:prstGeom>
+          <a:noFill/>
+          <a:ln/>
+        </p:spPr>
+        <p:txBody>
+          <a:bodyPr wrap="square" lIns="0" tIns="0" rIns="0" bIns="0" rtlCol="0" anchor="ctr"/>
+          <a:lstStyle/>
+          <a:p>
+            <a:pPr indent="0" marL="0">
+              <a:buNone/>
+            </a:pPr>
+            <a:r>
+              <a:rPr lang="en-US" sz="1250" dirty="0">
+                <a:solidFill>
+                  <a:srgbClr val="1C2333"/>
+                </a:solidFill>
+                <a:latin typeface="Calibri" pitchFamily="34" charset="0"/>
+                <a:ea typeface="Calibri" pitchFamily="34" charset="-122"/>
+                <a:cs typeface="Calibri" pitchFamily="34" charset="-120"/>
+              </a:rPr>
+              <a:t>Entirely local and offline-capable, preserving privacy</a:t>
+            </a:r>
+            <a:endParaRPr lang="en-US" sz="1250" dirty="0"/>
+          </a:p>
+        </p:txBody>
+      </p:sp>
+      <p:pic>
+        <p:nvPicPr>
+          <p:cNvPr id="35" name="Image 4" descr="preencoded.png">    </p:cNvPr>
+          <p:cNvPicPr>
+            <a:picLocks noChangeAspect="1"/>
+          </p:cNvPicPr>
+          <p:nvPr/>
+        </p:nvPicPr>
+        <p:blipFill>
+          <a:blip r:embed="rId5"/>
+          <a:stretch>
+            <a:fillRect/>
+          </a:stretch>
+        </p:blipFill>
+        <p:spPr>
+          <a:xfrm>
+            <a:off x="11247120" y="4846320"/>
+            <a:ext cx="256032" cy="256032"/>
+          </a:xfrm>
+          <a:prstGeom prst="rect">
+            <a:avLst/>
+          </a:prstGeom>
+        </p:spPr>
+      </p:pic>
+      <p:sp>
+        <p:nvSpPr>
+          <p:cNvPr id="36" name="Shape 29"/>
+          <p:cNvSpPr/>
+          <p:nvPr/>
+        </p:nvSpPr>
+        <p:spPr>
+          <a:xfrm>
+            <a:off x="5852160" y="5394960"/>
+            <a:ext cx="5806440" cy="621792"/>
+          </a:xfrm>
+          <a:prstGeom prst="rect">
+            <a:avLst/>
+          </a:prstGeom>
+          <a:solidFill>
+            <a:srgbClr val="FFFFFF"/>
+          </a:solidFill>
+          <a:ln/>
+          <a:effectLst>
+            <a:outerShdw sx="100000" sy="100000" kx="0" ky="0" algn="bl" rotWithShape="0" blurRad="76200" dist="25400" dir="8100000">
+              <a:srgbClr val="000000">
+                <a:alpha val="10000"/>
+              </a:srgbClr>
+            </a:outerShdw>
+          </a:effectLst>
+        </p:spPr>
+      </p:sp>
+      <p:sp>
+        <p:nvSpPr>
+          <p:cNvPr id="37" name="Shape 30"/>
+          <p:cNvSpPr/>
+          <p:nvPr/>
+        </p:nvSpPr>
+        <p:spPr>
+          <a:xfrm>
+            <a:off x="5852160" y="5394960"/>
+            <a:ext cx="64008" cy="621792"/>
+          </a:xfrm>
+          <a:prstGeom prst="rect">
+            <a:avLst/>
+          </a:prstGeom>
+          <a:solidFill>
+            <a:srgbClr val="2E7D32"/>
+          </a:solidFill>
+          <a:ln/>
+        </p:spPr>
+      </p:sp>
+      <p:sp>
+        <p:nvSpPr>
+          <p:cNvPr id="38" name="Text 31"/>
+          <p:cNvSpPr/>
+          <p:nvPr/>
+        </p:nvSpPr>
+        <p:spPr>
+          <a:xfrm>
+            <a:off x="6035040" y="5394960"/>
+            <a:ext cx="365760" cy="621792"/>
+          </a:xfrm>
+          <a:prstGeom prst="rect">
+            <a:avLst/>
+          </a:prstGeom>
+          <a:noFill/>
+          <a:ln/>
+        </p:spPr>
+        <p:txBody>
+          <a:bodyPr wrap="square" lIns="0" tIns="0" rIns="0" bIns="0" rtlCol="0" anchor="ctr"/>
+          <a:lstStyle/>
+          <a:p>
+            <a:pPr indent="0" marL="0">
+              <a:buNone/>
+            </a:pPr>
+            <a:r>
+              <a:rPr lang="en-US" sz="1600" b="1" dirty="0">
+                <a:solidFill>
+                  <a:srgbClr val="2E7D32"/>
+                </a:solidFill>
+                <a:latin typeface="Trebuchet MS" pitchFamily="34" charset="0"/>
+                <a:ea typeface="Trebuchet MS" pitchFamily="34" charset="-122"/>
+                <a:cs typeface="Trebuchet MS" pitchFamily="34" charset="-120"/>
+              </a:rPr>
+              <a:t>6</a:t>
+            </a:r>
+            <a:endParaRPr lang="en-US" sz="1600" dirty="0"/>
+          </a:p>
+        </p:txBody>
+      </p:sp>
+      <p:sp>
+        <p:nvSpPr>
+          <p:cNvPr id="39" name="Text 32"/>
+          <p:cNvSpPr/>
+          <p:nvPr/>
+        </p:nvSpPr>
+        <p:spPr>
+          <a:xfrm>
+            <a:off x="6446520" y="5394960"/>
+            <a:ext cx="4846320" cy="621792"/>
+          </a:xfrm>
+          <a:prstGeom prst="rect">
+            <a:avLst/>
+          </a:prstGeom>
+          <a:noFill/>
+          <a:ln/>
+        </p:spPr>
+        <p:txBody>
+          <a:bodyPr wrap="square" lIns="0" tIns="0" rIns="0" bIns="0" rtlCol="0" anchor="ctr"/>
+          <a:lstStyle/>
+          <a:p>
+            <a:pPr indent="0" marL="0">
+              <a:buNone/>
+            </a:pPr>
+            <a:r>
+              <a:rPr lang="en-US" sz="1250" dirty="0">
+                <a:solidFill>
+                  <a:srgbClr val="1C2333"/>
+                </a:solidFill>
+                <a:latin typeface="Calibri" pitchFamily="34" charset="0"/>
+                <a:ea typeface="Calibri" pitchFamily="34" charset="-122"/>
+                <a:cs typeface="Calibri" pitchFamily="34" charset="-120"/>
+              </a:rPr>
+              <a:t>Knowledge graph, context memory and intelligent workspace manager</a:t>
+            </a:r>
+            <a:endParaRPr lang="en-US" sz="1250" dirty="0"/>
+          </a:p>
+        </p:txBody>
+      </p:sp>
+      <p:pic>
+        <p:nvPicPr>
+          <p:cNvPr id="40" name="Image 5" descr="preencoded.png">    </p:cNvPr>
+          <p:cNvPicPr>
+            <a:picLocks noChangeAspect="1"/>
+          </p:cNvPicPr>
+          <p:nvPr/>
+        </p:nvPicPr>
+        <p:blipFill>
+          <a:blip r:embed="rId6"/>
+          <a:stretch>
+            <a:fillRect/>
+          </a:stretch>
+        </p:blipFill>
+        <p:spPr>
+          <a:xfrm>
+            <a:off x="11247120" y="5577840"/>
+            <a:ext cx="256032" cy="256032"/>
+          </a:xfrm>
+          <a:prstGeom prst="rect">
+            <a:avLst/>
+          </a:prstGeom>
+        </p:spPr>
+      </p:pic>
+    </p:spTree>
+  </p:cSld>
+  <p:clrMapOvr>
+    <a:masterClrMapping/>
+  </p:clrMapOvr>
+</p:sld>
+</file>
+
+<file path=ppt/slides/slide20.xml><?xml version="1.0" encoding="utf-8"?>
+<p:sld xmlns:a="http://schemas.openxmlformats.org/drawingml/2006/main" xmlns:r="http://schemas.openxmlformats.org/officeDocument/2006/relationships" xmlns:p="http://schemas.openxmlformats.org/presentationml/2006/main">
+  <p:cSld name="Slide 20">
+    <p:bg>
+      <p:bgPr>
+        <a:solidFill>
+          <a:srgbClr val="F4F6FB"/>
+        </a:solidFill>
+      </p:bgPr>
+    </p:bg>
+    <p:spTree>
+      <p:nvGrpSpPr>
+        <p:cNvPr id="1" name=""/>
+        <p:cNvGrpSpPr/>
+        <p:nvPr/>
+      </p:nvGrpSpPr>
+      <p:grpSpPr>
+        <a:xfrm>
+          <a:off x="0" y="0"/>
+          <a:ext cx="0" cy="0"/>
+          <a:chOff x="0" y="0"/>
+          <a:chExt cx="0" cy="0"/>
+        </a:xfrm>
+      </p:grpSpPr>
+      <p:sp>
+        <p:nvSpPr>
+          <p:cNvPr id="2" name="Text 0"/>
+          <p:cNvSpPr/>
+          <p:nvPr/>
+        </p:nvSpPr>
+        <p:spPr>
+          <a:xfrm>
+            <a:off x="548640" y="320040"/>
+            <a:ext cx="11064240" cy="640080"/>
+          </a:xfrm>
+          <a:prstGeom prst="rect">
+            <a:avLst/>
+          </a:prstGeom>
+          <a:noFill/>
+          <a:ln/>
+        </p:spPr>
+        <p:txBody>
+          <a:bodyPr wrap="square" lIns="0" tIns="0" rIns="0" bIns="0" rtlCol="0" anchor="ctr"/>
+          <a:lstStyle/>
+          <a:p>
+            <a:pPr indent="0" marL="0">
+              <a:buNone/>
+            </a:pPr>
+            <a:r>
+              <a:rPr lang="en-US" sz="2800" b="1" dirty="0">
+                <a:solidFill>
+                  <a:srgbClr val="1C2333"/>
+                </a:solidFill>
+                <a:latin typeface="Trebuchet MS" pitchFamily="34" charset="0"/>
+                <a:ea typeface="Trebuchet MS" pitchFamily="34" charset="-122"/>
+                <a:cs typeface="Trebuchet MS" pitchFamily="34" charset="-120"/>
+              </a:rPr>
+              <a:t>Testing and verification</a:t>
+            </a:r>
+            <a:endParaRPr lang="en-US" sz="2800" dirty="0"/>
+          </a:p>
+        </p:txBody>
+      </p:sp>
+      <p:sp>
+        <p:nvSpPr>
+          <p:cNvPr id="3" name="Text 1"/>
+          <p:cNvSpPr/>
+          <p:nvPr/>
+        </p:nvSpPr>
+        <p:spPr>
+          <a:xfrm>
+            <a:off x="548640" y="914400"/>
+            <a:ext cx="11064240" cy="365760"/>
+          </a:xfrm>
+          <a:prstGeom prst="rect">
+            <a:avLst/>
+          </a:prstGeom>
+          <a:noFill/>
+          <a:ln/>
+        </p:spPr>
+        <p:txBody>
+          <a:bodyPr wrap="square" lIns="0" tIns="0" rIns="0" bIns="0" rtlCol="0" anchor="ctr"/>
+          <a:lstStyle/>
+          <a:p>
+            <a:pPr indent="0" marL="0">
+              <a:buNone/>
+            </a:pPr>
+            <a:r>
+              <a:rPr lang="en-US" sz="1400" dirty="0">
+                <a:solidFill>
+                  <a:srgbClr val="5B6478"/>
+                </a:solidFill>
+                <a:latin typeface="Calibri" pitchFamily="34" charset="0"/>
+                <a:ea typeface="Calibri" pitchFamily="34" charset="-122"/>
+                <a:cs typeface="Calibri" pitchFamily="34" charset="-120"/>
+              </a:rPr>
+              <a:t>Report section 5.6</a:t>
+            </a:r>
+            <a:endParaRPr lang="en-US" sz="1400" dirty="0"/>
+          </a:p>
+        </p:txBody>
+      </p:sp>
+      <p:sp>
+        <p:nvSpPr>
+          <p:cNvPr id="4" name="Text 2"/>
+          <p:cNvSpPr/>
+          <p:nvPr/>
+        </p:nvSpPr>
+        <p:spPr>
+          <a:xfrm>
+            <a:off x="548640" y="6473952"/>
+            <a:ext cx="5486400" cy="274320"/>
+          </a:xfrm>
+          <a:prstGeom prst="rect">
+            <a:avLst/>
+          </a:prstGeom>
+          <a:noFill/>
+          <a:ln/>
+        </p:spPr>
+        <p:txBody>
+          <a:bodyPr wrap="square" lIns="0" tIns="0" rIns="0" bIns="0" rtlCol="0" anchor="ctr"/>
+          <a:lstStyle/>
+          <a:p>
+            <a:pPr indent="0" marL="0">
+              <a:buNone/>
+            </a:pPr>
+            <a:r>
+              <a:rPr lang="en-US" sz="1000" dirty="0">
+                <a:solidFill>
+                  <a:srgbClr val="8A93AA"/>
+                </a:solidFill>
+                <a:latin typeface="Calibri" pitchFamily="34" charset="0"/>
+                <a:ea typeface="Calibri" pitchFamily="34" charset="-122"/>
+                <a:cs typeface="Calibri" pitchFamily="34" charset="-120"/>
+              </a:rPr>
+              <a:t>DreamOS - Project Monitoring II</a:t>
+            </a:r>
+            <a:endParaRPr lang="en-US" sz="1000" dirty="0"/>
+          </a:p>
+        </p:txBody>
+      </p:sp>
+      <p:sp>
+        <p:nvSpPr>
+          <p:cNvPr id="5" name="Text 3"/>
+          <p:cNvSpPr/>
+          <p:nvPr/>
+        </p:nvSpPr>
+        <p:spPr>
+          <a:xfrm>
+            <a:off x="11064240" y="6473952"/>
+            <a:ext cx="594360" cy="274320"/>
+          </a:xfrm>
+          <a:prstGeom prst="rect">
+            <a:avLst/>
+          </a:prstGeom>
+          <a:noFill/>
+          <a:ln/>
+        </p:spPr>
+        <p:txBody>
+          <a:bodyPr wrap="square" lIns="0" tIns="0" rIns="0" bIns="0" rtlCol="0" anchor="ctr"/>
+          <a:lstStyle/>
+          <a:p>
+            <a:pPr algn="r" indent="0" marL="0">
+              <a:buNone/>
+            </a:pPr>
+            <a:r>
+              <a:rPr lang="en-US" sz="1000" dirty="0">
+                <a:solidFill>
+                  <a:srgbClr val="8A93AA"/>
+                </a:solidFill>
+                <a:latin typeface="Calibri" pitchFamily="34" charset="0"/>
+                <a:ea typeface="Calibri" pitchFamily="34" charset="-122"/>
+                <a:cs typeface="Calibri" pitchFamily="34" charset="-120"/>
+              </a:rPr>
+              <a:t>20</a:t>
+            </a:r>
+            <a:endParaRPr lang="en-US" sz="1000" dirty="0"/>
+          </a:p>
+        </p:txBody>
+      </p:sp>
+      <p:graphicFrame>
+        <p:nvGraphicFramePr>
+          <p:cNvPr id="21" name="Table 0"/>
+          <p:cNvGraphicFramePr>
+            <a:graphicFrameLocks noGrp="1"/>
+          </p:cNvGraphicFramePr>
+          <p:nvPr>
+            <p:extLst>
+              <p:ext uri="{D42A27DB-BD31-4B8C-83A1-F6EECF244321}">
+                <p14:modId xmlns:p14="http://schemas.microsoft.com/office/powerpoint/2010/main" val="1579011935"/>
+              </p:ext>
+            </p:extLst>
+          </p:nvPr>
+        </p:nvGraphicFramePr>
+        <p:xfrm>
+          <a:off x="548640" y="1371600"/>
           <a:ext cx="11109960" cy="914400"/>
         </p:xfrm>
         <a:graphic>
@@ -6898,10 +10796,10 @@
               <a:tblPr/>
               <a:tblGrid>
                 <a:gridCol w="2468880"/>
-                <a:gridCol w="6446520"/>
-                <a:gridCol w="2194560"/>
+                <a:gridCol w="6263640"/>
+                <a:gridCol w="2377440"/>
               </a:tblGrid>
-              <a:tr h="621792">
+              <a:tr h="530352">
                 <a:tc>
                   <a:txBody>
                     <a:bodyPr/>
@@ -7107,7 +11005,7 @@
                   </a:tcPr>
                 </a:tc>
               </a:tr>
-              <a:tr h="621792">
+              <a:tr h="530352">
                 <a:tc>
                   <a:txBody>
                     <a:bodyPr/>
@@ -7117,7 +11015,7 @@
                         <a:buNone/>
                       </a:pPr>
                       <a:r>
-                        <a:rPr lang="en-US" sz="1350" dirty="0">
+                        <a:rPr lang="en-US" sz="1250" dirty="0">
                           <a:solidFill>
                             <a:srgbClr val="1C2333"/>
                           </a:solidFill>
@@ -7127,7 +11025,7 @@
                         </a:rPr>
                         <a:t>Unit and integration</a:t>
                       </a:r>
-                      <a:endParaRPr lang="en-US" sz="1350" dirty="0">
+                      <a:endParaRPr lang="en-US" sz="1250" dirty="0">
                         <a:latin typeface="Calibri" charset="0"/>
                         <a:ea typeface="Calibri" charset="0"/>
                         <a:cs typeface="Calibri" charset="0"/>
@@ -7182,7 +11080,7 @@
                         <a:buNone/>
                       </a:pPr>
                       <a:r>
-                        <a:rPr lang="en-US" sz="1350" dirty="0">
+                        <a:rPr lang="en-US" sz="1250" dirty="0">
                           <a:solidFill>
                             <a:srgbClr val="1C2333"/>
                           </a:solidFill>
@@ -7190,9 +11088,9 @@
                           <a:ea typeface="Calibri" pitchFamily="34" charset="-122"/>
                           <a:cs typeface="Calibri" pitchFamily="34" charset="-120"/>
                         </a:rPr>
-                        <a:t>97 pytest tests over indexing, search, organizer, graph, memory, workspaces, NL routing and the HTTP API</a:t>
+                        <a:t>107 pytest tests: indexing, search and keyword boost, organizer, graph, memory, workspaces, intent routing, reset script, HTTP API</a:t>
                       </a:r>
-                      <a:endParaRPr lang="en-US" sz="1350" dirty="0">
+                      <a:endParaRPr lang="en-US" sz="1250" dirty="0">
                         <a:latin typeface="Calibri" charset="0"/>
                         <a:ea typeface="Calibri" charset="0"/>
                         <a:cs typeface="Calibri" charset="0"/>
@@ -7247,7 +11145,7 @@
                         <a:buNone/>
                       </a:pPr>
                       <a:r>
-                        <a:rPr lang="en-US" sz="1350" dirty="0">
+                        <a:rPr lang="en-US" sz="1250" dirty="0">
                           <a:solidFill>
                             <a:srgbClr val="1C2333"/>
                           </a:solidFill>
@@ -7255,9 +11153,9 @@
                           <a:ea typeface="Calibri" pitchFamily="34" charset="-122"/>
                           <a:cs typeface="Calibri" pitchFamily="34" charset="-120"/>
                         </a:rPr>
-                        <a:t>97 passed, offline</a:t>
+                        <a:t>107 passed, offline</a:t>
                       </a:r>
-                      <a:endParaRPr lang="en-US" sz="1350" dirty="0">
+                      <a:endParaRPr lang="en-US" sz="1250" dirty="0">
                         <a:latin typeface="Calibri" charset="0"/>
                         <a:ea typeface="Calibri" charset="0"/>
                         <a:cs typeface="Calibri" charset="0"/>
@@ -7304,7 +11202,7 @@
                   </a:tcPr>
                 </a:tc>
               </a:tr>
-              <a:tr h="621792">
+              <a:tr h="530352">
                 <a:tc>
                   <a:txBody>
                     <a:bodyPr/>
@@ -7314,7 +11212,7 @@
                         <a:buNone/>
                       </a:pPr>
                       <a:r>
-                        <a:rPr lang="en-US" sz="1350" dirty="0">
+                        <a:rPr lang="en-US" sz="1250" dirty="0">
                           <a:solidFill>
                             <a:srgbClr val="1C2333"/>
                           </a:solidFill>
@@ -7324,7 +11222,7 @@
                         </a:rPr>
                         <a:t>Continuous integration</a:t>
                       </a:r>
-                      <a:endParaRPr lang="en-US" sz="1350" dirty="0">
+                      <a:endParaRPr lang="en-US" sz="1250" dirty="0">
                         <a:latin typeface="Calibri" charset="0"/>
                         <a:ea typeface="Calibri" charset="0"/>
                         <a:cs typeface="Calibri" charset="0"/>
@@ -7379,7 +11277,7 @@
                         <a:buNone/>
                       </a:pPr>
                       <a:r>
-                        <a:rPr lang="en-US" sz="1350" dirty="0">
+                        <a:rPr lang="en-US" sz="1250" dirty="0">
                           <a:solidFill>
                             <a:srgbClr val="1C2333"/>
                           </a:solidFill>
@@ -7389,7 +11287,7 @@
                         </a:rPr>
                         <a:t>GitHub Actions runs the suite on every push (Linux)</a:t>
                       </a:r>
-                      <a:endParaRPr lang="en-US" sz="1350" dirty="0">
+                      <a:endParaRPr lang="en-US" sz="1250" dirty="0">
                         <a:latin typeface="Calibri" charset="0"/>
                         <a:ea typeface="Calibri" charset="0"/>
                         <a:cs typeface="Calibri" charset="0"/>
@@ -7444,7 +11342,7 @@
                         <a:buNone/>
                       </a:pPr>
                       <a:r>
-                        <a:rPr lang="en-US" sz="1350" dirty="0">
+                        <a:rPr lang="en-US" sz="1250" dirty="0">
                           <a:solidFill>
                             <a:srgbClr val="1C2333"/>
                           </a:solidFill>
@@ -7454,7 +11352,7 @@
                         </a:rPr>
                         <a:t>Passing</a:t>
                       </a:r>
-                      <a:endParaRPr lang="en-US" sz="1350" dirty="0">
+                      <a:endParaRPr lang="en-US" sz="1250" dirty="0">
                         <a:latin typeface="Calibri" charset="0"/>
                         <a:ea typeface="Calibri" charset="0"/>
                         <a:cs typeface="Calibri" charset="0"/>
@@ -7501,7 +11399,7 @@
                   </a:tcPr>
                 </a:tc>
               </a:tr>
-              <a:tr h="621792">
+              <a:tr h="530352">
                 <a:tc>
                   <a:txBody>
                     <a:bodyPr/>
@@ -7511,7 +11409,7 @@
                         <a:buNone/>
                       </a:pPr>
                       <a:r>
-                        <a:rPr lang="en-US" sz="1350" dirty="0">
+                        <a:rPr lang="en-US" sz="1250" dirty="0">
                           <a:solidFill>
                             <a:srgbClr val="1C2333"/>
                           </a:solidFill>
@@ -7521,7 +11419,7 @@
                         </a:rPr>
                         <a:t>Test strength</a:t>
                       </a:r>
-                      <a:endParaRPr lang="en-US" sz="1350" dirty="0">
+                      <a:endParaRPr lang="en-US" sz="1250" dirty="0">
                         <a:latin typeface="Calibri" charset="0"/>
                         <a:ea typeface="Calibri" charset="0"/>
                         <a:cs typeface="Calibri" charset="0"/>
@@ -7576,7 +11474,7 @@
                         <a:buNone/>
                       </a:pPr>
                       <a:r>
-                        <a:rPr lang="en-US" sz="1350" dirty="0">
+                        <a:rPr lang="en-US" sz="1250" dirty="0">
                           <a:solidFill>
                             <a:srgbClr val="1C2333"/>
                           </a:solidFill>
@@ -7584,9 +11482,9 @@
                           <a:ea typeface="Calibri" pitchFamily="34" charset="-122"/>
                           <a:cs typeface="Calibri" pitchFamily="34" charset="-120"/>
                         </a:rPr>
-                        <a:t>Key guards deliberately broken (short-filename rule, workspace-coverage filter) to confirm a test fails</a:t>
+                        <a:t>Key guards deliberately broken to confirm a test fails</a:t>
                       </a:r>
-                      <a:endParaRPr lang="en-US" sz="1350" dirty="0">
+                      <a:endParaRPr lang="en-US" sz="1250" dirty="0">
                         <a:latin typeface="Calibri" charset="0"/>
                         <a:ea typeface="Calibri" charset="0"/>
                         <a:cs typeface="Calibri" charset="0"/>
@@ -7641,7 +11539,7 @@
                         <a:buNone/>
                       </a:pPr>
                       <a:r>
-                        <a:rPr lang="en-US" sz="1350" dirty="0">
+                        <a:rPr lang="en-US" sz="1250" dirty="0">
                           <a:solidFill>
                             <a:srgbClr val="1C2333"/>
                           </a:solidFill>
@@ -7651,7 +11549,7 @@
                         </a:rPr>
                         <a:t>Each caught</a:t>
                       </a:r>
-                      <a:endParaRPr lang="en-US" sz="1350" dirty="0">
+                      <a:endParaRPr lang="en-US" sz="1250" dirty="0">
                         <a:latin typeface="Calibri" charset="0"/>
                         <a:ea typeface="Calibri" charset="0"/>
                         <a:cs typeface="Calibri" charset="0"/>
@@ -7698,7 +11596,7 @@
                   </a:tcPr>
                 </a:tc>
               </a:tr>
-              <a:tr h="621792">
+              <a:tr h="530352">
                 <a:tc>
                   <a:txBody>
                     <a:bodyPr/>
@@ -7708,7 +11606,7 @@
                         <a:buNone/>
                       </a:pPr>
                       <a:r>
-                        <a:rPr lang="en-US" sz="1350" dirty="0">
+                        <a:rPr lang="en-US" sz="1250" dirty="0">
                           <a:solidFill>
                             <a:srgbClr val="1C2333"/>
                           </a:solidFill>
@@ -7718,7 +11616,7 @@
                         </a:rPr>
                         <a:t>Intent routing, real model</a:t>
                       </a:r>
-                      <a:endParaRPr lang="en-US" sz="1350" dirty="0">
+                      <a:endParaRPr lang="en-US" sz="1250" dirty="0">
                         <a:latin typeface="Calibri" charset="0"/>
                         <a:ea typeface="Calibri" charset="0"/>
                         <a:cs typeface="Calibri" charset="0"/>
@@ -7773,7 +11671,7 @@
                         <a:buNone/>
                       </a:pPr>
                       <a:r>
-                        <a:rPr lang="en-US" sz="1350" dirty="0">
+                        <a:rPr lang="en-US" sz="1250" dirty="0">
                           <a:solidFill>
                             <a:srgbClr val="1C2333"/>
                           </a:solidFill>
@@ -7783,7 +11681,7 @@
                         </a:rPr>
                         <a:t>32-message tuning set and a 26-message held-out set on llama3.2; prompt rewritten and compared</a:t>
                       </a:r>
-                      <a:endParaRPr lang="en-US" sz="1350" dirty="0">
+                      <a:endParaRPr lang="en-US" sz="1250" dirty="0">
                         <a:latin typeface="Calibri" charset="0"/>
                         <a:ea typeface="Calibri" charset="0"/>
                         <a:cs typeface="Calibri" charset="0"/>
@@ -7838,7 +11736,7 @@
                         <a:buNone/>
                       </a:pPr>
                       <a:r>
-                        <a:rPr lang="en-US" sz="1350" dirty="0">
+                        <a:rPr lang="en-US" sz="1250" dirty="0">
                           <a:solidFill>
                             <a:srgbClr val="1C2333"/>
                           </a:solidFill>
@@ -7846,9 +11744,9 @@
                           <a:ea typeface="Calibri" pitchFamily="34" charset="-122"/>
                           <a:cs typeface="Calibri" pitchFamily="34" charset="-120"/>
                         </a:rPr>
-                        <a:t>Held-out 80% -&gt; 88%</a:t>
+                        <a:t>Held-out 80% to 88%</a:t>
                       </a:r>
-                      <a:endParaRPr lang="en-US" sz="1350" dirty="0">
+                      <a:endParaRPr lang="en-US" sz="1250" dirty="0">
                         <a:latin typeface="Calibri" charset="0"/>
                         <a:ea typeface="Calibri" charset="0"/>
                         <a:cs typeface="Calibri" charset="0"/>
@@ -7895,7 +11793,7 @@
                   </a:tcPr>
                 </a:tc>
               </a:tr>
-              <a:tr h="621792">
+              <a:tr h="530352">
                 <a:tc>
                   <a:txBody>
                     <a:bodyPr/>
@@ -7905,7 +11803,7 @@
                         <a:buNone/>
                       </a:pPr>
                       <a:r>
-                        <a:rPr lang="en-US" sz="1350" dirty="0">
+                        <a:rPr lang="en-US" sz="1250" dirty="0">
                           <a:solidFill>
                             <a:srgbClr val="1C2333"/>
                           </a:solidFill>
@@ -7915,7 +11813,7 @@
                         </a:rPr>
                         <a:t>End to end, real models</a:t>
                       </a:r>
-                      <a:endParaRPr lang="en-US" sz="1350" dirty="0">
+                      <a:endParaRPr lang="en-US" sz="1250" dirty="0">
                         <a:latin typeface="Calibri" charset="0"/>
                         <a:ea typeface="Calibri" charset="0"/>
                         <a:cs typeface="Calibri" charset="0"/>
@@ -7970,7 +11868,7 @@
                         <a:buNone/>
                       </a:pPr>
                       <a:r>
-                        <a:rPr lang="en-US" sz="1350" dirty="0">
+                        <a:rPr lang="en-US" sz="1250" dirty="0">
                           <a:solidFill>
                             <a:srgbClr val="1C2333"/>
                           </a:solidFill>
@@ -7978,9 +11876,9 @@
                           <a:ea typeface="Calibri" pitchFamily="34" charset="-122"/>
                           <a:cs typeface="Calibri" pitchFamily="34" charset="-120"/>
                         </a:rPr>
-                        <a:t>Multi-turn follow-ups, ambiguity then usage resolution, organize and revert on a new file</a:t>
+                        <a:t>Follow-ups, ambiguity then usage resolution, organize and revert, graph rebuild on indexing</a:t>
                       </a:r>
-                      <a:endParaRPr lang="en-US" sz="1350" dirty="0">
+                      <a:endParaRPr lang="en-US" sz="1250" dirty="0">
                         <a:latin typeface="Calibri" charset="0"/>
                         <a:ea typeface="Calibri" charset="0"/>
                         <a:cs typeface="Calibri" charset="0"/>
@@ -8035,7 +11933,7 @@
                         <a:buNone/>
                       </a:pPr>
                       <a:r>
-                        <a:rPr lang="en-US" sz="1350" dirty="0">
+                        <a:rPr lang="en-US" sz="1250" dirty="0">
                           <a:solidFill>
                             <a:srgbClr val="1C2333"/>
                           </a:solidFill>
@@ -8045,7 +11943,7 @@
                         </a:rPr>
                         <a:t>As designed</a:t>
                       </a:r>
-                      <a:endParaRPr lang="en-US" sz="1350" dirty="0">
+                      <a:endParaRPr lang="en-US" sz="1250" dirty="0">
                         <a:latin typeface="Calibri" charset="0"/>
                         <a:ea typeface="Calibri" charset="0"/>
                         <a:cs typeface="Calibri" charset="0"/>
@@ -8092,7 +11990,7 @@
                   </a:tcPr>
                 </a:tc>
               </a:tr>
-              <a:tr h="621792">
+              <a:tr h="530352">
                 <a:tc>
                   <a:txBody>
                     <a:bodyPr/>
@@ -8102,7 +12000,7 @@
                         <a:buNone/>
                       </a:pPr>
                       <a:r>
-                        <a:rPr lang="en-US" sz="1350" dirty="0">
+                        <a:rPr lang="en-US" sz="1250" dirty="0">
                           <a:solidFill>
                             <a:srgbClr val="1C2333"/>
                           </a:solidFill>
@@ -8110,9 +12008,9 @@
                           <a:ea typeface="Calibri" pitchFamily="34" charset="-122"/>
                           <a:cs typeface="Calibri" pitchFamily="34" charset="-120"/>
                         </a:rPr>
-                        <a:t>Real desktop shell</a:t>
+                        <a:t>Retrieval</a:t>
                       </a:r>
-                      <a:endParaRPr lang="en-US" sz="1350" dirty="0">
+                      <a:endParaRPr lang="en-US" sz="1250" dirty="0">
                         <a:latin typeface="Calibri" charset="0"/>
                         <a:ea typeface="Calibri" charset="0"/>
                         <a:cs typeface="Calibri" charset="0"/>
@@ -8167,7 +12065,7 @@
                         <a:buNone/>
                       </a:pPr>
                       <a:r>
-                        <a:rPr lang="en-US" sz="1350" dirty="0">
+                        <a:rPr lang="en-US" sz="1250" dirty="0">
                           <a:solidFill>
                             <a:srgbClr val="1C2333"/>
                           </a:solidFill>
@@ -8175,9 +12073,9 @@
                           <a:ea typeface="Calibri" pitchFamily="34" charset="-122"/>
                           <a:cs typeface="Calibri" pitchFamily="34" charset="-120"/>
                         </a:rPr>
-                        <a:t>Workspace Open all and click-to-open driven over WebView2's debug port</a:t>
+                        <a:t>31-query labelled set with tuning and held-out halves</a:t>
                       </a:r>
-                      <a:endParaRPr lang="en-US" sz="1350" dirty="0">
+                      <a:endParaRPr lang="en-US" sz="1250" dirty="0">
                         <a:latin typeface="Calibri" charset="0"/>
                         <a:ea typeface="Calibri" charset="0"/>
                         <a:cs typeface="Calibri" charset="0"/>
@@ -8232,7 +12130,204 @@
                         <a:buNone/>
                       </a:pPr>
                       <a:r>
-                        <a:rPr lang="en-US" sz="1350" dirty="0">
+                        <a:rPr lang="en-US" sz="1250" dirty="0">
+                          <a:solidFill>
+                            <a:srgbClr val="1C2333"/>
+                          </a:solidFill>
+                          <a:latin typeface="Calibri" pitchFamily="34" charset="0"/>
+                          <a:ea typeface="Calibri" pitchFamily="34" charset="-122"/>
+                          <a:cs typeface="Calibri" pitchFamily="34" charset="-120"/>
+                        </a:rPr>
+                        <a:t>27/27 found; top-1 24/27</a:t>
+                      </a:r>
+                      <a:endParaRPr lang="en-US" sz="1250" dirty="0">
+                        <a:latin typeface="Calibri" charset="0"/>
+                        <a:ea typeface="Calibri" charset="0"/>
+                        <a:cs typeface="Calibri" charset="0"/>
+                      </a:endParaRPr>
+                    </a:p>
+                  </a:txBody>
+                  <a:tcPr marL="91440" marR="91440" marT="45720" marB="45720" anchor="ctr">
+                    <a:lnL w="6350" cap="flat" cmpd="sng" algn="ctr">
+                      <a:solidFill>
+                        <a:srgbClr val="D6DCEA"/>
+                      </a:solidFill>
+                      <a:prstDash val="solid"/>
+                      <a:round/>
+                      <a:headEnd type="none" w="med" len="med"/>
+                      <a:tailEnd type="none" w="med" len="med"/>
+                    </a:lnL>
+                    <a:lnR w="6350" cap="flat" cmpd="sng" algn="ctr">
+                      <a:solidFill>
+                        <a:srgbClr val="D6DCEA"/>
+                      </a:solidFill>
+                      <a:prstDash val="solid"/>
+                      <a:round/>
+                      <a:headEnd type="none" w="med" len="med"/>
+                      <a:tailEnd type="none" w="med" len="med"/>
+                    </a:lnR>
+                    <a:lnT w="6350" cap="flat" cmpd="sng" algn="ctr">
+                      <a:solidFill>
+                        <a:srgbClr val="D6DCEA"/>
+                      </a:solidFill>
+                      <a:prstDash val="solid"/>
+                      <a:round/>
+                      <a:headEnd type="none" w="med" len="med"/>
+                      <a:tailEnd type="none" w="med" len="med"/>
+                    </a:lnT>
+                    <a:lnB w="6350" cap="flat" cmpd="sng" algn="ctr">
+                      <a:solidFill>
+                        <a:srgbClr val="D6DCEA"/>
+                      </a:solidFill>
+                      <a:prstDash val="solid"/>
+                      <a:round/>
+                      <a:headEnd type="none" w="med" len="med"/>
+                      <a:tailEnd type="none" w="med" len="med"/>
+                    </a:lnB>
+                  </a:tcPr>
+                </a:tc>
+              </a:tr>
+              <a:tr h="530352">
+                <a:tc>
+                  <a:txBody>
+                    <a:bodyPr/>
+                    <a:lstStyle/>
+                    <a:p>
+                      <a:pPr indent="0" marL="0">
+                        <a:buNone/>
+                      </a:pPr>
+                      <a:r>
+                        <a:rPr lang="en-US" sz="1250" dirty="0">
+                          <a:solidFill>
+                            <a:srgbClr val="1C2333"/>
+                          </a:solidFill>
+                          <a:latin typeface="Calibri" pitchFamily="34" charset="0"/>
+                          <a:ea typeface="Calibri" pitchFamily="34" charset="-122"/>
+                          <a:cs typeface="Calibri" pitchFamily="34" charset="-120"/>
+                        </a:rPr>
+                        <a:t>Real desktop shell</a:t>
+                      </a:r>
+                      <a:endParaRPr lang="en-US" sz="1250" dirty="0">
+                        <a:latin typeface="Calibri" charset="0"/>
+                        <a:ea typeface="Calibri" charset="0"/>
+                        <a:cs typeface="Calibri" charset="0"/>
+                      </a:endParaRPr>
+                    </a:p>
+                  </a:txBody>
+                  <a:tcPr marL="91440" marR="91440" marT="45720" marB="45720" anchor="ctr">
+                    <a:lnL w="6350" cap="flat" cmpd="sng" algn="ctr">
+                      <a:solidFill>
+                        <a:srgbClr val="D6DCEA"/>
+                      </a:solidFill>
+                      <a:prstDash val="solid"/>
+                      <a:round/>
+                      <a:headEnd type="none" w="med" len="med"/>
+                      <a:tailEnd type="none" w="med" len="med"/>
+                    </a:lnL>
+                    <a:lnR w="6350" cap="flat" cmpd="sng" algn="ctr">
+                      <a:solidFill>
+                        <a:srgbClr val="D6DCEA"/>
+                      </a:solidFill>
+                      <a:prstDash val="solid"/>
+                      <a:round/>
+                      <a:headEnd type="none" w="med" len="med"/>
+                      <a:tailEnd type="none" w="med" len="med"/>
+                    </a:lnR>
+                    <a:lnT w="6350" cap="flat" cmpd="sng" algn="ctr">
+                      <a:solidFill>
+                        <a:srgbClr val="D6DCEA"/>
+                      </a:solidFill>
+                      <a:prstDash val="solid"/>
+                      <a:round/>
+                      <a:headEnd type="none" w="med" len="med"/>
+                      <a:tailEnd type="none" w="med" len="med"/>
+                    </a:lnT>
+                    <a:lnB w="6350" cap="flat" cmpd="sng" algn="ctr">
+                      <a:solidFill>
+                        <a:srgbClr val="D6DCEA"/>
+                      </a:solidFill>
+                      <a:prstDash val="solid"/>
+                      <a:round/>
+                      <a:headEnd type="none" w="med" len="med"/>
+                      <a:tailEnd type="none" w="med" len="med"/>
+                    </a:lnB>
+                  </a:tcPr>
+                </a:tc>
+                <a:tc>
+                  <a:txBody>
+                    <a:bodyPr/>
+                    <a:lstStyle/>
+                    <a:p>
+                      <a:pPr indent="0" marL="0">
+                        <a:buNone/>
+                      </a:pPr>
+                      <a:r>
+                        <a:rPr lang="en-US" sz="1250" dirty="0">
+                          <a:solidFill>
+                            <a:srgbClr val="1C2333"/>
+                          </a:solidFill>
+                          <a:latin typeface="Calibri" pitchFamily="34" charset="0"/>
+                          <a:ea typeface="Calibri" pitchFamily="34" charset="-122"/>
+                          <a:cs typeface="Calibri" pitchFamily="34" charset="-120"/>
+                        </a:rPr>
+                        <a:t>Workspace Open all and click-to-open driven over WebView2's debug port</a:t>
+                      </a:r>
+                      <a:endParaRPr lang="en-US" sz="1250" dirty="0">
+                        <a:latin typeface="Calibri" charset="0"/>
+                        <a:ea typeface="Calibri" charset="0"/>
+                        <a:cs typeface="Calibri" charset="0"/>
+                      </a:endParaRPr>
+                    </a:p>
+                  </a:txBody>
+                  <a:tcPr marL="91440" marR="91440" marT="45720" marB="45720" anchor="ctr">
+                    <a:lnL w="6350" cap="flat" cmpd="sng" algn="ctr">
+                      <a:solidFill>
+                        <a:srgbClr val="D6DCEA"/>
+                      </a:solidFill>
+                      <a:prstDash val="solid"/>
+                      <a:round/>
+                      <a:headEnd type="none" w="med" len="med"/>
+                      <a:tailEnd type="none" w="med" len="med"/>
+                    </a:lnL>
+                    <a:lnR w="6350" cap="flat" cmpd="sng" algn="ctr">
+                      <a:solidFill>
+                        <a:srgbClr val="D6DCEA"/>
+                      </a:solidFill>
+                      <a:prstDash val="solid"/>
+                      <a:round/>
+                      <a:headEnd type="none" w="med" len="med"/>
+                      <a:tailEnd type="none" w="med" len="med"/>
+                    </a:lnR>
+                    <a:lnT w="6350" cap="flat" cmpd="sng" algn="ctr">
+                      <a:solidFill>
+                        <a:srgbClr val="D6DCEA"/>
+                      </a:solidFill>
+                      <a:prstDash val="solid"/>
+                      <a:round/>
+                      <a:headEnd type="none" w="med" len="med"/>
+                      <a:tailEnd type="none" w="med" len="med"/>
+                    </a:lnT>
+                    <a:lnB w="6350" cap="flat" cmpd="sng" algn="ctr">
+                      <a:solidFill>
+                        <a:srgbClr val="D6DCEA"/>
+                      </a:solidFill>
+                      <a:prstDash val="solid"/>
+                      <a:round/>
+                      <a:headEnd type="none" w="med" len="med"/>
+                      <a:tailEnd type="none" w="med" len="med"/>
+                    </a:lnB>
+                  </a:tcPr>
+                </a:tc>
+                <a:tc>
+                  <a:txBody>
+                    <a:bodyPr/>
+                    <a:lstStyle/>
+                    <a:p>
+                      <a:pPr indent="0" marL="0">
+                        <a:buNone/>
+                      </a:pPr>
+                      <a:r>
+                        <a:rPr lang="en-US" sz="1250" dirty="0">
                           <a:solidFill>
                             <a:srgbClr val="1C2333"/>
                           </a:solidFill>
@@ -8242,7 +12337,7 @@
                         </a:rPr>
                         <a:t>No permission errors</a:t>
                       </a:r>
-                      <a:endParaRPr lang="en-US" sz="1350" dirty="0">
+                      <a:endParaRPr lang="en-US" sz="1250" dirty="0">
                         <a:latin typeface="Calibri" charset="0"/>
                         <a:ea typeface="Calibri" charset="0"/>
                         <a:cs typeface="Calibri" charset="0"/>
@@ -8295,14 +12390,14 @@
       </p:graphicFrame>
       <p:sp>
         <p:nvSpPr>
-          <p:cNvPr id="6" name="Text 3"/>
-          <p:cNvSpPr/>
-          <p:nvPr/>
-        </p:nvSpPr>
-        <p:spPr>
-          <a:xfrm>
-            <a:off x="548640" y="5806440"/>
-            <a:ext cx="11109960" cy="457200"/>
+          <p:cNvPr id="7" name="Text 4"/>
+          <p:cNvSpPr/>
+          <p:nvPr/>
+        </p:nvSpPr>
+        <p:spPr>
+          <a:xfrm>
+            <a:off x="548640" y="5989320"/>
+            <a:ext cx="11109960" cy="365760"/>
           </a:xfrm>
           <a:prstGeom prst="rect">
             <a:avLst/>
@@ -8326,7 +12421,7 @@
                 <a:ea typeface="Calibri" pitchFamily="34" charset="-122"/>
                 <a:cs typeface="Calibri" pitchFamily="34" charset="-120"/>
               </a:rPr>
-              <a:t>The tuning set reached 32/32 after the prompt change, but it was tuned against its own misses - the held-out figure is the honest one.</a:t>
+              <a:t>The intent prompt scored 32/32 on the tuning set it was tuned against - the held-out figure is the honest one.</a:t>
             </a:r>
             <a:endParaRPr lang="en-US" sz="1200" dirty="0"/>
           </a:p>
@@ -8340,9 +12435,9 @@
 </p:sld>
 </file>
 
-<file path=ppt/slides/slide19.xml><?xml version="1.0" encoding="utf-8"?>
+<file path=ppt/slides/slide21.xml><?xml version="1.0" encoding="utf-8"?>
 <p:sld xmlns:a="http://schemas.openxmlformats.org/drawingml/2006/main" xmlns:r="http://schemas.openxmlformats.org/officeDocument/2006/relationships" xmlns:p="http://schemas.openxmlformats.org/presentationml/2006/main">
-  <p:cSld name="Slide 19">
+  <p:cSld name="Slide 21">
     <p:bg>
       <p:bgPr>
         <a:solidFill>
@@ -8411,8 +12506,8 @@
         </p:nvSpPr>
         <p:spPr>
           <a:xfrm>
-            <a:off x="548640" y="6473952"/>
-            <a:ext cx="5486400" cy="274320"/>
+            <a:off x="548640" y="914400"/>
+            <a:ext cx="11064240" cy="365760"/>
           </a:xfrm>
           <a:prstGeom prst="rect">
             <a:avLst/>
@@ -8428,17 +12523,17 @@
               <a:buNone/>
             </a:pPr>
             <a:r>
-              <a:rPr lang="en-US" sz="1000" dirty="0">
-                <a:solidFill>
-                  <a:srgbClr val="8A93AA"/>
+              <a:rPr lang="en-US" sz="1400" dirty="0">
+                <a:solidFill>
+                  <a:srgbClr val="5B6478"/>
                 </a:solidFill>
                 <a:latin typeface="Calibri" pitchFamily="34" charset="0"/>
                 <a:ea typeface="Calibri" pitchFamily="34" charset="-122"/>
                 <a:cs typeface="Calibri" pitchFamily="34" charset="-120"/>
               </a:rPr>
-              <a:t>DreamOS - Project Monitoring II</a:t>
-            </a:r>
-            <a:endParaRPr lang="en-US" sz="1000" dirty="0"/>
+              <a:t>Report sections 5.8 and 6</a:t>
+            </a:r>
+            <a:endParaRPr lang="en-US" sz="1400" dirty="0"/>
           </a:p>
         </p:txBody>
       </p:sp>
@@ -8450,8 +12545,8 @@
         </p:nvSpPr>
         <p:spPr>
           <a:xfrm>
-            <a:off x="11064240" y="6473952"/>
-            <a:ext cx="594360" cy="274320"/>
+            <a:off x="548640" y="6473952"/>
+            <a:ext cx="5486400" cy="274320"/>
           </a:xfrm>
           <a:prstGeom prst="rect">
             <a:avLst/>
@@ -8463,7 +12558,7 @@
           <a:bodyPr wrap="square" lIns="0" tIns="0" rIns="0" bIns="0" rtlCol="0" anchor="ctr"/>
           <a:lstStyle/>
           <a:p>
-            <a:pPr algn="r" indent="0" marL="0">
+            <a:pPr indent="0" marL="0">
               <a:buNone/>
             </a:pPr>
             <a:r>
@@ -8475,7 +12570,7 @@
                 <a:ea typeface="Calibri" pitchFamily="34" charset="-122"/>
                 <a:cs typeface="Calibri" pitchFamily="34" charset="-120"/>
               </a:rPr>
-              <a:t>19</a:t>
+              <a:t>DreamOS - Project Monitoring II</a:t>
             </a:r>
             <a:endParaRPr lang="en-US" sz="1000" dirty="0"/>
           </a:p>
@@ -8483,14 +12578,53 @@
       </p:sp>
       <p:sp>
         <p:nvSpPr>
-          <p:cNvPr id="5" name="Shape 3"/>
-          <p:cNvSpPr/>
-          <p:nvPr/>
-        </p:nvSpPr>
-        <p:spPr>
-          <a:xfrm>
-            <a:off x="548640" y="1280160"/>
-            <a:ext cx="5440680" cy="4937760"/>
+          <p:cNvPr id="5" name="Text 3"/>
+          <p:cNvSpPr/>
+          <p:nvPr/>
+        </p:nvSpPr>
+        <p:spPr>
+          <a:xfrm>
+            <a:off x="11064240" y="6473952"/>
+            <a:ext cx="594360" cy="274320"/>
+          </a:xfrm>
+          <a:prstGeom prst="rect">
+            <a:avLst/>
+          </a:prstGeom>
+          <a:noFill/>
+          <a:ln/>
+        </p:spPr>
+        <p:txBody>
+          <a:bodyPr wrap="square" lIns="0" tIns="0" rIns="0" bIns="0" rtlCol="0" anchor="ctr"/>
+          <a:lstStyle/>
+          <a:p>
+            <a:pPr algn="r" indent="0" marL="0">
+              <a:buNone/>
+            </a:pPr>
+            <a:r>
+              <a:rPr lang="en-US" sz="1000" dirty="0">
+                <a:solidFill>
+                  <a:srgbClr val="8A93AA"/>
+                </a:solidFill>
+                <a:latin typeface="Calibri" pitchFamily="34" charset="0"/>
+                <a:ea typeface="Calibri" pitchFamily="34" charset="-122"/>
+                <a:cs typeface="Calibri" pitchFamily="34" charset="-120"/>
+              </a:rPr>
+              <a:t>21</a:t>
+            </a:r>
+            <a:endParaRPr lang="en-US" sz="1000" dirty="0"/>
+          </a:p>
+        </p:txBody>
+      </p:sp>
+      <p:sp>
+        <p:nvSpPr>
+          <p:cNvPr id="6" name="Shape 4"/>
+          <p:cNvSpPr/>
+          <p:nvPr/>
+        </p:nvSpPr>
+        <p:spPr>
+          <a:xfrm>
+            <a:off x="548640" y="1371600"/>
+            <a:ext cx="5440680" cy="4846320"/>
           </a:xfrm>
           <a:prstGeom prst="rect">
             <a:avLst/>
@@ -8510,14 +12644,14 @@
       </p:sp>
       <p:sp>
         <p:nvSpPr>
-          <p:cNvPr id="6" name="Shape 4"/>
-          <p:cNvSpPr/>
-          <p:nvPr/>
-        </p:nvSpPr>
-        <p:spPr>
-          <a:xfrm>
-            <a:off x="548640" y="1280160"/>
-            <a:ext cx="64008" cy="4937760"/>
+          <p:cNvPr id="7" name="Shape 5"/>
+          <p:cNvSpPr/>
+          <p:nvPr/>
+        </p:nvSpPr>
+        <p:spPr>
+          <a:xfrm>
+            <a:off x="548640" y="1371600"/>
+            <a:ext cx="64008" cy="4846320"/>
           </a:xfrm>
           <a:prstGeom prst="rect">
             <a:avLst/>
@@ -8530,13 +12664,13 @@
       </p:sp>
       <p:sp>
         <p:nvSpPr>
-          <p:cNvPr id="7" name="Text 5"/>
-          <p:cNvSpPr/>
-          <p:nvPr/>
-        </p:nvSpPr>
-        <p:spPr>
-          <a:xfrm>
-            <a:off x="822960" y="1417320"/>
+          <p:cNvPr id="8" name="Text 6"/>
+          <p:cNvSpPr/>
+          <p:nvPr/>
+        </p:nvSpPr>
+        <p:spPr>
+          <a:xfrm>
+            <a:off x="822960" y="1508760"/>
             <a:ext cx="4983480" cy="365760"/>
           </a:xfrm>
           <a:prstGeom prst="rect">
@@ -8569,14 +12703,14 @@
       </p:sp>
       <p:sp>
         <p:nvSpPr>
-          <p:cNvPr id="8" name="Text 6"/>
-          <p:cNvSpPr/>
-          <p:nvPr/>
-        </p:nvSpPr>
-        <p:spPr>
-          <a:xfrm>
-            <a:off x="822960" y="1874520"/>
-            <a:ext cx="4937760" cy="4206240"/>
+          <p:cNvPr id="9" name="Text 7"/>
+          <p:cNvSpPr/>
+          <p:nvPr/>
+        </p:nvSpPr>
+        <p:spPr>
+          <a:xfrm>
+            <a:off x="822960" y="1965960"/>
+            <a:ext cx="4937760" cy="4114800"/>
           </a:xfrm>
           <a:prstGeom prst="rect">
             <a:avLst/>
@@ -8596,7 +12730,7 @@
               <a:buChar char="•"/>
             </a:pPr>
             <a:r>
-              <a:rPr lang="en-US" sz="1500" dirty="0">
+              <a:rPr lang="en-US" sz="1400" dirty="0">
                 <a:solidFill>
                   <a:srgbClr val="1C2333"/>
                 </a:solidFill>
@@ -8604,9 +12738,9 @@
                 <a:ea typeface="Calibri" pitchFamily="34" charset="-122"/>
                 <a:cs typeface="Calibri" pitchFamily="34" charset="-120"/>
               </a:rPr>
-              <a:t>Short generic queries ("meeting") return nothing above the threshold, and "meeting notes" returns wrong files; descriptive queries work.</a:t>
-            </a:r>
-            <a:endParaRPr lang="en-US" sz="1500" dirty="0"/>
+              <a:t>Very short queries are best-effort: a file that merely contains the word can outrank the answer ("meeting notes" ranks workout_log first)</a:t>
+            </a:r>
+            <a:endParaRPr lang="en-US" sz="1400" dirty="0"/>
           </a:p>
           <a:p>
             <a:pPr marL="342900" indent="-342900">
@@ -8617,7 +12751,7 @@
               <a:buChar char="•"/>
             </a:pPr>
             <a:r>
-              <a:rPr lang="en-US" sz="1500" dirty="0">
+              <a:rPr lang="en-US" sz="1400" dirty="0">
                 <a:solidFill>
                   <a:srgbClr val="1C2333"/>
                 </a:solidFill>
@@ -8625,9 +12759,9 @@
                 <a:ea typeface="Calibri" pitchFamily="34" charset="-122"/>
                 <a:cs typeface="Calibri" pitchFamily="34" charset="-120"/>
               </a:rPr>
-              <a:t>Suspected cause, not yet tested: nomic-embed-text expects search_query / search_document prefixes the pipeline does not add.</a:t>
-            </a:r>
-            <a:endParaRPr lang="en-US" sz="1500" dirty="0"/>
+              <a:t>Off-topic file-shaped queries return labelled low-confidence guesses; non-file requests are turned away by the intent router</a:t>
+            </a:r>
+            <a:endParaRPr lang="en-US" sz="1400" dirty="0"/>
           </a:p>
           <a:p>
             <a:pPr marL="342900" indent="-342900">
@@ -8638,7 +12772,7 @@
               <a:buChar char="•"/>
             </a:pPr>
             <a:r>
-              <a:rPr lang="en-US" sz="1500" dirty="0">
+              <a:rPr lang="en-US" sz="1400" dirty="0">
                 <a:solidFill>
                   <a:srgbClr val="1C2333"/>
                 </a:solidFill>
@@ -8646,9 +12780,9 @@
                 <a:ea typeface="Calibri" pitchFamily="34" charset="-122"/>
                 <a:cs typeface="Calibri" pitchFamily="34" charset="-120"/>
               </a:rPr>
-              <a:t>The 3B intent router misses borderline wording ("which files should I archive").</a:t>
-            </a:r>
-            <a:endParaRPr lang="en-US" sz="1500" dirty="0"/>
+              <a:t>The 3B intent router misses borderline wording ("which files should I archive")</a:t>
+            </a:r>
+            <a:endParaRPr lang="en-US" sz="1400" dirty="0"/>
           </a:p>
           <a:p>
             <a:pPr marL="342900" indent="-342900">
@@ -8659,7 +12793,7 @@
               <a:buChar char="•"/>
             </a:pPr>
             <a:r>
-              <a:rPr lang="en-US" sz="1500" dirty="0">
+              <a:rPr lang="en-US" sz="1400" dirty="0">
                 <a:solidFill>
                   <a:srgbClr val="1C2333"/>
                 </a:solidFill>
@@ -8667,9 +12801,9 @@
                 <a:ea typeface="Calibri" pitchFamily="34" charset="-122"/>
                 <a:cs typeface="Calibri" pitchFamily="34" charset="-120"/>
               </a:rPr>
-              <a:t>Clustering is conservative: some related files stay unlinked.</a:t>
-            </a:r>
-            <a:endParaRPr lang="en-US" sz="1500" dirty="0"/>
+              <a:t>Clustering is conservative: some related files stay unlinked</a:t>
+            </a:r>
+            <a:endParaRPr lang="en-US" sz="1400" dirty="0"/>
           </a:p>
           <a:p>
             <a:pPr marL="342900" indent="-342900">
@@ -8680,7 +12814,7 @@
               <a:buChar char="•"/>
             </a:pPr>
             <a:r>
-              <a:rPr lang="en-US" sz="1500" dirty="0">
+              <a:rPr lang="en-US" sz="1400" dirty="0">
                 <a:solidFill>
                   <a:srgbClr val="1C2333"/>
                 </a:solidFill>
@@ -8688,22 +12822,22 @@
                 <a:ea typeface="Calibri" pitchFamily="34" charset="-122"/>
                 <a:cs typeface="Calibri" pitchFamily="34" charset="-120"/>
               </a:rPr>
-              <a:t>Similarity is pairwise - fine for tens to hundreds of files, not thousands.</a:t>
-            </a:r>
-            <a:endParaRPr lang="en-US" sz="1500" dirty="0"/>
+              <a:t>Similarity is pairwise and search scores every chunk: fine for hundreds of files, not thousands</a:t>
+            </a:r>
+            <a:endParaRPr lang="en-US" sz="1400" dirty="0"/>
           </a:p>
         </p:txBody>
       </p:sp>
       <p:sp>
         <p:nvSpPr>
-          <p:cNvPr id="9" name="Shape 7"/>
-          <p:cNvSpPr/>
-          <p:nvPr/>
-        </p:nvSpPr>
-        <p:spPr>
-          <a:xfrm>
-            <a:off x="6217920" y="1280160"/>
-            <a:ext cx="5440680" cy="4937760"/>
+          <p:cNvPr id="10" name="Shape 8"/>
+          <p:cNvSpPr/>
+          <p:nvPr/>
+        </p:nvSpPr>
+        <p:spPr>
+          <a:xfrm>
+            <a:off x="6217920" y="1371600"/>
+            <a:ext cx="5440680" cy="4846320"/>
           </a:xfrm>
           <a:prstGeom prst="rect">
             <a:avLst/>
@@ -8723,14 +12857,14 @@
       </p:sp>
       <p:sp>
         <p:nvSpPr>
-          <p:cNvPr id="10" name="Shape 8"/>
-          <p:cNvSpPr/>
-          <p:nvPr/>
-        </p:nvSpPr>
-        <p:spPr>
-          <a:xfrm>
-            <a:off x="6217920" y="1280160"/>
-            <a:ext cx="64008" cy="4937760"/>
+          <p:cNvPr id="11" name="Shape 9"/>
+          <p:cNvSpPr/>
+          <p:nvPr/>
+        </p:nvSpPr>
+        <p:spPr>
+          <a:xfrm>
+            <a:off x="6217920" y="1371600"/>
+            <a:ext cx="64008" cy="4846320"/>
           </a:xfrm>
           <a:prstGeom prst="rect">
             <a:avLst/>
@@ -8743,13 +12877,13 @@
       </p:sp>
       <p:sp>
         <p:nvSpPr>
-          <p:cNvPr id="11" name="Text 9"/>
-          <p:cNvSpPr/>
-          <p:nvPr/>
-        </p:nvSpPr>
-        <p:spPr>
-          <a:xfrm>
-            <a:off x="6492240" y="1417320"/>
+          <p:cNvPr id="12" name="Text 10"/>
+          <p:cNvSpPr/>
+          <p:nvPr/>
+        </p:nvSpPr>
+        <p:spPr>
+          <a:xfrm>
+            <a:off x="6492240" y="1508760"/>
             <a:ext cx="4983480" cy="365760"/>
           </a:xfrm>
           <a:prstGeom prst="rect">
@@ -8782,14 +12916,14 @@
       </p:sp>
       <p:sp>
         <p:nvSpPr>
-          <p:cNvPr id="12" name="Text 10"/>
-          <p:cNvSpPr/>
-          <p:nvPr/>
-        </p:nvSpPr>
-        <p:spPr>
-          <a:xfrm>
-            <a:off x="6492240" y="1874520"/>
-            <a:ext cx="4937760" cy="4206240"/>
+          <p:cNvPr id="13" name="Text 11"/>
+          <p:cNvSpPr/>
+          <p:nvPr/>
+        </p:nvSpPr>
+        <p:spPr>
+          <a:xfrm>
+            <a:off x="6492240" y="1965960"/>
+            <a:ext cx="4937760" cy="4114800"/>
           </a:xfrm>
           <a:prstGeom prst="rect">
             <a:avLst/>
@@ -8817,7 +12951,7 @@
                 <a:ea typeface="Calibri" pitchFamily="34" charset="-122"/>
                 <a:cs typeface="Calibri" pitchFamily="34" charset="-120"/>
               </a:rPr>
-              <a:t>Test the embedding-prefix hypothesis: re-embed, retune thresholds, compare retrieval quality.</a:t>
+              <a:t>Scale and performance: a larger vault, timing, an approximate neighbour method if needed</a:t>
             </a:r>
             <a:endParaRPr lang="en-US" sz="1450" dirty="0"/>
           </a:p>
@@ -8838,7 +12972,7 @@
                 <a:ea typeface="Calibri" pitchFamily="34" charset="-122"/>
                 <a:cs typeface="Calibri" pitchFamily="34" charset="-120"/>
               </a:rPr>
-              <a:t>Performance and scale testing on a larger vault; an approximate neighbour method if needed.</a:t>
+              <a:t>Retrieval: test the embedding-prefix option end to end, judged by the labelled evaluation set</a:t>
             </a:r>
             <a:endParaRPr lang="en-US" sz="1450" dirty="0"/>
           </a:p>
@@ -8859,7 +12993,7 @@
                 <a:ea typeface="Calibri" pitchFamily="34" charset="-122"/>
                 <a:cs typeface="Calibri" pitchFamily="34" charset="-120"/>
               </a:rPr>
-              <a:t>Final project report: results, discussion, conclusion, future scope.</a:t>
+              <a:t>Final project report: results, discussion, conclusion, future scope</a:t>
             </a:r>
             <a:endParaRPr lang="en-US" sz="1450" dirty="0"/>
           </a:p>
@@ -8880,7 +13014,7 @@
                 <a:ea typeface="Calibri" pitchFamily="34" charset="-122"/>
                 <a:cs typeface="Calibri" pitchFamily="34" charset="-120"/>
               </a:rPr>
-              <a:t>Prepare and submit the accompanying research paper.</a:t>
+              <a:t>Research paper, drawing on the measurements in this report</a:t>
             </a:r>
             <a:endParaRPr lang="en-US" sz="1450" dirty="0"/>
           </a:p>
@@ -8901,7 +13035,7 @@
                 <a:ea typeface="Calibri" pitchFamily="34" charset="-122"/>
                 <a:cs typeface="Calibri" pitchFamily="34" charset="-120"/>
               </a:rPr>
-              <a:t>Final GitHub submission and installer hand-off.</a:t>
+              <a:t>Final GitHub submission and installer hand-off</a:t>
             </a:r>
             <a:endParaRPr lang="en-US" sz="1450" dirty="0"/>
           </a:p>
@@ -8915,9 +13049,9 @@
 </p:sld>
 </file>
 
-<file path=ppt/slides/slide2.xml><?xml version="1.0" encoding="utf-8"?>
+<file path=ppt/slides/slide22.xml><?xml version="1.0" encoding="utf-8"?>
 <p:sld xmlns:a="http://schemas.openxmlformats.org/drawingml/2006/main" xmlns:r="http://schemas.openxmlformats.org/officeDocument/2006/relationships" xmlns:p="http://schemas.openxmlformats.org/presentationml/2006/main">
-  <p:cSld name="Slide 2">
+  <p:cSld name="Slide 22">
     <p:bg>
       <p:bgPr>
         <a:solidFill>
@@ -8972,7 +13106,7 @@
                 <a:ea typeface="Trebuchet MS" pitchFamily="34" charset="-122"/>
                 <a:cs typeface="Trebuchet MS" pitchFamily="34" charset="-120"/>
               </a:rPr>
-              <a:t>Problem statement and objectives</a:t>
+              <a:t>References</a:t>
             </a:r>
             <a:endParaRPr lang="en-US" sz="2800" dirty="0"/>
           </a:p>
@@ -9050,1253 +13184,7 @@
                 <a:ea typeface="Calibri" pitchFamily="34" charset="-122"/>
                 <a:cs typeface="Calibri" pitchFamily="34" charset="-120"/>
               </a:rPr>
-              <a:t>2</a:t>
-            </a:r>
-            <a:endParaRPr lang="en-US" sz="1000" dirty="0"/>
-          </a:p>
-        </p:txBody>
-      </p:sp>
-      <p:sp>
-        <p:nvSpPr>
-          <p:cNvPr id="5" name="Shape 3"/>
-          <p:cNvSpPr/>
-          <p:nvPr/>
-        </p:nvSpPr>
-        <p:spPr>
-          <a:xfrm>
-            <a:off x="548640" y="1280160"/>
-            <a:ext cx="4937760" cy="4892040"/>
-          </a:xfrm>
-          <a:prstGeom prst="rect">
-            <a:avLst/>
-          </a:prstGeom>
-          <a:solidFill>
-            <a:srgbClr val="FFFFFF"/>
-          </a:solidFill>
-          <a:ln/>
-          <a:effectLst>
-            <a:outerShdw sx="100000" sy="100000" kx="0" ky="0" algn="bl" rotWithShape="0" blurRad="76200" dist="25400" dir="8100000">
-              <a:srgbClr val="000000">
-                <a:alpha val="10000"/>
-              </a:srgbClr>
-            </a:outerShdw>
-          </a:effectLst>
-        </p:spPr>
-      </p:sp>
-      <p:sp>
-        <p:nvSpPr>
-          <p:cNvPr id="6" name="Shape 4"/>
-          <p:cNvSpPr/>
-          <p:nvPr/>
-        </p:nvSpPr>
-        <p:spPr>
-          <a:xfrm>
-            <a:off x="548640" y="1280160"/>
-            <a:ext cx="64008" cy="4892040"/>
-          </a:xfrm>
-          <a:prstGeom prst="rect">
-            <a:avLst/>
-          </a:prstGeom>
-          <a:solidFill>
-            <a:srgbClr val="C0475B"/>
-          </a:solidFill>
-          <a:ln/>
-        </p:spPr>
-      </p:sp>
-      <p:sp>
-        <p:nvSpPr>
-          <p:cNvPr id="7" name="Text 5"/>
-          <p:cNvSpPr/>
-          <p:nvPr/>
-        </p:nvSpPr>
-        <p:spPr>
-          <a:xfrm>
-            <a:off x="822960" y="1417320"/>
-            <a:ext cx="4389120" cy="320040"/>
-          </a:xfrm>
-          <a:prstGeom prst="rect">
-            <a:avLst/>
-          </a:prstGeom>
-          <a:noFill/>
-          <a:ln/>
-        </p:spPr>
-        <p:txBody>
-          <a:bodyPr wrap="square" lIns="0" tIns="0" rIns="0" bIns="0" rtlCol="0" anchor="ctr"/>
-          <a:lstStyle/>
-          <a:p>
-            <a:pPr indent="0" marL="0">
-              <a:buNone/>
-            </a:pPr>
-            <a:r>
-              <a:rPr lang="en-US" sz="1250" b="1" dirty="0">
-                <a:solidFill>
-                  <a:srgbClr val="C0475B"/>
-                </a:solidFill>
-                <a:latin typeface="Trebuchet MS" pitchFamily="34" charset="0"/>
-                <a:ea typeface="Trebuchet MS" pitchFamily="34" charset="-122"/>
-                <a:cs typeface="Trebuchet MS" pitchFamily="34" charset="-120"/>
-              </a:rPr>
-              <a:t>THE PROBLEM</a:t>
-            </a:r>
-            <a:endParaRPr lang="en-US" sz="1250" dirty="0"/>
-          </a:p>
-        </p:txBody>
-      </p:sp>
-      <p:sp>
-        <p:nvSpPr>
-          <p:cNvPr id="8" name="Text 6"/>
-          <p:cNvSpPr/>
-          <p:nvPr/>
-        </p:nvSpPr>
-        <p:spPr>
-          <a:xfrm>
-            <a:off x="822960" y="1783080"/>
-            <a:ext cx="4389120" cy="1828800"/>
-          </a:xfrm>
-          <a:prstGeom prst="rect">
-            <a:avLst/>
-          </a:prstGeom>
-          <a:noFill/>
-          <a:ln/>
-        </p:spPr>
-        <p:txBody>
-          <a:bodyPr wrap="square" lIns="0" tIns="0" rIns="0" bIns="0" rtlCol="0" anchor="t"/>
-          <a:lstStyle/>
-          <a:p>
-            <a:pPr indent="0" marL="0">
-              <a:buNone/>
-            </a:pPr>
-            <a:r>
-              <a:rPr lang="en-US" sz="1400" dirty="0">
-                <a:solidFill>
-                  <a:srgbClr val="1C2333"/>
-                </a:solidFill>
-                <a:latin typeface="Calibri" pitchFamily="34" charset="0"/>
-                <a:ea typeface="Calibri" pitchFamily="34" charset="-122"/>
-                <a:cs typeface="Calibri" pitchFamily="34" charset="-120"/>
-              </a:rPr>
-              <a:t>Desktop operating systems organize files around folders and filenames chosen at the moment of saving. As a machine grows to thousands of files, this breaks down: the name chosen months ago rarely matches how the file is described today.</a:t>
-            </a:r>
-            <a:endParaRPr lang="en-US" sz="1400" dirty="0"/>
-          </a:p>
-        </p:txBody>
-      </p:sp>
-      <p:sp>
-        <p:nvSpPr>
-          <p:cNvPr id="9" name="Text 7"/>
-          <p:cNvSpPr/>
-          <p:nvPr/>
-        </p:nvSpPr>
-        <p:spPr>
-          <a:xfrm>
-            <a:off x="822960" y="3703320"/>
-            <a:ext cx="4389120" cy="2286000"/>
-          </a:xfrm>
-          <a:prstGeom prst="rect">
-            <a:avLst/>
-          </a:prstGeom>
-          <a:noFill/>
-          <a:ln/>
-        </p:spPr>
-        <p:txBody>
-          <a:bodyPr wrap="square" lIns="0" tIns="0" rIns="0" bIns="0" rtlCol="0" anchor="t"/>
-          <a:lstStyle/>
-          <a:p>
-            <a:pPr indent="0" marL="0">
-              <a:buNone/>
-            </a:pPr>
-            <a:r>
-              <a:rPr lang="en-US" sz="1350" i="1" dirty="0">
-                <a:solidFill>
-                  <a:srgbClr val="5B6478"/>
-                </a:solidFill>
-                <a:latin typeface="Calibri" pitchFamily="34" charset="0"/>
-                <a:ea typeface="Calibri" pitchFamily="34" charset="-122"/>
-                <a:cs typeface="Calibri" pitchFamily="34" charset="-120"/>
-              </a:rPr>
-              <a:t>Design and implement a locally-run, AI-native file management layer that retrieves, opens and organizes files by describing their meaning in natural language - without exact names, folder locations or a cloud service.</a:t>
-            </a:r>
-            <a:endParaRPr lang="en-US" sz="1350" dirty="0"/>
-          </a:p>
-        </p:txBody>
-      </p:sp>
-      <p:sp>
-        <p:nvSpPr>
-          <p:cNvPr id="10" name="Text 8"/>
-          <p:cNvSpPr/>
-          <p:nvPr/>
-        </p:nvSpPr>
-        <p:spPr>
-          <a:xfrm>
-            <a:off x="5852160" y="1280160"/>
-            <a:ext cx="5486400" cy="320040"/>
-          </a:xfrm>
-          <a:prstGeom prst="rect">
-            <a:avLst/>
-          </a:prstGeom>
-          <a:noFill/>
-          <a:ln/>
-        </p:spPr>
-        <p:txBody>
-          <a:bodyPr wrap="square" lIns="0" tIns="0" rIns="0" bIns="0" rtlCol="0" anchor="ctr"/>
-          <a:lstStyle/>
-          <a:p>
-            <a:pPr indent="0" marL="0">
-              <a:buNone/>
-            </a:pPr>
-            <a:r>
-              <a:rPr lang="en-US" sz="1250" b="1" dirty="0">
-                <a:solidFill>
-                  <a:srgbClr val="2E7D32"/>
-                </a:solidFill>
-                <a:latin typeface="Trebuchet MS" pitchFamily="34" charset="0"/>
-                <a:ea typeface="Trebuchet MS" pitchFamily="34" charset="-122"/>
-                <a:cs typeface="Trebuchet MS" pitchFamily="34" charset="-120"/>
-              </a:rPr>
-              <a:t>OBJECTIVES - ALL DELIVERED</a:t>
-            </a:r>
-            <a:endParaRPr lang="en-US" sz="1250" dirty="0"/>
-          </a:p>
-        </p:txBody>
-      </p:sp>
-      <p:sp>
-        <p:nvSpPr>
-          <p:cNvPr id="11" name="Shape 9"/>
-          <p:cNvSpPr/>
-          <p:nvPr/>
-        </p:nvSpPr>
-        <p:spPr>
-          <a:xfrm>
-            <a:off x="5852160" y="1737360"/>
-            <a:ext cx="5806440" cy="621792"/>
-          </a:xfrm>
-          <a:prstGeom prst="rect">
-            <a:avLst/>
-          </a:prstGeom>
-          <a:solidFill>
-            <a:srgbClr val="FFFFFF"/>
-          </a:solidFill>
-          <a:ln/>
-          <a:effectLst>
-            <a:outerShdw sx="100000" sy="100000" kx="0" ky="0" algn="bl" rotWithShape="0" blurRad="76200" dist="25400" dir="8100000">
-              <a:srgbClr val="000000">
-                <a:alpha val="10000"/>
-              </a:srgbClr>
-            </a:outerShdw>
-          </a:effectLst>
-        </p:spPr>
-      </p:sp>
-      <p:sp>
-        <p:nvSpPr>
-          <p:cNvPr id="12" name="Shape 10"/>
-          <p:cNvSpPr/>
-          <p:nvPr/>
-        </p:nvSpPr>
-        <p:spPr>
-          <a:xfrm>
-            <a:off x="5852160" y="1737360"/>
-            <a:ext cx="64008" cy="621792"/>
-          </a:xfrm>
-          <a:prstGeom prst="rect">
-            <a:avLst/>
-          </a:prstGeom>
-          <a:solidFill>
-            <a:srgbClr val="2E7D32"/>
-          </a:solidFill>
-          <a:ln/>
-        </p:spPr>
-      </p:sp>
-      <p:sp>
-        <p:nvSpPr>
-          <p:cNvPr id="13" name="Text 11"/>
-          <p:cNvSpPr/>
-          <p:nvPr/>
-        </p:nvSpPr>
-        <p:spPr>
-          <a:xfrm>
-            <a:off x="6035040" y="1737360"/>
-            <a:ext cx="365760" cy="621792"/>
-          </a:xfrm>
-          <a:prstGeom prst="rect">
-            <a:avLst/>
-          </a:prstGeom>
-          <a:noFill/>
-          <a:ln/>
-        </p:spPr>
-        <p:txBody>
-          <a:bodyPr wrap="square" lIns="0" tIns="0" rIns="0" bIns="0" rtlCol="0" anchor="ctr"/>
-          <a:lstStyle/>
-          <a:p>
-            <a:pPr indent="0" marL="0">
-              <a:buNone/>
-            </a:pPr>
-            <a:r>
-              <a:rPr lang="en-US" sz="1600" b="1" dirty="0">
-                <a:solidFill>
-                  <a:srgbClr val="2E7D32"/>
-                </a:solidFill>
-                <a:latin typeface="Trebuchet MS" pitchFamily="34" charset="0"/>
-                <a:ea typeface="Trebuchet MS" pitchFamily="34" charset="-122"/>
-                <a:cs typeface="Trebuchet MS" pitchFamily="34" charset="-120"/>
-              </a:rPr>
-              <a:t>1</a:t>
-            </a:r>
-            <a:endParaRPr lang="en-US" sz="1600" dirty="0"/>
-          </a:p>
-        </p:txBody>
-      </p:sp>
-      <p:sp>
-        <p:nvSpPr>
-          <p:cNvPr id="14" name="Text 12"/>
-          <p:cNvSpPr/>
-          <p:nvPr/>
-        </p:nvSpPr>
-        <p:spPr>
-          <a:xfrm>
-            <a:off x="6446520" y="1737360"/>
-            <a:ext cx="4846320" cy="621792"/>
-          </a:xfrm>
-          <a:prstGeom prst="rect">
-            <a:avLst/>
-          </a:prstGeom>
-          <a:noFill/>
-          <a:ln/>
-        </p:spPr>
-        <p:txBody>
-          <a:bodyPr wrap="square" lIns="0" tIns="0" rIns="0" bIns="0" rtlCol="0" anchor="ctr"/>
-          <a:lstStyle/>
-          <a:p>
-            <a:pPr indent="0" marL="0">
-              <a:buNone/>
-            </a:pPr>
-            <a:r>
-              <a:rPr lang="en-US" sz="1250" dirty="0">
-                <a:solidFill>
-                  <a:srgbClr val="1C2333"/>
-                </a:solidFill>
-                <a:latin typeface="Calibri" pitchFamily="34" charset="0"/>
-                <a:ea typeface="Calibri" pitchFamily="34" charset="-122"/>
-                <a:cs typeface="Calibri" pitchFamily="34" charset="-120"/>
-              </a:rPr>
-              <a:t>Semantic index of a file vault using local embedding models</a:t>
-            </a:r>
-            <a:endParaRPr lang="en-US" sz="1250" dirty="0"/>
-          </a:p>
-        </p:txBody>
-      </p:sp>
-      <p:pic>
-        <p:nvPicPr>
-          <p:cNvPr id="15" name="Image 0" descr="preencoded.png">    </p:cNvPr>
-          <p:cNvPicPr>
-            <a:picLocks noChangeAspect="1"/>
-          </p:cNvPicPr>
-          <p:nvPr/>
-        </p:nvPicPr>
-        <p:blipFill>
-          <a:blip r:embed="rId1"/>
-          <a:stretch>
-            <a:fillRect/>
-          </a:stretch>
-        </p:blipFill>
-        <p:spPr>
-          <a:xfrm>
-            <a:off x="11247120" y="1920240"/>
-            <a:ext cx="256032" cy="256032"/>
-          </a:xfrm>
-          <a:prstGeom prst="rect">
-            <a:avLst/>
-          </a:prstGeom>
-        </p:spPr>
-      </p:pic>
-      <p:sp>
-        <p:nvSpPr>
-          <p:cNvPr id="16" name="Shape 13"/>
-          <p:cNvSpPr/>
-          <p:nvPr/>
-        </p:nvSpPr>
-        <p:spPr>
-          <a:xfrm>
-            <a:off x="5852160" y="2468880"/>
-            <a:ext cx="5806440" cy="621792"/>
-          </a:xfrm>
-          <a:prstGeom prst="rect">
-            <a:avLst/>
-          </a:prstGeom>
-          <a:solidFill>
-            <a:srgbClr val="FFFFFF"/>
-          </a:solidFill>
-          <a:ln/>
-          <a:effectLst>
-            <a:outerShdw sx="100000" sy="100000" kx="0" ky="0" algn="bl" rotWithShape="0" blurRad="76200" dist="25400" dir="8100000">
-              <a:srgbClr val="000000">
-                <a:alpha val="10000"/>
-              </a:srgbClr>
-            </a:outerShdw>
-          </a:effectLst>
-        </p:spPr>
-      </p:sp>
-      <p:sp>
-        <p:nvSpPr>
-          <p:cNvPr id="17" name="Shape 14"/>
-          <p:cNvSpPr/>
-          <p:nvPr/>
-        </p:nvSpPr>
-        <p:spPr>
-          <a:xfrm>
-            <a:off x="5852160" y="2468880"/>
-            <a:ext cx="64008" cy="621792"/>
-          </a:xfrm>
-          <a:prstGeom prst="rect">
-            <a:avLst/>
-          </a:prstGeom>
-          <a:solidFill>
-            <a:srgbClr val="2E7D32"/>
-          </a:solidFill>
-          <a:ln/>
-        </p:spPr>
-      </p:sp>
-      <p:sp>
-        <p:nvSpPr>
-          <p:cNvPr id="18" name="Text 15"/>
-          <p:cNvSpPr/>
-          <p:nvPr/>
-        </p:nvSpPr>
-        <p:spPr>
-          <a:xfrm>
-            <a:off x="6035040" y="2468880"/>
-            <a:ext cx="365760" cy="621792"/>
-          </a:xfrm>
-          <a:prstGeom prst="rect">
-            <a:avLst/>
-          </a:prstGeom>
-          <a:noFill/>
-          <a:ln/>
-        </p:spPr>
-        <p:txBody>
-          <a:bodyPr wrap="square" lIns="0" tIns="0" rIns="0" bIns="0" rtlCol="0" anchor="ctr"/>
-          <a:lstStyle/>
-          <a:p>
-            <a:pPr indent="0" marL="0">
-              <a:buNone/>
-            </a:pPr>
-            <a:r>
-              <a:rPr lang="en-US" sz="1600" b="1" dirty="0">
-                <a:solidFill>
-                  <a:srgbClr val="2E7D32"/>
-                </a:solidFill>
-                <a:latin typeface="Trebuchet MS" pitchFamily="34" charset="0"/>
-                <a:ea typeface="Trebuchet MS" pitchFamily="34" charset="-122"/>
-                <a:cs typeface="Trebuchet MS" pitchFamily="34" charset="-120"/>
-              </a:rPr>
-              <a:t>2</a:t>
-            </a:r>
-            <a:endParaRPr lang="en-US" sz="1600" dirty="0"/>
-          </a:p>
-        </p:txBody>
-      </p:sp>
-      <p:sp>
-        <p:nvSpPr>
-          <p:cNvPr id="19" name="Text 16"/>
-          <p:cNvSpPr/>
-          <p:nvPr/>
-        </p:nvSpPr>
-        <p:spPr>
-          <a:xfrm>
-            <a:off x="6446520" y="2468880"/>
-            <a:ext cx="4846320" cy="621792"/>
-          </a:xfrm>
-          <a:prstGeom prst="rect">
-            <a:avLst/>
-          </a:prstGeom>
-          <a:noFill/>
-          <a:ln/>
-        </p:spPr>
-        <p:txBody>
-          <a:bodyPr wrap="square" lIns="0" tIns="0" rIns="0" bIns="0" rtlCol="0" anchor="ctr"/>
-          <a:lstStyle/>
-          <a:p>
-            <a:pPr indent="0" marL="0">
-              <a:buNone/>
-            </a:pPr>
-            <a:r>
-              <a:rPr lang="en-US" sz="1250" dirty="0">
-                <a:solidFill>
-                  <a:srgbClr val="1C2333"/>
-                </a:solidFill>
-                <a:latin typeface="Calibri" pitchFamily="34" charset="0"/>
-                <a:ea typeface="Calibri" pitchFamily="34" charset="-122"/>
-                <a:cs typeface="Calibri" pitchFamily="34" charset="-120"/>
-              </a:rPr>
-              <a:t>One natural-language interface that classifies intent and routes it</a:t>
-            </a:r>
-            <a:endParaRPr lang="en-US" sz="1250" dirty="0"/>
-          </a:p>
-        </p:txBody>
-      </p:sp>
-      <p:pic>
-        <p:nvPicPr>
-          <p:cNvPr id="20" name="Image 1" descr="preencoded.png">    </p:cNvPr>
-          <p:cNvPicPr>
-            <a:picLocks noChangeAspect="1"/>
-          </p:cNvPicPr>
-          <p:nvPr/>
-        </p:nvPicPr>
-        <p:blipFill>
-          <a:blip r:embed="rId2"/>
-          <a:stretch>
-            <a:fillRect/>
-          </a:stretch>
-        </p:blipFill>
-        <p:spPr>
-          <a:xfrm>
-            <a:off x="11247120" y="2651760"/>
-            <a:ext cx="256032" cy="256032"/>
-          </a:xfrm>
-          <a:prstGeom prst="rect">
-            <a:avLst/>
-          </a:prstGeom>
-        </p:spPr>
-      </p:pic>
-      <p:sp>
-        <p:nvSpPr>
-          <p:cNvPr id="21" name="Shape 17"/>
-          <p:cNvSpPr/>
-          <p:nvPr/>
-        </p:nvSpPr>
-        <p:spPr>
-          <a:xfrm>
-            <a:off x="5852160" y="3200400"/>
-            <a:ext cx="5806440" cy="621792"/>
-          </a:xfrm>
-          <a:prstGeom prst="rect">
-            <a:avLst/>
-          </a:prstGeom>
-          <a:solidFill>
-            <a:srgbClr val="FFFFFF"/>
-          </a:solidFill>
-          <a:ln/>
-          <a:effectLst>
-            <a:outerShdw sx="100000" sy="100000" kx="0" ky="0" algn="bl" rotWithShape="0" blurRad="76200" dist="25400" dir="8100000">
-              <a:srgbClr val="000000">
-                <a:alpha val="10000"/>
-              </a:srgbClr>
-            </a:outerShdw>
-          </a:effectLst>
-        </p:spPr>
-      </p:sp>
-      <p:sp>
-        <p:nvSpPr>
-          <p:cNvPr id="22" name="Shape 18"/>
-          <p:cNvSpPr/>
-          <p:nvPr/>
-        </p:nvSpPr>
-        <p:spPr>
-          <a:xfrm>
-            <a:off x="5852160" y="3200400"/>
-            <a:ext cx="64008" cy="621792"/>
-          </a:xfrm>
-          <a:prstGeom prst="rect">
-            <a:avLst/>
-          </a:prstGeom>
-          <a:solidFill>
-            <a:srgbClr val="2E7D32"/>
-          </a:solidFill>
-          <a:ln/>
-        </p:spPr>
-      </p:sp>
-      <p:sp>
-        <p:nvSpPr>
-          <p:cNvPr id="23" name="Text 19"/>
-          <p:cNvSpPr/>
-          <p:nvPr/>
-        </p:nvSpPr>
-        <p:spPr>
-          <a:xfrm>
-            <a:off x="6035040" y="3200400"/>
-            <a:ext cx="365760" cy="621792"/>
-          </a:xfrm>
-          <a:prstGeom prst="rect">
-            <a:avLst/>
-          </a:prstGeom>
-          <a:noFill/>
-          <a:ln/>
-        </p:spPr>
-        <p:txBody>
-          <a:bodyPr wrap="square" lIns="0" tIns="0" rIns="0" bIns="0" rtlCol="0" anchor="ctr"/>
-          <a:lstStyle/>
-          <a:p>
-            <a:pPr indent="0" marL="0">
-              <a:buNone/>
-            </a:pPr>
-            <a:r>
-              <a:rPr lang="en-US" sz="1600" b="1" dirty="0">
-                <a:solidFill>
-                  <a:srgbClr val="2E7D32"/>
-                </a:solidFill>
-                <a:latin typeface="Trebuchet MS" pitchFamily="34" charset="0"/>
-                <a:ea typeface="Trebuchet MS" pitchFamily="34" charset="-122"/>
-                <a:cs typeface="Trebuchet MS" pitchFamily="34" charset="-120"/>
-              </a:rPr>
-              <a:t>3</a:t>
-            </a:r>
-            <a:endParaRPr lang="en-US" sz="1600" dirty="0"/>
-          </a:p>
-        </p:txBody>
-      </p:sp>
-      <p:sp>
-        <p:nvSpPr>
-          <p:cNvPr id="24" name="Text 20"/>
-          <p:cNvSpPr/>
-          <p:nvPr/>
-        </p:nvSpPr>
-        <p:spPr>
-          <a:xfrm>
-            <a:off x="6446520" y="3200400"/>
-            <a:ext cx="4846320" cy="621792"/>
-          </a:xfrm>
-          <a:prstGeom prst="rect">
-            <a:avLst/>
-          </a:prstGeom>
-          <a:noFill/>
-          <a:ln/>
-        </p:spPr>
-        <p:txBody>
-          <a:bodyPr wrap="square" lIns="0" tIns="0" rIns="0" bIns="0" rtlCol="0" anchor="ctr"/>
-          <a:lstStyle/>
-          <a:p>
-            <a:pPr indent="0" marL="0">
-              <a:buNone/>
-            </a:pPr>
-            <a:r>
-              <a:rPr lang="en-US" sz="1250" dirty="0">
-                <a:solidFill>
-                  <a:srgbClr val="1C2333"/>
-                </a:solidFill>
-                <a:latin typeface="Calibri" pitchFamily="34" charset="0"/>
-                <a:ea typeface="Calibri" pitchFamily="34" charset="-122"/>
-                <a:cs typeface="Calibri" pitchFamily="34" charset="-120"/>
-              </a:rPr>
-              <a:t>Retrieve by meaning, ranked by similarity; open the top match directly</a:t>
-            </a:r>
-            <a:endParaRPr lang="en-US" sz="1250" dirty="0"/>
-          </a:p>
-        </p:txBody>
-      </p:sp>
-      <p:pic>
-        <p:nvPicPr>
-          <p:cNvPr id="25" name="Image 2" descr="preencoded.png">    </p:cNvPr>
-          <p:cNvPicPr>
-            <a:picLocks noChangeAspect="1"/>
-          </p:cNvPicPr>
-          <p:nvPr/>
-        </p:nvPicPr>
-        <p:blipFill>
-          <a:blip r:embed="rId3"/>
-          <a:stretch>
-            <a:fillRect/>
-          </a:stretch>
-        </p:blipFill>
-        <p:spPr>
-          <a:xfrm>
-            <a:off x="11247120" y="3383280"/>
-            <a:ext cx="256032" cy="256032"/>
-          </a:xfrm>
-          <a:prstGeom prst="rect">
-            <a:avLst/>
-          </a:prstGeom>
-        </p:spPr>
-      </p:pic>
-      <p:sp>
-        <p:nvSpPr>
-          <p:cNvPr id="26" name="Shape 21"/>
-          <p:cNvSpPr/>
-          <p:nvPr/>
-        </p:nvSpPr>
-        <p:spPr>
-          <a:xfrm>
-            <a:off x="5852160" y="3931920"/>
-            <a:ext cx="5806440" cy="621792"/>
-          </a:xfrm>
-          <a:prstGeom prst="rect">
-            <a:avLst/>
-          </a:prstGeom>
-          <a:solidFill>
-            <a:srgbClr val="FFFFFF"/>
-          </a:solidFill>
-          <a:ln/>
-          <a:effectLst>
-            <a:outerShdw sx="100000" sy="100000" kx="0" ky="0" algn="bl" rotWithShape="0" blurRad="76200" dist="25400" dir="8100000">
-              <a:srgbClr val="000000">
-                <a:alpha val="10000"/>
-              </a:srgbClr>
-            </a:outerShdw>
-          </a:effectLst>
-        </p:spPr>
-      </p:sp>
-      <p:sp>
-        <p:nvSpPr>
-          <p:cNvPr id="27" name="Shape 22"/>
-          <p:cNvSpPr/>
-          <p:nvPr/>
-        </p:nvSpPr>
-        <p:spPr>
-          <a:xfrm>
-            <a:off x="5852160" y="3931920"/>
-            <a:ext cx="64008" cy="621792"/>
-          </a:xfrm>
-          <a:prstGeom prst="rect">
-            <a:avLst/>
-          </a:prstGeom>
-          <a:solidFill>
-            <a:srgbClr val="2E7D32"/>
-          </a:solidFill>
-          <a:ln/>
-        </p:spPr>
-      </p:sp>
-      <p:sp>
-        <p:nvSpPr>
-          <p:cNvPr id="28" name="Text 23"/>
-          <p:cNvSpPr/>
-          <p:nvPr/>
-        </p:nvSpPr>
-        <p:spPr>
-          <a:xfrm>
-            <a:off x="6035040" y="3931920"/>
-            <a:ext cx="365760" cy="621792"/>
-          </a:xfrm>
-          <a:prstGeom prst="rect">
-            <a:avLst/>
-          </a:prstGeom>
-          <a:noFill/>
-          <a:ln/>
-        </p:spPr>
-        <p:txBody>
-          <a:bodyPr wrap="square" lIns="0" tIns="0" rIns="0" bIns="0" rtlCol="0" anchor="ctr"/>
-          <a:lstStyle/>
-          <a:p>
-            <a:pPr indent="0" marL="0">
-              <a:buNone/>
-            </a:pPr>
-            <a:r>
-              <a:rPr lang="en-US" sz="1600" b="1" dirty="0">
-                <a:solidFill>
-                  <a:srgbClr val="2E7D32"/>
-                </a:solidFill>
-                <a:latin typeface="Trebuchet MS" pitchFamily="34" charset="0"/>
-                <a:ea typeface="Trebuchet MS" pitchFamily="34" charset="-122"/>
-                <a:cs typeface="Trebuchet MS" pitchFamily="34" charset="-120"/>
-              </a:rPr>
-              <a:t>4</a:t>
-            </a:r>
-            <a:endParaRPr lang="en-US" sz="1600" dirty="0"/>
-          </a:p>
-        </p:txBody>
-      </p:sp>
-      <p:sp>
-        <p:nvSpPr>
-          <p:cNvPr id="29" name="Text 24"/>
-          <p:cNvSpPr/>
-          <p:nvPr/>
-        </p:nvSpPr>
-        <p:spPr>
-          <a:xfrm>
-            <a:off x="6446520" y="3931920"/>
-            <a:ext cx="4846320" cy="621792"/>
-          </a:xfrm>
-          <a:prstGeom prst="rect">
-            <a:avLst/>
-          </a:prstGeom>
-          <a:noFill/>
-          <a:ln/>
-        </p:spPr>
-        <p:txBody>
-          <a:bodyPr wrap="square" lIns="0" tIns="0" rIns="0" bIns="0" rtlCol="0" anchor="ctr"/>
-          <a:lstStyle/>
-          <a:p>
-            <a:pPr indent="0" marL="0">
-              <a:buNone/>
-            </a:pPr>
-            <a:r>
-              <a:rPr lang="en-US" sz="1250" dirty="0">
-                <a:solidFill>
-                  <a:srgbClr val="1C2333"/>
-                </a:solidFill>
-                <a:latin typeface="Calibri" pitchFamily="34" charset="0"/>
-                <a:ea typeface="Calibri" pitchFamily="34" charset="-122"/>
-                <a:cs typeface="Calibri" pitchFamily="34" charset="-120"/>
-              </a:rPr>
-              <a:t>Local LLM summary, tags and category, applied reversibly</a:t>
-            </a:r>
-            <a:endParaRPr lang="en-US" sz="1250" dirty="0"/>
-          </a:p>
-        </p:txBody>
-      </p:sp>
-      <p:pic>
-        <p:nvPicPr>
-          <p:cNvPr id="30" name="Image 3" descr="preencoded.png">    </p:cNvPr>
-          <p:cNvPicPr>
-            <a:picLocks noChangeAspect="1"/>
-          </p:cNvPicPr>
-          <p:nvPr/>
-        </p:nvPicPr>
-        <p:blipFill>
-          <a:blip r:embed="rId4"/>
-          <a:stretch>
-            <a:fillRect/>
-          </a:stretch>
-        </p:blipFill>
-        <p:spPr>
-          <a:xfrm>
-            <a:off x="11247120" y="4114800"/>
-            <a:ext cx="256032" cy="256032"/>
-          </a:xfrm>
-          <a:prstGeom prst="rect">
-            <a:avLst/>
-          </a:prstGeom>
-        </p:spPr>
-      </p:pic>
-      <p:sp>
-        <p:nvSpPr>
-          <p:cNvPr id="31" name="Shape 25"/>
-          <p:cNvSpPr/>
-          <p:nvPr/>
-        </p:nvSpPr>
-        <p:spPr>
-          <a:xfrm>
-            <a:off x="5852160" y="4663440"/>
-            <a:ext cx="5806440" cy="621792"/>
-          </a:xfrm>
-          <a:prstGeom prst="rect">
-            <a:avLst/>
-          </a:prstGeom>
-          <a:solidFill>
-            <a:srgbClr val="FFFFFF"/>
-          </a:solidFill>
-          <a:ln/>
-          <a:effectLst>
-            <a:outerShdw sx="100000" sy="100000" kx="0" ky="0" algn="bl" rotWithShape="0" blurRad="76200" dist="25400" dir="8100000">
-              <a:srgbClr val="000000">
-                <a:alpha val="10000"/>
-              </a:srgbClr>
-            </a:outerShdw>
-          </a:effectLst>
-        </p:spPr>
-      </p:sp>
-      <p:sp>
-        <p:nvSpPr>
-          <p:cNvPr id="32" name="Shape 26"/>
-          <p:cNvSpPr/>
-          <p:nvPr/>
-        </p:nvSpPr>
-        <p:spPr>
-          <a:xfrm>
-            <a:off x="5852160" y="4663440"/>
-            <a:ext cx="64008" cy="621792"/>
-          </a:xfrm>
-          <a:prstGeom prst="rect">
-            <a:avLst/>
-          </a:prstGeom>
-          <a:solidFill>
-            <a:srgbClr val="2E7D32"/>
-          </a:solidFill>
-          <a:ln/>
-        </p:spPr>
-      </p:sp>
-      <p:sp>
-        <p:nvSpPr>
-          <p:cNvPr id="33" name="Text 27"/>
-          <p:cNvSpPr/>
-          <p:nvPr/>
-        </p:nvSpPr>
-        <p:spPr>
-          <a:xfrm>
-            <a:off x="6035040" y="4663440"/>
-            <a:ext cx="365760" cy="621792"/>
-          </a:xfrm>
-          <a:prstGeom prst="rect">
-            <a:avLst/>
-          </a:prstGeom>
-          <a:noFill/>
-          <a:ln/>
-        </p:spPr>
-        <p:txBody>
-          <a:bodyPr wrap="square" lIns="0" tIns="0" rIns="0" bIns="0" rtlCol="0" anchor="ctr"/>
-          <a:lstStyle/>
-          <a:p>
-            <a:pPr indent="0" marL="0">
-              <a:buNone/>
-            </a:pPr>
-            <a:r>
-              <a:rPr lang="en-US" sz="1600" b="1" dirty="0">
-                <a:solidFill>
-                  <a:srgbClr val="2E7D32"/>
-                </a:solidFill>
-                <a:latin typeface="Trebuchet MS" pitchFamily="34" charset="0"/>
-                <a:ea typeface="Trebuchet MS" pitchFamily="34" charset="-122"/>
-                <a:cs typeface="Trebuchet MS" pitchFamily="34" charset="-120"/>
-              </a:rPr>
-              <a:t>5</a:t>
-            </a:r>
-            <a:endParaRPr lang="en-US" sz="1600" dirty="0"/>
-          </a:p>
-        </p:txBody>
-      </p:sp>
-      <p:sp>
-        <p:nvSpPr>
-          <p:cNvPr id="34" name="Text 28"/>
-          <p:cNvSpPr/>
-          <p:nvPr/>
-        </p:nvSpPr>
-        <p:spPr>
-          <a:xfrm>
-            <a:off x="6446520" y="4663440"/>
-            <a:ext cx="4846320" cy="621792"/>
-          </a:xfrm>
-          <a:prstGeom prst="rect">
-            <a:avLst/>
-          </a:prstGeom>
-          <a:noFill/>
-          <a:ln/>
-        </p:spPr>
-        <p:txBody>
-          <a:bodyPr wrap="square" lIns="0" tIns="0" rIns="0" bIns="0" rtlCol="0" anchor="ctr"/>
-          <a:lstStyle/>
-          <a:p>
-            <a:pPr indent="0" marL="0">
-              <a:buNone/>
-            </a:pPr>
-            <a:r>
-              <a:rPr lang="en-US" sz="1250" dirty="0">
-                <a:solidFill>
-                  <a:srgbClr val="1C2333"/>
-                </a:solidFill>
-                <a:latin typeface="Calibri" pitchFamily="34" charset="0"/>
-                <a:ea typeface="Calibri" pitchFamily="34" charset="-122"/>
-                <a:cs typeface="Calibri" pitchFamily="34" charset="-120"/>
-              </a:rPr>
-              <a:t>Entirely local and offline-capable, preserving privacy</a:t>
-            </a:r>
-            <a:endParaRPr lang="en-US" sz="1250" dirty="0"/>
-          </a:p>
-        </p:txBody>
-      </p:sp>
-      <p:pic>
-        <p:nvPicPr>
-          <p:cNvPr id="35" name="Image 4" descr="preencoded.png">    </p:cNvPr>
-          <p:cNvPicPr>
-            <a:picLocks noChangeAspect="1"/>
-          </p:cNvPicPr>
-          <p:nvPr/>
-        </p:nvPicPr>
-        <p:blipFill>
-          <a:blip r:embed="rId5"/>
-          <a:stretch>
-            <a:fillRect/>
-          </a:stretch>
-        </p:blipFill>
-        <p:spPr>
-          <a:xfrm>
-            <a:off x="11247120" y="4846320"/>
-            <a:ext cx="256032" cy="256032"/>
-          </a:xfrm>
-          <a:prstGeom prst="rect">
-            <a:avLst/>
-          </a:prstGeom>
-        </p:spPr>
-      </p:pic>
-      <p:sp>
-        <p:nvSpPr>
-          <p:cNvPr id="36" name="Shape 29"/>
-          <p:cNvSpPr/>
-          <p:nvPr/>
-        </p:nvSpPr>
-        <p:spPr>
-          <a:xfrm>
-            <a:off x="5852160" y="5394960"/>
-            <a:ext cx="5806440" cy="621792"/>
-          </a:xfrm>
-          <a:prstGeom prst="rect">
-            <a:avLst/>
-          </a:prstGeom>
-          <a:solidFill>
-            <a:srgbClr val="FFFFFF"/>
-          </a:solidFill>
-          <a:ln/>
-          <a:effectLst>
-            <a:outerShdw sx="100000" sy="100000" kx="0" ky="0" algn="bl" rotWithShape="0" blurRad="76200" dist="25400" dir="8100000">
-              <a:srgbClr val="000000">
-                <a:alpha val="10000"/>
-              </a:srgbClr>
-            </a:outerShdw>
-          </a:effectLst>
-        </p:spPr>
-      </p:sp>
-      <p:sp>
-        <p:nvSpPr>
-          <p:cNvPr id="37" name="Shape 30"/>
-          <p:cNvSpPr/>
-          <p:nvPr/>
-        </p:nvSpPr>
-        <p:spPr>
-          <a:xfrm>
-            <a:off x="5852160" y="5394960"/>
-            <a:ext cx="64008" cy="621792"/>
-          </a:xfrm>
-          <a:prstGeom prst="rect">
-            <a:avLst/>
-          </a:prstGeom>
-          <a:solidFill>
-            <a:srgbClr val="2E7D32"/>
-          </a:solidFill>
-          <a:ln/>
-        </p:spPr>
-      </p:sp>
-      <p:sp>
-        <p:nvSpPr>
-          <p:cNvPr id="38" name="Text 31"/>
-          <p:cNvSpPr/>
-          <p:nvPr/>
-        </p:nvSpPr>
-        <p:spPr>
-          <a:xfrm>
-            <a:off x="6035040" y="5394960"/>
-            <a:ext cx="365760" cy="621792"/>
-          </a:xfrm>
-          <a:prstGeom prst="rect">
-            <a:avLst/>
-          </a:prstGeom>
-          <a:noFill/>
-          <a:ln/>
-        </p:spPr>
-        <p:txBody>
-          <a:bodyPr wrap="square" lIns="0" tIns="0" rIns="0" bIns="0" rtlCol="0" anchor="ctr"/>
-          <a:lstStyle/>
-          <a:p>
-            <a:pPr indent="0" marL="0">
-              <a:buNone/>
-            </a:pPr>
-            <a:r>
-              <a:rPr lang="en-US" sz="1600" b="1" dirty="0">
-                <a:solidFill>
-                  <a:srgbClr val="2E7D32"/>
-                </a:solidFill>
-                <a:latin typeface="Trebuchet MS" pitchFamily="34" charset="0"/>
-                <a:ea typeface="Trebuchet MS" pitchFamily="34" charset="-122"/>
-                <a:cs typeface="Trebuchet MS" pitchFamily="34" charset="-120"/>
-              </a:rPr>
-              <a:t>6</a:t>
-            </a:r>
-            <a:endParaRPr lang="en-US" sz="1600" dirty="0"/>
-          </a:p>
-        </p:txBody>
-      </p:sp>
-      <p:sp>
-        <p:nvSpPr>
-          <p:cNvPr id="39" name="Text 32"/>
-          <p:cNvSpPr/>
-          <p:nvPr/>
-        </p:nvSpPr>
-        <p:spPr>
-          <a:xfrm>
-            <a:off x="6446520" y="5394960"/>
-            <a:ext cx="4846320" cy="621792"/>
-          </a:xfrm>
-          <a:prstGeom prst="rect">
-            <a:avLst/>
-          </a:prstGeom>
-          <a:noFill/>
-          <a:ln/>
-        </p:spPr>
-        <p:txBody>
-          <a:bodyPr wrap="square" lIns="0" tIns="0" rIns="0" bIns="0" rtlCol="0" anchor="ctr"/>
-          <a:lstStyle/>
-          <a:p>
-            <a:pPr indent="0" marL="0">
-              <a:buNone/>
-            </a:pPr>
-            <a:r>
-              <a:rPr lang="en-US" sz="1250" dirty="0">
-                <a:solidFill>
-                  <a:srgbClr val="1C2333"/>
-                </a:solidFill>
-                <a:latin typeface="Calibri" pitchFamily="34" charset="0"/>
-                <a:ea typeface="Calibri" pitchFamily="34" charset="-122"/>
-                <a:cs typeface="Calibri" pitchFamily="34" charset="-120"/>
-              </a:rPr>
-              <a:t>Knowledge graph, context memory and intelligent workspace manager</a:t>
-            </a:r>
-            <a:endParaRPr lang="en-US" sz="1250" dirty="0"/>
-          </a:p>
-        </p:txBody>
-      </p:sp>
-      <p:pic>
-        <p:nvPicPr>
-          <p:cNvPr id="40" name="Image 5" descr="preencoded.png">    </p:cNvPr>
-          <p:cNvPicPr>
-            <a:picLocks noChangeAspect="1"/>
-          </p:cNvPicPr>
-          <p:nvPr/>
-        </p:nvPicPr>
-        <p:blipFill>
-          <a:blip r:embed="rId6"/>
-          <a:stretch>
-            <a:fillRect/>
-          </a:stretch>
-        </p:blipFill>
-        <p:spPr>
-          <a:xfrm>
-            <a:off x="11247120" y="5577840"/>
-            <a:ext cx="256032" cy="256032"/>
-          </a:xfrm>
-          <a:prstGeom prst="rect">
-            <a:avLst/>
-          </a:prstGeom>
-        </p:spPr>
-      </p:pic>
-    </p:spTree>
-  </p:cSld>
-  <p:clrMapOvr>
-    <a:masterClrMapping/>
-  </p:clrMapOvr>
-</p:sld>
-</file>
-
-<file path=ppt/slides/slide20.xml><?xml version="1.0" encoding="utf-8"?>
-<p:sld xmlns:a="http://schemas.openxmlformats.org/drawingml/2006/main" xmlns:r="http://schemas.openxmlformats.org/officeDocument/2006/relationships" xmlns:p="http://schemas.openxmlformats.org/presentationml/2006/main">
-  <p:cSld name="Slide 20">
-    <p:bg>
-      <p:bgPr>
-        <a:solidFill>
-          <a:srgbClr val="F4F6FB"/>
-        </a:solidFill>
-      </p:bgPr>
-    </p:bg>
-    <p:spTree>
-      <p:nvGrpSpPr>
-        <p:cNvPr id="1" name=""/>
-        <p:cNvGrpSpPr/>
-        <p:nvPr/>
-      </p:nvGrpSpPr>
-      <p:grpSpPr>
-        <a:xfrm>
-          <a:off x="0" y="0"/>
-          <a:ext cx="0" cy="0"/>
-          <a:chOff x="0" y="0"/>
-          <a:chExt cx="0" cy="0"/>
-        </a:xfrm>
-      </p:grpSpPr>
-      <p:sp>
-        <p:nvSpPr>
-          <p:cNvPr id="2" name="Text 0"/>
-          <p:cNvSpPr/>
-          <p:nvPr/>
-        </p:nvSpPr>
-        <p:spPr>
-          <a:xfrm>
-            <a:off x="548640" y="320040"/>
-            <a:ext cx="11064240" cy="640080"/>
-          </a:xfrm>
-          <a:prstGeom prst="rect">
-            <a:avLst/>
-          </a:prstGeom>
-          <a:noFill/>
-          <a:ln/>
-        </p:spPr>
-        <p:txBody>
-          <a:bodyPr wrap="square" lIns="0" tIns="0" rIns="0" bIns="0" rtlCol="0" anchor="ctr"/>
-          <a:lstStyle/>
-          <a:p>
-            <a:pPr indent="0" marL="0">
-              <a:buNone/>
-            </a:pPr>
-            <a:r>
-              <a:rPr lang="en-US" sz="2800" b="1" dirty="0">
-                <a:solidFill>
-                  <a:srgbClr val="1C2333"/>
-                </a:solidFill>
-                <a:latin typeface="Trebuchet MS" pitchFamily="34" charset="0"/>
-                <a:ea typeface="Trebuchet MS" pitchFamily="34" charset="-122"/>
-                <a:cs typeface="Trebuchet MS" pitchFamily="34" charset="-120"/>
-              </a:rPr>
-              <a:t>References</a:t>
-            </a:r>
-            <a:endParaRPr lang="en-US" sz="2800" dirty="0"/>
-          </a:p>
-        </p:txBody>
-      </p:sp>
-      <p:sp>
-        <p:nvSpPr>
-          <p:cNvPr id="3" name="Text 1"/>
-          <p:cNvSpPr/>
-          <p:nvPr/>
-        </p:nvSpPr>
-        <p:spPr>
-          <a:xfrm>
-            <a:off x="548640" y="6473952"/>
-            <a:ext cx="5486400" cy="274320"/>
-          </a:xfrm>
-          <a:prstGeom prst="rect">
-            <a:avLst/>
-          </a:prstGeom>
-          <a:noFill/>
-          <a:ln/>
-        </p:spPr>
-        <p:txBody>
-          <a:bodyPr wrap="square" lIns="0" tIns="0" rIns="0" bIns="0" rtlCol="0" anchor="ctr"/>
-          <a:lstStyle/>
-          <a:p>
-            <a:pPr indent="0" marL="0">
-              <a:buNone/>
-            </a:pPr>
-            <a:r>
-              <a:rPr lang="en-US" sz="1000" dirty="0">
-                <a:solidFill>
-                  <a:srgbClr val="8A93AA"/>
-                </a:solidFill>
-                <a:latin typeface="Calibri" pitchFamily="34" charset="0"/>
-                <a:ea typeface="Calibri" pitchFamily="34" charset="-122"/>
-                <a:cs typeface="Calibri" pitchFamily="34" charset="-120"/>
-              </a:rPr>
-              <a:t>DreamOS - Project Monitoring II</a:t>
-            </a:r>
-            <a:endParaRPr lang="en-US" sz="1000" dirty="0"/>
-          </a:p>
-        </p:txBody>
-      </p:sp>
-      <p:sp>
-        <p:nvSpPr>
-          <p:cNvPr id="4" name="Text 2"/>
-          <p:cNvSpPr/>
-          <p:nvPr/>
-        </p:nvSpPr>
-        <p:spPr>
-          <a:xfrm>
-            <a:off x="11064240" y="6473952"/>
-            <a:ext cx="594360" cy="274320"/>
-          </a:xfrm>
-          <a:prstGeom prst="rect">
-            <a:avLst/>
-          </a:prstGeom>
-          <a:noFill/>
-          <a:ln/>
-        </p:spPr>
-        <p:txBody>
-          <a:bodyPr wrap="square" lIns="0" tIns="0" rIns="0" bIns="0" rtlCol="0" anchor="ctr"/>
-          <a:lstStyle/>
-          <a:p>
-            <a:pPr algn="r" indent="0" marL="0">
-              <a:buNone/>
-            </a:pPr>
-            <a:r>
-              <a:rPr lang="en-US" sz="1000" dirty="0">
-                <a:solidFill>
-                  <a:srgbClr val="8A93AA"/>
-                </a:solidFill>
-                <a:latin typeface="Calibri" pitchFamily="34" charset="0"/>
-                <a:ea typeface="Calibri" pitchFamily="34" charset="-122"/>
-                <a:cs typeface="Calibri" pitchFamily="34" charset="-120"/>
-              </a:rPr>
-              <a:t>20</a:t>
+              <a:t>22</a:t>
             </a:r>
             <a:endParaRPr lang="en-US" sz="1000" dirty="0"/>
           </a:p>
@@ -16308,7 +19196,7 @@
                 <a:ea typeface="Calibri" pitchFamily="34" charset="-122"/>
                 <a:cs typeface="Calibri" pitchFamily="34" charset="-120"/>
               </a:rPr>
-              <a:t>pytest: 97 tests, fully offline (embeddings and LLM mocked)</a:t>
+              <a:t>pytest: 107 tests, fully offline (embeddings and LLM mocked)</a:t>
             </a:r>
             <a:endParaRPr lang="en-US" sz="1450" dirty="0"/>
           </a:p>

--- a/docs/DreamOS-Project-Monitoring-II.pptx
+++ b/docs/DreamOS-Project-Monitoring-II.pptx
@@ -4,6 +4,9 @@
   <p:sldMasterIdLst>
     <p:sldMasterId id="2147483648" r:id="rId1"/>
   </p:sldMasterIdLst>
+  <p:notesMasterIdLst>
+    <p:notesMasterId r:id="rId24"/>
+  </p:notesMasterIdLst>
   <p:sldIdLst>
     <p:sldId id="256" r:id="rId2"/>
     <p:sldId id="257" r:id="rId3"/>
@@ -28,9 +31,6 @@
     <p:sldId id="276" r:id="rId22"/>
     <p:sldId id="277" r:id="rId23"/>
   </p:sldIdLst>
-  <p:notesMasterIdLst>
-    <p:notesMasterId r:id="rId24"/>
-  </p:notesMasterIdLst>
   <p:sldSz cx="12192000" cy="6858000"/>
   <p:notesSz cx="6858000" cy="12192000"/>
   <p:defaultTextStyle>
@@ -125,6 +125,11 @@
       </a:defRPr>
     </a:lvl9pPr>
   </p:defaultTextStyle>
+  <p:extLst>
+    <p:ext uri="{EFAFB233-063F-42B5-8137-9DF3F51BA10A}">
+      <p15:sldGuideLst xmlns:p15="http://schemas.microsoft.com/office/powerpoint/2012/main"/>
+    </p:ext>
+  </p:extLst>
 </p:presentation>
 </file>
 
@@ -150,234 +155,10 @@
           <a:chExt cx="0" cy="0"/>
         </a:xfrm>
       </p:grpSpPr>
-      <p:sp>
-        <p:nvSpPr>
-          <p:cNvPr id="2" name="Header Placeholder 1"/>
-          <p:cNvSpPr>
-            <a:spLocks noGrp="1"/>
-          </p:cNvSpPr>
-          <p:nvPr>
-            <p:ph type="hdr" sz="quarter"/>
-          </p:nvPr>
-        </p:nvSpPr>
-        <p:spPr>
-          <a:xfrm>
-            <a:off x="0" y="0"/>
-            <a:ext cx="2971800" cy="458788"/>
-          </a:xfrm>
-          <a:prstGeom prst="rect">
-            <a:avLst/>
-          </a:prstGeom>
-        </p:spPr>
-        <p:txBody>
-          <a:bodyPr vert="horz" lIns="91440" tIns="45720" rIns="91440" bIns="45720" rtlCol="0"/>
-          <a:lstStyle>
-            <a:lvl1pPr algn="l">
-              <a:defRPr sz="1200"/>
-            </a:lvl1pPr>
-          </a:lstStyle>
-          <a:p>
-            <a:endParaRPr lang="en-US"/>
-          </a:p>
-        </p:txBody>
-      </p:sp>
-      <p:sp>
-        <p:nvSpPr>
-          <p:cNvPr id="3" name="Date Placeholder 2"/>
-          <p:cNvSpPr>
-            <a:spLocks noGrp="1"/>
-          </p:cNvSpPr>
-          <p:nvPr>
-            <p:ph type="dt" idx="1"/>
-          </p:nvPr>
-        </p:nvSpPr>
-        <p:spPr>
-          <a:xfrm>
-            <a:off x="3884613" y="0"/>
-            <a:ext cx="2971800" cy="458788"/>
-          </a:xfrm>
-          <a:prstGeom prst="rect">
-            <a:avLst/>
-          </a:prstGeom>
-        </p:spPr>
-        <p:txBody>
-          <a:bodyPr vert="horz" lIns="91440" tIns="45720" rIns="91440" bIns="45720" rtlCol="0"/>
-          <a:lstStyle>
-            <a:lvl1pPr algn="r">
-              <a:defRPr sz="1200"/>
-            </a:lvl1pPr>
-          </a:lstStyle>
-          <a:p>
-            <a:fld id="{5282F153-3F37-0F45-9E97-73ACFA13230C}" type="datetimeFigureOut">
-              <a:rPr lang="en-US"/>
-              <a:t>7/23/19</a:t>
-            </a:fld>
-            <a:endParaRPr lang="en-US"/>
-          </a:p>
-        </p:txBody>
-      </p:sp>
-      <p:sp>
-        <p:nvSpPr>
-          <p:cNvPr id="4" name="Slide Image Placeholder 3"/>
-          <p:cNvSpPr>
-            <a:spLocks noGrp="1" noRot="1" noChangeAspect="1"/>
-          </p:cNvSpPr>
-          <p:nvPr>
-            <p:ph type="sldImg" idx="2"/>
-          </p:nvPr>
-        </p:nvSpPr>
-        <p:spPr>
-          <a:xfrm>
-            <a:off x="685800" y="1143000"/>
-            <a:ext cx="5486400" cy="3086100"/>
-          </a:xfrm>
-          <a:prstGeom prst="rect">
-            <a:avLst/>
-          </a:prstGeom>
-          <a:noFill/>
-          <a:ln w="12700">
-            <a:solidFill>
-              <a:prstClr val="black"/>
-            </a:solidFill>
-          </a:ln>
-        </p:spPr>
-        <p:txBody>
-          <a:bodyPr vert="horz" lIns="91440" tIns="45720" rIns="91440" bIns="45720" rtlCol="0" anchor="ctr"/>
-          <a:lstStyle/>
-          <a:p>
-            <a:endParaRPr lang="en-US"/>
-          </a:p>
-        </p:txBody>
-      </p:sp>
-      <p:sp>
-        <p:nvSpPr>
-          <p:cNvPr id="5" name="Notes Placeholder 4"/>
-          <p:cNvSpPr>
-            <a:spLocks noGrp="1"/>
-          </p:cNvSpPr>
-          <p:nvPr>
-            <p:ph type="body" sz="quarter" idx="3"/>
-          </p:nvPr>
-        </p:nvSpPr>
-        <p:spPr>
-          <a:xfrm>
-            <a:off x="685800" y="4400550"/>
-            <a:ext cx="5486400" cy="3600450"/>
-          </a:xfrm>
-          <a:prstGeom prst="rect">
-            <a:avLst/>
-          </a:prstGeom>
-        </p:spPr>
-        <p:txBody>
-          <a:bodyPr vert="horz" lIns="91440" tIns="45720" rIns="91440" bIns="45720" rtlCol="0"/>
-          <a:lstStyle/>
-          <a:p>
-            <a:pPr lvl="0"/>
-            <a:r>
-              <a:rPr lang="en-US"/>
-              <a:t>Click to edit Master text styles</a:t>
-            </a:r>
-          </a:p>
-          <a:p>
-            <a:pPr lvl="1"/>
-            <a:r>
-              <a:rPr lang="en-US"/>
-              <a:t>Second level</a:t>
-            </a:r>
-          </a:p>
-          <a:p>
-            <a:pPr lvl="2"/>
-            <a:r>
-              <a:rPr lang="en-US"/>
-              <a:t>Third level</a:t>
-            </a:r>
-          </a:p>
-          <a:p>
-            <a:pPr lvl="3"/>
-            <a:r>
-              <a:rPr lang="en-US"/>
-              <a:t>Fourth level</a:t>
-            </a:r>
-          </a:p>
-          <a:p>
-            <a:pPr lvl="4"/>
-            <a:r>
-              <a:rPr lang="en-US"/>
-              <a:t>Fifth level</a:t>
-            </a:r>
-          </a:p>
-        </p:txBody>
-      </p:sp>
-      <p:sp>
-        <p:nvSpPr>
-          <p:cNvPr id="6" name="Footer Placeholder 5"/>
-          <p:cNvSpPr>
-            <a:spLocks noGrp="1"/>
-          </p:cNvSpPr>
-          <p:nvPr>
-            <p:ph type="ftr" sz="quarter" idx="4"/>
-          </p:nvPr>
-        </p:nvSpPr>
-        <p:spPr>
-          <a:xfrm>
-            <a:off x="0" y="8685213"/>
-            <a:ext cx="2971800" cy="458787"/>
-          </a:xfrm>
-          <a:prstGeom prst="rect">
-            <a:avLst/>
-          </a:prstGeom>
-        </p:spPr>
-        <p:txBody>
-          <a:bodyPr vert="horz" lIns="91440" tIns="45720" rIns="91440" bIns="45720" rtlCol="0" anchor="b"/>
-          <a:lstStyle>
-            <a:lvl1pPr algn="l">
-              <a:defRPr sz="1200"/>
-            </a:lvl1pPr>
-          </a:lstStyle>
-          <a:p>
-            <a:endParaRPr lang="en-US"/>
-          </a:p>
-        </p:txBody>
-      </p:sp>
-      <p:sp>
-        <p:nvSpPr>
-          <p:cNvPr id="7" name="Slide Number Placeholder 6"/>
-          <p:cNvSpPr>
-            <a:spLocks noGrp="1"/>
-          </p:cNvSpPr>
-          <p:nvPr>
-            <p:ph type="sldNum" sz="quarter" idx="5"/>
-          </p:nvPr>
-        </p:nvSpPr>
-        <p:spPr>
-          <a:xfrm>
-            <a:off x="3884613" y="8685213"/>
-            <a:ext cx="2971800" cy="458787"/>
-          </a:xfrm>
-          <a:prstGeom prst="rect">
-            <a:avLst/>
-          </a:prstGeom>
-        </p:spPr>
-        <p:txBody>
-          <a:bodyPr vert="horz" lIns="91440" tIns="45720" rIns="91440" bIns="45720" rtlCol="0" anchor="b"/>
-          <a:lstStyle>
-            <a:lvl1pPr algn="r">
-              <a:defRPr sz="1200"/>
-            </a:lvl1pPr>
-          </a:lstStyle>
-          <a:p>
-            <a:fld id="{CE5E9CC1-C706-0F49-92D6-E571CC5EEA8F}" type="slidenum">
-              <a:rPr lang="en-US"/>
-              <a:t>‹#›</a:t>
-            </a:fld>
-            <a:endParaRPr lang="en-US"/>
-          </a:p>
-        </p:txBody>
-      </p:sp>
     </p:spTree>
     <p:extLst>
       <p:ext uri="{BB962C8B-B14F-4D97-AF65-F5344CB8AC3E}">
-        <p14:creationId xmlns:p14="http://schemas.microsoft.com/office/powerpoint/2010/main" val="1024086991"/>
+        <p14:creationId xmlns:p14="http://schemas.microsoft.com/office/powerpoint/2010/main" val="1996405364"/>
       </p:ext>
     </p:extLst>
   </p:cSld>
@@ -521,10 +302,6 @@
           <a:bodyPr/>
           <a:lstStyle/>
           <a:p>
-            <a:r>
-              <a:rPr lang="en-US" dirty="0"/>
-              <a:t/>
-            </a:r>
             <a:endParaRPr lang="en-US" dirty="0"/>
           </a:p>
         </p:txBody>
@@ -609,10 +386,6 @@
           <a:bodyPr/>
           <a:lstStyle/>
           <a:p>
-            <a:r>
-              <a:rPr lang="en-US" dirty="0"/>
-              <a:t/>
-            </a:r>
             <a:endParaRPr lang="en-US" dirty="0"/>
           </a:p>
         </p:txBody>
@@ -697,10 +470,6 @@
           <a:bodyPr/>
           <a:lstStyle/>
           <a:p>
-            <a:r>
-              <a:rPr lang="en-US" dirty="0"/>
-              <a:t/>
-            </a:r>
             <a:endParaRPr lang="en-US" dirty="0"/>
           </a:p>
         </p:txBody>
@@ -785,10 +554,6 @@
           <a:bodyPr/>
           <a:lstStyle/>
           <a:p>
-            <a:r>
-              <a:rPr lang="en-US" dirty="0"/>
-              <a:t/>
-            </a:r>
             <a:endParaRPr lang="en-US" dirty="0"/>
           </a:p>
         </p:txBody>
@@ -873,10 +638,6 @@
           <a:bodyPr/>
           <a:lstStyle/>
           <a:p>
-            <a:r>
-              <a:rPr lang="en-US" dirty="0"/>
-              <a:t/>
-            </a:r>
             <a:endParaRPr lang="en-US" dirty="0"/>
           </a:p>
         </p:txBody>
@@ -961,10 +722,6 @@
           <a:bodyPr/>
           <a:lstStyle/>
           <a:p>
-            <a:r>
-              <a:rPr lang="en-US" dirty="0"/>
-              <a:t/>
-            </a:r>
             <a:endParaRPr lang="en-US" dirty="0"/>
           </a:p>
         </p:txBody>
@@ -1049,10 +806,6 @@
           <a:bodyPr/>
           <a:lstStyle/>
           <a:p>
-            <a:r>
-              <a:rPr lang="en-US" dirty="0"/>
-              <a:t/>
-            </a:r>
             <a:endParaRPr lang="en-US" dirty="0"/>
           </a:p>
         </p:txBody>
@@ -1137,10 +890,6 @@
           <a:bodyPr/>
           <a:lstStyle/>
           <a:p>
-            <a:r>
-              <a:rPr lang="en-US" dirty="0"/>
-              <a:t/>
-            </a:r>
             <a:endParaRPr lang="en-US" dirty="0"/>
           </a:p>
         </p:txBody>
@@ -1225,10 +974,6 @@
           <a:bodyPr/>
           <a:lstStyle/>
           <a:p>
-            <a:r>
-              <a:rPr lang="en-US" dirty="0"/>
-              <a:t/>
-            </a:r>
             <a:endParaRPr lang="en-US" dirty="0"/>
           </a:p>
         </p:txBody>
@@ -1313,10 +1058,6 @@
           <a:bodyPr/>
           <a:lstStyle/>
           <a:p>
-            <a:r>
-              <a:rPr lang="en-US" dirty="0"/>
-              <a:t/>
-            </a:r>
             <a:endParaRPr lang="en-US" dirty="0"/>
           </a:p>
         </p:txBody>
@@ -1401,10 +1142,6 @@
           <a:bodyPr/>
           <a:lstStyle/>
           <a:p>
-            <a:r>
-              <a:rPr lang="en-US" dirty="0"/>
-              <a:t/>
-            </a:r>
             <a:endParaRPr lang="en-US" dirty="0"/>
           </a:p>
         </p:txBody>
@@ -1489,10 +1226,6 @@
           <a:bodyPr/>
           <a:lstStyle/>
           <a:p>
-            <a:r>
-              <a:rPr lang="en-US" dirty="0"/>
-              <a:t/>
-            </a:r>
             <a:endParaRPr lang="en-US" dirty="0"/>
           </a:p>
         </p:txBody>
@@ -1577,10 +1310,6 @@
           <a:bodyPr/>
           <a:lstStyle/>
           <a:p>
-            <a:r>
-              <a:rPr lang="en-US" dirty="0"/>
-              <a:t/>
-            </a:r>
             <a:endParaRPr lang="en-US" dirty="0"/>
           </a:p>
         </p:txBody>
@@ -1665,10 +1394,6 @@
           <a:bodyPr/>
           <a:lstStyle/>
           <a:p>
-            <a:r>
-              <a:rPr lang="en-US" dirty="0"/>
-              <a:t/>
-            </a:r>
             <a:endParaRPr lang="en-US" dirty="0"/>
           </a:p>
         </p:txBody>
@@ -1753,10 +1478,6 @@
           <a:bodyPr/>
           <a:lstStyle/>
           <a:p>
-            <a:r>
-              <a:rPr lang="en-US" dirty="0"/>
-              <a:t/>
-            </a:r>
             <a:endParaRPr lang="en-US" dirty="0"/>
           </a:p>
         </p:txBody>
@@ -1841,10 +1562,6 @@
           <a:bodyPr/>
           <a:lstStyle/>
           <a:p>
-            <a:r>
-              <a:rPr lang="en-US" dirty="0"/>
-              <a:t/>
-            </a:r>
             <a:endParaRPr lang="en-US" dirty="0"/>
           </a:p>
         </p:txBody>
@@ -1929,10 +1646,6 @@
           <a:bodyPr/>
           <a:lstStyle/>
           <a:p>
-            <a:r>
-              <a:rPr lang="en-US" dirty="0"/>
-              <a:t/>
-            </a:r>
             <a:endParaRPr lang="en-US" dirty="0"/>
           </a:p>
         </p:txBody>
@@ -2017,10 +1730,6 @@
           <a:bodyPr/>
           <a:lstStyle/>
           <a:p>
-            <a:r>
-              <a:rPr lang="en-US" dirty="0"/>
-              <a:t/>
-            </a:r>
             <a:endParaRPr lang="en-US" dirty="0"/>
           </a:p>
         </p:txBody>
@@ -2105,10 +1814,6 @@
           <a:bodyPr/>
           <a:lstStyle/>
           <a:p>
-            <a:r>
-              <a:rPr lang="en-US" dirty="0"/>
-              <a:t/>
-            </a:r>
             <a:endParaRPr lang="en-US" dirty="0"/>
           </a:p>
         </p:txBody>
@@ -2193,10 +1898,6 @@
           <a:bodyPr/>
           <a:lstStyle/>
           <a:p>
-            <a:r>
-              <a:rPr lang="en-US" dirty="0"/>
-              <a:t/>
-            </a:r>
             <a:endParaRPr lang="en-US" dirty="0"/>
           </a:p>
         </p:txBody>
@@ -2281,10 +1982,6 @@
           <a:bodyPr/>
           <a:lstStyle/>
           <a:p>
-            <a:r>
-              <a:rPr lang="en-US" dirty="0"/>
-              <a:t/>
-            </a:r>
             <a:endParaRPr lang="en-US" dirty="0"/>
           </a:p>
         </p:txBody>
@@ -2369,10 +2066,6 @@
           <a:bodyPr/>
           <a:lstStyle/>
           <a:p>
-            <a:r>
-              <a:rPr lang="en-US" dirty="0"/>
-              <a:t/>
-            </a:r>
             <a:endParaRPr lang="en-US" dirty="0"/>
           </a:p>
         </p:txBody>
@@ -2446,6 +2139,11 @@
 <file path=ppt/slideMasters/slideMaster1.xml><?xml version="1.0" encoding="utf-8"?>
 <p:sldMaster xmlns:a="http://schemas.openxmlformats.org/drawingml/2006/main" xmlns:r="http://schemas.openxmlformats.org/officeDocument/2006/relationships" xmlns:p="http://schemas.openxmlformats.org/presentationml/2006/main">
   <p:cSld>
+    <p:bg>
+      <p:bgRef idx="1001">
+        <a:schemeClr val="bg1"/>
+      </p:bgRef>
+    </p:bg>
     <p:spTree>
       <p:nvGrpSpPr>
         <p:cNvPr id="1" name=""/>
@@ -2728,6 +2426,7 @@
         <a:solidFill>
           <a:srgbClr val="1E2761"/>
         </a:solidFill>
+        <a:effectLst/>
       </p:bgPr>
     </p:bg>
     <p:spTree>
@@ -2746,14 +2445,14 @@
       </p:grpSpPr>
       <p:pic>
         <p:nvPicPr>
-          <p:cNvPr id="2" name="Image 0" descr="preencoded.png">    </p:cNvPr>
+          <p:cNvPr id="2" name="Image 0" descr="preencoded.png"/>
           <p:cNvPicPr>
             <a:picLocks noChangeAspect="1"/>
           </p:cNvPicPr>
           <p:nvPr/>
         </p:nvPicPr>
         <p:blipFill>
-          <a:blip r:embed="rId1"/>
+          <a:blip r:embed="rId3"/>
           <a:stretch>
             <a:fillRect/>
           </a:stretch>
@@ -2790,14 +2489,14 @@
       </p:sp>
       <p:pic>
         <p:nvPicPr>
-          <p:cNvPr id="4" name="Image 1" descr="preencoded.png">    </p:cNvPr>
+          <p:cNvPr id="4" name="Image 1" descr="preencoded.png"/>
           <p:cNvPicPr>
             <a:picLocks noChangeAspect="1"/>
           </p:cNvPicPr>
           <p:nvPr/>
         </p:nvPicPr>
         <p:blipFill>
-          <a:blip r:embed="rId2"/>
+          <a:blip r:embed="rId4"/>
           <a:stretch>
             <a:fillRect/>
           </a:stretch>
@@ -2833,7 +2532,7 @@
           <a:bodyPr wrap="square" lIns="0" tIns="0" rIns="0" bIns="0" rtlCol="0" anchor="ctr"/>
           <a:lstStyle/>
           <a:p>
-            <a:pPr indent="0" marL="0">
+            <a:pPr marL="0" indent="0">
               <a:buNone/>
             </a:pPr>
             <a:r>
@@ -2872,7 +2571,7 @@
           <a:bodyPr wrap="square" lIns="0" tIns="0" rIns="0" bIns="0" rtlCol="0" anchor="ctr"/>
           <a:lstStyle/>
           <a:p>
-            <a:pPr indent="0" marL="0">
+            <a:pPr marL="0" indent="0">
               <a:buNone/>
             </a:pPr>
             <a:r>
@@ -2931,7 +2630,7 @@
           <a:bodyPr wrap="square" lIns="0" tIns="0" rIns="0" bIns="0" rtlCol="0" anchor="ctr"/>
           <a:lstStyle/>
           <a:p>
-            <a:pPr algn="ctr" indent="0" marL="0">
+            <a:pPr marL="0" indent="0" algn="ctr">
               <a:buNone/>
             </a:pPr>
             <a:r>
@@ -2970,7 +2669,7 @@
           <a:bodyPr wrap="square" lIns="0" tIns="0" rIns="0" bIns="0" rtlCol="0" anchor="ctr"/>
           <a:lstStyle/>
           <a:p>
-            <a:pPr indent="0" marL="0">
+            <a:pPr marL="0" indent="0">
               <a:buNone/>
             </a:pPr>
             <a:r>
@@ -3009,7 +2708,7 @@
           <a:bodyPr wrap="square" lIns="0" tIns="0" rIns="0" bIns="0" rtlCol="0" anchor="ctr"/>
           <a:lstStyle/>
           <a:p>
-            <a:pPr indent="0" marL="0">
+            <a:pPr marL="0" indent="0">
               <a:buNone/>
             </a:pPr>
             <a:r>
@@ -3026,7 +2725,7 @@
             <a:endParaRPr lang="en-US" sz="1350" dirty="0"/>
           </a:p>
           <a:p>
-            <a:pPr indent="0" marL="0">
+            <a:pPr marL="0" indent="0">
               <a:buNone/>
             </a:pPr>
             <a:r>
@@ -3041,6 +2740,47 @@
               <a:t>B.Tech Information Technology - IICT, MGM University  |  September 2026</a:t>
             </a:r>
             <a:endParaRPr lang="en-US" sz="1350" dirty="0"/>
+          </a:p>
+        </p:txBody>
+      </p:sp>
+      <p:sp>
+        <p:nvSpPr>
+          <p:cNvPr id="12" name="Text 6">
+            <a:extLst>
+              <a:ext uri="{FF2B5EF4-FFF2-40B4-BE49-F238E27FC236}">
+                <a16:creationId xmlns:a16="http://schemas.microsoft.com/office/drawing/2014/main" id="{422CF306-2588-FE31-552C-97509D987623}"/>
+              </a:ext>
+            </a:extLst>
+          </p:cNvPr>
+          <p:cNvSpPr/>
+          <p:nvPr/>
+        </p:nvSpPr>
+        <p:spPr>
+          <a:xfrm>
+            <a:off x="838200" y="4956748"/>
+            <a:ext cx="10515600" cy="777240"/>
+          </a:xfrm>
+          <a:prstGeom prst="rect">
+            <a:avLst/>
+          </a:prstGeom>
+          <a:noFill/>
+          <a:ln/>
+        </p:spPr>
+        <p:txBody>
+          <a:bodyPr wrap="square" lIns="0" tIns="0" rIns="0" bIns="0" rtlCol="0" anchor="ctr"/>
+          <a:lstStyle/>
+          <a:p>
+            <a:pPr marL="0" indent="0">
+              <a:buNone/>
+            </a:pPr>
+            <a:r>
+              <a:rPr lang="en-US" sz="2000" dirty="0">
+                <a:solidFill>
+                  <a:schemeClr val="bg1"/>
+                </a:solidFill>
+              </a:rPr>
+              <a:t>Guide :- Dr. Minakshi Rajput</a:t>
+            </a:r>
           </a:p>
         </p:txBody>
       </p:sp>
@@ -3060,6 +2800,7 @@
         <a:solidFill>
           <a:srgbClr val="F4F6FB"/>
         </a:solidFill>
+        <a:effectLst/>
       </p:bgPr>
     </p:bg>
     <p:spTree>
@@ -3097,7 +2838,7 @@
           <a:bodyPr wrap="square" lIns="0" tIns="0" rIns="0" bIns="0" rtlCol="0" anchor="ctr"/>
           <a:lstStyle/>
           <a:p>
-            <a:pPr indent="0" marL="0">
+            <a:pPr marL="0" indent="0">
               <a:buNone/>
             </a:pPr>
             <a:r>
@@ -3136,7 +2877,7 @@
           <a:bodyPr wrap="square" lIns="0" tIns="0" rIns="0" bIns="0" rtlCol="0" anchor="ctr"/>
           <a:lstStyle/>
           <a:p>
-            <a:pPr indent="0" marL="0">
+            <a:pPr marL="0" indent="0">
               <a:buNone/>
             </a:pPr>
             <a:r>
@@ -3175,7 +2916,7 @@
           <a:bodyPr wrap="square" lIns="0" tIns="0" rIns="0" bIns="0" rtlCol="0" anchor="ctr"/>
           <a:lstStyle/>
           <a:p>
-            <a:pPr indent="0" marL="0">
+            <a:pPr marL="0" indent="0">
               <a:buNone/>
             </a:pPr>
             <a:r>
@@ -3214,7 +2955,7 @@
           <a:bodyPr wrap="square" lIns="0" tIns="0" rIns="0" bIns="0" rtlCol="0" anchor="ctr"/>
           <a:lstStyle/>
           <a:p>
-            <a:pPr algn="r" indent="0" marL="0">
+            <a:pPr marL="0" indent="0" algn="r">
               <a:buNone/>
             </a:pPr>
             <a:r>
@@ -3251,7 +2992,7 @@
           </a:solidFill>
           <a:ln/>
           <a:effectLst>
-            <a:outerShdw sx="100000" sy="100000" kx="0" ky="0" algn="bl" rotWithShape="0" blurRad="76200" dist="25400" dir="8100000">
+            <a:outerShdw blurRad="76200" dist="25400" dir="8100000" algn="bl" rotWithShape="0">
               <a:srgbClr val="000000">
                 <a:alpha val="10000"/>
               </a:srgbClr>
@@ -3261,14 +3002,14 @@
       </p:sp>
       <p:pic>
         <p:nvPicPr>
-          <p:cNvPr id="7" name="Image 0" descr="C:\Users\Asus\projects\DreamOS\docs\diagrams\04_dfd_level1.png">    </p:cNvPr>
+          <p:cNvPr id="7" name="Image 0" descr="C:\Users\Asus\projects\DreamOS\docs\diagrams\04_dfd_level1.png"/>
           <p:cNvPicPr>
             <a:picLocks noChangeAspect="1"/>
           </p:cNvPicPr>
           <p:nvPr/>
         </p:nvPicPr>
         <p:blipFill>
-          <a:blip r:embed="rId1"/>
+          <a:blip r:embed="rId3"/>
           <a:stretch>
             <a:fillRect/>
           </a:stretch>
@@ -3299,6 +3040,7 @@
         <a:solidFill>
           <a:srgbClr val="F4F6FB"/>
         </a:solidFill>
+        <a:effectLst/>
       </p:bgPr>
     </p:bg>
     <p:spTree>
@@ -3336,7 +3078,7 @@
           <a:bodyPr wrap="square" lIns="0" tIns="0" rIns="0" bIns="0" rtlCol="0" anchor="ctr"/>
           <a:lstStyle/>
           <a:p>
-            <a:pPr indent="0" marL="0">
+            <a:pPr marL="0" indent="0">
               <a:buNone/>
             </a:pPr>
             <a:r>
@@ -3375,7 +3117,7 @@
           <a:bodyPr wrap="square" lIns="0" tIns="0" rIns="0" bIns="0" rtlCol="0" anchor="ctr"/>
           <a:lstStyle/>
           <a:p>
-            <a:pPr indent="0" marL="0">
+            <a:pPr marL="0" indent="0">
               <a:buNone/>
             </a:pPr>
             <a:r>
@@ -3414,7 +3156,7 @@
           <a:bodyPr wrap="square" lIns="0" tIns="0" rIns="0" bIns="0" rtlCol="0" anchor="ctr"/>
           <a:lstStyle/>
           <a:p>
-            <a:pPr indent="0" marL="0">
+            <a:pPr marL="0" indent="0">
               <a:buNone/>
             </a:pPr>
             <a:r>
@@ -3453,7 +3195,7 @@
           <a:bodyPr wrap="square" lIns="0" tIns="0" rIns="0" bIns="0" rtlCol="0" anchor="ctr"/>
           <a:lstStyle/>
           <a:p>
-            <a:pPr algn="r" indent="0" marL="0">
+            <a:pPr marL="0" indent="0" algn="r">
               <a:buNone/>
             </a:pPr>
             <a:r>
@@ -3490,7 +3232,7 @@
           </a:solidFill>
           <a:ln/>
           <a:effectLst>
-            <a:outerShdw sx="100000" sy="100000" kx="0" ky="0" algn="bl" rotWithShape="0" blurRad="76200" dist="25400" dir="8100000">
+            <a:outerShdw blurRad="76200" dist="25400" dir="8100000" algn="bl" rotWithShape="0">
               <a:srgbClr val="000000">
                 <a:alpha val="10000"/>
               </a:srgbClr>
@@ -3500,14 +3242,14 @@
       </p:sp>
       <p:pic>
         <p:nvPicPr>
-          <p:cNvPr id="7" name="Image 0" descr="C:\Users\Asus\projects\DreamOS\docs\diagrams\05_use_case.png">    </p:cNvPr>
+          <p:cNvPr id="7" name="Image 0" descr="C:\Users\Asus\projects\DreamOS\docs\diagrams\05_use_case.png"/>
           <p:cNvPicPr>
             <a:picLocks noChangeAspect="1"/>
           </p:cNvPicPr>
           <p:nvPr/>
         </p:nvPicPr>
         <p:blipFill>
-          <a:blip r:embed="rId1"/>
+          <a:blip r:embed="rId3"/>
           <a:stretch>
             <a:fillRect/>
           </a:stretch>
@@ -3541,7 +3283,7 @@
           </a:solidFill>
           <a:ln/>
           <a:effectLst>
-            <a:outerShdw sx="100000" sy="100000" kx="0" ky="0" algn="bl" rotWithShape="0" blurRad="76200" dist="25400" dir="8100000">
+            <a:outerShdw blurRad="76200" dist="25400" dir="8100000" algn="bl" rotWithShape="0">
               <a:srgbClr val="000000">
                 <a:alpha val="10000"/>
               </a:srgbClr>
@@ -3590,7 +3332,7 @@
           <a:bodyPr wrap="square" lIns="0" tIns="0" rIns="0" bIns="0" rtlCol="0" anchor="ctr"/>
           <a:lstStyle/>
           <a:p>
-            <a:pPr indent="0" marL="0">
+            <a:pPr marL="0" indent="0">
               <a:buNone/>
             </a:pPr>
             <a:r>
@@ -3772,6 +3514,7 @@
         <a:solidFill>
           <a:srgbClr val="F4F6FB"/>
         </a:solidFill>
+        <a:effectLst/>
       </p:bgPr>
     </p:bg>
     <p:spTree>
@@ -3809,7 +3552,7 @@
           <a:bodyPr wrap="square" lIns="0" tIns="0" rIns="0" bIns="0" rtlCol="0" anchor="ctr"/>
           <a:lstStyle/>
           <a:p>
-            <a:pPr indent="0" marL="0">
+            <a:pPr marL="0" indent="0">
               <a:buNone/>
             </a:pPr>
             <a:r>
@@ -3848,7 +3591,7 @@
           <a:bodyPr wrap="square" lIns="0" tIns="0" rIns="0" bIns="0" rtlCol="0" anchor="ctr"/>
           <a:lstStyle/>
           <a:p>
-            <a:pPr indent="0" marL="0">
+            <a:pPr marL="0" indent="0">
               <a:buNone/>
             </a:pPr>
             <a:r>
@@ -3887,7 +3630,7 @@
           <a:bodyPr wrap="square" lIns="0" tIns="0" rIns="0" bIns="0" rtlCol="0" anchor="ctr"/>
           <a:lstStyle/>
           <a:p>
-            <a:pPr indent="0" marL="0">
+            <a:pPr marL="0" indent="0">
               <a:buNone/>
             </a:pPr>
             <a:r>
@@ -3926,7 +3669,7 @@
           <a:bodyPr wrap="square" lIns="0" tIns="0" rIns="0" bIns="0" rtlCol="0" anchor="ctr"/>
           <a:lstStyle/>
           <a:p>
-            <a:pPr algn="r" indent="0" marL="0">
+            <a:pPr marL="0" indent="0" algn="r">
               <a:buNone/>
             </a:pPr>
             <a:r>
@@ -3963,7 +3706,7 @@
           </a:solidFill>
           <a:ln/>
           <a:effectLst>
-            <a:outerShdw sx="100000" sy="100000" kx="0" ky="0" algn="bl" rotWithShape="0" blurRad="76200" dist="25400" dir="8100000">
+            <a:outerShdw blurRad="76200" dist="25400" dir="8100000" algn="bl" rotWithShape="0">
               <a:srgbClr val="000000">
                 <a:alpha val="10000"/>
               </a:srgbClr>
@@ -3973,14 +3716,14 @@
       </p:sp>
       <p:pic>
         <p:nvPicPr>
-          <p:cNvPr id="7" name="Image 0" descr="C:\Users\Asus\projects\DreamOS\docs\diagrams\06_class_diagram.png">    </p:cNvPr>
+          <p:cNvPr id="7" name="Image 0" descr="C:\Users\Asus\projects\DreamOS\docs\diagrams\06_class_diagram.png"/>
           <p:cNvPicPr>
             <a:picLocks noChangeAspect="1"/>
           </p:cNvPicPr>
           <p:nvPr/>
         </p:nvPicPr>
         <p:blipFill>
-          <a:blip r:embed="rId1"/>
+          <a:blip r:embed="rId3"/>
           <a:stretch>
             <a:fillRect/>
           </a:stretch>
@@ -4011,6 +3754,7 @@
         <a:solidFill>
           <a:srgbClr val="F4F6FB"/>
         </a:solidFill>
+        <a:effectLst/>
       </p:bgPr>
     </p:bg>
     <p:spTree>
@@ -4048,7 +3792,7 @@
           <a:bodyPr wrap="square" lIns="0" tIns="0" rIns="0" bIns="0" rtlCol="0" anchor="ctr"/>
           <a:lstStyle/>
           <a:p>
-            <a:pPr indent="0" marL="0">
+            <a:pPr marL="0" indent="0">
               <a:buNone/>
             </a:pPr>
             <a:r>
@@ -4087,7 +3831,7 @@
           <a:bodyPr wrap="square" lIns="0" tIns="0" rIns="0" bIns="0" rtlCol="0" anchor="ctr"/>
           <a:lstStyle/>
           <a:p>
-            <a:pPr indent="0" marL="0">
+            <a:pPr marL="0" indent="0">
               <a:buNone/>
             </a:pPr>
             <a:r>
@@ -4126,7 +3870,7 @@
           <a:bodyPr wrap="square" lIns="0" tIns="0" rIns="0" bIns="0" rtlCol="0" anchor="ctr"/>
           <a:lstStyle/>
           <a:p>
-            <a:pPr indent="0" marL="0">
+            <a:pPr marL="0" indent="0">
               <a:buNone/>
             </a:pPr>
             <a:r>
@@ -4165,7 +3909,7 @@
           <a:bodyPr wrap="square" lIns="0" tIns="0" rIns="0" bIns="0" rtlCol="0" anchor="ctr"/>
           <a:lstStyle/>
           <a:p>
-            <a:pPr algn="r" indent="0" marL="0">
+            <a:pPr marL="0" indent="0" algn="r">
               <a:buNone/>
             </a:pPr>
             <a:r>
@@ -4202,7 +3946,7 @@
           </a:solidFill>
           <a:ln/>
           <a:effectLst>
-            <a:outerShdw sx="100000" sy="100000" kx="0" ky="0" algn="bl" rotWithShape="0" blurRad="76200" dist="25400" dir="8100000">
+            <a:outerShdw blurRad="76200" dist="25400" dir="8100000" algn="bl" rotWithShape="0">
               <a:srgbClr val="000000">
                 <a:alpha val="10000"/>
               </a:srgbClr>
@@ -4212,14 +3956,14 @@
       </p:sp>
       <p:pic>
         <p:nvPicPr>
-          <p:cNvPr id="7" name="Image 0" descr="C:\Users\Asus\projects\DreamOS\docs\diagrams\10_sequence_followup.png">    </p:cNvPr>
+          <p:cNvPr id="7" name="Image 0" descr="C:\Users\Asus\projects\DreamOS\docs\diagrams\10_sequence_followup.png"/>
           <p:cNvPicPr>
             <a:picLocks noChangeAspect="1"/>
           </p:cNvPicPr>
           <p:nvPr/>
         </p:nvPicPr>
         <p:blipFill>
-          <a:blip r:embed="rId1"/>
+          <a:blip r:embed="rId3"/>
           <a:stretch>
             <a:fillRect/>
           </a:stretch>
@@ -4250,6 +3994,7 @@
         <a:solidFill>
           <a:srgbClr val="F4F6FB"/>
         </a:solidFill>
+        <a:effectLst/>
       </p:bgPr>
     </p:bg>
     <p:spTree>
@@ -4287,7 +4032,7 @@
           <a:bodyPr wrap="square" lIns="0" tIns="0" rIns="0" bIns="0" rtlCol="0" anchor="ctr"/>
           <a:lstStyle/>
           <a:p>
-            <a:pPr indent="0" marL="0">
+            <a:pPr marL="0" indent="0">
               <a:buNone/>
             </a:pPr>
             <a:r>
@@ -4326,7 +4071,7 @@
           <a:bodyPr wrap="square" lIns="0" tIns="0" rIns="0" bIns="0" rtlCol="0" anchor="ctr"/>
           <a:lstStyle/>
           <a:p>
-            <a:pPr indent="0" marL="0">
+            <a:pPr marL="0" indent="0">
               <a:buNone/>
             </a:pPr>
             <a:r>
@@ -4365,7 +4110,7 @@
           <a:bodyPr wrap="square" lIns="0" tIns="0" rIns="0" bIns="0" rtlCol="0" anchor="ctr"/>
           <a:lstStyle/>
           <a:p>
-            <a:pPr indent="0" marL="0">
+            <a:pPr marL="0" indent="0">
               <a:buNone/>
             </a:pPr>
             <a:r>
@@ -4404,7 +4149,7 @@
           <a:bodyPr wrap="square" lIns="0" tIns="0" rIns="0" bIns="0" rtlCol="0" anchor="ctr"/>
           <a:lstStyle/>
           <a:p>
-            <a:pPr algn="r" indent="0" marL="0">
+            <a:pPr marL="0" indent="0" algn="r">
               <a:buNone/>
             </a:pPr>
             <a:r>
@@ -4441,7 +4186,7 @@
           </a:solidFill>
           <a:ln/>
           <a:effectLst>
-            <a:outerShdw sx="100000" sy="100000" kx="0" ky="0" algn="bl" rotWithShape="0" blurRad="76200" dist="25400" dir="8100000">
+            <a:outerShdw blurRad="76200" dist="25400" dir="8100000" algn="bl" rotWithShape="0">
               <a:srgbClr val="000000">
                 <a:alpha val="10000"/>
               </a:srgbClr>
@@ -4451,14 +4196,14 @@
       </p:sp>
       <p:pic>
         <p:nvPicPr>
-          <p:cNvPr id="7" name="Image 0" descr="C:\Users\Asus\projects\DreamOS\docs\diagrams\08_er_diagram.png">    </p:cNvPr>
+          <p:cNvPr id="7" name="Image 0" descr="C:\Users\Asus\projects\DreamOS\docs\diagrams\08_er_diagram.png"/>
           <p:cNvPicPr>
             <a:picLocks noChangeAspect="1"/>
           </p:cNvPicPr>
           <p:nvPr/>
         </p:nvPicPr>
         <p:blipFill>
-          <a:blip r:embed="rId1"/>
+          <a:blip r:embed="rId3"/>
           <a:stretch>
             <a:fillRect/>
           </a:stretch>
@@ -4492,7 +4237,7 @@
           </a:solidFill>
           <a:ln/>
           <a:effectLst>
-            <a:outerShdw sx="100000" sy="100000" kx="0" ky="0" algn="bl" rotWithShape="0" blurRad="76200" dist="25400" dir="8100000">
+            <a:outerShdw blurRad="76200" dist="25400" dir="8100000" algn="bl" rotWithShape="0">
               <a:srgbClr val="000000">
                 <a:alpha val="10000"/>
               </a:srgbClr>
@@ -4541,7 +4286,7 @@
           <a:bodyPr wrap="square" lIns="0" tIns="0" rIns="0" bIns="0" rtlCol="0" anchor="ctr"/>
           <a:lstStyle/>
           <a:p>
-            <a:pPr indent="0" marL="0">
+            <a:pPr marL="0" indent="0">
               <a:buNone/>
             </a:pPr>
             <a:r>
@@ -4702,6 +4447,7 @@
         <a:solidFill>
           <a:srgbClr val="F4F6FB"/>
         </a:solidFill>
+        <a:effectLst/>
       </p:bgPr>
     </p:bg>
     <p:spTree>
@@ -4739,7 +4485,7 @@
           <a:bodyPr wrap="square" lIns="0" tIns="0" rIns="0" bIns="0" rtlCol="0" anchor="ctr"/>
           <a:lstStyle/>
           <a:p>
-            <a:pPr indent="0" marL="0">
+            <a:pPr marL="0" indent="0">
               <a:buNone/>
             </a:pPr>
             <a:r>
@@ -4778,7 +4524,7 @@
           <a:bodyPr wrap="square" lIns="0" tIns="0" rIns="0" bIns="0" rtlCol="0" anchor="ctr"/>
           <a:lstStyle/>
           <a:p>
-            <a:pPr indent="0" marL="0">
+            <a:pPr marL="0" indent="0">
               <a:buNone/>
             </a:pPr>
             <a:r>
@@ -4817,7 +4563,7 @@
           <a:bodyPr wrap="square" lIns="0" tIns="0" rIns="0" bIns="0" rtlCol="0" anchor="ctr"/>
           <a:lstStyle/>
           <a:p>
-            <a:pPr indent="0" marL="0">
+            <a:pPr marL="0" indent="0">
               <a:buNone/>
             </a:pPr>
             <a:r>
@@ -4856,7 +4602,7 @@
           <a:bodyPr wrap="square" lIns="0" tIns="0" rIns="0" bIns="0" rtlCol="0" anchor="ctr"/>
           <a:lstStyle/>
           <a:p>
-            <a:pPr algn="r" indent="0" marL="0">
+            <a:pPr marL="0" indent="0" algn="r">
               <a:buNone/>
             </a:pPr>
             <a:r>
@@ -4893,7 +4639,7 @@
           </a:solidFill>
           <a:ln/>
           <a:effectLst>
-            <a:outerShdw sx="100000" sy="100000" kx="0" ky="0" algn="bl" rotWithShape="0" blurRad="76200" dist="25400" dir="8100000">
+            <a:outerShdw blurRad="76200" dist="25400" dir="8100000" algn="bl" rotWithShape="0">
               <a:srgbClr val="000000">
                 <a:alpha val="10000"/>
               </a:srgbClr>
@@ -4903,187 +4649,7 @@
       </p:sp>
       <p:pic>
         <p:nvPicPr>
-          <p:cNvPr id="7" name="Image 0" descr="C:\Users\Asus\projects\DreamOS\docs\screenshots\ui-chat.png">    </p:cNvPr>
-          <p:cNvPicPr>
-            <a:picLocks noChangeAspect="1"/>
-          </p:cNvPicPr>
-          <p:nvPr/>
-        </p:nvPicPr>
-        <p:blipFill>
-          <a:blip r:embed="rId1"/>
-          <a:stretch>
-            <a:fillRect/>
-          </a:stretch>
-        </p:blipFill>
-        <p:spPr>
-          <a:xfrm>
-            <a:off x="621792" y="1508331"/>
-            <a:ext cx="3465576" cy="2707481"/>
-          </a:xfrm>
-          <a:prstGeom prst="rect">
-            <a:avLst/>
-          </a:prstGeom>
-        </p:spPr>
-      </p:pic>
-      <p:sp>
-        <p:nvSpPr>
-          <p:cNvPr id="8" name="Text 5"/>
-          <p:cNvSpPr/>
-          <p:nvPr/>
-        </p:nvSpPr>
-        <p:spPr>
-          <a:xfrm>
-            <a:off x="685800" y="4343400"/>
-            <a:ext cx="3337560" cy="1097280"/>
-          </a:xfrm>
-          <a:prstGeom prst="rect">
-            <a:avLst/>
-          </a:prstGeom>
-          <a:noFill/>
-          <a:ln/>
-        </p:spPr>
-        <p:txBody>
-          <a:bodyPr wrap="square" lIns="0" tIns="0" rIns="0" bIns="0" rtlCol="0" anchor="t"/>
-          <a:lstStyle/>
-          <a:p>
-            <a:pPr indent="0" marL="0">
-              <a:buNone/>
-            </a:pPr>
-            <a:r>
-              <a:rPr lang="en-US" sz="1350" dirty="0">
-                <a:solidFill>
-                  <a:srgbClr val="1C2333"/>
-                </a:solidFill>
-                <a:latin typeface="Calibri" pitchFamily="34" charset="0"/>
-                <a:ea typeface="Calibri" pitchFamily="34" charset="-122"/>
-                <a:cs typeface="Calibri" pitchFamily="34" charset="-120"/>
-              </a:rPr>
-              <a:t>Chat: related files with the reason they are linked, and workspace suggestions</a:t>
-            </a:r>
-            <a:endParaRPr lang="en-US" sz="1350" dirty="0"/>
-          </a:p>
-        </p:txBody>
-      </p:sp>
-      <p:sp>
-        <p:nvSpPr>
-          <p:cNvPr id="9" name="Shape 6"/>
-          <p:cNvSpPr/>
-          <p:nvPr/>
-        </p:nvSpPr>
-        <p:spPr>
-          <a:xfrm>
-            <a:off x="4297680" y="1417320"/>
-            <a:ext cx="3611880" cy="4160520"/>
-          </a:xfrm>
-          <a:prstGeom prst="rect">
-            <a:avLst/>
-          </a:prstGeom>
-          <a:solidFill>
-            <a:srgbClr val="FFFFFF"/>
-          </a:solidFill>
-          <a:ln/>
-          <a:effectLst>
-            <a:outerShdw sx="100000" sy="100000" kx="0" ky="0" algn="bl" rotWithShape="0" blurRad="76200" dist="25400" dir="8100000">
-              <a:srgbClr val="000000">
-                <a:alpha val="10000"/>
-              </a:srgbClr>
-            </a:outerShdw>
-          </a:effectLst>
-        </p:spPr>
-      </p:sp>
-      <p:pic>
-        <p:nvPicPr>
-          <p:cNvPr id="10" name="Image 1" descr="C:\Users\Asus\projects\DreamOS\docs\screenshots\ui-knowledge-graph.png">    </p:cNvPr>
-          <p:cNvPicPr>
-            <a:picLocks noChangeAspect="1"/>
-          </p:cNvPicPr>
-          <p:nvPr/>
-        </p:nvPicPr>
-        <p:blipFill>
-          <a:blip r:embed="rId2"/>
-          <a:stretch>
-            <a:fillRect/>
-          </a:stretch>
-        </p:blipFill>
-        <p:spPr>
-          <a:xfrm>
-            <a:off x="4370832" y="1508331"/>
-            <a:ext cx="3465576" cy="2707481"/>
-          </a:xfrm>
-          <a:prstGeom prst="rect">
-            <a:avLst/>
-          </a:prstGeom>
-        </p:spPr>
-      </p:pic>
-      <p:sp>
-        <p:nvSpPr>
-          <p:cNvPr id="11" name="Text 7"/>
-          <p:cNvSpPr/>
-          <p:nvPr/>
-        </p:nvSpPr>
-        <p:spPr>
-          <a:xfrm>
-            <a:off x="4434840" y="4343400"/>
-            <a:ext cx="3337560" cy="1097280"/>
-          </a:xfrm>
-          <a:prstGeom prst="rect">
-            <a:avLst/>
-          </a:prstGeom>
-          <a:noFill/>
-          <a:ln/>
-        </p:spPr>
-        <p:txBody>
-          <a:bodyPr wrap="square" lIns="0" tIns="0" rIns="0" bIns="0" rtlCol="0" anchor="t"/>
-          <a:lstStyle/>
-          <a:p>
-            <a:pPr indent="0" marL="0">
-              <a:buNone/>
-            </a:pPr>
-            <a:r>
-              <a:rPr lang="en-US" sz="1350" dirty="0">
-                <a:solidFill>
-                  <a:srgbClr val="1C2333"/>
-                </a:solidFill>
-                <a:latin typeface="Calibri" pitchFamily="34" charset="0"/>
-                <a:ea typeface="Calibri" pitchFamily="34" charset="-122"/>
-                <a:cs typeface="Calibri" pitchFamily="34" charset="-120"/>
-              </a:rPr>
-              <a:t>Knowledge graph: nodes by category, edges by kind; a selected file and its neighbours</a:t>
-            </a:r>
-            <a:endParaRPr lang="en-US" sz="1350" dirty="0"/>
-          </a:p>
-        </p:txBody>
-      </p:sp>
-      <p:sp>
-        <p:nvSpPr>
-          <p:cNvPr id="12" name="Shape 8"/>
-          <p:cNvSpPr/>
-          <p:nvPr/>
-        </p:nvSpPr>
-        <p:spPr>
-          <a:xfrm>
-            <a:off x="8046720" y="1417320"/>
-            <a:ext cx="3611880" cy="4160520"/>
-          </a:xfrm>
-          <a:prstGeom prst="rect">
-            <a:avLst/>
-          </a:prstGeom>
-          <a:solidFill>
-            <a:srgbClr val="FFFFFF"/>
-          </a:solidFill>
-          <a:ln/>
-          <a:effectLst>
-            <a:outerShdw sx="100000" sy="100000" kx="0" ky="0" algn="bl" rotWithShape="0" blurRad="76200" dist="25400" dir="8100000">
-              <a:srgbClr val="000000">
-                <a:alpha val="10000"/>
-              </a:srgbClr>
-            </a:outerShdw>
-          </a:effectLst>
-        </p:spPr>
-      </p:sp>
-      <p:pic>
-        <p:nvPicPr>
-          <p:cNvPr id="13" name="Image 2" descr="C:\Users\Asus\projects\DreamOS\docs\screenshots\ui-workspaces.png">    </p:cNvPr>
+          <p:cNvPr id="7" name="Image 0" descr="C:\Users\Asus\projects\DreamOS\docs\screenshots\ui-chat.png"/>
           <p:cNvPicPr>
             <a:picLocks noChangeAspect="1"/>
           </p:cNvPicPr>
@@ -5097,7 +4663,7 @@
         </p:blipFill>
         <p:spPr>
           <a:xfrm>
-            <a:off x="8119872" y="1508331"/>
+            <a:off x="621792" y="1508331"/>
             <a:ext cx="3465576" cy="2707481"/>
           </a:xfrm>
           <a:prstGeom prst="rect">
@@ -5107,13 +4673,13 @@
       </p:pic>
       <p:sp>
         <p:nvSpPr>
-          <p:cNvPr id="14" name="Text 9"/>
-          <p:cNvSpPr/>
-          <p:nvPr/>
-        </p:nvSpPr>
-        <p:spPr>
-          <a:xfrm>
-            <a:off x="8183880" y="4343400"/>
+          <p:cNvPr id="8" name="Text 5"/>
+          <p:cNvSpPr/>
+          <p:nvPr/>
+        </p:nvSpPr>
+        <p:spPr>
+          <a:xfrm>
+            <a:off x="685800" y="4343400"/>
             <a:ext cx="3337560" cy="1097280"/>
           </a:xfrm>
           <a:prstGeom prst="rect">
@@ -5126,7 +4692,7 @@
           <a:bodyPr wrap="square" lIns="0" tIns="0" rIns="0" bIns="0" rtlCol="0" anchor="t"/>
           <a:lstStyle/>
           <a:p>
-            <a:pPr indent="0" marL="0">
+            <a:pPr marL="0" indent="0">
               <a:buNone/>
             </a:pPr>
             <a:r>
@@ -5138,6 +4704,186 @@
                 <a:ea typeface="Calibri" pitchFamily="34" charset="-122"/>
                 <a:cs typeface="Calibri" pitchFamily="34" charset="-120"/>
               </a:rPr>
+              <a:t>Chat: related files with the reason they are linked, and workspace suggestions</a:t>
+            </a:r>
+            <a:endParaRPr lang="en-US" sz="1350" dirty="0"/>
+          </a:p>
+        </p:txBody>
+      </p:sp>
+      <p:sp>
+        <p:nvSpPr>
+          <p:cNvPr id="9" name="Shape 6"/>
+          <p:cNvSpPr/>
+          <p:nvPr/>
+        </p:nvSpPr>
+        <p:spPr>
+          <a:xfrm>
+            <a:off x="4297680" y="1417320"/>
+            <a:ext cx="3611880" cy="4160520"/>
+          </a:xfrm>
+          <a:prstGeom prst="rect">
+            <a:avLst/>
+          </a:prstGeom>
+          <a:solidFill>
+            <a:srgbClr val="FFFFFF"/>
+          </a:solidFill>
+          <a:ln/>
+          <a:effectLst>
+            <a:outerShdw blurRad="76200" dist="25400" dir="8100000" algn="bl" rotWithShape="0">
+              <a:srgbClr val="000000">
+                <a:alpha val="10000"/>
+              </a:srgbClr>
+            </a:outerShdw>
+          </a:effectLst>
+        </p:spPr>
+      </p:sp>
+      <p:pic>
+        <p:nvPicPr>
+          <p:cNvPr id="10" name="Image 1" descr="C:\Users\Asus\projects\DreamOS\docs\screenshots\ui-knowledge-graph.png"/>
+          <p:cNvPicPr>
+            <a:picLocks noChangeAspect="1"/>
+          </p:cNvPicPr>
+          <p:nvPr/>
+        </p:nvPicPr>
+        <p:blipFill>
+          <a:blip r:embed="rId4"/>
+          <a:stretch>
+            <a:fillRect/>
+          </a:stretch>
+        </p:blipFill>
+        <p:spPr>
+          <a:xfrm>
+            <a:off x="4370832" y="1508331"/>
+            <a:ext cx="3465576" cy="2707481"/>
+          </a:xfrm>
+          <a:prstGeom prst="rect">
+            <a:avLst/>
+          </a:prstGeom>
+        </p:spPr>
+      </p:pic>
+      <p:sp>
+        <p:nvSpPr>
+          <p:cNvPr id="11" name="Text 7"/>
+          <p:cNvSpPr/>
+          <p:nvPr/>
+        </p:nvSpPr>
+        <p:spPr>
+          <a:xfrm>
+            <a:off x="4434840" y="4343400"/>
+            <a:ext cx="3337560" cy="1097280"/>
+          </a:xfrm>
+          <a:prstGeom prst="rect">
+            <a:avLst/>
+          </a:prstGeom>
+          <a:noFill/>
+          <a:ln/>
+        </p:spPr>
+        <p:txBody>
+          <a:bodyPr wrap="square" lIns="0" tIns="0" rIns="0" bIns="0" rtlCol="0" anchor="t"/>
+          <a:lstStyle/>
+          <a:p>
+            <a:pPr marL="0" indent="0">
+              <a:buNone/>
+            </a:pPr>
+            <a:r>
+              <a:rPr lang="en-US" sz="1350" dirty="0">
+                <a:solidFill>
+                  <a:srgbClr val="1C2333"/>
+                </a:solidFill>
+                <a:latin typeface="Calibri" pitchFamily="34" charset="0"/>
+                <a:ea typeface="Calibri" pitchFamily="34" charset="-122"/>
+                <a:cs typeface="Calibri" pitchFamily="34" charset="-120"/>
+              </a:rPr>
+              <a:t>Knowledge graph: nodes by category, edges by kind; a selected file and its neighbours</a:t>
+            </a:r>
+            <a:endParaRPr lang="en-US" sz="1350" dirty="0"/>
+          </a:p>
+        </p:txBody>
+      </p:sp>
+      <p:sp>
+        <p:nvSpPr>
+          <p:cNvPr id="12" name="Shape 8"/>
+          <p:cNvSpPr/>
+          <p:nvPr/>
+        </p:nvSpPr>
+        <p:spPr>
+          <a:xfrm>
+            <a:off x="8046720" y="1417320"/>
+            <a:ext cx="3611880" cy="4160520"/>
+          </a:xfrm>
+          <a:prstGeom prst="rect">
+            <a:avLst/>
+          </a:prstGeom>
+          <a:solidFill>
+            <a:srgbClr val="FFFFFF"/>
+          </a:solidFill>
+          <a:ln/>
+          <a:effectLst>
+            <a:outerShdw blurRad="76200" dist="25400" dir="8100000" algn="bl" rotWithShape="0">
+              <a:srgbClr val="000000">
+                <a:alpha val="10000"/>
+              </a:srgbClr>
+            </a:outerShdw>
+          </a:effectLst>
+        </p:spPr>
+      </p:sp>
+      <p:pic>
+        <p:nvPicPr>
+          <p:cNvPr id="13" name="Image 2" descr="C:\Users\Asus\projects\DreamOS\docs\screenshots\ui-workspaces.png"/>
+          <p:cNvPicPr>
+            <a:picLocks noChangeAspect="1"/>
+          </p:cNvPicPr>
+          <p:nvPr/>
+        </p:nvPicPr>
+        <p:blipFill>
+          <a:blip r:embed="rId5"/>
+          <a:stretch>
+            <a:fillRect/>
+          </a:stretch>
+        </p:blipFill>
+        <p:spPr>
+          <a:xfrm>
+            <a:off x="8119872" y="1508331"/>
+            <a:ext cx="3465576" cy="2707481"/>
+          </a:xfrm>
+          <a:prstGeom prst="rect">
+            <a:avLst/>
+          </a:prstGeom>
+        </p:spPr>
+      </p:pic>
+      <p:sp>
+        <p:nvSpPr>
+          <p:cNvPr id="14" name="Text 9"/>
+          <p:cNvSpPr/>
+          <p:nvPr/>
+        </p:nvSpPr>
+        <p:spPr>
+          <a:xfrm>
+            <a:off x="8183880" y="4343400"/>
+            <a:ext cx="3337560" cy="1097280"/>
+          </a:xfrm>
+          <a:prstGeom prst="rect">
+            <a:avLst/>
+          </a:prstGeom>
+          <a:noFill/>
+          <a:ln/>
+        </p:spPr>
+        <p:txBody>
+          <a:bodyPr wrap="square" lIns="0" tIns="0" rIns="0" bIns="0" rtlCol="0" anchor="t"/>
+          <a:lstStyle/>
+          <a:p>
+            <a:pPr marL="0" indent="0">
+              <a:buNone/>
+            </a:pPr>
+            <a:r>
+              <a:rPr lang="en-US" sz="1350" dirty="0">
+                <a:solidFill>
+                  <a:srgbClr val="1C2333"/>
+                </a:solidFill>
+                <a:latin typeface="Calibri" pitchFamily="34" charset="0"/>
+                <a:ea typeface="Calibri" pitchFamily="34" charset="-122"/>
+                <a:cs typeface="Calibri" pitchFamily="34" charset="-120"/>
+              </a:rPr>
               <a:t>Workspaces: a workspace created from a suggestion, and the remaining suggestions</a:t>
             </a:r>
             <a:endParaRPr lang="en-US" sz="1350" dirty="0"/>
@@ -5165,7 +4911,7 @@
           <a:bodyPr wrap="square" lIns="0" tIns="0" rIns="0" bIns="0" rtlCol="0" anchor="ctr"/>
           <a:lstStyle/>
           <a:p>
-            <a:pPr indent="0" marL="0">
+            <a:pPr marL="0" indent="0">
               <a:buNone/>
             </a:pPr>
             <a:r>
@@ -5199,6 +4945,7 @@
         <a:solidFill>
           <a:srgbClr val="F4F6FB"/>
         </a:solidFill>
+        <a:effectLst/>
       </p:bgPr>
     </p:bg>
     <p:spTree>
@@ -5236,7 +4983,7 @@
           <a:bodyPr wrap="square" lIns="0" tIns="0" rIns="0" bIns="0" rtlCol="0" anchor="ctr"/>
           <a:lstStyle/>
           <a:p>
-            <a:pPr indent="0" marL="0">
+            <a:pPr marL="0" indent="0">
               <a:buNone/>
             </a:pPr>
             <a:r>
@@ -5275,7 +5022,7 @@
           <a:bodyPr wrap="square" lIns="0" tIns="0" rIns="0" bIns="0" rtlCol="0" anchor="ctr"/>
           <a:lstStyle/>
           <a:p>
-            <a:pPr indent="0" marL="0">
+            <a:pPr marL="0" indent="0">
               <a:buNone/>
             </a:pPr>
             <a:r>
@@ -5314,7 +5061,7 @@
           <a:bodyPr wrap="square" lIns="0" tIns="0" rIns="0" bIns="0" rtlCol="0" anchor="ctr"/>
           <a:lstStyle/>
           <a:p>
-            <a:pPr algn="r" indent="0" marL="0">
+            <a:pPr marL="0" indent="0" algn="r">
               <a:buNone/>
             </a:pPr>
             <a:r>
@@ -5351,7 +5098,7 @@
           </a:solidFill>
           <a:ln/>
           <a:effectLst>
-            <a:outerShdw sx="100000" sy="100000" kx="0" ky="0" algn="bl" rotWithShape="0" blurRad="76200" dist="25400" dir="8100000">
+            <a:outerShdw blurRad="76200" dist="25400" dir="8100000" algn="bl" rotWithShape="0">
               <a:srgbClr val="000000">
                 <a:alpha val="10000"/>
               </a:srgbClr>
@@ -5380,7 +5127,7 @@
           <a:bodyPr wrap="square" lIns="0" tIns="0" rIns="0" bIns="0" rtlCol="0" anchor="ctr"/>
           <a:lstStyle/>
           <a:p>
-            <a:pPr indent="0" marL="0">
+            <a:pPr marL="0" indent="0">
               <a:buNone/>
             </a:pPr>
             <a:r>
@@ -5419,7 +5166,7 @@
           <a:bodyPr wrap="square" lIns="0" tIns="0" rIns="0" bIns="0" rtlCol="0" anchor="t"/>
           <a:lstStyle/>
           <a:p>
-            <a:pPr indent="0" marL="0">
+            <a:pPr marL="0" indent="0">
               <a:buNone/>
             </a:pPr>
             <a:r>
@@ -5456,7 +5203,7 @@
           </a:solidFill>
           <a:ln/>
           <a:effectLst>
-            <a:outerShdw sx="100000" sy="100000" kx="0" ky="0" algn="bl" rotWithShape="0" blurRad="76200" dist="25400" dir="8100000">
+            <a:outerShdw blurRad="76200" dist="25400" dir="8100000" algn="bl" rotWithShape="0">
               <a:srgbClr val="000000">
                 <a:alpha val="10000"/>
               </a:srgbClr>
@@ -5485,7 +5232,7 @@
           <a:bodyPr wrap="square" lIns="0" tIns="0" rIns="0" bIns="0" rtlCol="0" anchor="ctr"/>
           <a:lstStyle/>
           <a:p>
-            <a:pPr indent="0" marL="0">
+            <a:pPr marL="0" indent="0">
               <a:buNone/>
             </a:pPr>
             <a:r>
@@ -5524,7 +5271,7 @@
           <a:bodyPr wrap="square" lIns="0" tIns="0" rIns="0" bIns="0" rtlCol="0" anchor="t"/>
           <a:lstStyle/>
           <a:p>
-            <a:pPr indent="0" marL="0">
+            <a:pPr marL="0" indent="0">
               <a:buNone/>
             </a:pPr>
             <a:r>
@@ -5561,7 +5308,7 @@
           </a:solidFill>
           <a:ln/>
           <a:effectLst>
-            <a:outerShdw sx="100000" sy="100000" kx="0" ky="0" algn="bl" rotWithShape="0" blurRad="76200" dist="25400" dir="8100000">
+            <a:outerShdw blurRad="76200" dist="25400" dir="8100000" algn="bl" rotWithShape="0">
               <a:srgbClr val="000000">
                 <a:alpha val="10000"/>
               </a:srgbClr>
@@ -5590,7 +5337,7 @@
           <a:bodyPr wrap="square" lIns="0" tIns="0" rIns="0" bIns="0" rtlCol="0" anchor="ctr"/>
           <a:lstStyle/>
           <a:p>
-            <a:pPr indent="0" marL="0">
+            <a:pPr marL="0" indent="0">
               <a:buNone/>
             </a:pPr>
             <a:r>
@@ -5629,7 +5376,7 @@
           <a:bodyPr wrap="square" lIns="0" tIns="0" rIns="0" bIns="0" rtlCol="0" anchor="t"/>
           <a:lstStyle/>
           <a:p>
-            <a:pPr indent="0" marL="0">
+            <a:pPr marL="0" indent="0">
               <a:buNone/>
             </a:pPr>
             <a:r>
@@ -5666,7 +5413,7 @@
           </a:solidFill>
           <a:ln/>
           <a:effectLst>
-            <a:outerShdw sx="100000" sy="100000" kx="0" ky="0" algn="bl" rotWithShape="0" blurRad="76200" dist="25400" dir="8100000">
+            <a:outerShdw blurRad="76200" dist="25400" dir="8100000" algn="bl" rotWithShape="0">
               <a:srgbClr val="000000">
                 <a:alpha val="10000"/>
               </a:srgbClr>
@@ -5715,7 +5462,7 @@
           <a:bodyPr wrap="square" lIns="0" tIns="0" rIns="0" bIns="0" rtlCol="0" anchor="ctr"/>
           <a:lstStyle/>
           <a:p>
-            <a:pPr indent="0" marL="0">
+            <a:pPr marL="0" indent="0">
               <a:buNone/>
             </a:pPr>
             <a:r>
@@ -5858,7 +5605,7 @@
           </a:solidFill>
           <a:ln/>
           <a:effectLst>
-            <a:outerShdw sx="100000" sy="100000" kx="0" ky="0" algn="bl" rotWithShape="0" blurRad="76200" dist="25400" dir="8100000">
+            <a:outerShdw blurRad="76200" dist="25400" dir="8100000" algn="bl" rotWithShape="0">
               <a:srgbClr val="000000">
                 <a:alpha val="10000"/>
               </a:srgbClr>
@@ -5907,7 +5654,7 @@
           <a:bodyPr wrap="square" lIns="0" tIns="0" rIns="0" bIns="0" rtlCol="0" anchor="ctr"/>
           <a:lstStyle/>
           <a:p>
-            <a:pPr indent="0" marL="0">
+            <a:pPr marL="0" indent="0">
               <a:buNone/>
             </a:pPr>
             <a:r>
@@ -6047,6 +5794,7 @@
         <a:solidFill>
           <a:srgbClr val="F4F6FB"/>
         </a:solidFill>
+        <a:effectLst/>
       </p:bgPr>
     </p:bg>
     <p:spTree>
@@ -6084,7 +5832,7 @@
           <a:bodyPr wrap="square" lIns="0" tIns="0" rIns="0" bIns="0" rtlCol="0" anchor="ctr"/>
           <a:lstStyle/>
           <a:p>
-            <a:pPr indent="0" marL="0">
+            <a:pPr marL="0" indent="0">
               <a:buNone/>
             </a:pPr>
             <a:r>
@@ -6123,7 +5871,7 @@
           <a:bodyPr wrap="square" lIns="0" tIns="0" rIns="0" bIns="0" rtlCol="0" anchor="ctr"/>
           <a:lstStyle/>
           <a:p>
-            <a:pPr indent="0" marL="0">
+            <a:pPr marL="0" indent="0">
               <a:buNone/>
             </a:pPr>
             <a:r>
@@ -6162,7 +5910,7 @@
           <a:bodyPr wrap="square" lIns="0" tIns="0" rIns="0" bIns="0" rtlCol="0" anchor="ctr"/>
           <a:lstStyle/>
           <a:p>
-            <a:pPr indent="0" marL="0">
+            <a:pPr marL="0" indent="0">
               <a:buNone/>
             </a:pPr>
             <a:r>
@@ -6201,7 +5949,7 @@
           <a:bodyPr wrap="square" lIns="0" tIns="0" rIns="0" bIns="0" rtlCol="0" anchor="ctr"/>
           <a:lstStyle/>
           <a:p>
-            <a:pPr algn="r" indent="0" marL="0">
+            <a:pPr marL="0" indent="0" algn="r">
               <a:buNone/>
             </a:pPr>
             <a:r>
@@ -6238,7 +5986,7 @@
           </a:solidFill>
           <a:ln/>
           <a:effectLst>
-            <a:outerShdw sx="100000" sy="100000" kx="0" ky="0" algn="bl" rotWithShape="0" blurRad="76200" dist="25400" dir="8100000">
+            <a:outerShdw blurRad="76200" dist="25400" dir="8100000" algn="bl" rotWithShape="0">
               <a:srgbClr val="000000">
                 <a:alpha val="10000"/>
               </a:srgbClr>
@@ -6287,7 +6035,7 @@
           <a:bodyPr wrap="square" lIns="0" tIns="0" rIns="0" bIns="0" rtlCol="0" anchor="ctr"/>
           <a:lstStyle/>
           <a:p>
-            <a:pPr indent="0" marL="0">
+            <a:pPr marL="0" indent="0">
               <a:buNone/>
             </a:pPr>
             <a:r>
@@ -6430,7 +6178,7 @@
           </a:solidFill>
           <a:ln/>
           <a:effectLst>
-            <a:outerShdw sx="100000" sy="100000" kx="0" ky="0" algn="bl" rotWithShape="0" blurRad="76200" dist="25400" dir="8100000">
+            <a:outerShdw blurRad="76200" dist="25400" dir="8100000" algn="bl" rotWithShape="0">
               <a:srgbClr val="000000">
                 <a:alpha val="10000"/>
               </a:srgbClr>
@@ -6479,7 +6227,7 @@
           <a:bodyPr wrap="square" lIns="0" tIns="0" rIns="0" bIns="0" rtlCol="0" anchor="ctr"/>
           <a:lstStyle/>
           <a:p>
-            <a:pPr indent="0" marL="0">
+            <a:pPr marL="0" indent="0">
               <a:buNone/>
             </a:pPr>
             <a:r>
@@ -6601,7 +6349,7 @@
           </a:solidFill>
           <a:ln/>
           <a:effectLst>
-            <a:outerShdw sx="100000" sy="100000" kx="0" ky="0" algn="bl" rotWithShape="0" blurRad="76200" dist="25400" dir="8100000">
+            <a:outerShdw blurRad="76200" dist="25400" dir="8100000" algn="bl" rotWithShape="0">
               <a:srgbClr val="000000">
                 <a:alpha val="10000"/>
               </a:srgbClr>
@@ -6650,7 +6398,7 @@
           <a:bodyPr wrap="square" lIns="0" tIns="0" rIns="0" bIns="0" rtlCol="0" anchor="ctr"/>
           <a:lstStyle/>
           <a:p>
-            <a:pPr indent="0" marL="0">
+            <a:pPr marL="0" indent="0">
               <a:buNone/>
             </a:pPr>
             <a:r>
@@ -6769,6 +6517,7 @@
         <a:solidFill>
           <a:srgbClr val="F4F6FB"/>
         </a:solidFill>
+        <a:effectLst/>
       </p:bgPr>
     </p:bg>
     <p:spTree>
@@ -6806,7 +6555,7 @@
           <a:bodyPr wrap="square" lIns="0" tIns="0" rIns="0" bIns="0" rtlCol="0" anchor="ctr"/>
           <a:lstStyle/>
           <a:p>
-            <a:pPr indent="0" marL="0">
+            <a:pPr marL="0" indent="0">
               <a:buNone/>
             </a:pPr>
             <a:r>
@@ -6845,7 +6594,7 @@
           <a:bodyPr wrap="square" lIns="0" tIns="0" rIns="0" bIns="0" rtlCol="0" anchor="ctr"/>
           <a:lstStyle/>
           <a:p>
-            <a:pPr indent="0" marL="0">
+            <a:pPr marL="0" indent="0">
               <a:buNone/>
             </a:pPr>
             <a:r>
@@ -6884,7 +6633,7 @@
           <a:bodyPr wrap="square" lIns="0" tIns="0" rIns="0" bIns="0" rtlCol="0" anchor="ctr"/>
           <a:lstStyle/>
           <a:p>
-            <a:pPr indent="0" marL="0">
+            <a:pPr marL="0" indent="0">
               <a:buNone/>
             </a:pPr>
             <a:r>
@@ -6923,7 +6672,7 @@
           <a:bodyPr wrap="square" lIns="0" tIns="0" rIns="0" bIns="0" rtlCol="0" anchor="ctr"/>
           <a:lstStyle/>
           <a:p>
-            <a:pPr algn="r" indent="0" marL="0">
+            <a:pPr marL="0" indent="0" algn="r">
               <a:buNone/>
             </a:pPr>
             <a:r>
@@ -6960,7 +6709,7 @@
           </a:solidFill>
           <a:ln/>
           <a:effectLst>
-            <a:outerShdw sx="100000" sy="100000" kx="0" ky="0" algn="bl" rotWithShape="0" blurRad="76200" dist="25400" dir="8100000">
+            <a:outerShdw blurRad="76200" dist="25400" dir="8100000" algn="bl" rotWithShape="0">
               <a:srgbClr val="000000">
                 <a:alpha val="10000"/>
               </a:srgbClr>
@@ -7009,7 +6758,7 @@
           <a:bodyPr wrap="square" lIns="0" tIns="0" rIns="0" bIns="0" rtlCol="0" anchor="ctr"/>
           <a:lstStyle/>
           <a:p>
-            <a:pPr indent="0" marL="0">
+            <a:pPr marL="0" indent="0">
               <a:buNone/>
             </a:pPr>
             <a:r>
@@ -7154,7 +6903,7 @@
           <a:bodyPr wrap="square" lIns="0" tIns="0" rIns="0" bIns="0" rtlCol="0" anchor="ctr"/>
           <a:lstStyle/>
           <a:p>
-            <a:pPr indent="0" marL="0">
+            <a:pPr marL="0" indent="0">
               <a:buNone/>
             </a:pPr>
             <a:r>
@@ -7195,8 +6944,20 @@
             <a:tbl>
               <a:tblPr/>
               <a:tblGrid>
-                <a:gridCol w="2011680"/>
-                <a:gridCol w="3703320"/>
+                <a:gridCol w="2011680">
+                  <a:extLst>
+                    <a:ext uri="{9D8B030D-6E8A-4147-A177-3AD203B41FA5}">
+                      <a16:colId xmlns:a16="http://schemas.microsoft.com/office/drawing/2014/main" val="20000"/>
+                    </a:ext>
+                  </a:extLst>
+                </a:gridCol>
+                <a:gridCol w="3703320">
+                  <a:extLst>
+                    <a:ext uri="{9D8B030D-6E8A-4147-A177-3AD203B41FA5}">
+                      <a16:colId xmlns:a16="http://schemas.microsoft.com/office/drawing/2014/main" val="20001"/>
+                    </a:ext>
+                  </a:extLst>
+                </a:gridCol>
               </a:tblGrid>
               <a:tr h="566928">
                 <a:tc>
@@ -7204,7 +6965,7 @@
                     <a:bodyPr/>
                     <a:lstStyle/>
                     <a:p>
-                      <a:pPr indent="0" marL="0">
+                      <a:pPr marL="0" indent="0">
                         <a:buNone/>
                       </a:pPr>
                       <a:r>
@@ -7225,7 +6986,7 @@
                       </a:endParaRPr>
                     </a:p>
                   </a:txBody>
-                  <a:tcPr marL="91440" marR="91440" marT="45720" marB="45720" anchor="ctr">
+                  <a:tcPr anchor="ctr">
                     <a:lnL w="6350" cap="flat" cmpd="sng" algn="ctr">
                       <a:solidFill>
                         <a:srgbClr val="D6DCEA"/>
@@ -7272,7 +7033,7 @@
                     <a:bodyPr/>
                     <a:lstStyle/>
                     <a:p>
-                      <a:pPr indent="0" marL="0">
+                      <a:pPr marL="0" indent="0">
                         <a:buNone/>
                       </a:pPr>
                       <a:r>
@@ -7293,7 +7054,7 @@
                       </a:endParaRPr>
                     </a:p>
                   </a:txBody>
-                  <a:tcPr marL="91440" marR="91440" marT="45720" marB="45720" anchor="ctr">
+                  <a:tcPr anchor="ctr">
                     <a:lnL w="6350" cap="flat" cmpd="sng" algn="ctr">
                       <a:solidFill>
                         <a:srgbClr val="D6DCEA"/>
@@ -7335,6 +7096,11 @@
                     </a:solidFill>
                   </a:tcPr>
                 </a:tc>
+                <a:extLst>
+                  <a:ext uri="{0D108BD9-81ED-4DB2-BD59-A6C34878D82A}">
+                    <a16:rowId xmlns:a16="http://schemas.microsoft.com/office/drawing/2014/main" val="10000"/>
+                  </a:ext>
+                </a:extLst>
               </a:tr>
               <a:tr h="566928">
                 <a:tc>
@@ -7342,7 +7108,7 @@
                     <a:bodyPr/>
                     <a:lstStyle/>
                     <a:p>
-                      <a:pPr indent="0" marL="0">
+                      <a:pPr marL="0" indent="0">
                         <a:buNone/>
                       </a:pPr>
                       <a:r>
@@ -7363,7 +7129,7 @@
                       </a:endParaRPr>
                     </a:p>
                   </a:txBody>
-                  <a:tcPr marL="91440" marR="91440" marT="45720" marB="45720" anchor="ctr">
+                  <a:tcPr anchor="ctr">
                     <a:lnL w="6350" cap="flat" cmpd="sng" algn="ctr">
                       <a:solidFill>
                         <a:srgbClr val="D6DCEA"/>
@@ -7407,7 +7173,7 @@
                     <a:bodyPr/>
                     <a:lstStyle/>
                     <a:p>
-                      <a:pPr indent="0" marL="0">
+                      <a:pPr marL="0" indent="0">
                         <a:buNone/>
                       </a:pPr>
                       <a:r>
@@ -7428,7 +7194,7 @@
                       </a:endParaRPr>
                     </a:p>
                   </a:txBody>
-                  <a:tcPr marL="91440" marR="91440" marT="45720" marB="45720" anchor="ctr">
+                  <a:tcPr anchor="ctr">
                     <a:lnL w="6350" cap="flat" cmpd="sng" algn="ctr">
                       <a:solidFill>
                         <a:srgbClr val="D6DCEA"/>
@@ -7467,6 +7233,11 @@
                     </a:lnB>
                   </a:tcPr>
                 </a:tc>
+                <a:extLst>
+                  <a:ext uri="{0D108BD9-81ED-4DB2-BD59-A6C34878D82A}">
+                    <a16:rowId xmlns:a16="http://schemas.microsoft.com/office/drawing/2014/main" val="10001"/>
+                  </a:ext>
+                </a:extLst>
               </a:tr>
               <a:tr h="566928">
                 <a:tc>
@@ -7474,7 +7245,7 @@
                     <a:bodyPr/>
                     <a:lstStyle/>
                     <a:p>
-                      <a:pPr indent="0" marL="0">
+                      <a:pPr marL="0" indent="0">
                         <a:buNone/>
                       </a:pPr>
                       <a:r>
@@ -7495,7 +7266,7 @@
                       </a:endParaRPr>
                     </a:p>
                   </a:txBody>
-                  <a:tcPr marL="91440" marR="91440" marT="45720" marB="45720" anchor="ctr">
+                  <a:tcPr anchor="ctr">
                     <a:lnL w="6350" cap="flat" cmpd="sng" algn="ctr">
                       <a:solidFill>
                         <a:srgbClr val="D6DCEA"/>
@@ -7539,7 +7310,7 @@
                     <a:bodyPr/>
                     <a:lstStyle/>
                     <a:p>
-                      <a:pPr indent="0" marL="0">
+                      <a:pPr marL="0" indent="0">
                         <a:buNone/>
                       </a:pPr>
                       <a:r>
@@ -7560,7 +7331,7 @@
                       </a:endParaRPr>
                     </a:p>
                   </a:txBody>
-                  <a:tcPr marL="91440" marR="91440" marT="45720" marB="45720" anchor="ctr">
+                  <a:tcPr anchor="ctr">
                     <a:lnL w="6350" cap="flat" cmpd="sng" algn="ctr">
                       <a:solidFill>
                         <a:srgbClr val="D6DCEA"/>
@@ -7599,6 +7370,11 @@
                     </a:lnB>
                   </a:tcPr>
                 </a:tc>
+                <a:extLst>
+                  <a:ext uri="{0D108BD9-81ED-4DB2-BD59-A6C34878D82A}">
+                    <a16:rowId xmlns:a16="http://schemas.microsoft.com/office/drawing/2014/main" val="10002"/>
+                  </a:ext>
+                </a:extLst>
               </a:tr>
               <a:tr h="566928">
                 <a:tc>
@@ -7606,7 +7382,7 @@
                     <a:bodyPr/>
                     <a:lstStyle/>
                     <a:p>
-                      <a:pPr indent="0" marL="0">
+                      <a:pPr marL="0" indent="0">
                         <a:buNone/>
                       </a:pPr>
                       <a:r>
@@ -7627,7 +7403,7 @@
                       </a:endParaRPr>
                     </a:p>
                   </a:txBody>
-                  <a:tcPr marL="91440" marR="91440" marT="45720" marB="45720" anchor="ctr">
+                  <a:tcPr anchor="ctr">
                     <a:lnL w="6350" cap="flat" cmpd="sng" algn="ctr">
                       <a:solidFill>
                         <a:srgbClr val="D6DCEA"/>
@@ -7671,7 +7447,7 @@
                     <a:bodyPr/>
                     <a:lstStyle/>
                     <a:p>
-                      <a:pPr indent="0" marL="0">
+                      <a:pPr marL="0" indent="0">
                         <a:buNone/>
                       </a:pPr>
                       <a:r>
@@ -7692,7 +7468,7 @@
                       </a:endParaRPr>
                     </a:p>
                   </a:txBody>
-                  <a:tcPr marL="91440" marR="91440" marT="45720" marB="45720" anchor="ctr">
+                  <a:tcPr anchor="ctr">
                     <a:lnL w="6350" cap="flat" cmpd="sng" algn="ctr">
                       <a:solidFill>
                         <a:srgbClr val="D6DCEA"/>
@@ -7731,6 +7507,11 @@
                     </a:lnB>
                   </a:tcPr>
                 </a:tc>
+                <a:extLst>
+                  <a:ext uri="{0D108BD9-81ED-4DB2-BD59-A6C34878D82A}">
+                    <a16:rowId xmlns:a16="http://schemas.microsoft.com/office/drawing/2014/main" val="10003"/>
+                  </a:ext>
+                </a:extLst>
               </a:tr>
               <a:tr h="566928">
                 <a:tc>
@@ -7738,7 +7519,7 @@
                     <a:bodyPr/>
                     <a:lstStyle/>
                     <a:p>
-                      <a:pPr indent="0" marL="0">
+                      <a:pPr marL="0" indent="0">
                         <a:buNone/>
                       </a:pPr>
                       <a:r>
@@ -7759,7 +7540,7 @@
                       </a:endParaRPr>
                     </a:p>
                   </a:txBody>
-                  <a:tcPr marL="91440" marR="91440" marT="45720" marB="45720" anchor="ctr">
+                  <a:tcPr anchor="ctr">
                     <a:lnL w="6350" cap="flat" cmpd="sng" algn="ctr">
                       <a:solidFill>
                         <a:srgbClr val="D6DCEA"/>
@@ -7803,7 +7584,7 @@
                     <a:bodyPr/>
                     <a:lstStyle/>
                     <a:p>
-                      <a:pPr indent="0" marL="0">
+                      <a:pPr marL="0" indent="0">
                         <a:buNone/>
                       </a:pPr>
                       <a:r>
@@ -7824,7 +7605,7 @@
                       </a:endParaRPr>
                     </a:p>
                   </a:txBody>
-                  <a:tcPr marL="91440" marR="91440" marT="45720" marB="45720" anchor="ctr">
+                  <a:tcPr anchor="ctr">
                     <a:lnL w="6350" cap="flat" cmpd="sng" algn="ctr">
                       <a:solidFill>
                         <a:srgbClr val="D6DCEA"/>
@@ -7863,6 +7644,11 @@
                     </a:lnB>
                   </a:tcPr>
                 </a:tc>
+                <a:extLst>
+                  <a:ext uri="{0D108BD9-81ED-4DB2-BD59-A6C34878D82A}">
+                    <a16:rowId xmlns:a16="http://schemas.microsoft.com/office/drawing/2014/main" val="10004"/>
+                  </a:ext>
+                </a:extLst>
               </a:tr>
               <a:tr h="566928">
                 <a:tc>
@@ -7870,7 +7656,7 @@
                     <a:bodyPr/>
                     <a:lstStyle/>
                     <a:p>
-                      <a:pPr indent="0" marL="0">
+                      <a:pPr marL="0" indent="0">
                         <a:buNone/>
                       </a:pPr>
                       <a:r>
@@ -7891,7 +7677,7 @@
                       </a:endParaRPr>
                     </a:p>
                   </a:txBody>
-                  <a:tcPr marL="91440" marR="91440" marT="45720" marB="45720" anchor="ctr">
+                  <a:tcPr anchor="ctr">
                     <a:lnL w="6350" cap="flat" cmpd="sng" algn="ctr">
                       <a:solidFill>
                         <a:srgbClr val="D6DCEA"/>
@@ -7935,7 +7721,7 @@
                     <a:bodyPr/>
                     <a:lstStyle/>
                     <a:p>
-                      <a:pPr indent="0" marL="0">
+                      <a:pPr marL="0" indent="0">
                         <a:buNone/>
                       </a:pPr>
                       <a:r>
@@ -7956,7 +7742,7 @@
                       </a:endParaRPr>
                     </a:p>
                   </a:txBody>
-                  <a:tcPr marL="91440" marR="91440" marT="45720" marB="45720" anchor="ctr">
+                  <a:tcPr anchor="ctr">
                     <a:lnL w="6350" cap="flat" cmpd="sng" algn="ctr">
                       <a:solidFill>
                         <a:srgbClr val="D6DCEA"/>
@@ -7995,6 +7781,11 @@
                     </a:lnB>
                   </a:tcPr>
                 </a:tc>
+                <a:extLst>
+                  <a:ext uri="{0D108BD9-81ED-4DB2-BD59-A6C34878D82A}">
+                    <a16:rowId xmlns:a16="http://schemas.microsoft.com/office/drawing/2014/main" val="10005"/>
+                  </a:ext>
+                </a:extLst>
               </a:tr>
             </a:tbl>
           </a:graphicData>
@@ -8021,7 +7812,7 @@
           <a:bodyPr wrap="square" lIns="0" tIns="0" rIns="0" bIns="0" rtlCol="0" anchor="t"/>
           <a:lstStyle/>
           <a:p>
-            <a:pPr indent="0" marL="0">
+            <a:pPr marL="0" indent="0">
               <a:buNone/>
             </a:pPr>
             <a:r>
@@ -8055,6 +7846,7 @@
         <a:solidFill>
           <a:srgbClr val="F4F6FB"/>
         </a:solidFill>
+        <a:effectLst/>
       </p:bgPr>
     </p:bg>
     <p:spTree>
@@ -8092,7 +7884,7 @@
           <a:bodyPr wrap="square" lIns="0" tIns="0" rIns="0" bIns="0" rtlCol="0" anchor="ctr"/>
           <a:lstStyle/>
           <a:p>
-            <a:pPr indent="0" marL="0">
+            <a:pPr marL="0" indent="0">
               <a:buNone/>
             </a:pPr>
             <a:r>
@@ -8131,7 +7923,7 @@
           <a:bodyPr wrap="square" lIns="0" tIns="0" rIns="0" bIns="0" rtlCol="0" anchor="ctr"/>
           <a:lstStyle/>
           <a:p>
-            <a:pPr indent="0" marL="0">
+            <a:pPr marL="0" indent="0">
               <a:buNone/>
             </a:pPr>
             <a:r>
@@ -8170,7 +7962,7 @@
           <a:bodyPr wrap="square" lIns="0" tIns="0" rIns="0" bIns="0" rtlCol="0" anchor="ctr"/>
           <a:lstStyle/>
           <a:p>
-            <a:pPr indent="0" marL="0">
+            <a:pPr marL="0" indent="0">
               <a:buNone/>
             </a:pPr>
             <a:r>
@@ -8209,7 +8001,7 @@
           <a:bodyPr wrap="square" lIns="0" tIns="0" rIns="0" bIns="0" rtlCol="0" anchor="ctr"/>
           <a:lstStyle/>
           <a:p>
-            <a:pPr algn="r" indent="0" marL="0">
+            <a:pPr marL="0" indent="0" algn="r">
               <a:buNone/>
             </a:pPr>
             <a:r>
@@ -8250,9 +8042,27 @@
             <a:tbl>
               <a:tblPr/>
               <a:tblGrid>
-                <a:gridCol w="3017520"/>
-                <a:gridCol w="6263640"/>
-                <a:gridCol w="1828800"/>
+                <a:gridCol w="3017520">
+                  <a:extLst>
+                    <a:ext uri="{9D8B030D-6E8A-4147-A177-3AD203B41FA5}">
+                      <a16:colId xmlns:a16="http://schemas.microsoft.com/office/drawing/2014/main" val="20000"/>
+                    </a:ext>
+                  </a:extLst>
+                </a:gridCol>
+                <a:gridCol w="6263640">
+                  <a:extLst>
+                    <a:ext uri="{9D8B030D-6E8A-4147-A177-3AD203B41FA5}">
+                      <a16:colId xmlns:a16="http://schemas.microsoft.com/office/drawing/2014/main" val="20001"/>
+                    </a:ext>
+                  </a:extLst>
+                </a:gridCol>
+                <a:gridCol w="1828800">
+                  <a:extLst>
+                    <a:ext uri="{9D8B030D-6E8A-4147-A177-3AD203B41FA5}">
+                      <a16:colId xmlns:a16="http://schemas.microsoft.com/office/drawing/2014/main" val="20002"/>
+                    </a:ext>
+                  </a:extLst>
+                </a:gridCol>
               </a:tblGrid>
               <a:tr h="640080">
                 <a:tc>
@@ -8260,7 +8070,7 @@
                     <a:bodyPr/>
                     <a:lstStyle/>
                     <a:p>
-                      <a:pPr indent="0" marL="0">
+                      <a:pPr marL="0" indent="0">
                         <a:buNone/>
                       </a:pPr>
                       <a:r>
@@ -8281,7 +8091,7 @@
                       </a:endParaRPr>
                     </a:p>
                   </a:txBody>
-                  <a:tcPr marL="91440" marR="91440" marT="45720" marB="45720" anchor="ctr">
+                  <a:tcPr anchor="ctr">
                     <a:lnL w="6350" cap="flat" cmpd="sng" algn="ctr">
                       <a:solidFill>
                         <a:srgbClr val="D6DCEA"/>
@@ -8328,7 +8138,7 @@
                     <a:bodyPr/>
                     <a:lstStyle/>
                     <a:p>
-                      <a:pPr indent="0" marL="0">
+                      <a:pPr marL="0" indent="0">
                         <a:buNone/>
                       </a:pPr>
                       <a:r>
@@ -8349,7 +8159,7 @@
                       </a:endParaRPr>
                     </a:p>
                   </a:txBody>
-                  <a:tcPr marL="91440" marR="91440" marT="45720" marB="45720" anchor="ctr">
+                  <a:tcPr anchor="ctr">
                     <a:lnL w="6350" cap="flat" cmpd="sng" algn="ctr">
                       <a:solidFill>
                         <a:srgbClr val="D6DCEA"/>
@@ -8396,7 +8206,7 @@
                     <a:bodyPr/>
                     <a:lstStyle/>
                     <a:p>
-                      <a:pPr indent="0" marL="0">
+                      <a:pPr marL="0" indent="0">
                         <a:buNone/>
                       </a:pPr>
                       <a:r>
@@ -8417,7 +8227,7 @@
                       </a:endParaRPr>
                     </a:p>
                   </a:txBody>
-                  <a:tcPr marL="91440" marR="91440" marT="45720" marB="45720" anchor="ctr">
+                  <a:tcPr anchor="ctr">
                     <a:lnL w="6350" cap="flat" cmpd="sng" algn="ctr">
                       <a:solidFill>
                         <a:srgbClr val="D6DCEA"/>
@@ -8459,6 +8269,11 @@
                     </a:solidFill>
                   </a:tcPr>
                 </a:tc>
+                <a:extLst>
+                  <a:ext uri="{0D108BD9-81ED-4DB2-BD59-A6C34878D82A}">
+                    <a16:rowId xmlns:a16="http://schemas.microsoft.com/office/drawing/2014/main" val="10000"/>
+                  </a:ext>
+                </a:extLst>
               </a:tr>
               <a:tr h="640080">
                 <a:tc>
@@ -8466,7 +8281,7 @@
                     <a:bodyPr/>
                     <a:lstStyle/>
                     <a:p>
-                      <a:pPr indent="0" marL="0">
+                      <a:pPr marL="0" indent="0">
                         <a:buNone/>
                       </a:pPr>
                       <a:r>
@@ -8487,7 +8302,7 @@
                       </a:endParaRPr>
                     </a:p>
                   </a:txBody>
-                  <a:tcPr marL="91440" marR="91440" marT="45720" marB="45720" anchor="ctr">
+                  <a:tcPr anchor="ctr">
                     <a:lnL w="6350" cap="flat" cmpd="sng" algn="ctr">
                       <a:solidFill>
                         <a:srgbClr val="D6DCEA"/>
@@ -8531,7 +8346,7 @@
                     <a:bodyPr/>
                     <a:lstStyle/>
                     <a:p>
-                      <a:pPr indent="0" marL="0">
+                      <a:pPr marL="0" indent="0">
                         <a:buNone/>
                       </a:pPr>
                       <a:r>
@@ -8552,7 +8367,7 @@
                       </a:endParaRPr>
                     </a:p>
                   </a:txBody>
-                  <a:tcPr marL="91440" marR="91440" marT="45720" marB="45720" anchor="ctr">
+                  <a:tcPr anchor="ctr">
                     <a:lnL w="6350" cap="flat" cmpd="sng" algn="ctr">
                       <a:solidFill>
                         <a:srgbClr val="D6DCEA"/>
@@ -8596,7 +8411,7 @@
                     <a:bodyPr/>
                     <a:lstStyle/>
                     <a:p>
-                      <a:pPr indent="0" marL="0">
+                      <a:pPr marL="0" indent="0">
                         <a:buNone/>
                       </a:pPr>
                       <a:r>
@@ -8617,7 +8432,7 @@
                       </a:endParaRPr>
                     </a:p>
                   </a:txBody>
-                  <a:tcPr marL="91440" marR="91440" marT="45720" marB="45720" anchor="ctr">
+                  <a:tcPr anchor="ctr">
                     <a:lnL w="6350" cap="flat" cmpd="sng" algn="ctr">
                       <a:solidFill>
                         <a:srgbClr val="D6DCEA"/>
@@ -8656,6 +8471,11 @@
                     </a:lnB>
                   </a:tcPr>
                 </a:tc>
+                <a:extLst>
+                  <a:ext uri="{0D108BD9-81ED-4DB2-BD59-A6C34878D82A}">
+                    <a16:rowId xmlns:a16="http://schemas.microsoft.com/office/drawing/2014/main" val="10001"/>
+                  </a:ext>
+                </a:extLst>
               </a:tr>
               <a:tr h="640080">
                 <a:tc>
@@ -8663,7 +8483,7 @@
                     <a:bodyPr/>
                     <a:lstStyle/>
                     <a:p>
-                      <a:pPr indent="0" marL="0">
+                      <a:pPr marL="0" indent="0">
                         <a:buNone/>
                       </a:pPr>
                       <a:r>
@@ -8684,7 +8504,7 @@
                       </a:endParaRPr>
                     </a:p>
                   </a:txBody>
-                  <a:tcPr marL="91440" marR="91440" marT="45720" marB="45720" anchor="ctr">
+                  <a:tcPr anchor="ctr">
                     <a:lnL w="6350" cap="flat" cmpd="sng" algn="ctr">
                       <a:solidFill>
                         <a:srgbClr val="D6DCEA"/>
@@ -8728,7 +8548,7 @@
                     <a:bodyPr/>
                     <a:lstStyle/>
                     <a:p>
-                      <a:pPr indent="0" marL="0">
+                      <a:pPr marL="0" indent="0">
                         <a:buNone/>
                       </a:pPr>
                       <a:r>
@@ -8749,7 +8569,7 @@
                       </a:endParaRPr>
                     </a:p>
                   </a:txBody>
-                  <a:tcPr marL="91440" marR="91440" marT="45720" marB="45720" anchor="ctr">
+                  <a:tcPr anchor="ctr">
                     <a:lnL w="6350" cap="flat" cmpd="sng" algn="ctr">
                       <a:solidFill>
                         <a:srgbClr val="D6DCEA"/>
@@ -8793,7 +8613,7 @@
                     <a:bodyPr/>
                     <a:lstStyle/>
                     <a:p>
-                      <a:pPr indent="0" marL="0">
+                      <a:pPr marL="0" indent="0">
                         <a:buNone/>
                       </a:pPr>
                       <a:r>
@@ -8814,7 +8634,7 @@
                       </a:endParaRPr>
                     </a:p>
                   </a:txBody>
-                  <a:tcPr marL="91440" marR="91440" marT="45720" marB="45720" anchor="ctr">
+                  <a:tcPr anchor="ctr">
                     <a:lnL w="6350" cap="flat" cmpd="sng" algn="ctr">
                       <a:solidFill>
                         <a:srgbClr val="D6DCEA"/>
@@ -8853,6 +8673,11 @@
                     </a:lnB>
                   </a:tcPr>
                 </a:tc>
+                <a:extLst>
+                  <a:ext uri="{0D108BD9-81ED-4DB2-BD59-A6C34878D82A}">
+                    <a16:rowId xmlns:a16="http://schemas.microsoft.com/office/drawing/2014/main" val="10002"/>
+                  </a:ext>
+                </a:extLst>
               </a:tr>
               <a:tr h="640080">
                 <a:tc>
@@ -8860,7 +8685,7 @@
                     <a:bodyPr/>
                     <a:lstStyle/>
                     <a:p>
-                      <a:pPr indent="0" marL="0">
+                      <a:pPr marL="0" indent="0">
                         <a:buNone/>
                       </a:pPr>
                       <a:r>
@@ -8881,7 +8706,7 @@
                       </a:endParaRPr>
                     </a:p>
                   </a:txBody>
-                  <a:tcPr marL="91440" marR="91440" marT="45720" marB="45720" anchor="ctr">
+                  <a:tcPr anchor="ctr">
                     <a:lnL w="6350" cap="flat" cmpd="sng" algn="ctr">
                       <a:solidFill>
                         <a:srgbClr val="D6DCEA"/>
@@ -8925,7 +8750,7 @@
                     <a:bodyPr/>
                     <a:lstStyle/>
                     <a:p>
-                      <a:pPr indent="0" marL="0">
+                      <a:pPr marL="0" indent="0">
                         <a:buNone/>
                       </a:pPr>
                       <a:r>
@@ -8946,7 +8771,7 @@
                       </a:endParaRPr>
                     </a:p>
                   </a:txBody>
-                  <a:tcPr marL="91440" marR="91440" marT="45720" marB="45720" anchor="ctr">
+                  <a:tcPr anchor="ctr">
                     <a:lnL w="6350" cap="flat" cmpd="sng" algn="ctr">
                       <a:solidFill>
                         <a:srgbClr val="D6DCEA"/>
@@ -8990,7 +8815,7 @@
                     <a:bodyPr/>
                     <a:lstStyle/>
                     <a:p>
-                      <a:pPr indent="0" marL="0">
+                      <a:pPr marL="0" indent="0">
                         <a:buNone/>
                       </a:pPr>
                       <a:r>
@@ -9011,7 +8836,7 @@
                       </a:endParaRPr>
                     </a:p>
                   </a:txBody>
-                  <a:tcPr marL="91440" marR="91440" marT="45720" marB="45720" anchor="ctr">
+                  <a:tcPr anchor="ctr">
                     <a:lnL w="6350" cap="flat" cmpd="sng" algn="ctr">
                       <a:solidFill>
                         <a:srgbClr val="D6DCEA"/>
@@ -9050,6 +8875,11 @@
                     </a:lnB>
                   </a:tcPr>
                 </a:tc>
+                <a:extLst>
+                  <a:ext uri="{0D108BD9-81ED-4DB2-BD59-A6C34878D82A}">
+                    <a16:rowId xmlns:a16="http://schemas.microsoft.com/office/drawing/2014/main" val="10003"/>
+                  </a:ext>
+                </a:extLst>
               </a:tr>
               <a:tr h="640080">
                 <a:tc>
@@ -9057,7 +8887,7 @@
                     <a:bodyPr/>
                     <a:lstStyle/>
                     <a:p>
-                      <a:pPr indent="0" marL="0">
+                      <a:pPr marL="0" indent="0">
                         <a:buNone/>
                       </a:pPr>
                       <a:r>
@@ -9078,7 +8908,7 @@
                       </a:endParaRPr>
                     </a:p>
                   </a:txBody>
-                  <a:tcPr marL="91440" marR="91440" marT="45720" marB="45720" anchor="ctr">
+                  <a:tcPr anchor="ctr">
                     <a:lnL w="6350" cap="flat" cmpd="sng" algn="ctr">
                       <a:solidFill>
                         <a:srgbClr val="D6DCEA"/>
@@ -9122,7 +8952,7 @@
                     <a:bodyPr/>
                     <a:lstStyle/>
                     <a:p>
-                      <a:pPr indent="0" marL="0">
+                      <a:pPr marL="0" indent="0">
                         <a:buNone/>
                       </a:pPr>
                       <a:r>
@@ -9143,7 +8973,7 @@
                       </a:endParaRPr>
                     </a:p>
                   </a:txBody>
-                  <a:tcPr marL="91440" marR="91440" marT="45720" marB="45720" anchor="ctr">
+                  <a:tcPr anchor="ctr">
                     <a:lnL w="6350" cap="flat" cmpd="sng" algn="ctr">
                       <a:solidFill>
                         <a:srgbClr val="D6DCEA"/>
@@ -9187,7 +9017,7 @@
                     <a:bodyPr/>
                     <a:lstStyle/>
                     <a:p>
-                      <a:pPr indent="0" marL="0">
+                      <a:pPr marL="0" indent="0">
                         <a:buNone/>
                       </a:pPr>
                       <a:r>
@@ -9208,7 +9038,7 @@
                       </a:endParaRPr>
                     </a:p>
                   </a:txBody>
-                  <a:tcPr marL="91440" marR="91440" marT="45720" marB="45720" anchor="ctr">
+                  <a:tcPr anchor="ctr">
                     <a:lnL w="6350" cap="flat" cmpd="sng" algn="ctr">
                       <a:solidFill>
                         <a:srgbClr val="D6DCEA"/>
@@ -9247,6 +9077,11 @@
                     </a:lnB>
                   </a:tcPr>
                 </a:tc>
+                <a:extLst>
+                  <a:ext uri="{0D108BD9-81ED-4DB2-BD59-A6C34878D82A}">
+                    <a16:rowId xmlns:a16="http://schemas.microsoft.com/office/drawing/2014/main" val="10004"/>
+                  </a:ext>
+                </a:extLst>
               </a:tr>
             </a:tbl>
           </a:graphicData>
@@ -9271,7 +9106,7 @@
           </a:solidFill>
           <a:ln/>
           <a:effectLst>
-            <a:outerShdw sx="100000" sy="100000" kx="0" ky="0" algn="bl" rotWithShape="0" blurRad="76200" dist="25400" dir="8100000">
+            <a:outerShdw blurRad="76200" dist="25400" dir="8100000" algn="bl" rotWithShape="0">
               <a:srgbClr val="000000">
                 <a:alpha val="10000"/>
               </a:srgbClr>
@@ -9320,7 +9155,7 @@
           <a:bodyPr wrap="square" lIns="0" tIns="0" rIns="0" bIns="0" rtlCol="0" anchor="ctr"/>
           <a:lstStyle/>
           <a:p>
-            <a:pPr indent="0" marL="0">
+            <a:pPr marL="0" indent="0">
               <a:buNone/>
             </a:pPr>
             <a:r>
@@ -9354,6 +9189,7 @@
         <a:solidFill>
           <a:srgbClr val="F4F6FB"/>
         </a:solidFill>
+        <a:effectLst/>
       </p:bgPr>
     </p:bg>
     <p:spTree>
@@ -9391,7 +9227,7 @@
           <a:bodyPr wrap="square" lIns="0" tIns="0" rIns="0" bIns="0" rtlCol="0" anchor="ctr"/>
           <a:lstStyle/>
           <a:p>
-            <a:pPr indent="0" marL="0">
+            <a:pPr marL="0" indent="0">
               <a:buNone/>
             </a:pPr>
             <a:r>
@@ -9430,7 +9266,7 @@
           <a:bodyPr wrap="square" lIns="0" tIns="0" rIns="0" bIns="0" rtlCol="0" anchor="ctr"/>
           <a:lstStyle/>
           <a:p>
-            <a:pPr indent="0" marL="0">
+            <a:pPr marL="0" indent="0">
               <a:buNone/>
             </a:pPr>
             <a:r>
@@ -9469,7 +9305,7 @@
           <a:bodyPr wrap="square" lIns="0" tIns="0" rIns="0" bIns="0" rtlCol="0" anchor="ctr"/>
           <a:lstStyle/>
           <a:p>
-            <a:pPr algn="r" indent="0" marL="0">
+            <a:pPr marL="0" indent="0" algn="r">
               <a:buNone/>
             </a:pPr>
             <a:r>
@@ -9506,7 +9342,7 @@
           </a:solidFill>
           <a:ln/>
           <a:effectLst>
-            <a:outerShdw sx="100000" sy="100000" kx="0" ky="0" algn="bl" rotWithShape="0" blurRad="76200" dist="25400" dir="8100000">
+            <a:outerShdw blurRad="76200" dist="25400" dir="8100000" algn="bl" rotWithShape="0">
               <a:srgbClr val="000000">
                 <a:alpha val="10000"/>
               </a:srgbClr>
@@ -9555,7 +9391,7 @@
           <a:bodyPr wrap="square" lIns="0" tIns="0" rIns="0" bIns="0" rtlCol="0" anchor="ctr"/>
           <a:lstStyle/>
           <a:p>
-            <a:pPr indent="0" marL="0">
+            <a:pPr marL="0" indent="0">
               <a:buNone/>
             </a:pPr>
             <a:r>
@@ -9594,7 +9430,7 @@
           <a:bodyPr wrap="square" lIns="0" tIns="0" rIns="0" bIns="0" rtlCol="0" anchor="t"/>
           <a:lstStyle/>
           <a:p>
-            <a:pPr indent="0" marL="0">
+            <a:pPr marL="0" indent="0">
               <a:buNone/>
             </a:pPr>
             <a:r>
@@ -9633,7 +9469,7 @@
           <a:bodyPr wrap="square" lIns="0" tIns="0" rIns="0" bIns="0" rtlCol="0" anchor="t"/>
           <a:lstStyle/>
           <a:p>
-            <a:pPr indent="0" marL="0">
+            <a:pPr marL="0" indent="0">
               <a:buNone/>
             </a:pPr>
             <a:r>
@@ -9672,7 +9508,7 @@
           <a:bodyPr wrap="square" lIns="0" tIns="0" rIns="0" bIns="0" rtlCol="0" anchor="ctr"/>
           <a:lstStyle/>
           <a:p>
-            <a:pPr indent="0" marL="0">
+            <a:pPr marL="0" indent="0">
               <a:buNone/>
             </a:pPr>
             <a:r>
@@ -9709,7 +9545,7 @@
           </a:solidFill>
           <a:ln/>
           <a:effectLst>
-            <a:outerShdw sx="100000" sy="100000" kx="0" ky="0" algn="bl" rotWithShape="0" blurRad="76200" dist="25400" dir="8100000">
+            <a:outerShdw blurRad="76200" dist="25400" dir="8100000" algn="bl" rotWithShape="0">
               <a:srgbClr val="000000">
                 <a:alpha val="10000"/>
               </a:srgbClr>
@@ -9758,7 +9594,7 @@
           <a:bodyPr wrap="square" lIns="0" tIns="0" rIns="0" bIns="0" rtlCol="0" anchor="ctr"/>
           <a:lstStyle/>
           <a:p>
-            <a:pPr indent="0" marL="0">
+            <a:pPr marL="0" indent="0">
               <a:buNone/>
             </a:pPr>
             <a:r>
@@ -9797,7 +9633,7 @@
           <a:bodyPr wrap="square" lIns="0" tIns="0" rIns="0" bIns="0" rtlCol="0" anchor="ctr"/>
           <a:lstStyle/>
           <a:p>
-            <a:pPr indent="0" marL="0">
+            <a:pPr marL="0" indent="0">
               <a:buNone/>
             </a:pPr>
             <a:r>
@@ -9817,305 +9653,7 @@
       </p:sp>
       <p:pic>
         <p:nvPicPr>
-          <p:cNvPr id="15" name="Image 0" descr="preencoded.png">    </p:cNvPr>
-          <p:cNvPicPr>
-            <a:picLocks noChangeAspect="1"/>
-          </p:cNvPicPr>
-          <p:nvPr/>
-        </p:nvPicPr>
-        <p:blipFill>
-          <a:blip r:embed="rId1"/>
-          <a:stretch>
-            <a:fillRect/>
-          </a:stretch>
-        </p:blipFill>
-        <p:spPr>
-          <a:xfrm>
-            <a:off x="11247120" y="1920240"/>
-            <a:ext cx="256032" cy="256032"/>
-          </a:xfrm>
-          <a:prstGeom prst="rect">
-            <a:avLst/>
-          </a:prstGeom>
-        </p:spPr>
-      </p:pic>
-      <p:sp>
-        <p:nvSpPr>
-          <p:cNvPr id="16" name="Shape 13"/>
-          <p:cNvSpPr/>
-          <p:nvPr/>
-        </p:nvSpPr>
-        <p:spPr>
-          <a:xfrm>
-            <a:off x="5852160" y="2468880"/>
-            <a:ext cx="5806440" cy="621792"/>
-          </a:xfrm>
-          <a:prstGeom prst="rect">
-            <a:avLst/>
-          </a:prstGeom>
-          <a:solidFill>
-            <a:srgbClr val="FFFFFF"/>
-          </a:solidFill>
-          <a:ln/>
-          <a:effectLst>
-            <a:outerShdw sx="100000" sy="100000" kx="0" ky="0" algn="bl" rotWithShape="0" blurRad="76200" dist="25400" dir="8100000">
-              <a:srgbClr val="000000">
-                <a:alpha val="10000"/>
-              </a:srgbClr>
-            </a:outerShdw>
-          </a:effectLst>
-        </p:spPr>
-      </p:sp>
-      <p:sp>
-        <p:nvSpPr>
-          <p:cNvPr id="17" name="Shape 14"/>
-          <p:cNvSpPr/>
-          <p:nvPr/>
-        </p:nvSpPr>
-        <p:spPr>
-          <a:xfrm>
-            <a:off x="5852160" y="2468880"/>
-            <a:ext cx="64008" cy="621792"/>
-          </a:xfrm>
-          <a:prstGeom prst="rect">
-            <a:avLst/>
-          </a:prstGeom>
-          <a:solidFill>
-            <a:srgbClr val="2E7D32"/>
-          </a:solidFill>
-          <a:ln/>
-        </p:spPr>
-      </p:sp>
-      <p:sp>
-        <p:nvSpPr>
-          <p:cNvPr id="18" name="Text 15"/>
-          <p:cNvSpPr/>
-          <p:nvPr/>
-        </p:nvSpPr>
-        <p:spPr>
-          <a:xfrm>
-            <a:off x="6035040" y="2468880"/>
-            <a:ext cx="365760" cy="621792"/>
-          </a:xfrm>
-          <a:prstGeom prst="rect">
-            <a:avLst/>
-          </a:prstGeom>
-          <a:noFill/>
-          <a:ln/>
-        </p:spPr>
-        <p:txBody>
-          <a:bodyPr wrap="square" lIns="0" tIns="0" rIns="0" bIns="0" rtlCol="0" anchor="ctr"/>
-          <a:lstStyle/>
-          <a:p>
-            <a:pPr indent="0" marL="0">
-              <a:buNone/>
-            </a:pPr>
-            <a:r>
-              <a:rPr lang="en-US" sz="1600" b="1" dirty="0">
-                <a:solidFill>
-                  <a:srgbClr val="2E7D32"/>
-                </a:solidFill>
-                <a:latin typeface="Trebuchet MS" pitchFamily="34" charset="0"/>
-                <a:ea typeface="Trebuchet MS" pitchFamily="34" charset="-122"/>
-                <a:cs typeface="Trebuchet MS" pitchFamily="34" charset="-120"/>
-              </a:rPr>
-              <a:t>2</a:t>
-            </a:r>
-            <a:endParaRPr lang="en-US" sz="1600" dirty="0"/>
-          </a:p>
-        </p:txBody>
-      </p:sp>
-      <p:sp>
-        <p:nvSpPr>
-          <p:cNvPr id="19" name="Text 16"/>
-          <p:cNvSpPr/>
-          <p:nvPr/>
-        </p:nvSpPr>
-        <p:spPr>
-          <a:xfrm>
-            <a:off x="6446520" y="2468880"/>
-            <a:ext cx="4846320" cy="621792"/>
-          </a:xfrm>
-          <a:prstGeom prst="rect">
-            <a:avLst/>
-          </a:prstGeom>
-          <a:noFill/>
-          <a:ln/>
-        </p:spPr>
-        <p:txBody>
-          <a:bodyPr wrap="square" lIns="0" tIns="0" rIns="0" bIns="0" rtlCol="0" anchor="ctr"/>
-          <a:lstStyle/>
-          <a:p>
-            <a:pPr indent="0" marL="0">
-              <a:buNone/>
-            </a:pPr>
-            <a:r>
-              <a:rPr lang="en-US" sz="1250" dirty="0">
-                <a:solidFill>
-                  <a:srgbClr val="1C2333"/>
-                </a:solidFill>
-                <a:latin typeface="Calibri" pitchFamily="34" charset="0"/>
-                <a:ea typeface="Calibri" pitchFamily="34" charset="-122"/>
-                <a:cs typeface="Calibri" pitchFamily="34" charset="-120"/>
-              </a:rPr>
-              <a:t>One natural-language interface that classifies intent and routes it</a:t>
-            </a:r>
-            <a:endParaRPr lang="en-US" sz="1250" dirty="0"/>
-          </a:p>
-        </p:txBody>
-      </p:sp>
-      <p:pic>
-        <p:nvPicPr>
-          <p:cNvPr id="20" name="Image 1" descr="preencoded.png">    </p:cNvPr>
-          <p:cNvPicPr>
-            <a:picLocks noChangeAspect="1"/>
-          </p:cNvPicPr>
-          <p:nvPr/>
-        </p:nvPicPr>
-        <p:blipFill>
-          <a:blip r:embed="rId2"/>
-          <a:stretch>
-            <a:fillRect/>
-          </a:stretch>
-        </p:blipFill>
-        <p:spPr>
-          <a:xfrm>
-            <a:off x="11247120" y="2651760"/>
-            <a:ext cx="256032" cy="256032"/>
-          </a:xfrm>
-          <a:prstGeom prst="rect">
-            <a:avLst/>
-          </a:prstGeom>
-        </p:spPr>
-      </p:pic>
-      <p:sp>
-        <p:nvSpPr>
-          <p:cNvPr id="21" name="Shape 17"/>
-          <p:cNvSpPr/>
-          <p:nvPr/>
-        </p:nvSpPr>
-        <p:spPr>
-          <a:xfrm>
-            <a:off x="5852160" y="3200400"/>
-            <a:ext cx="5806440" cy="621792"/>
-          </a:xfrm>
-          <a:prstGeom prst="rect">
-            <a:avLst/>
-          </a:prstGeom>
-          <a:solidFill>
-            <a:srgbClr val="FFFFFF"/>
-          </a:solidFill>
-          <a:ln/>
-          <a:effectLst>
-            <a:outerShdw sx="100000" sy="100000" kx="0" ky="0" algn="bl" rotWithShape="0" blurRad="76200" dist="25400" dir="8100000">
-              <a:srgbClr val="000000">
-                <a:alpha val="10000"/>
-              </a:srgbClr>
-            </a:outerShdw>
-          </a:effectLst>
-        </p:spPr>
-      </p:sp>
-      <p:sp>
-        <p:nvSpPr>
-          <p:cNvPr id="22" name="Shape 18"/>
-          <p:cNvSpPr/>
-          <p:nvPr/>
-        </p:nvSpPr>
-        <p:spPr>
-          <a:xfrm>
-            <a:off x="5852160" y="3200400"/>
-            <a:ext cx="64008" cy="621792"/>
-          </a:xfrm>
-          <a:prstGeom prst="rect">
-            <a:avLst/>
-          </a:prstGeom>
-          <a:solidFill>
-            <a:srgbClr val="2E7D32"/>
-          </a:solidFill>
-          <a:ln/>
-        </p:spPr>
-      </p:sp>
-      <p:sp>
-        <p:nvSpPr>
-          <p:cNvPr id="23" name="Text 19"/>
-          <p:cNvSpPr/>
-          <p:nvPr/>
-        </p:nvSpPr>
-        <p:spPr>
-          <a:xfrm>
-            <a:off x="6035040" y="3200400"/>
-            <a:ext cx="365760" cy="621792"/>
-          </a:xfrm>
-          <a:prstGeom prst="rect">
-            <a:avLst/>
-          </a:prstGeom>
-          <a:noFill/>
-          <a:ln/>
-        </p:spPr>
-        <p:txBody>
-          <a:bodyPr wrap="square" lIns="0" tIns="0" rIns="0" bIns="0" rtlCol="0" anchor="ctr"/>
-          <a:lstStyle/>
-          <a:p>
-            <a:pPr indent="0" marL="0">
-              <a:buNone/>
-            </a:pPr>
-            <a:r>
-              <a:rPr lang="en-US" sz="1600" b="1" dirty="0">
-                <a:solidFill>
-                  <a:srgbClr val="2E7D32"/>
-                </a:solidFill>
-                <a:latin typeface="Trebuchet MS" pitchFamily="34" charset="0"/>
-                <a:ea typeface="Trebuchet MS" pitchFamily="34" charset="-122"/>
-                <a:cs typeface="Trebuchet MS" pitchFamily="34" charset="-120"/>
-              </a:rPr>
-              <a:t>3</a:t>
-            </a:r>
-            <a:endParaRPr lang="en-US" sz="1600" dirty="0"/>
-          </a:p>
-        </p:txBody>
-      </p:sp>
-      <p:sp>
-        <p:nvSpPr>
-          <p:cNvPr id="24" name="Text 20"/>
-          <p:cNvSpPr/>
-          <p:nvPr/>
-        </p:nvSpPr>
-        <p:spPr>
-          <a:xfrm>
-            <a:off x="6446520" y="3200400"/>
-            <a:ext cx="4846320" cy="621792"/>
-          </a:xfrm>
-          <a:prstGeom prst="rect">
-            <a:avLst/>
-          </a:prstGeom>
-          <a:noFill/>
-          <a:ln/>
-        </p:spPr>
-        <p:txBody>
-          <a:bodyPr wrap="square" lIns="0" tIns="0" rIns="0" bIns="0" rtlCol="0" anchor="ctr"/>
-          <a:lstStyle/>
-          <a:p>
-            <a:pPr indent="0" marL="0">
-              <a:buNone/>
-            </a:pPr>
-            <a:r>
-              <a:rPr lang="en-US" sz="1250" dirty="0">
-                <a:solidFill>
-                  <a:srgbClr val="1C2333"/>
-                </a:solidFill>
-                <a:latin typeface="Calibri" pitchFamily="34" charset="0"/>
-                <a:ea typeface="Calibri" pitchFamily="34" charset="-122"/>
-                <a:cs typeface="Calibri" pitchFamily="34" charset="-120"/>
-              </a:rPr>
-              <a:t>Retrieve by meaning, ranked by similarity; open the top match directly</a:t>
-            </a:r>
-            <a:endParaRPr lang="en-US" sz="1250" dirty="0"/>
-          </a:p>
-        </p:txBody>
-      </p:sp>
-      <p:pic>
-        <p:nvPicPr>
-          <p:cNvPr id="25" name="Image 2" descr="preencoded.png">    </p:cNvPr>
+          <p:cNvPr id="15" name="Image 0" descr="preencoded.png"/>
           <p:cNvPicPr>
             <a:picLocks noChangeAspect="1"/>
           </p:cNvPicPr>
@@ -10129,7 +9667,7 @@
         </p:blipFill>
         <p:spPr>
           <a:xfrm>
-            <a:off x="11247120" y="3383280"/>
+            <a:off x="11247120" y="1920240"/>
             <a:ext cx="256032" cy="256032"/>
           </a:xfrm>
           <a:prstGeom prst="rect">
@@ -10139,13 +9677,13 @@
       </p:pic>
       <p:sp>
         <p:nvSpPr>
-          <p:cNvPr id="26" name="Shape 21"/>
-          <p:cNvSpPr/>
-          <p:nvPr/>
-        </p:nvSpPr>
-        <p:spPr>
-          <a:xfrm>
-            <a:off x="5852160" y="3931920"/>
+          <p:cNvPr id="16" name="Shape 13"/>
+          <p:cNvSpPr/>
+          <p:nvPr/>
+        </p:nvSpPr>
+        <p:spPr>
+          <a:xfrm>
+            <a:off x="5852160" y="2468880"/>
             <a:ext cx="5806440" cy="621792"/>
           </a:xfrm>
           <a:prstGeom prst="rect">
@@ -10156,7 +9694,7 @@
           </a:solidFill>
           <a:ln/>
           <a:effectLst>
-            <a:outerShdw sx="100000" sy="100000" kx="0" ky="0" algn="bl" rotWithShape="0" blurRad="76200" dist="25400" dir="8100000">
+            <a:outerShdw blurRad="76200" dist="25400" dir="8100000" algn="bl" rotWithShape="0">
               <a:srgbClr val="000000">
                 <a:alpha val="10000"/>
               </a:srgbClr>
@@ -10166,13 +9704,13 @@
       </p:sp>
       <p:sp>
         <p:nvSpPr>
-          <p:cNvPr id="27" name="Shape 22"/>
-          <p:cNvSpPr/>
-          <p:nvPr/>
-        </p:nvSpPr>
-        <p:spPr>
-          <a:xfrm>
-            <a:off x="5852160" y="3931920"/>
+          <p:cNvPr id="17" name="Shape 14"/>
+          <p:cNvSpPr/>
+          <p:nvPr/>
+        </p:nvSpPr>
+        <p:spPr>
+          <a:xfrm>
+            <a:off x="5852160" y="2468880"/>
             <a:ext cx="64008" cy="621792"/>
           </a:xfrm>
           <a:prstGeom prst="rect">
@@ -10186,13 +9724,13 @@
       </p:sp>
       <p:sp>
         <p:nvSpPr>
-          <p:cNvPr id="28" name="Text 23"/>
-          <p:cNvSpPr/>
-          <p:nvPr/>
-        </p:nvSpPr>
-        <p:spPr>
-          <a:xfrm>
-            <a:off x="6035040" y="3931920"/>
+          <p:cNvPr id="18" name="Text 15"/>
+          <p:cNvSpPr/>
+          <p:nvPr/>
+        </p:nvSpPr>
+        <p:spPr>
+          <a:xfrm>
+            <a:off x="6035040" y="2468880"/>
             <a:ext cx="365760" cy="621792"/>
           </a:xfrm>
           <a:prstGeom prst="rect">
@@ -10205,7 +9743,7 @@
           <a:bodyPr wrap="square" lIns="0" tIns="0" rIns="0" bIns="0" rtlCol="0" anchor="ctr"/>
           <a:lstStyle/>
           <a:p>
-            <a:pPr indent="0" marL="0">
+            <a:pPr marL="0" indent="0">
               <a:buNone/>
             </a:pPr>
             <a:r>
@@ -10217,7 +9755,7 @@
                 <a:ea typeface="Trebuchet MS" pitchFamily="34" charset="-122"/>
                 <a:cs typeface="Trebuchet MS" pitchFamily="34" charset="-120"/>
               </a:rPr>
-              <a:t>4</a:t>
+              <a:t>2</a:t>
             </a:r>
             <a:endParaRPr lang="en-US" sz="1600" dirty="0"/>
           </a:p>
@@ -10225,13 +9763,13 @@
       </p:sp>
       <p:sp>
         <p:nvSpPr>
-          <p:cNvPr id="29" name="Text 24"/>
-          <p:cNvSpPr/>
-          <p:nvPr/>
-        </p:nvSpPr>
-        <p:spPr>
-          <a:xfrm>
-            <a:off x="6446520" y="3931920"/>
+          <p:cNvPr id="19" name="Text 16"/>
+          <p:cNvSpPr/>
+          <p:nvPr/>
+        </p:nvSpPr>
+        <p:spPr>
+          <a:xfrm>
+            <a:off x="6446520" y="2468880"/>
             <a:ext cx="4846320" cy="621792"/>
           </a:xfrm>
           <a:prstGeom prst="rect">
@@ -10244,7 +9782,7 @@
           <a:bodyPr wrap="square" lIns="0" tIns="0" rIns="0" bIns="0" rtlCol="0" anchor="ctr"/>
           <a:lstStyle/>
           <a:p>
-            <a:pPr indent="0" marL="0">
+            <a:pPr marL="0" indent="0">
               <a:buNone/>
             </a:pPr>
             <a:r>
@@ -10256,7 +9794,7 @@
                 <a:ea typeface="Calibri" pitchFamily="34" charset="-122"/>
                 <a:cs typeface="Calibri" pitchFamily="34" charset="-120"/>
               </a:rPr>
-              <a:t>Local LLM summary, tags and category, applied reversibly</a:t>
+              <a:t>One natural-language interface that classifies intent and routes it</a:t>
             </a:r>
             <a:endParaRPr lang="en-US" sz="1250" dirty="0"/>
           </a:p>
@@ -10264,21 +9802,21 @@
       </p:sp>
       <p:pic>
         <p:nvPicPr>
-          <p:cNvPr id="30" name="Image 3" descr="preencoded.png">    </p:cNvPr>
+          <p:cNvPr id="20" name="Image 1" descr="preencoded.png"/>
           <p:cNvPicPr>
             <a:picLocks noChangeAspect="1"/>
           </p:cNvPicPr>
           <p:nvPr/>
         </p:nvPicPr>
         <p:blipFill>
-          <a:blip r:embed="rId4"/>
+          <a:blip r:embed="rId3"/>
           <a:stretch>
             <a:fillRect/>
           </a:stretch>
         </p:blipFill>
         <p:spPr>
           <a:xfrm>
-            <a:off x="11247120" y="4114800"/>
+            <a:off x="11247120" y="2651760"/>
             <a:ext cx="256032" cy="256032"/>
           </a:xfrm>
           <a:prstGeom prst="rect">
@@ -10288,13 +9826,13 @@
       </p:pic>
       <p:sp>
         <p:nvSpPr>
-          <p:cNvPr id="31" name="Shape 25"/>
-          <p:cNvSpPr/>
-          <p:nvPr/>
-        </p:nvSpPr>
-        <p:spPr>
-          <a:xfrm>
-            <a:off x="5852160" y="4663440"/>
+          <p:cNvPr id="21" name="Shape 17"/>
+          <p:cNvSpPr/>
+          <p:nvPr/>
+        </p:nvSpPr>
+        <p:spPr>
+          <a:xfrm>
+            <a:off x="5852160" y="3200400"/>
             <a:ext cx="5806440" cy="621792"/>
           </a:xfrm>
           <a:prstGeom prst="rect">
@@ -10305,7 +9843,7 @@
           </a:solidFill>
           <a:ln/>
           <a:effectLst>
-            <a:outerShdw sx="100000" sy="100000" kx="0" ky="0" algn="bl" rotWithShape="0" blurRad="76200" dist="25400" dir="8100000">
+            <a:outerShdw blurRad="76200" dist="25400" dir="8100000" algn="bl" rotWithShape="0">
               <a:srgbClr val="000000">
                 <a:alpha val="10000"/>
               </a:srgbClr>
@@ -10315,13 +9853,13 @@
       </p:sp>
       <p:sp>
         <p:nvSpPr>
-          <p:cNvPr id="32" name="Shape 26"/>
-          <p:cNvSpPr/>
-          <p:nvPr/>
-        </p:nvSpPr>
-        <p:spPr>
-          <a:xfrm>
-            <a:off x="5852160" y="4663440"/>
+          <p:cNvPr id="22" name="Shape 18"/>
+          <p:cNvSpPr/>
+          <p:nvPr/>
+        </p:nvSpPr>
+        <p:spPr>
+          <a:xfrm>
+            <a:off x="5852160" y="3200400"/>
             <a:ext cx="64008" cy="621792"/>
           </a:xfrm>
           <a:prstGeom prst="rect">
@@ -10335,13 +9873,13 @@
       </p:sp>
       <p:sp>
         <p:nvSpPr>
-          <p:cNvPr id="33" name="Text 27"/>
-          <p:cNvSpPr/>
-          <p:nvPr/>
-        </p:nvSpPr>
-        <p:spPr>
-          <a:xfrm>
-            <a:off x="6035040" y="4663440"/>
+          <p:cNvPr id="23" name="Text 19"/>
+          <p:cNvSpPr/>
+          <p:nvPr/>
+        </p:nvSpPr>
+        <p:spPr>
+          <a:xfrm>
+            <a:off x="6035040" y="3200400"/>
             <a:ext cx="365760" cy="621792"/>
           </a:xfrm>
           <a:prstGeom prst="rect">
@@ -10354,7 +9892,7 @@
           <a:bodyPr wrap="square" lIns="0" tIns="0" rIns="0" bIns="0" rtlCol="0" anchor="ctr"/>
           <a:lstStyle/>
           <a:p>
-            <a:pPr indent="0" marL="0">
+            <a:pPr marL="0" indent="0">
               <a:buNone/>
             </a:pPr>
             <a:r>
@@ -10366,7 +9904,7 @@
                 <a:ea typeface="Trebuchet MS" pitchFamily="34" charset="-122"/>
                 <a:cs typeface="Trebuchet MS" pitchFamily="34" charset="-120"/>
               </a:rPr>
-              <a:t>5</a:t>
+              <a:t>3</a:t>
             </a:r>
             <a:endParaRPr lang="en-US" sz="1600" dirty="0"/>
           </a:p>
@@ -10374,13 +9912,13 @@
       </p:sp>
       <p:sp>
         <p:nvSpPr>
-          <p:cNvPr id="34" name="Text 28"/>
-          <p:cNvSpPr/>
-          <p:nvPr/>
-        </p:nvSpPr>
-        <p:spPr>
-          <a:xfrm>
-            <a:off x="6446520" y="4663440"/>
+          <p:cNvPr id="24" name="Text 20"/>
+          <p:cNvSpPr/>
+          <p:nvPr/>
+        </p:nvSpPr>
+        <p:spPr>
+          <a:xfrm>
+            <a:off x="6446520" y="3200400"/>
             <a:ext cx="4846320" cy="621792"/>
           </a:xfrm>
           <a:prstGeom prst="rect">
@@ -10393,7 +9931,7 @@
           <a:bodyPr wrap="square" lIns="0" tIns="0" rIns="0" bIns="0" rtlCol="0" anchor="ctr"/>
           <a:lstStyle/>
           <a:p>
-            <a:pPr indent="0" marL="0">
+            <a:pPr marL="0" indent="0">
               <a:buNone/>
             </a:pPr>
             <a:r>
@@ -10405,7 +9943,7 @@
                 <a:ea typeface="Calibri" pitchFamily="34" charset="-122"/>
                 <a:cs typeface="Calibri" pitchFamily="34" charset="-120"/>
               </a:rPr>
-              <a:t>Entirely local and offline-capable, preserving privacy</a:t>
+              <a:t>Retrieve by meaning, ranked by similarity; open the top match directly</a:t>
             </a:r>
             <a:endParaRPr lang="en-US" sz="1250" dirty="0"/>
           </a:p>
@@ -10413,21 +9951,21 @@
       </p:sp>
       <p:pic>
         <p:nvPicPr>
-          <p:cNvPr id="35" name="Image 4" descr="preencoded.png">    </p:cNvPr>
+          <p:cNvPr id="25" name="Image 2" descr="preencoded.png"/>
           <p:cNvPicPr>
             <a:picLocks noChangeAspect="1"/>
           </p:cNvPicPr>
           <p:nvPr/>
         </p:nvPicPr>
         <p:blipFill>
-          <a:blip r:embed="rId5"/>
+          <a:blip r:embed="rId3"/>
           <a:stretch>
             <a:fillRect/>
           </a:stretch>
         </p:blipFill>
         <p:spPr>
           <a:xfrm>
-            <a:off x="11247120" y="4846320"/>
+            <a:off x="11247120" y="3383280"/>
             <a:ext cx="256032" cy="256032"/>
           </a:xfrm>
           <a:prstGeom prst="rect">
@@ -10437,13 +9975,13 @@
       </p:pic>
       <p:sp>
         <p:nvSpPr>
-          <p:cNvPr id="36" name="Shape 29"/>
-          <p:cNvSpPr/>
-          <p:nvPr/>
-        </p:nvSpPr>
-        <p:spPr>
-          <a:xfrm>
-            <a:off x="5852160" y="5394960"/>
+          <p:cNvPr id="26" name="Shape 21"/>
+          <p:cNvSpPr/>
+          <p:nvPr/>
+        </p:nvSpPr>
+        <p:spPr>
+          <a:xfrm>
+            <a:off x="5852160" y="3931920"/>
             <a:ext cx="5806440" cy="621792"/>
           </a:xfrm>
           <a:prstGeom prst="rect">
@@ -10454,7 +9992,7 @@
           </a:solidFill>
           <a:ln/>
           <a:effectLst>
-            <a:outerShdw sx="100000" sy="100000" kx="0" ky="0" algn="bl" rotWithShape="0" blurRad="76200" dist="25400" dir="8100000">
+            <a:outerShdw blurRad="76200" dist="25400" dir="8100000" algn="bl" rotWithShape="0">
               <a:srgbClr val="000000">
                 <a:alpha val="10000"/>
               </a:srgbClr>
@@ -10464,13 +10002,13 @@
       </p:sp>
       <p:sp>
         <p:nvSpPr>
-          <p:cNvPr id="37" name="Shape 30"/>
-          <p:cNvSpPr/>
-          <p:nvPr/>
-        </p:nvSpPr>
-        <p:spPr>
-          <a:xfrm>
-            <a:off x="5852160" y="5394960"/>
+          <p:cNvPr id="27" name="Shape 22"/>
+          <p:cNvSpPr/>
+          <p:nvPr/>
+        </p:nvSpPr>
+        <p:spPr>
+          <a:xfrm>
+            <a:off x="5852160" y="3931920"/>
             <a:ext cx="64008" cy="621792"/>
           </a:xfrm>
           <a:prstGeom prst="rect">
@@ -10484,13 +10022,13 @@
       </p:sp>
       <p:sp>
         <p:nvSpPr>
-          <p:cNvPr id="38" name="Text 31"/>
-          <p:cNvSpPr/>
-          <p:nvPr/>
-        </p:nvSpPr>
-        <p:spPr>
-          <a:xfrm>
-            <a:off x="6035040" y="5394960"/>
+          <p:cNvPr id="28" name="Text 23"/>
+          <p:cNvSpPr/>
+          <p:nvPr/>
+        </p:nvSpPr>
+        <p:spPr>
+          <a:xfrm>
+            <a:off x="6035040" y="3931920"/>
             <a:ext cx="365760" cy="621792"/>
           </a:xfrm>
           <a:prstGeom prst="rect">
@@ -10503,7 +10041,7 @@
           <a:bodyPr wrap="square" lIns="0" tIns="0" rIns="0" bIns="0" rtlCol="0" anchor="ctr"/>
           <a:lstStyle/>
           <a:p>
-            <a:pPr indent="0" marL="0">
+            <a:pPr marL="0" indent="0">
               <a:buNone/>
             </a:pPr>
             <a:r>
@@ -10515,7 +10053,7 @@
                 <a:ea typeface="Trebuchet MS" pitchFamily="34" charset="-122"/>
                 <a:cs typeface="Trebuchet MS" pitchFamily="34" charset="-120"/>
               </a:rPr>
-              <a:t>6</a:t>
+              <a:t>4</a:t>
             </a:r>
             <a:endParaRPr lang="en-US" sz="1600" dirty="0"/>
           </a:p>
@@ -10523,13 +10061,13 @@
       </p:sp>
       <p:sp>
         <p:nvSpPr>
-          <p:cNvPr id="39" name="Text 32"/>
-          <p:cNvSpPr/>
-          <p:nvPr/>
-        </p:nvSpPr>
-        <p:spPr>
-          <a:xfrm>
-            <a:off x="6446520" y="5394960"/>
+          <p:cNvPr id="29" name="Text 24"/>
+          <p:cNvSpPr/>
+          <p:nvPr/>
+        </p:nvSpPr>
+        <p:spPr>
+          <a:xfrm>
+            <a:off x="6446520" y="3931920"/>
             <a:ext cx="4846320" cy="621792"/>
           </a:xfrm>
           <a:prstGeom prst="rect">
@@ -10542,7 +10080,7 @@
           <a:bodyPr wrap="square" lIns="0" tIns="0" rIns="0" bIns="0" rtlCol="0" anchor="ctr"/>
           <a:lstStyle/>
           <a:p>
-            <a:pPr indent="0" marL="0">
+            <a:pPr marL="0" indent="0">
               <a:buNone/>
             </a:pPr>
             <a:r>
@@ -10554,7 +10092,7 @@
                 <a:ea typeface="Calibri" pitchFamily="34" charset="-122"/>
                 <a:cs typeface="Calibri" pitchFamily="34" charset="-120"/>
               </a:rPr>
-              <a:t>Knowledge graph, context memory and intelligent workspace manager</a:t>
+              <a:t>Local LLM summary, tags and category, applied reversibly</a:t>
             </a:r>
             <a:endParaRPr lang="en-US" sz="1250" dirty="0"/>
           </a:p>
@@ -10562,14 +10100,312 @@
       </p:sp>
       <p:pic>
         <p:nvPicPr>
-          <p:cNvPr id="40" name="Image 5" descr="preencoded.png">    </p:cNvPr>
+          <p:cNvPr id="30" name="Image 3" descr="preencoded.png"/>
           <p:cNvPicPr>
             <a:picLocks noChangeAspect="1"/>
           </p:cNvPicPr>
           <p:nvPr/>
         </p:nvPicPr>
         <p:blipFill>
-          <a:blip r:embed="rId6"/>
+          <a:blip r:embed="rId3"/>
+          <a:stretch>
+            <a:fillRect/>
+          </a:stretch>
+        </p:blipFill>
+        <p:spPr>
+          <a:xfrm>
+            <a:off x="11247120" y="4114800"/>
+            <a:ext cx="256032" cy="256032"/>
+          </a:xfrm>
+          <a:prstGeom prst="rect">
+            <a:avLst/>
+          </a:prstGeom>
+        </p:spPr>
+      </p:pic>
+      <p:sp>
+        <p:nvSpPr>
+          <p:cNvPr id="31" name="Shape 25"/>
+          <p:cNvSpPr/>
+          <p:nvPr/>
+        </p:nvSpPr>
+        <p:spPr>
+          <a:xfrm>
+            <a:off x="5852160" y="4663440"/>
+            <a:ext cx="5806440" cy="621792"/>
+          </a:xfrm>
+          <a:prstGeom prst="rect">
+            <a:avLst/>
+          </a:prstGeom>
+          <a:solidFill>
+            <a:srgbClr val="FFFFFF"/>
+          </a:solidFill>
+          <a:ln/>
+          <a:effectLst>
+            <a:outerShdw blurRad="76200" dist="25400" dir="8100000" algn="bl" rotWithShape="0">
+              <a:srgbClr val="000000">
+                <a:alpha val="10000"/>
+              </a:srgbClr>
+            </a:outerShdw>
+          </a:effectLst>
+        </p:spPr>
+      </p:sp>
+      <p:sp>
+        <p:nvSpPr>
+          <p:cNvPr id="32" name="Shape 26"/>
+          <p:cNvSpPr/>
+          <p:nvPr/>
+        </p:nvSpPr>
+        <p:spPr>
+          <a:xfrm>
+            <a:off x="5852160" y="4663440"/>
+            <a:ext cx="64008" cy="621792"/>
+          </a:xfrm>
+          <a:prstGeom prst="rect">
+            <a:avLst/>
+          </a:prstGeom>
+          <a:solidFill>
+            <a:srgbClr val="2E7D32"/>
+          </a:solidFill>
+          <a:ln/>
+        </p:spPr>
+      </p:sp>
+      <p:sp>
+        <p:nvSpPr>
+          <p:cNvPr id="33" name="Text 27"/>
+          <p:cNvSpPr/>
+          <p:nvPr/>
+        </p:nvSpPr>
+        <p:spPr>
+          <a:xfrm>
+            <a:off x="6035040" y="4663440"/>
+            <a:ext cx="365760" cy="621792"/>
+          </a:xfrm>
+          <a:prstGeom prst="rect">
+            <a:avLst/>
+          </a:prstGeom>
+          <a:noFill/>
+          <a:ln/>
+        </p:spPr>
+        <p:txBody>
+          <a:bodyPr wrap="square" lIns="0" tIns="0" rIns="0" bIns="0" rtlCol="0" anchor="ctr"/>
+          <a:lstStyle/>
+          <a:p>
+            <a:pPr marL="0" indent="0">
+              <a:buNone/>
+            </a:pPr>
+            <a:r>
+              <a:rPr lang="en-US" sz="1600" b="1" dirty="0">
+                <a:solidFill>
+                  <a:srgbClr val="2E7D32"/>
+                </a:solidFill>
+                <a:latin typeface="Trebuchet MS" pitchFamily="34" charset="0"/>
+                <a:ea typeface="Trebuchet MS" pitchFamily="34" charset="-122"/>
+                <a:cs typeface="Trebuchet MS" pitchFamily="34" charset="-120"/>
+              </a:rPr>
+              <a:t>5</a:t>
+            </a:r>
+            <a:endParaRPr lang="en-US" sz="1600" dirty="0"/>
+          </a:p>
+        </p:txBody>
+      </p:sp>
+      <p:sp>
+        <p:nvSpPr>
+          <p:cNvPr id="34" name="Text 28"/>
+          <p:cNvSpPr/>
+          <p:nvPr/>
+        </p:nvSpPr>
+        <p:spPr>
+          <a:xfrm>
+            <a:off x="6446520" y="4663440"/>
+            <a:ext cx="4846320" cy="621792"/>
+          </a:xfrm>
+          <a:prstGeom prst="rect">
+            <a:avLst/>
+          </a:prstGeom>
+          <a:noFill/>
+          <a:ln/>
+        </p:spPr>
+        <p:txBody>
+          <a:bodyPr wrap="square" lIns="0" tIns="0" rIns="0" bIns="0" rtlCol="0" anchor="ctr"/>
+          <a:lstStyle/>
+          <a:p>
+            <a:pPr marL="0" indent="0">
+              <a:buNone/>
+            </a:pPr>
+            <a:r>
+              <a:rPr lang="en-US" sz="1250" dirty="0">
+                <a:solidFill>
+                  <a:srgbClr val="1C2333"/>
+                </a:solidFill>
+                <a:latin typeface="Calibri" pitchFamily="34" charset="0"/>
+                <a:ea typeface="Calibri" pitchFamily="34" charset="-122"/>
+                <a:cs typeface="Calibri" pitchFamily="34" charset="-120"/>
+              </a:rPr>
+              <a:t>Entirely local and offline-capable, preserving privacy</a:t>
+            </a:r>
+            <a:endParaRPr lang="en-US" sz="1250" dirty="0"/>
+          </a:p>
+        </p:txBody>
+      </p:sp>
+      <p:pic>
+        <p:nvPicPr>
+          <p:cNvPr id="35" name="Image 4" descr="preencoded.png"/>
+          <p:cNvPicPr>
+            <a:picLocks noChangeAspect="1"/>
+          </p:cNvPicPr>
+          <p:nvPr/>
+        </p:nvPicPr>
+        <p:blipFill>
+          <a:blip r:embed="rId3"/>
+          <a:stretch>
+            <a:fillRect/>
+          </a:stretch>
+        </p:blipFill>
+        <p:spPr>
+          <a:xfrm>
+            <a:off x="11247120" y="4846320"/>
+            <a:ext cx="256032" cy="256032"/>
+          </a:xfrm>
+          <a:prstGeom prst="rect">
+            <a:avLst/>
+          </a:prstGeom>
+        </p:spPr>
+      </p:pic>
+      <p:sp>
+        <p:nvSpPr>
+          <p:cNvPr id="36" name="Shape 29"/>
+          <p:cNvSpPr/>
+          <p:nvPr/>
+        </p:nvSpPr>
+        <p:spPr>
+          <a:xfrm>
+            <a:off x="5852160" y="5394960"/>
+            <a:ext cx="5806440" cy="621792"/>
+          </a:xfrm>
+          <a:prstGeom prst="rect">
+            <a:avLst/>
+          </a:prstGeom>
+          <a:solidFill>
+            <a:srgbClr val="FFFFFF"/>
+          </a:solidFill>
+          <a:ln/>
+          <a:effectLst>
+            <a:outerShdw blurRad="76200" dist="25400" dir="8100000" algn="bl" rotWithShape="0">
+              <a:srgbClr val="000000">
+                <a:alpha val="10000"/>
+              </a:srgbClr>
+            </a:outerShdw>
+          </a:effectLst>
+        </p:spPr>
+      </p:sp>
+      <p:sp>
+        <p:nvSpPr>
+          <p:cNvPr id="37" name="Shape 30"/>
+          <p:cNvSpPr/>
+          <p:nvPr/>
+        </p:nvSpPr>
+        <p:spPr>
+          <a:xfrm>
+            <a:off x="5852160" y="5394960"/>
+            <a:ext cx="64008" cy="621792"/>
+          </a:xfrm>
+          <a:prstGeom prst="rect">
+            <a:avLst/>
+          </a:prstGeom>
+          <a:solidFill>
+            <a:srgbClr val="2E7D32"/>
+          </a:solidFill>
+          <a:ln/>
+        </p:spPr>
+      </p:sp>
+      <p:sp>
+        <p:nvSpPr>
+          <p:cNvPr id="38" name="Text 31"/>
+          <p:cNvSpPr/>
+          <p:nvPr/>
+        </p:nvSpPr>
+        <p:spPr>
+          <a:xfrm>
+            <a:off x="6035040" y="5394960"/>
+            <a:ext cx="365760" cy="621792"/>
+          </a:xfrm>
+          <a:prstGeom prst="rect">
+            <a:avLst/>
+          </a:prstGeom>
+          <a:noFill/>
+          <a:ln/>
+        </p:spPr>
+        <p:txBody>
+          <a:bodyPr wrap="square" lIns="0" tIns="0" rIns="0" bIns="0" rtlCol="0" anchor="ctr"/>
+          <a:lstStyle/>
+          <a:p>
+            <a:pPr marL="0" indent="0">
+              <a:buNone/>
+            </a:pPr>
+            <a:r>
+              <a:rPr lang="en-US" sz="1600" b="1" dirty="0">
+                <a:solidFill>
+                  <a:srgbClr val="2E7D32"/>
+                </a:solidFill>
+                <a:latin typeface="Trebuchet MS" pitchFamily="34" charset="0"/>
+                <a:ea typeface="Trebuchet MS" pitchFamily="34" charset="-122"/>
+                <a:cs typeface="Trebuchet MS" pitchFamily="34" charset="-120"/>
+              </a:rPr>
+              <a:t>6</a:t>
+            </a:r>
+            <a:endParaRPr lang="en-US" sz="1600" dirty="0"/>
+          </a:p>
+        </p:txBody>
+      </p:sp>
+      <p:sp>
+        <p:nvSpPr>
+          <p:cNvPr id="39" name="Text 32"/>
+          <p:cNvSpPr/>
+          <p:nvPr/>
+        </p:nvSpPr>
+        <p:spPr>
+          <a:xfrm>
+            <a:off x="6446520" y="5394960"/>
+            <a:ext cx="4846320" cy="621792"/>
+          </a:xfrm>
+          <a:prstGeom prst="rect">
+            <a:avLst/>
+          </a:prstGeom>
+          <a:noFill/>
+          <a:ln/>
+        </p:spPr>
+        <p:txBody>
+          <a:bodyPr wrap="square" lIns="0" tIns="0" rIns="0" bIns="0" rtlCol="0" anchor="ctr"/>
+          <a:lstStyle/>
+          <a:p>
+            <a:pPr marL="0" indent="0">
+              <a:buNone/>
+            </a:pPr>
+            <a:r>
+              <a:rPr lang="en-US" sz="1250" dirty="0">
+                <a:solidFill>
+                  <a:srgbClr val="1C2333"/>
+                </a:solidFill>
+                <a:latin typeface="Calibri" pitchFamily="34" charset="0"/>
+                <a:ea typeface="Calibri" pitchFamily="34" charset="-122"/>
+                <a:cs typeface="Calibri" pitchFamily="34" charset="-120"/>
+              </a:rPr>
+              <a:t>Knowledge graph, context memory and intelligent workspace manager</a:t>
+            </a:r>
+            <a:endParaRPr lang="en-US" sz="1250" dirty="0"/>
+          </a:p>
+        </p:txBody>
+      </p:sp>
+      <p:pic>
+        <p:nvPicPr>
+          <p:cNvPr id="40" name="Image 5" descr="preencoded.png"/>
+          <p:cNvPicPr>
+            <a:picLocks noChangeAspect="1"/>
+          </p:cNvPicPr>
+          <p:nvPr/>
+        </p:nvPicPr>
+        <p:blipFill>
+          <a:blip r:embed="rId3"/>
           <a:stretch>
             <a:fillRect/>
           </a:stretch>
@@ -10600,6 +10436,7 @@
         <a:solidFill>
           <a:srgbClr val="F4F6FB"/>
         </a:solidFill>
+        <a:effectLst/>
       </p:bgPr>
     </p:bg>
     <p:spTree>
@@ -10637,7 +10474,7 @@
           <a:bodyPr wrap="square" lIns="0" tIns="0" rIns="0" bIns="0" rtlCol="0" anchor="ctr"/>
           <a:lstStyle/>
           <a:p>
-            <a:pPr indent="0" marL="0">
+            <a:pPr marL="0" indent="0">
               <a:buNone/>
             </a:pPr>
             <a:r>
@@ -10676,7 +10513,7 @@
           <a:bodyPr wrap="square" lIns="0" tIns="0" rIns="0" bIns="0" rtlCol="0" anchor="ctr"/>
           <a:lstStyle/>
           <a:p>
-            <a:pPr indent="0" marL="0">
+            <a:pPr marL="0" indent="0">
               <a:buNone/>
             </a:pPr>
             <a:r>
@@ -10715,7 +10552,7 @@
           <a:bodyPr wrap="square" lIns="0" tIns="0" rIns="0" bIns="0" rtlCol="0" anchor="ctr"/>
           <a:lstStyle/>
           <a:p>
-            <a:pPr indent="0" marL="0">
+            <a:pPr marL="0" indent="0">
               <a:buNone/>
             </a:pPr>
             <a:r>
@@ -10754,7 +10591,7 @@
           <a:bodyPr wrap="square" lIns="0" tIns="0" rIns="0" bIns="0" rtlCol="0" anchor="ctr"/>
           <a:lstStyle/>
           <a:p>
-            <a:pPr algn="r" indent="0" marL="0">
+            <a:pPr marL="0" indent="0" algn="r">
               <a:buNone/>
             </a:pPr>
             <a:r>
@@ -10795,9 +10632,27 @@
             <a:tbl>
               <a:tblPr/>
               <a:tblGrid>
-                <a:gridCol w="2468880"/>
-                <a:gridCol w="6263640"/>
-                <a:gridCol w="2377440"/>
+                <a:gridCol w="2468880">
+                  <a:extLst>
+                    <a:ext uri="{9D8B030D-6E8A-4147-A177-3AD203B41FA5}">
+                      <a16:colId xmlns:a16="http://schemas.microsoft.com/office/drawing/2014/main" val="20000"/>
+                    </a:ext>
+                  </a:extLst>
+                </a:gridCol>
+                <a:gridCol w="6263640">
+                  <a:extLst>
+                    <a:ext uri="{9D8B030D-6E8A-4147-A177-3AD203B41FA5}">
+                      <a16:colId xmlns:a16="http://schemas.microsoft.com/office/drawing/2014/main" val="20001"/>
+                    </a:ext>
+                  </a:extLst>
+                </a:gridCol>
+                <a:gridCol w="2377440">
+                  <a:extLst>
+                    <a:ext uri="{9D8B030D-6E8A-4147-A177-3AD203B41FA5}">
+                      <a16:colId xmlns:a16="http://schemas.microsoft.com/office/drawing/2014/main" val="20002"/>
+                    </a:ext>
+                  </a:extLst>
+                </a:gridCol>
               </a:tblGrid>
               <a:tr h="530352">
                 <a:tc>
@@ -10805,7 +10660,7 @@
                     <a:bodyPr/>
                     <a:lstStyle/>
                     <a:p>
-                      <a:pPr indent="0" marL="0">
+                      <a:pPr marL="0" indent="0">
                         <a:buNone/>
                       </a:pPr>
                       <a:r>
@@ -10826,7 +10681,7 @@
                       </a:endParaRPr>
                     </a:p>
                   </a:txBody>
-                  <a:tcPr marL="91440" marR="91440" marT="45720" marB="45720" anchor="ctr">
+                  <a:tcPr anchor="ctr">
                     <a:lnL w="6350" cap="flat" cmpd="sng" algn="ctr">
                       <a:solidFill>
                         <a:srgbClr val="D6DCEA"/>
@@ -10873,7 +10728,7 @@
                     <a:bodyPr/>
                     <a:lstStyle/>
                     <a:p>
-                      <a:pPr indent="0" marL="0">
+                      <a:pPr marL="0" indent="0">
                         <a:buNone/>
                       </a:pPr>
                       <a:r>
@@ -10894,7 +10749,7 @@
                       </a:endParaRPr>
                     </a:p>
                   </a:txBody>
-                  <a:tcPr marL="91440" marR="91440" marT="45720" marB="45720" anchor="ctr">
+                  <a:tcPr anchor="ctr">
                     <a:lnL w="6350" cap="flat" cmpd="sng" algn="ctr">
                       <a:solidFill>
                         <a:srgbClr val="D6DCEA"/>
@@ -10941,7 +10796,7 @@
                     <a:bodyPr/>
                     <a:lstStyle/>
                     <a:p>
-                      <a:pPr indent="0" marL="0">
+                      <a:pPr marL="0" indent="0">
                         <a:buNone/>
                       </a:pPr>
                       <a:r>
@@ -10962,7 +10817,7 @@
                       </a:endParaRPr>
                     </a:p>
                   </a:txBody>
-                  <a:tcPr marL="91440" marR="91440" marT="45720" marB="45720" anchor="ctr">
+                  <a:tcPr anchor="ctr">
                     <a:lnL w="6350" cap="flat" cmpd="sng" algn="ctr">
                       <a:solidFill>
                         <a:srgbClr val="D6DCEA"/>
@@ -11004,6 +10859,11 @@
                     </a:solidFill>
                   </a:tcPr>
                 </a:tc>
+                <a:extLst>
+                  <a:ext uri="{0D108BD9-81ED-4DB2-BD59-A6C34878D82A}">
+                    <a16:rowId xmlns:a16="http://schemas.microsoft.com/office/drawing/2014/main" val="10000"/>
+                  </a:ext>
+                </a:extLst>
               </a:tr>
               <a:tr h="530352">
                 <a:tc>
@@ -11011,7 +10871,7 @@
                     <a:bodyPr/>
                     <a:lstStyle/>
                     <a:p>
-                      <a:pPr indent="0" marL="0">
+                      <a:pPr marL="0" indent="0">
                         <a:buNone/>
                       </a:pPr>
                       <a:r>
@@ -11032,7 +10892,7 @@
                       </a:endParaRPr>
                     </a:p>
                   </a:txBody>
-                  <a:tcPr marL="91440" marR="91440" marT="45720" marB="45720" anchor="ctr">
+                  <a:tcPr anchor="ctr">
                     <a:lnL w="6350" cap="flat" cmpd="sng" algn="ctr">
                       <a:solidFill>
                         <a:srgbClr val="D6DCEA"/>
@@ -11076,7 +10936,7 @@
                     <a:bodyPr/>
                     <a:lstStyle/>
                     <a:p>
-                      <a:pPr indent="0" marL="0">
+                      <a:pPr marL="0" indent="0">
                         <a:buNone/>
                       </a:pPr>
                       <a:r>
@@ -11097,7 +10957,7 @@
                       </a:endParaRPr>
                     </a:p>
                   </a:txBody>
-                  <a:tcPr marL="91440" marR="91440" marT="45720" marB="45720" anchor="ctr">
+                  <a:tcPr anchor="ctr">
                     <a:lnL w="6350" cap="flat" cmpd="sng" algn="ctr">
                       <a:solidFill>
                         <a:srgbClr val="D6DCEA"/>
@@ -11141,7 +11001,7 @@
                     <a:bodyPr/>
                     <a:lstStyle/>
                     <a:p>
-                      <a:pPr indent="0" marL="0">
+                      <a:pPr marL="0" indent="0">
                         <a:buNone/>
                       </a:pPr>
                       <a:r>
@@ -11162,7 +11022,7 @@
                       </a:endParaRPr>
                     </a:p>
                   </a:txBody>
-                  <a:tcPr marL="91440" marR="91440" marT="45720" marB="45720" anchor="ctr">
+                  <a:tcPr anchor="ctr">
                     <a:lnL w="6350" cap="flat" cmpd="sng" algn="ctr">
                       <a:solidFill>
                         <a:srgbClr val="D6DCEA"/>
@@ -11201,6 +11061,11 @@
                     </a:lnB>
                   </a:tcPr>
                 </a:tc>
+                <a:extLst>
+                  <a:ext uri="{0D108BD9-81ED-4DB2-BD59-A6C34878D82A}">
+                    <a16:rowId xmlns:a16="http://schemas.microsoft.com/office/drawing/2014/main" val="10001"/>
+                  </a:ext>
+                </a:extLst>
               </a:tr>
               <a:tr h="530352">
                 <a:tc>
@@ -11208,7 +11073,7 @@
                     <a:bodyPr/>
                     <a:lstStyle/>
                     <a:p>
-                      <a:pPr indent="0" marL="0">
+                      <a:pPr marL="0" indent="0">
                         <a:buNone/>
                       </a:pPr>
                       <a:r>
@@ -11229,7 +11094,7 @@
                       </a:endParaRPr>
                     </a:p>
                   </a:txBody>
-                  <a:tcPr marL="91440" marR="91440" marT="45720" marB="45720" anchor="ctr">
+                  <a:tcPr anchor="ctr">
                     <a:lnL w="6350" cap="flat" cmpd="sng" algn="ctr">
                       <a:solidFill>
                         <a:srgbClr val="D6DCEA"/>
@@ -11273,7 +11138,7 @@
                     <a:bodyPr/>
                     <a:lstStyle/>
                     <a:p>
-                      <a:pPr indent="0" marL="0">
+                      <a:pPr marL="0" indent="0">
                         <a:buNone/>
                       </a:pPr>
                       <a:r>
@@ -11294,7 +11159,7 @@
                       </a:endParaRPr>
                     </a:p>
                   </a:txBody>
-                  <a:tcPr marL="91440" marR="91440" marT="45720" marB="45720" anchor="ctr">
+                  <a:tcPr anchor="ctr">
                     <a:lnL w="6350" cap="flat" cmpd="sng" algn="ctr">
                       <a:solidFill>
                         <a:srgbClr val="D6DCEA"/>
@@ -11338,7 +11203,7 @@
                     <a:bodyPr/>
                     <a:lstStyle/>
                     <a:p>
-                      <a:pPr indent="0" marL="0">
+                      <a:pPr marL="0" indent="0">
                         <a:buNone/>
                       </a:pPr>
                       <a:r>
@@ -11359,7 +11224,7 @@
                       </a:endParaRPr>
                     </a:p>
                   </a:txBody>
-                  <a:tcPr marL="91440" marR="91440" marT="45720" marB="45720" anchor="ctr">
+                  <a:tcPr anchor="ctr">
                     <a:lnL w="6350" cap="flat" cmpd="sng" algn="ctr">
                       <a:solidFill>
                         <a:srgbClr val="D6DCEA"/>
@@ -11398,6 +11263,11 @@
                     </a:lnB>
                   </a:tcPr>
                 </a:tc>
+                <a:extLst>
+                  <a:ext uri="{0D108BD9-81ED-4DB2-BD59-A6C34878D82A}">
+                    <a16:rowId xmlns:a16="http://schemas.microsoft.com/office/drawing/2014/main" val="10002"/>
+                  </a:ext>
+                </a:extLst>
               </a:tr>
               <a:tr h="530352">
                 <a:tc>
@@ -11405,7 +11275,7 @@
                     <a:bodyPr/>
                     <a:lstStyle/>
                     <a:p>
-                      <a:pPr indent="0" marL="0">
+                      <a:pPr marL="0" indent="0">
                         <a:buNone/>
                       </a:pPr>
                       <a:r>
@@ -11426,7 +11296,7 @@
                       </a:endParaRPr>
                     </a:p>
                   </a:txBody>
-                  <a:tcPr marL="91440" marR="91440" marT="45720" marB="45720" anchor="ctr">
+                  <a:tcPr anchor="ctr">
                     <a:lnL w="6350" cap="flat" cmpd="sng" algn="ctr">
                       <a:solidFill>
                         <a:srgbClr val="D6DCEA"/>
@@ -11470,7 +11340,7 @@
                     <a:bodyPr/>
                     <a:lstStyle/>
                     <a:p>
-                      <a:pPr indent="0" marL="0">
+                      <a:pPr marL="0" indent="0">
                         <a:buNone/>
                       </a:pPr>
                       <a:r>
@@ -11491,7 +11361,7 @@
                       </a:endParaRPr>
                     </a:p>
                   </a:txBody>
-                  <a:tcPr marL="91440" marR="91440" marT="45720" marB="45720" anchor="ctr">
+                  <a:tcPr anchor="ctr">
                     <a:lnL w="6350" cap="flat" cmpd="sng" algn="ctr">
                       <a:solidFill>
                         <a:srgbClr val="D6DCEA"/>
@@ -11535,7 +11405,7 @@
                     <a:bodyPr/>
                     <a:lstStyle/>
                     <a:p>
-                      <a:pPr indent="0" marL="0">
+                      <a:pPr marL="0" indent="0">
                         <a:buNone/>
                       </a:pPr>
                       <a:r>
@@ -11556,7 +11426,7 @@
                       </a:endParaRPr>
                     </a:p>
                   </a:txBody>
-                  <a:tcPr marL="91440" marR="91440" marT="45720" marB="45720" anchor="ctr">
+                  <a:tcPr anchor="ctr">
                     <a:lnL w="6350" cap="flat" cmpd="sng" algn="ctr">
                       <a:solidFill>
                         <a:srgbClr val="D6DCEA"/>
@@ -11595,6 +11465,11 @@
                     </a:lnB>
                   </a:tcPr>
                 </a:tc>
+                <a:extLst>
+                  <a:ext uri="{0D108BD9-81ED-4DB2-BD59-A6C34878D82A}">
+                    <a16:rowId xmlns:a16="http://schemas.microsoft.com/office/drawing/2014/main" val="10003"/>
+                  </a:ext>
+                </a:extLst>
               </a:tr>
               <a:tr h="530352">
                 <a:tc>
@@ -11602,7 +11477,7 @@
                     <a:bodyPr/>
                     <a:lstStyle/>
                     <a:p>
-                      <a:pPr indent="0" marL="0">
+                      <a:pPr marL="0" indent="0">
                         <a:buNone/>
                       </a:pPr>
                       <a:r>
@@ -11623,7 +11498,7 @@
                       </a:endParaRPr>
                     </a:p>
                   </a:txBody>
-                  <a:tcPr marL="91440" marR="91440" marT="45720" marB="45720" anchor="ctr">
+                  <a:tcPr anchor="ctr">
                     <a:lnL w="6350" cap="flat" cmpd="sng" algn="ctr">
                       <a:solidFill>
                         <a:srgbClr val="D6DCEA"/>
@@ -11667,7 +11542,7 @@
                     <a:bodyPr/>
                     <a:lstStyle/>
                     <a:p>
-                      <a:pPr indent="0" marL="0">
+                      <a:pPr marL="0" indent="0">
                         <a:buNone/>
                       </a:pPr>
                       <a:r>
@@ -11688,7 +11563,7 @@
                       </a:endParaRPr>
                     </a:p>
                   </a:txBody>
-                  <a:tcPr marL="91440" marR="91440" marT="45720" marB="45720" anchor="ctr">
+                  <a:tcPr anchor="ctr">
                     <a:lnL w="6350" cap="flat" cmpd="sng" algn="ctr">
                       <a:solidFill>
                         <a:srgbClr val="D6DCEA"/>
@@ -11732,7 +11607,7 @@
                     <a:bodyPr/>
                     <a:lstStyle/>
                     <a:p>
-                      <a:pPr indent="0" marL="0">
+                      <a:pPr marL="0" indent="0">
                         <a:buNone/>
                       </a:pPr>
                       <a:r>
@@ -11753,7 +11628,7 @@
                       </a:endParaRPr>
                     </a:p>
                   </a:txBody>
-                  <a:tcPr marL="91440" marR="91440" marT="45720" marB="45720" anchor="ctr">
+                  <a:tcPr anchor="ctr">
                     <a:lnL w="6350" cap="flat" cmpd="sng" algn="ctr">
                       <a:solidFill>
                         <a:srgbClr val="D6DCEA"/>
@@ -11792,6 +11667,11 @@
                     </a:lnB>
                   </a:tcPr>
                 </a:tc>
+                <a:extLst>
+                  <a:ext uri="{0D108BD9-81ED-4DB2-BD59-A6C34878D82A}">
+                    <a16:rowId xmlns:a16="http://schemas.microsoft.com/office/drawing/2014/main" val="10004"/>
+                  </a:ext>
+                </a:extLst>
               </a:tr>
               <a:tr h="530352">
                 <a:tc>
@@ -11799,7 +11679,7 @@
                     <a:bodyPr/>
                     <a:lstStyle/>
                     <a:p>
-                      <a:pPr indent="0" marL="0">
+                      <a:pPr marL="0" indent="0">
                         <a:buNone/>
                       </a:pPr>
                       <a:r>
@@ -11820,7 +11700,7 @@
                       </a:endParaRPr>
                     </a:p>
                   </a:txBody>
-                  <a:tcPr marL="91440" marR="91440" marT="45720" marB="45720" anchor="ctr">
+                  <a:tcPr anchor="ctr">
                     <a:lnL w="6350" cap="flat" cmpd="sng" algn="ctr">
                       <a:solidFill>
                         <a:srgbClr val="D6DCEA"/>
@@ -11864,7 +11744,7 @@
                     <a:bodyPr/>
                     <a:lstStyle/>
                     <a:p>
-                      <a:pPr indent="0" marL="0">
+                      <a:pPr marL="0" indent="0">
                         <a:buNone/>
                       </a:pPr>
                       <a:r>
@@ -11885,7 +11765,7 @@
                       </a:endParaRPr>
                     </a:p>
                   </a:txBody>
-                  <a:tcPr marL="91440" marR="91440" marT="45720" marB="45720" anchor="ctr">
+                  <a:tcPr anchor="ctr">
                     <a:lnL w="6350" cap="flat" cmpd="sng" algn="ctr">
                       <a:solidFill>
                         <a:srgbClr val="D6DCEA"/>
@@ -11929,7 +11809,7 @@
                     <a:bodyPr/>
                     <a:lstStyle/>
                     <a:p>
-                      <a:pPr indent="0" marL="0">
+                      <a:pPr marL="0" indent="0">
                         <a:buNone/>
                       </a:pPr>
                       <a:r>
@@ -11950,7 +11830,7 @@
                       </a:endParaRPr>
                     </a:p>
                   </a:txBody>
-                  <a:tcPr marL="91440" marR="91440" marT="45720" marB="45720" anchor="ctr">
+                  <a:tcPr anchor="ctr">
                     <a:lnL w="6350" cap="flat" cmpd="sng" algn="ctr">
                       <a:solidFill>
                         <a:srgbClr val="D6DCEA"/>
@@ -11989,6 +11869,11 @@
                     </a:lnB>
                   </a:tcPr>
                 </a:tc>
+                <a:extLst>
+                  <a:ext uri="{0D108BD9-81ED-4DB2-BD59-A6C34878D82A}">
+                    <a16:rowId xmlns:a16="http://schemas.microsoft.com/office/drawing/2014/main" val="10005"/>
+                  </a:ext>
+                </a:extLst>
               </a:tr>
               <a:tr h="530352">
                 <a:tc>
@@ -11996,7 +11881,7 @@
                     <a:bodyPr/>
                     <a:lstStyle/>
                     <a:p>
-                      <a:pPr indent="0" marL="0">
+                      <a:pPr marL="0" indent="0">
                         <a:buNone/>
                       </a:pPr>
                       <a:r>
@@ -12017,7 +11902,7 @@
                       </a:endParaRPr>
                     </a:p>
                   </a:txBody>
-                  <a:tcPr marL="91440" marR="91440" marT="45720" marB="45720" anchor="ctr">
+                  <a:tcPr anchor="ctr">
                     <a:lnL w="6350" cap="flat" cmpd="sng" algn="ctr">
                       <a:solidFill>
                         <a:srgbClr val="D6DCEA"/>
@@ -12061,7 +11946,7 @@
                     <a:bodyPr/>
                     <a:lstStyle/>
                     <a:p>
-                      <a:pPr indent="0" marL="0">
+                      <a:pPr marL="0" indent="0">
                         <a:buNone/>
                       </a:pPr>
                       <a:r>
@@ -12082,7 +11967,7 @@
                       </a:endParaRPr>
                     </a:p>
                   </a:txBody>
-                  <a:tcPr marL="91440" marR="91440" marT="45720" marB="45720" anchor="ctr">
+                  <a:tcPr anchor="ctr">
                     <a:lnL w="6350" cap="flat" cmpd="sng" algn="ctr">
                       <a:solidFill>
                         <a:srgbClr val="D6DCEA"/>
@@ -12126,7 +12011,7 @@
                     <a:bodyPr/>
                     <a:lstStyle/>
                     <a:p>
-                      <a:pPr indent="0" marL="0">
+                      <a:pPr marL="0" indent="0">
                         <a:buNone/>
                       </a:pPr>
                       <a:r>
@@ -12147,7 +12032,7 @@
                       </a:endParaRPr>
                     </a:p>
                   </a:txBody>
-                  <a:tcPr marL="91440" marR="91440" marT="45720" marB="45720" anchor="ctr">
+                  <a:tcPr anchor="ctr">
                     <a:lnL w="6350" cap="flat" cmpd="sng" algn="ctr">
                       <a:solidFill>
                         <a:srgbClr val="D6DCEA"/>
@@ -12186,6 +12071,11 @@
                     </a:lnB>
                   </a:tcPr>
                 </a:tc>
+                <a:extLst>
+                  <a:ext uri="{0D108BD9-81ED-4DB2-BD59-A6C34878D82A}">
+                    <a16:rowId xmlns:a16="http://schemas.microsoft.com/office/drawing/2014/main" val="10006"/>
+                  </a:ext>
+                </a:extLst>
               </a:tr>
               <a:tr h="530352">
                 <a:tc>
@@ -12193,7 +12083,7 @@
                     <a:bodyPr/>
                     <a:lstStyle/>
                     <a:p>
-                      <a:pPr indent="0" marL="0">
+                      <a:pPr marL="0" indent="0">
                         <a:buNone/>
                       </a:pPr>
                       <a:r>
@@ -12214,7 +12104,7 @@
                       </a:endParaRPr>
                     </a:p>
                   </a:txBody>
-                  <a:tcPr marL="91440" marR="91440" marT="45720" marB="45720" anchor="ctr">
+                  <a:tcPr anchor="ctr">
                     <a:lnL w="6350" cap="flat" cmpd="sng" algn="ctr">
                       <a:solidFill>
                         <a:srgbClr val="D6DCEA"/>
@@ -12258,7 +12148,7 @@
                     <a:bodyPr/>
                     <a:lstStyle/>
                     <a:p>
-                      <a:pPr indent="0" marL="0">
+                      <a:pPr marL="0" indent="0">
                         <a:buNone/>
                       </a:pPr>
                       <a:r>
@@ -12279,7 +12169,7 @@
                       </a:endParaRPr>
                     </a:p>
                   </a:txBody>
-                  <a:tcPr marL="91440" marR="91440" marT="45720" marB="45720" anchor="ctr">
+                  <a:tcPr anchor="ctr">
                     <a:lnL w="6350" cap="flat" cmpd="sng" algn="ctr">
                       <a:solidFill>
                         <a:srgbClr val="D6DCEA"/>
@@ -12323,7 +12213,7 @@
                     <a:bodyPr/>
                     <a:lstStyle/>
                     <a:p>
-                      <a:pPr indent="0" marL="0">
+                      <a:pPr marL="0" indent="0">
                         <a:buNone/>
                       </a:pPr>
                       <a:r>
@@ -12344,7 +12234,7 @@
                       </a:endParaRPr>
                     </a:p>
                   </a:txBody>
-                  <a:tcPr marL="91440" marR="91440" marT="45720" marB="45720" anchor="ctr">
+                  <a:tcPr anchor="ctr">
                     <a:lnL w="6350" cap="flat" cmpd="sng" algn="ctr">
                       <a:solidFill>
                         <a:srgbClr val="D6DCEA"/>
@@ -12383,6 +12273,11 @@
                     </a:lnB>
                   </a:tcPr>
                 </a:tc>
+                <a:extLst>
+                  <a:ext uri="{0D108BD9-81ED-4DB2-BD59-A6C34878D82A}">
+                    <a16:rowId xmlns:a16="http://schemas.microsoft.com/office/drawing/2014/main" val="10007"/>
+                  </a:ext>
+                </a:extLst>
               </a:tr>
             </a:tbl>
           </a:graphicData>
@@ -12409,7 +12304,7 @@
           <a:bodyPr wrap="square" lIns="0" tIns="0" rIns="0" bIns="0" rtlCol="0" anchor="ctr"/>
           <a:lstStyle/>
           <a:p>
-            <a:pPr indent="0" marL="0">
+            <a:pPr marL="0" indent="0">
               <a:buNone/>
             </a:pPr>
             <a:r>
@@ -12443,6 +12338,7 @@
         <a:solidFill>
           <a:srgbClr val="F4F6FB"/>
         </a:solidFill>
+        <a:effectLst/>
       </p:bgPr>
     </p:bg>
     <p:spTree>
@@ -12480,7 +12376,7 @@
           <a:bodyPr wrap="square" lIns="0" tIns="0" rIns="0" bIns="0" rtlCol="0" anchor="ctr"/>
           <a:lstStyle/>
           <a:p>
-            <a:pPr indent="0" marL="0">
+            <a:pPr marL="0" indent="0">
               <a:buNone/>
             </a:pPr>
             <a:r>
@@ -12519,7 +12415,7 @@
           <a:bodyPr wrap="square" lIns="0" tIns="0" rIns="0" bIns="0" rtlCol="0" anchor="ctr"/>
           <a:lstStyle/>
           <a:p>
-            <a:pPr indent="0" marL="0">
+            <a:pPr marL="0" indent="0">
               <a:buNone/>
             </a:pPr>
             <a:r>
@@ -12558,7 +12454,7 @@
           <a:bodyPr wrap="square" lIns="0" tIns="0" rIns="0" bIns="0" rtlCol="0" anchor="ctr"/>
           <a:lstStyle/>
           <a:p>
-            <a:pPr indent="0" marL="0">
+            <a:pPr marL="0" indent="0">
               <a:buNone/>
             </a:pPr>
             <a:r>
@@ -12597,7 +12493,7 @@
           <a:bodyPr wrap="square" lIns="0" tIns="0" rIns="0" bIns="0" rtlCol="0" anchor="ctr"/>
           <a:lstStyle/>
           <a:p>
-            <a:pPr algn="r" indent="0" marL="0">
+            <a:pPr marL="0" indent="0" algn="r">
               <a:buNone/>
             </a:pPr>
             <a:r>
@@ -12634,7 +12530,7 @@
           </a:solidFill>
           <a:ln/>
           <a:effectLst>
-            <a:outerShdw sx="100000" sy="100000" kx="0" ky="0" algn="bl" rotWithShape="0" blurRad="76200" dist="25400" dir="8100000">
+            <a:outerShdw blurRad="76200" dist="25400" dir="8100000" algn="bl" rotWithShape="0">
               <a:srgbClr val="000000">
                 <a:alpha val="10000"/>
               </a:srgbClr>
@@ -12683,7 +12579,7 @@
           <a:bodyPr wrap="square" lIns="0" tIns="0" rIns="0" bIns="0" rtlCol="0" anchor="ctr"/>
           <a:lstStyle/>
           <a:p>
-            <a:pPr indent="0" marL="0">
+            <a:pPr marL="0" indent="0">
               <a:buNone/>
             </a:pPr>
             <a:r>
@@ -12847,7 +12743,7 @@
           </a:solidFill>
           <a:ln/>
           <a:effectLst>
-            <a:outerShdw sx="100000" sy="100000" kx="0" ky="0" algn="bl" rotWithShape="0" blurRad="76200" dist="25400" dir="8100000">
+            <a:outerShdw blurRad="76200" dist="25400" dir="8100000" algn="bl" rotWithShape="0">
               <a:srgbClr val="000000">
                 <a:alpha val="10000"/>
               </a:srgbClr>
@@ -12896,7 +12792,7 @@
           <a:bodyPr wrap="square" lIns="0" tIns="0" rIns="0" bIns="0" rtlCol="0" anchor="ctr"/>
           <a:lstStyle/>
           <a:p>
-            <a:pPr indent="0" marL="0">
+            <a:pPr marL="0" indent="0">
               <a:buNone/>
             </a:pPr>
             <a:r>
@@ -13057,6 +12953,7 @@
         <a:solidFill>
           <a:srgbClr val="F4F6FB"/>
         </a:solidFill>
+        <a:effectLst/>
       </p:bgPr>
     </p:bg>
     <p:spTree>
@@ -13094,7 +12991,7 @@
           <a:bodyPr wrap="square" lIns="0" tIns="0" rIns="0" bIns="0" rtlCol="0" anchor="ctr"/>
           <a:lstStyle/>
           <a:p>
-            <a:pPr indent="0" marL="0">
+            <a:pPr marL="0" indent="0">
               <a:buNone/>
             </a:pPr>
             <a:r>
@@ -13133,7 +13030,7 @@
           <a:bodyPr wrap="square" lIns="0" tIns="0" rIns="0" bIns="0" rtlCol="0" anchor="ctr"/>
           <a:lstStyle/>
           <a:p>
-            <a:pPr indent="0" marL="0">
+            <a:pPr marL="0" indent="0">
               <a:buNone/>
             </a:pPr>
             <a:r>
@@ -13172,7 +13069,7 @@
           <a:bodyPr wrap="square" lIns="0" tIns="0" rIns="0" bIns="0" rtlCol="0" anchor="ctr"/>
           <a:lstStyle/>
           <a:p>
-            <a:pPr algn="r" indent="0" marL="0">
+            <a:pPr marL="0" indent="0" algn="r">
               <a:buNone/>
             </a:pPr>
             <a:r>
@@ -13211,7 +13108,7 @@
           <a:bodyPr wrap="square" lIns="0" tIns="0" rIns="0" bIns="0" rtlCol="0" anchor="t"/>
           <a:lstStyle/>
           <a:p>
-            <a:pPr indent="0" marL="0">
+            <a:pPr marL="0" indent="0">
               <a:spcAft>
                 <a:spcPts val="1200"/>
               </a:spcAft>
@@ -13231,7 +13128,7 @@
             <a:endParaRPr lang="en-US" sz="1500" dirty="0"/>
           </a:p>
           <a:p>
-            <a:pPr indent="0" marL="0">
+            <a:pPr marL="0" indent="0">
               <a:spcAft>
                 <a:spcPts val="1200"/>
               </a:spcAft>
@@ -13251,7 +13148,7 @@
             <a:endParaRPr lang="en-US" sz="1500" dirty="0"/>
           </a:p>
           <a:p>
-            <a:pPr indent="0" marL="0">
+            <a:pPr marL="0" indent="0">
               <a:spcAft>
                 <a:spcPts val="1200"/>
               </a:spcAft>
@@ -13271,7 +13168,7 @@
             <a:endParaRPr lang="en-US" sz="1500" dirty="0"/>
           </a:p>
           <a:p>
-            <a:pPr indent="0" marL="0">
+            <a:pPr marL="0" indent="0">
               <a:spcAft>
                 <a:spcPts val="1200"/>
               </a:spcAft>
@@ -13291,7 +13188,7 @@
             <a:endParaRPr lang="en-US" sz="1500" dirty="0"/>
           </a:p>
           <a:p>
-            <a:pPr indent="0" marL="0">
+            <a:pPr marL="0" indent="0">
               <a:spcAft>
                 <a:spcPts val="1200"/>
               </a:spcAft>
@@ -13311,7 +13208,7 @@
             <a:endParaRPr lang="en-US" sz="1500" dirty="0"/>
           </a:p>
           <a:p>
-            <a:pPr indent="0" marL="0">
+            <a:pPr marL="0" indent="0">
               <a:spcAft>
                 <a:spcPts val="1200"/>
               </a:spcAft>
@@ -13331,7 +13228,7 @@
             <a:endParaRPr lang="en-US" sz="1500" dirty="0"/>
           </a:p>
           <a:p>
-            <a:pPr indent="0" marL="0">
+            <a:pPr marL="0" indent="0">
               <a:spcAft>
                 <a:spcPts val="1200"/>
               </a:spcAft>
@@ -13368,6 +13265,7 @@
         <a:solidFill>
           <a:srgbClr val="F4F6FB"/>
         </a:solidFill>
+        <a:effectLst/>
       </p:bgPr>
     </p:bg>
     <p:spTree>
@@ -13405,7 +13303,7 @@
           <a:bodyPr wrap="square" lIns="0" tIns="0" rIns="0" bIns="0" rtlCol="0" anchor="ctr"/>
           <a:lstStyle/>
           <a:p>
-            <a:pPr indent="0" marL="0">
+            <a:pPr marL="0" indent="0">
               <a:buNone/>
             </a:pPr>
             <a:r>
@@ -13444,7 +13342,7 @@
           <a:bodyPr wrap="square" lIns="0" tIns="0" rIns="0" bIns="0" rtlCol="0" anchor="ctr"/>
           <a:lstStyle/>
           <a:p>
-            <a:pPr indent="0" marL="0">
+            <a:pPr marL="0" indent="0">
               <a:buNone/>
             </a:pPr>
             <a:r>
@@ -13483,7 +13381,7 @@
           <a:bodyPr wrap="square" lIns="0" tIns="0" rIns="0" bIns="0" rtlCol="0" anchor="ctr"/>
           <a:lstStyle/>
           <a:p>
-            <a:pPr indent="0" marL="0">
+            <a:pPr marL="0" indent="0">
               <a:buNone/>
             </a:pPr>
             <a:r>
@@ -13522,7 +13420,7 @@
           <a:bodyPr wrap="square" lIns="0" tIns="0" rIns="0" bIns="0" rtlCol="0" anchor="ctr"/>
           <a:lstStyle/>
           <a:p>
-            <a:pPr algn="r" indent="0" marL="0">
+            <a:pPr marL="0" indent="0" algn="r">
               <a:buNone/>
             </a:pPr>
             <a:r>
@@ -13559,7 +13457,7 @@
           </a:solidFill>
           <a:ln/>
           <a:effectLst>
-            <a:outerShdw sx="100000" sy="100000" kx="0" ky="0" algn="bl" rotWithShape="0" blurRad="76200" dist="25400" dir="8100000">
+            <a:outerShdw blurRad="76200" dist="25400" dir="8100000" algn="bl" rotWithShape="0">
               <a:srgbClr val="000000">
                 <a:alpha val="10000"/>
               </a:srgbClr>
@@ -13608,7 +13506,7 @@
           <a:bodyPr wrap="square" lIns="0" tIns="0" rIns="0" bIns="0" rtlCol="0" anchor="ctr"/>
           <a:lstStyle/>
           <a:p>
-            <a:pPr indent="0" marL="0">
+            <a:pPr marL="0" indent="0">
               <a:buNone/>
             </a:pPr>
             <a:r>
@@ -13730,7 +13628,7 @@
           </a:solidFill>
           <a:ln/>
           <a:effectLst>
-            <a:outerShdw sx="100000" sy="100000" kx="0" ky="0" algn="bl" rotWithShape="0" blurRad="76200" dist="25400" dir="8100000">
+            <a:outerShdw blurRad="76200" dist="25400" dir="8100000" algn="bl" rotWithShape="0">
               <a:srgbClr val="000000">
                 <a:alpha val="10000"/>
               </a:srgbClr>
@@ -13779,7 +13677,7 @@
           <a:bodyPr wrap="square" lIns="0" tIns="0" rIns="0" bIns="0" rtlCol="0" anchor="ctr"/>
           <a:lstStyle/>
           <a:p>
-            <a:pPr indent="0" marL="0">
+            <a:pPr marL="0" indent="0">
               <a:buNone/>
             </a:pPr>
             <a:r>
@@ -13901,7 +13799,7 @@
           </a:solidFill>
           <a:ln/>
           <a:effectLst>
-            <a:outerShdw sx="100000" sy="100000" kx="0" ky="0" algn="bl" rotWithShape="0" blurRad="76200" dist="25400" dir="8100000">
+            <a:outerShdw blurRad="76200" dist="25400" dir="8100000" algn="bl" rotWithShape="0">
               <a:srgbClr val="000000">
                 <a:alpha val="10000"/>
               </a:srgbClr>
@@ -13950,7 +13848,7 @@
           <a:bodyPr wrap="square" lIns="0" tIns="0" rIns="0" bIns="0" rtlCol="0" anchor="ctr"/>
           <a:lstStyle/>
           <a:p>
-            <a:pPr indent="0" marL="0">
+            <a:pPr marL="0" indent="0">
               <a:buNone/>
             </a:pPr>
             <a:r>
@@ -13989,7 +13887,7 @@
           <a:bodyPr wrap="square" lIns="0" tIns="0" rIns="0" bIns="0" rtlCol="0" anchor="t"/>
           <a:lstStyle/>
           <a:p>
-            <a:pPr indent="0" marL="0">
+            <a:pPr marL="0" indent="0">
               <a:buNone/>
             </a:pPr>
             <a:r>
@@ -14023,6 +13921,7 @@
         <a:solidFill>
           <a:srgbClr val="F4F6FB"/>
         </a:solidFill>
+        <a:effectLst/>
       </p:bgPr>
     </p:bg>
     <p:spTree>
@@ -14060,7 +13959,7 @@
           <a:bodyPr wrap="square" lIns="0" tIns="0" rIns="0" bIns="0" rtlCol="0" anchor="ctr"/>
           <a:lstStyle/>
           <a:p>
-            <a:pPr indent="0" marL="0">
+            <a:pPr marL="0" indent="0">
               <a:buNone/>
             </a:pPr>
             <a:r>
@@ -14099,7 +13998,7 @@
           <a:bodyPr wrap="square" lIns="0" tIns="0" rIns="0" bIns="0" rtlCol="0" anchor="ctr"/>
           <a:lstStyle/>
           <a:p>
-            <a:pPr indent="0" marL="0">
+            <a:pPr marL="0" indent="0">
               <a:buNone/>
             </a:pPr>
             <a:r>
@@ -14138,7 +14037,7 @@
           <a:bodyPr wrap="square" lIns="0" tIns="0" rIns="0" bIns="0" rtlCol="0" anchor="ctr"/>
           <a:lstStyle/>
           <a:p>
-            <a:pPr algn="r" indent="0" marL="0">
+            <a:pPr marL="0" indent="0" algn="r">
               <a:buNone/>
             </a:pPr>
             <a:r>
@@ -14172,17 +14071,41 @@
         </p:nvGraphicFramePr>
         <p:xfrm>
           <a:off x="548640" y="1234440"/>
-          <a:ext cx="11109960" cy="914400"/>
+          <a:ext cx="11109960" cy="3182112"/>
         </p:xfrm>
         <a:graphic>
           <a:graphicData uri="http://schemas.openxmlformats.org/drawingml/2006/table">
             <a:tbl>
               <a:tblPr/>
               <a:tblGrid>
-                <a:gridCol w="2194560"/>
-                <a:gridCol w="2651760"/>
-                <a:gridCol w="3108960"/>
-                <a:gridCol w="3154680"/>
+                <a:gridCol w="2194560">
+                  <a:extLst>
+                    <a:ext uri="{9D8B030D-6E8A-4147-A177-3AD203B41FA5}">
+                      <a16:colId xmlns:a16="http://schemas.microsoft.com/office/drawing/2014/main" val="20000"/>
+                    </a:ext>
+                  </a:extLst>
+                </a:gridCol>
+                <a:gridCol w="2651760">
+                  <a:extLst>
+                    <a:ext uri="{9D8B030D-6E8A-4147-A177-3AD203B41FA5}">
+                      <a16:colId xmlns:a16="http://schemas.microsoft.com/office/drawing/2014/main" val="20001"/>
+                    </a:ext>
+                  </a:extLst>
+                </a:gridCol>
+                <a:gridCol w="3108960">
+                  <a:extLst>
+                    <a:ext uri="{9D8B030D-6E8A-4147-A177-3AD203B41FA5}">
+                      <a16:colId xmlns:a16="http://schemas.microsoft.com/office/drawing/2014/main" val="20002"/>
+                    </a:ext>
+                  </a:extLst>
+                </a:gridCol>
+                <a:gridCol w="3154680">
+                  <a:extLst>
+                    <a:ext uri="{9D8B030D-6E8A-4147-A177-3AD203B41FA5}">
+                      <a16:colId xmlns:a16="http://schemas.microsoft.com/office/drawing/2014/main" val="20003"/>
+                    </a:ext>
+                  </a:extLst>
+                </a:gridCol>
               </a:tblGrid>
               <a:tr h="530352">
                 <a:tc>
@@ -14190,7 +14113,7 @@
                     <a:bodyPr/>
                     <a:lstStyle/>
                     <a:p>
-                      <a:pPr indent="0" marL="0">
+                      <a:pPr marL="0" indent="0">
                         <a:buNone/>
                       </a:pPr>
                       <a:r>
@@ -14211,7 +14134,7 @@
                       </a:endParaRPr>
                     </a:p>
                   </a:txBody>
-                  <a:tcPr marL="91440" marR="91440" marT="45720" marB="45720" anchor="ctr">
+                  <a:tcPr anchor="ctr">
                     <a:lnL w="6350" cap="flat" cmpd="sng" algn="ctr">
                       <a:solidFill>
                         <a:srgbClr val="D6DCEA"/>
@@ -14258,7 +14181,7 @@
                     <a:bodyPr/>
                     <a:lstStyle/>
                     <a:p>
-                      <a:pPr indent="0" marL="0">
+                      <a:pPr marL="0" indent="0">
                         <a:buNone/>
                       </a:pPr>
                       <a:r>
@@ -14279,7 +14202,7 @@
                       </a:endParaRPr>
                     </a:p>
                   </a:txBody>
-                  <a:tcPr marL="91440" marR="91440" marT="45720" marB="45720" anchor="ctr">
+                  <a:tcPr anchor="ctr">
                     <a:lnL w="6350" cap="flat" cmpd="sng" algn="ctr">
                       <a:solidFill>
                         <a:srgbClr val="D6DCEA"/>
@@ -14326,7 +14249,7 @@
                     <a:bodyPr/>
                     <a:lstStyle/>
                     <a:p>
-                      <a:pPr indent="0" marL="0">
+                      <a:pPr marL="0" indent="0">
                         <a:buNone/>
                       </a:pPr>
                       <a:r>
@@ -14347,7 +14270,7 @@
                       </a:endParaRPr>
                     </a:p>
                   </a:txBody>
-                  <a:tcPr marL="91440" marR="91440" marT="45720" marB="45720" anchor="ctr">
+                  <a:tcPr anchor="ctr">
                     <a:lnL w="6350" cap="flat" cmpd="sng" algn="ctr">
                       <a:solidFill>
                         <a:srgbClr val="D6DCEA"/>
@@ -14394,7 +14317,7 @@
                     <a:bodyPr/>
                     <a:lstStyle/>
                     <a:p>
-                      <a:pPr indent="0" marL="0">
+                      <a:pPr marL="0" indent="0">
                         <a:buNone/>
                       </a:pPr>
                       <a:r>
@@ -14415,7 +14338,7 @@
                       </a:endParaRPr>
                     </a:p>
                   </a:txBody>
-                  <a:tcPr marL="91440" marR="91440" marT="45720" marB="45720" anchor="ctr">
+                  <a:tcPr anchor="ctr">
                     <a:lnL w="6350" cap="flat" cmpd="sng" algn="ctr">
                       <a:solidFill>
                         <a:srgbClr val="D6DCEA"/>
@@ -14457,6 +14380,11 @@
                     </a:solidFill>
                   </a:tcPr>
                 </a:tc>
+                <a:extLst>
+                  <a:ext uri="{0D108BD9-81ED-4DB2-BD59-A6C34878D82A}">
+                    <a16:rowId xmlns:a16="http://schemas.microsoft.com/office/drawing/2014/main" val="10000"/>
+                  </a:ext>
+                </a:extLst>
               </a:tr>
               <a:tr h="530352">
                 <a:tc>
@@ -14464,7 +14392,7 @@
                     <a:bodyPr/>
                     <a:lstStyle/>
                     <a:p>
-                      <a:pPr indent="0" marL="0">
+                      <a:pPr marL="0" indent="0">
                         <a:buNone/>
                       </a:pPr>
                       <a:r>
@@ -14485,7 +14413,7 @@
                       </a:endParaRPr>
                     </a:p>
                   </a:txBody>
-                  <a:tcPr marL="91440" marR="91440" marT="45720" marB="45720" anchor="ctr">
+                  <a:tcPr anchor="ctr">
                     <a:lnL w="6350" cap="flat" cmpd="sng" algn="ctr">
                       <a:solidFill>
                         <a:srgbClr val="D6DCEA"/>
@@ -14529,7 +14457,7 @@
                     <a:bodyPr/>
                     <a:lstStyle/>
                     <a:p>
-                      <a:pPr indent="0" marL="0">
+                      <a:pPr marL="0" indent="0">
                         <a:buNone/>
                       </a:pPr>
                       <a:r>
@@ -14550,7 +14478,7 @@
                       </a:endParaRPr>
                     </a:p>
                   </a:txBody>
-                  <a:tcPr marL="91440" marR="91440" marT="45720" marB="45720" anchor="ctr">
+                  <a:tcPr anchor="ctr">
                     <a:lnL w="6350" cap="flat" cmpd="sng" algn="ctr">
                       <a:solidFill>
                         <a:srgbClr val="D6DCEA"/>
@@ -14594,7 +14522,7 @@
                     <a:bodyPr/>
                     <a:lstStyle/>
                     <a:p>
-                      <a:pPr indent="0" marL="0">
+                      <a:pPr marL="0" indent="0">
                         <a:buNone/>
                       </a:pPr>
                       <a:r>
@@ -14615,7 +14543,7 @@
                       </a:endParaRPr>
                     </a:p>
                   </a:txBody>
-                  <a:tcPr marL="91440" marR="91440" marT="45720" marB="45720" anchor="ctr">
+                  <a:tcPr anchor="ctr">
                     <a:lnL w="6350" cap="flat" cmpd="sng" algn="ctr">
                       <a:solidFill>
                         <a:srgbClr val="D6DCEA"/>
@@ -14659,7 +14587,7 @@
                     <a:bodyPr/>
                     <a:lstStyle/>
                     <a:p>
-                      <a:pPr indent="0" marL="0">
+                      <a:pPr marL="0" indent="0">
                         <a:buNone/>
                       </a:pPr>
                       <a:r>
@@ -14680,7 +14608,7 @@
                       </a:endParaRPr>
                     </a:p>
                   </a:txBody>
-                  <a:tcPr marL="91440" marR="91440" marT="45720" marB="45720" anchor="ctr">
+                  <a:tcPr anchor="ctr">
                     <a:lnL w="6350" cap="flat" cmpd="sng" algn="ctr">
                       <a:solidFill>
                         <a:srgbClr val="D6DCEA"/>
@@ -14719,6 +14647,11 @@
                     </a:lnB>
                   </a:tcPr>
                 </a:tc>
+                <a:extLst>
+                  <a:ext uri="{0D108BD9-81ED-4DB2-BD59-A6C34878D82A}">
+                    <a16:rowId xmlns:a16="http://schemas.microsoft.com/office/drawing/2014/main" val="10001"/>
+                  </a:ext>
+                </a:extLst>
               </a:tr>
               <a:tr h="530352">
                 <a:tc>
@@ -14726,7 +14659,7 @@
                     <a:bodyPr/>
                     <a:lstStyle/>
                     <a:p>
-                      <a:pPr indent="0" marL="0">
+                      <a:pPr marL="0" indent="0">
                         <a:buNone/>
                       </a:pPr>
                       <a:r>
@@ -14747,7 +14680,7 @@
                       </a:endParaRPr>
                     </a:p>
                   </a:txBody>
-                  <a:tcPr marL="91440" marR="91440" marT="45720" marB="45720" anchor="ctr">
+                  <a:tcPr anchor="ctr">
                     <a:lnL w="6350" cap="flat" cmpd="sng" algn="ctr">
                       <a:solidFill>
                         <a:srgbClr val="D6DCEA"/>
@@ -14791,7 +14724,7 @@
                     <a:bodyPr/>
                     <a:lstStyle/>
                     <a:p>
-                      <a:pPr indent="0" marL="0">
+                      <a:pPr marL="0" indent="0">
                         <a:buNone/>
                       </a:pPr>
                       <a:r>
@@ -14812,7 +14745,7 @@
                       </a:endParaRPr>
                     </a:p>
                   </a:txBody>
-                  <a:tcPr marL="91440" marR="91440" marT="45720" marB="45720" anchor="ctr">
+                  <a:tcPr anchor="ctr">
                     <a:lnL w="6350" cap="flat" cmpd="sng" algn="ctr">
                       <a:solidFill>
                         <a:srgbClr val="D6DCEA"/>
@@ -14856,7 +14789,7 @@
                     <a:bodyPr/>
                     <a:lstStyle/>
                     <a:p>
-                      <a:pPr indent="0" marL="0">
+                      <a:pPr marL="0" indent="0">
                         <a:buNone/>
                       </a:pPr>
                       <a:r>
@@ -14877,7 +14810,7 @@
                       </a:endParaRPr>
                     </a:p>
                   </a:txBody>
-                  <a:tcPr marL="91440" marR="91440" marT="45720" marB="45720" anchor="ctr">
+                  <a:tcPr anchor="ctr">
                     <a:lnL w="6350" cap="flat" cmpd="sng" algn="ctr">
                       <a:solidFill>
                         <a:srgbClr val="D6DCEA"/>
@@ -14921,7 +14854,7 @@
                     <a:bodyPr/>
                     <a:lstStyle/>
                     <a:p>
-                      <a:pPr indent="0" marL="0">
+                      <a:pPr marL="0" indent="0">
                         <a:buNone/>
                       </a:pPr>
                       <a:r>
@@ -14942,7 +14875,7 @@
                       </a:endParaRPr>
                     </a:p>
                   </a:txBody>
-                  <a:tcPr marL="91440" marR="91440" marT="45720" marB="45720" anchor="ctr">
+                  <a:tcPr anchor="ctr">
                     <a:lnL w="6350" cap="flat" cmpd="sng" algn="ctr">
                       <a:solidFill>
                         <a:srgbClr val="D6DCEA"/>
@@ -14981,6 +14914,11 @@
                     </a:lnB>
                   </a:tcPr>
                 </a:tc>
+                <a:extLst>
+                  <a:ext uri="{0D108BD9-81ED-4DB2-BD59-A6C34878D82A}">
+                    <a16:rowId xmlns:a16="http://schemas.microsoft.com/office/drawing/2014/main" val="10002"/>
+                  </a:ext>
+                </a:extLst>
               </a:tr>
               <a:tr h="530352">
                 <a:tc>
@@ -14988,7 +14926,7 @@
                     <a:bodyPr/>
                     <a:lstStyle/>
                     <a:p>
-                      <a:pPr indent="0" marL="0">
+                      <a:pPr marL="0" indent="0">
                         <a:buNone/>
                       </a:pPr>
                       <a:r>
@@ -15009,7 +14947,7 @@
                       </a:endParaRPr>
                     </a:p>
                   </a:txBody>
-                  <a:tcPr marL="91440" marR="91440" marT="45720" marB="45720" anchor="ctr">
+                  <a:tcPr anchor="ctr">
                     <a:lnL w="6350" cap="flat" cmpd="sng" algn="ctr">
                       <a:solidFill>
                         <a:srgbClr val="D6DCEA"/>
@@ -15053,7 +14991,7 @@
                     <a:bodyPr/>
                     <a:lstStyle/>
                     <a:p>
-                      <a:pPr indent="0" marL="0">
+                      <a:pPr marL="0" indent="0">
                         <a:buNone/>
                       </a:pPr>
                       <a:r>
@@ -15074,7 +15012,7 @@
                       </a:endParaRPr>
                     </a:p>
                   </a:txBody>
-                  <a:tcPr marL="91440" marR="91440" marT="45720" marB="45720" anchor="ctr">
+                  <a:tcPr anchor="ctr">
                     <a:lnL w="6350" cap="flat" cmpd="sng" algn="ctr">
                       <a:solidFill>
                         <a:srgbClr val="D6DCEA"/>
@@ -15118,7 +15056,7 @@
                     <a:bodyPr/>
                     <a:lstStyle/>
                     <a:p>
-                      <a:pPr indent="0" marL="0">
+                      <a:pPr marL="0" indent="0">
                         <a:buNone/>
                       </a:pPr>
                       <a:r>
@@ -15139,7 +15077,7 @@
                       </a:endParaRPr>
                     </a:p>
                   </a:txBody>
-                  <a:tcPr marL="91440" marR="91440" marT="45720" marB="45720" anchor="ctr">
+                  <a:tcPr anchor="ctr">
                     <a:lnL w="6350" cap="flat" cmpd="sng" algn="ctr">
                       <a:solidFill>
                         <a:srgbClr val="D6DCEA"/>
@@ -15183,7 +15121,7 @@
                     <a:bodyPr/>
                     <a:lstStyle/>
                     <a:p>
-                      <a:pPr indent="0" marL="0">
+                      <a:pPr marL="0" indent="0">
                         <a:buNone/>
                       </a:pPr>
                       <a:r>
@@ -15204,7 +15142,7 @@
                       </a:endParaRPr>
                     </a:p>
                   </a:txBody>
-                  <a:tcPr marL="91440" marR="91440" marT="45720" marB="45720" anchor="ctr">
+                  <a:tcPr anchor="ctr">
                     <a:lnL w="6350" cap="flat" cmpd="sng" algn="ctr">
                       <a:solidFill>
                         <a:srgbClr val="D6DCEA"/>
@@ -15243,6 +15181,11 @@
                     </a:lnB>
                   </a:tcPr>
                 </a:tc>
+                <a:extLst>
+                  <a:ext uri="{0D108BD9-81ED-4DB2-BD59-A6C34878D82A}">
+                    <a16:rowId xmlns:a16="http://schemas.microsoft.com/office/drawing/2014/main" val="10003"/>
+                  </a:ext>
+                </a:extLst>
               </a:tr>
               <a:tr h="530352">
                 <a:tc>
@@ -15250,7 +15193,7 @@
                     <a:bodyPr/>
                     <a:lstStyle/>
                     <a:p>
-                      <a:pPr indent="0" marL="0">
+                      <a:pPr marL="0" indent="0">
                         <a:buNone/>
                       </a:pPr>
                       <a:r>
@@ -15271,7 +15214,7 @@
                       </a:endParaRPr>
                     </a:p>
                   </a:txBody>
-                  <a:tcPr marL="91440" marR="91440" marT="45720" marB="45720" anchor="ctr">
+                  <a:tcPr anchor="ctr">
                     <a:lnL w="6350" cap="flat" cmpd="sng" algn="ctr">
                       <a:solidFill>
                         <a:srgbClr val="D6DCEA"/>
@@ -15315,7 +15258,7 @@
                     <a:bodyPr/>
                     <a:lstStyle/>
                     <a:p>
-                      <a:pPr indent="0" marL="0">
+                      <a:pPr marL="0" indent="0">
                         <a:buNone/>
                       </a:pPr>
                       <a:r>
@@ -15336,7 +15279,7 @@
                       </a:endParaRPr>
                     </a:p>
                   </a:txBody>
-                  <a:tcPr marL="91440" marR="91440" marT="45720" marB="45720" anchor="ctr">
+                  <a:tcPr anchor="ctr">
                     <a:lnL w="6350" cap="flat" cmpd="sng" algn="ctr">
                       <a:solidFill>
                         <a:srgbClr val="D6DCEA"/>
@@ -15380,7 +15323,7 @@
                     <a:bodyPr/>
                     <a:lstStyle/>
                     <a:p>
-                      <a:pPr indent="0" marL="0">
+                      <a:pPr marL="0" indent="0">
                         <a:buNone/>
                       </a:pPr>
                       <a:r>
@@ -15401,7 +15344,7 @@
                       </a:endParaRPr>
                     </a:p>
                   </a:txBody>
-                  <a:tcPr marL="91440" marR="91440" marT="45720" marB="45720" anchor="ctr">
+                  <a:tcPr anchor="ctr">
                     <a:lnL w="6350" cap="flat" cmpd="sng" algn="ctr">
                       <a:solidFill>
                         <a:srgbClr val="D6DCEA"/>
@@ -15445,7 +15388,7 @@
                     <a:bodyPr/>
                     <a:lstStyle/>
                     <a:p>
-                      <a:pPr indent="0" marL="0">
+                      <a:pPr marL="0" indent="0">
                         <a:buNone/>
                       </a:pPr>
                       <a:r>
@@ -15466,7 +15409,7 @@
                       </a:endParaRPr>
                     </a:p>
                   </a:txBody>
-                  <a:tcPr marL="91440" marR="91440" marT="45720" marB="45720" anchor="ctr">
+                  <a:tcPr anchor="ctr">
                     <a:lnL w="6350" cap="flat" cmpd="sng" algn="ctr">
                       <a:solidFill>
                         <a:srgbClr val="D6DCEA"/>
@@ -15505,6 +15448,11 @@
                     </a:lnB>
                   </a:tcPr>
                 </a:tc>
+                <a:extLst>
+                  <a:ext uri="{0D108BD9-81ED-4DB2-BD59-A6C34878D82A}">
+                    <a16:rowId xmlns:a16="http://schemas.microsoft.com/office/drawing/2014/main" val="10004"/>
+                  </a:ext>
+                </a:extLst>
               </a:tr>
               <a:tr h="530352">
                 <a:tc>
@@ -15512,7 +15460,7 @@
                     <a:bodyPr/>
                     <a:lstStyle/>
                     <a:p>
-                      <a:pPr indent="0" marL="0">
+                      <a:pPr marL="0" indent="0">
                         <a:buNone/>
                       </a:pPr>
                       <a:r>
@@ -15533,7 +15481,7 @@
                       </a:endParaRPr>
                     </a:p>
                   </a:txBody>
-                  <a:tcPr marL="91440" marR="91440" marT="45720" marB="45720" anchor="ctr">
+                  <a:tcPr anchor="ctr">
                     <a:lnL w="6350" cap="flat" cmpd="sng" algn="ctr">
                       <a:solidFill>
                         <a:srgbClr val="D6DCEA"/>
@@ -15580,7 +15528,7 @@
                     <a:bodyPr/>
                     <a:lstStyle/>
                     <a:p>
-                      <a:pPr indent="0" marL="0">
+                      <a:pPr marL="0" indent="0">
                         <a:buNone/>
                       </a:pPr>
                       <a:r>
@@ -15601,7 +15549,7 @@
                       </a:endParaRPr>
                     </a:p>
                   </a:txBody>
-                  <a:tcPr marL="91440" marR="91440" marT="45720" marB="45720" anchor="ctr">
+                  <a:tcPr anchor="ctr">
                     <a:lnL w="6350" cap="flat" cmpd="sng" algn="ctr">
                       <a:solidFill>
                         <a:srgbClr val="D6DCEA"/>
@@ -15648,7 +15596,7 @@
                     <a:bodyPr/>
                     <a:lstStyle/>
                     <a:p>
-                      <a:pPr indent="0" marL="0">
+                      <a:pPr marL="0" indent="0">
                         <a:buNone/>
                       </a:pPr>
                       <a:r>
@@ -15669,7 +15617,7 @@
                       </a:endParaRPr>
                     </a:p>
                   </a:txBody>
-                  <a:tcPr marL="91440" marR="91440" marT="45720" marB="45720" anchor="ctr">
+                  <a:tcPr anchor="ctr">
                     <a:lnL w="6350" cap="flat" cmpd="sng" algn="ctr">
                       <a:solidFill>
                         <a:srgbClr val="D6DCEA"/>
@@ -15716,7 +15664,7 @@
                     <a:bodyPr/>
                     <a:lstStyle/>
                     <a:p>
-                      <a:pPr indent="0" marL="0">
+                      <a:pPr marL="0" indent="0">
                         <a:buNone/>
                       </a:pPr>
                       <a:r>
@@ -15737,7 +15685,7 @@
                       </a:endParaRPr>
                     </a:p>
                   </a:txBody>
-                  <a:tcPr marL="91440" marR="91440" marT="45720" marB="45720" anchor="ctr">
+                  <a:tcPr anchor="ctr">
                     <a:lnL w="6350" cap="flat" cmpd="sng" algn="ctr">
                       <a:solidFill>
                         <a:srgbClr val="D6DCEA"/>
@@ -15779,6 +15727,11 @@
                     </a:solidFill>
                   </a:tcPr>
                 </a:tc>
+                <a:extLst>
+                  <a:ext uri="{0D108BD9-81ED-4DB2-BD59-A6C34878D82A}">
+                    <a16:rowId xmlns:a16="http://schemas.microsoft.com/office/drawing/2014/main" val="10005"/>
+                  </a:ext>
+                </a:extLst>
               </a:tr>
             </a:tbl>
           </a:graphicData>
@@ -15803,7 +15756,7 @@
           </a:solidFill>
           <a:ln/>
           <a:effectLst>
-            <a:outerShdw sx="100000" sy="100000" kx="0" ky="0" algn="bl" rotWithShape="0" blurRad="76200" dist="25400" dir="8100000">
+            <a:outerShdw blurRad="76200" dist="25400" dir="8100000" algn="bl" rotWithShape="0">
               <a:srgbClr val="000000">
                 <a:alpha val="10000"/>
               </a:srgbClr>
@@ -15852,7 +15805,7 @@
           <a:bodyPr wrap="square" lIns="0" tIns="0" rIns="0" bIns="0" rtlCol="0" anchor="ctr"/>
           <a:lstStyle/>
           <a:p>
-            <a:pPr indent="0" marL="0">
+            <a:pPr marL="0" indent="0">
               <a:buNone/>
             </a:pPr>
             <a:r>
@@ -15891,7 +15844,7 @@
           <a:bodyPr wrap="square" lIns="0" tIns="0" rIns="0" bIns="0" rtlCol="0" anchor="t"/>
           <a:lstStyle/>
           <a:p>
-            <a:pPr indent="0" marL="0">
+            <a:pPr marL="0" indent="0">
               <a:buNone/>
             </a:pPr>
             <a:r>
@@ -15925,6 +15878,7 @@
         <a:solidFill>
           <a:srgbClr val="F4F6FB"/>
         </a:solidFill>
+        <a:effectLst/>
       </p:bgPr>
     </p:bg>
     <p:spTree>
@@ -15962,7 +15916,7 @@
           <a:bodyPr wrap="square" lIns="0" tIns="0" rIns="0" bIns="0" rtlCol="0" anchor="ctr"/>
           <a:lstStyle/>
           <a:p>
-            <a:pPr indent="0" marL="0">
+            <a:pPr marL="0" indent="0">
               <a:buNone/>
             </a:pPr>
             <a:r>
@@ -16001,7 +15955,7 @@
           <a:bodyPr wrap="square" lIns="0" tIns="0" rIns="0" bIns="0" rtlCol="0" anchor="ctr"/>
           <a:lstStyle/>
           <a:p>
-            <a:pPr indent="0" marL="0">
+            <a:pPr marL="0" indent="0">
               <a:buNone/>
             </a:pPr>
             <a:r>
@@ -16040,7 +15994,7 @@
           <a:bodyPr wrap="square" lIns="0" tIns="0" rIns="0" bIns="0" rtlCol="0" anchor="ctr"/>
           <a:lstStyle/>
           <a:p>
-            <a:pPr indent="0" marL="0">
+            <a:pPr marL="0" indent="0">
               <a:buNone/>
             </a:pPr>
             <a:r>
@@ -16079,7 +16033,7 @@
           <a:bodyPr wrap="square" lIns="0" tIns="0" rIns="0" bIns="0" rtlCol="0" anchor="ctr"/>
           <a:lstStyle/>
           <a:p>
-            <a:pPr algn="r" indent="0" marL="0">
+            <a:pPr marL="0" indent="0" algn="r">
               <a:buNone/>
             </a:pPr>
             <a:r>
@@ -16113,16 +16067,34 @@
         </p:nvGraphicFramePr>
         <p:xfrm>
           <a:off x="548640" y="1371600"/>
-          <a:ext cx="11109960" cy="914400"/>
+          <a:ext cx="11109960" cy="4608576"/>
         </p:xfrm>
         <a:graphic>
           <a:graphicData uri="http://schemas.openxmlformats.org/drawingml/2006/table">
             <a:tbl>
               <a:tblPr/>
               <a:tblGrid>
-                <a:gridCol w="822960"/>
-                <a:gridCol w="8001000"/>
-                <a:gridCol w="2286000"/>
+                <a:gridCol w="822960">
+                  <a:extLst>
+                    <a:ext uri="{9D8B030D-6E8A-4147-A177-3AD203B41FA5}">
+                      <a16:colId xmlns:a16="http://schemas.microsoft.com/office/drawing/2014/main" val="20000"/>
+                    </a:ext>
+                  </a:extLst>
+                </a:gridCol>
+                <a:gridCol w="8001000">
+                  <a:extLst>
+                    <a:ext uri="{9D8B030D-6E8A-4147-A177-3AD203B41FA5}">
+                      <a16:colId xmlns:a16="http://schemas.microsoft.com/office/drawing/2014/main" val="20001"/>
+                    </a:ext>
+                  </a:extLst>
+                </a:gridCol>
+                <a:gridCol w="2286000">
+                  <a:extLst>
+                    <a:ext uri="{9D8B030D-6E8A-4147-A177-3AD203B41FA5}">
+                      <a16:colId xmlns:a16="http://schemas.microsoft.com/office/drawing/2014/main" val="20002"/>
+                    </a:ext>
+                  </a:extLst>
+                </a:gridCol>
               </a:tblGrid>
               <a:tr h="384048">
                 <a:tc>
@@ -16130,7 +16102,7 @@
                     <a:bodyPr/>
                     <a:lstStyle/>
                     <a:p>
-                      <a:pPr indent="0" marL="0">
+                      <a:pPr marL="0" indent="0">
                         <a:buNone/>
                       </a:pPr>
                       <a:r>
@@ -16151,7 +16123,7 @@
                       </a:endParaRPr>
                     </a:p>
                   </a:txBody>
-                  <a:tcPr marL="91440" marR="91440" marT="45720" marB="45720" anchor="ctr">
+                  <a:tcPr anchor="ctr">
                     <a:lnL w="6350" cap="flat" cmpd="sng" algn="ctr">
                       <a:solidFill>
                         <a:srgbClr val="D6DCEA"/>
@@ -16198,7 +16170,7 @@
                     <a:bodyPr/>
                     <a:lstStyle/>
                     <a:p>
-                      <a:pPr indent="0" marL="0">
+                      <a:pPr marL="0" indent="0">
                         <a:buNone/>
                       </a:pPr>
                       <a:r>
@@ -16219,7 +16191,7 @@
                       </a:endParaRPr>
                     </a:p>
                   </a:txBody>
-                  <a:tcPr marL="91440" marR="91440" marT="45720" marB="45720" anchor="ctr">
+                  <a:tcPr anchor="ctr">
                     <a:lnL w="6350" cap="flat" cmpd="sng" algn="ctr">
                       <a:solidFill>
                         <a:srgbClr val="D6DCEA"/>
@@ -16266,7 +16238,7 @@
                     <a:bodyPr/>
                     <a:lstStyle/>
                     <a:p>
-                      <a:pPr indent="0" marL="0">
+                      <a:pPr marL="0" indent="0">
                         <a:buNone/>
                       </a:pPr>
                       <a:r>
@@ -16287,7 +16259,7 @@
                       </a:endParaRPr>
                     </a:p>
                   </a:txBody>
-                  <a:tcPr marL="91440" marR="91440" marT="45720" marB="45720" anchor="ctr">
+                  <a:tcPr anchor="ctr">
                     <a:lnL w="6350" cap="flat" cmpd="sng" algn="ctr">
                       <a:solidFill>
                         <a:srgbClr val="D6DCEA"/>
@@ -16329,6 +16301,11 @@
                     </a:solidFill>
                   </a:tcPr>
                 </a:tc>
+                <a:extLst>
+                  <a:ext uri="{0D108BD9-81ED-4DB2-BD59-A6C34878D82A}">
+                    <a16:rowId xmlns:a16="http://schemas.microsoft.com/office/drawing/2014/main" val="10000"/>
+                  </a:ext>
+                </a:extLst>
               </a:tr>
               <a:tr h="384048">
                 <a:tc>
@@ -16336,7 +16313,7 @@
                     <a:bodyPr/>
                     <a:lstStyle/>
                     <a:p>
-                      <a:pPr indent="0" marL="0">
+                      <a:pPr marL="0" indent="0">
                         <a:buNone/>
                       </a:pPr>
                       <a:r>
@@ -16357,7 +16334,7 @@
                       </a:endParaRPr>
                     </a:p>
                   </a:txBody>
-                  <a:tcPr marL="91440" marR="91440" marT="45720" marB="45720" anchor="ctr">
+                  <a:tcPr anchor="ctr">
                     <a:lnL w="6350" cap="flat" cmpd="sng" algn="ctr">
                       <a:solidFill>
                         <a:srgbClr val="D6DCEA"/>
@@ -16401,7 +16378,7 @@
                     <a:bodyPr/>
                     <a:lstStyle/>
                     <a:p>
-                      <a:pPr indent="0" marL="0">
+                      <a:pPr marL="0" indent="0">
                         <a:buNone/>
                       </a:pPr>
                       <a:r>
@@ -16422,7 +16399,7 @@
                       </a:endParaRPr>
                     </a:p>
                   </a:txBody>
-                  <a:tcPr marL="91440" marR="91440" marT="45720" marB="45720" anchor="ctr">
+                  <a:tcPr anchor="ctr">
                     <a:lnL w="6350" cap="flat" cmpd="sng" algn="ctr">
                       <a:solidFill>
                         <a:srgbClr val="D6DCEA"/>
@@ -16466,7 +16443,7 @@
                     <a:bodyPr/>
                     <a:lstStyle/>
                     <a:p>
-                      <a:pPr indent="0" marL="0">
+                      <a:pPr marL="0" indent="0">
                         <a:buNone/>
                       </a:pPr>
                       <a:r>
@@ -16487,7 +16464,7 @@
                       </a:endParaRPr>
                     </a:p>
                   </a:txBody>
-                  <a:tcPr marL="91440" marR="91440" marT="45720" marB="45720" anchor="ctr">
+                  <a:tcPr anchor="ctr">
                     <a:lnL w="6350" cap="flat" cmpd="sng" algn="ctr">
                       <a:solidFill>
                         <a:srgbClr val="D6DCEA"/>
@@ -16526,6 +16503,11 @@
                     </a:lnB>
                   </a:tcPr>
                 </a:tc>
+                <a:extLst>
+                  <a:ext uri="{0D108BD9-81ED-4DB2-BD59-A6C34878D82A}">
+                    <a16:rowId xmlns:a16="http://schemas.microsoft.com/office/drawing/2014/main" val="10001"/>
+                  </a:ext>
+                </a:extLst>
               </a:tr>
               <a:tr h="384048">
                 <a:tc>
@@ -16533,7 +16515,7 @@
                     <a:bodyPr/>
                     <a:lstStyle/>
                     <a:p>
-                      <a:pPr indent="0" marL="0">
+                      <a:pPr marL="0" indent="0">
                         <a:buNone/>
                       </a:pPr>
                       <a:r>
@@ -16554,7 +16536,7 @@
                       </a:endParaRPr>
                     </a:p>
                   </a:txBody>
-                  <a:tcPr marL="91440" marR="91440" marT="45720" marB="45720" anchor="ctr">
+                  <a:tcPr anchor="ctr">
                     <a:lnL w="6350" cap="flat" cmpd="sng" algn="ctr">
                       <a:solidFill>
                         <a:srgbClr val="D6DCEA"/>
@@ -16598,7 +16580,7 @@
                     <a:bodyPr/>
                     <a:lstStyle/>
                     <a:p>
-                      <a:pPr indent="0" marL="0">
+                      <a:pPr marL="0" indent="0">
                         <a:buNone/>
                       </a:pPr>
                       <a:r>
@@ -16619,7 +16601,7 @@
                       </a:endParaRPr>
                     </a:p>
                   </a:txBody>
-                  <a:tcPr marL="91440" marR="91440" marT="45720" marB="45720" anchor="ctr">
+                  <a:tcPr anchor="ctr">
                     <a:lnL w="6350" cap="flat" cmpd="sng" algn="ctr">
                       <a:solidFill>
                         <a:srgbClr val="D6DCEA"/>
@@ -16663,7 +16645,7 @@
                     <a:bodyPr/>
                     <a:lstStyle/>
                     <a:p>
-                      <a:pPr indent="0" marL="0">
+                      <a:pPr marL="0" indent="0">
                         <a:buNone/>
                       </a:pPr>
                       <a:r>
@@ -16684,7 +16666,7 @@
                       </a:endParaRPr>
                     </a:p>
                   </a:txBody>
-                  <a:tcPr marL="91440" marR="91440" marT="45720" marB="45720" anchor="ctr">
+                  <a:tcPr anchor="ctr">
                     <a:lnL w="6350" cap="flat" cmpd="sng" algn="ctr">
                       <a:solidFill>
                         <a:srgbClr val="D6DCEA"/>
@@ -16723,6 +16705,11 @@
                     </a:lnB>
                   </a:tcPr>
                 </a:tc>
+                <a:extLst>
+                  <a:ext uri="{0D108BD9-81ED-4DB2-BD59-A6C34878D82A}">
+                    <a16:rowId xmlns:a16="http://schemas.microsoft.com/office/drawing/2014/main" val="10002"/>
+                  </a:ext>
+                </a:extLst>
               </a:tr>
               <a:tr h="384048">
                 <a:tc>
@@ -16730,7 +16717,7 @@
                     <a:bodyPr/>
                     <a:lstStyle/>
                     <a:p>
-                      <a:pPr indent="0" marL="0">
+                      <a:pPr marL="0" indent="0">
                         <a:buNone/>
                       </a:pPr>
                       <a:r>
@@ -16751,7 +16738,7 @@
                       </a:endParaRPr>
                     </a:p>
                   </a:txBody>
-                  <a:tcPr marL="91440" marR="91440" marT="45720" marB="45720" anchor="ctr">
+                  <a:tcPr anchor="ctr">
                     <a:lnL w="6350" cap="flat" cmpd="sng" algn="ctr">
                       <a:solidFill>
                         <a:srgbClr val="D6DCEA"/>
@@ -16795,7 +16782,7 @@
                     <a:bodyPr/>
                     <a:lstStyle/>
                     <a:p>
-                      <a:pPr indent="0" marL="0">
+                      <a:pPr marL="0" indent="0">
                         <a:buNone/>
                       </a:pPr>
                       <a:r>
@@ -16816,7 +16803,7 @@
                       </a:endParaRPr>
                     </a:p>
                   </a:txBody>
-                  <a:tcPr marL="91440" marR="91440" marT="45720" marB="45720" anchor="ctr">
+                  <a:tcPr anchor="ctr">
                     <a:lnL w="6350" cap="flat" cmpd="sng" algn="ctr">
                       <a:solidFill>
                         <a:srgbClr val="D6DCEA"/>
@@ -16860,7 +16847,7 @@
                     <a:bodyPr/>
                     <a:lstStyle/>
                     <a:p>
-                      <a:pPr indent="0" marL="0">
+                      <a:pPr marL="0" indent="0">
                         <a:buNone/>
                       </a:pPr>
                       <a:r>
@@ -16881,7 +16868,7 @@
                       </a:endParaRPr>
                     </a:p>
                   </a:txBody>
-                  <a:tcPr marL="91440" marR="91440" marT="45720" marB="45720" anchor="ctr">
+                  <a:tcPr anchor="ctr">
                     <a:lnL w="6350" cap="flat" cmpd="sng" algn="ctr">
                       <a:solidFill>
                         <a:srgbClr val="D6DCEA"/>
@@ -16920,6 +16907,11 @@
                     </a:lnB>
                   </a:tcPr>
                 </a:tc>
+                <a:extLst>
+                  <a:ext uri="{0D108BD9-81ED-4DB2-BD59-A6C34878D82A}">
+                    <a16:rowId xmlns:a16="http://schemas.microsoft.com/office/drawing/2014/main" val="10003"/>
+                  </a:ext>
+                </a:extLst>
               </a:tr>
               <a:tr h="384048">
                 <a:tc>
@@ -16927,7 +16919,7 @@
                     <a:bodyPr/>
                     <a:lstStyle/>
                     <a:p>
-                      <a:pPr indent="0" marL="0">
+                      <a:pPr marL="0" indent="0">
                         <a:buNone/>
                       </a:pPr>
                       <a:r>
@@ -16948,7 +16940,7 @@
                       </a:endParaRPr>
                     </a:p>
                   </a:txBody>
-                  <a:tcPr marL="91440" marR="91440" marT="45720" marB="45720" anchor="ctr">
+                  <a:tcPr anchor="ctr">
                     <a:lnL w="6350" cap="flat" cmpd="sng" algn="ctr">
                       <a:solidFill>
                         <a:srgbClr val="D6DCEA"/>
@@ -16992,7 +16984,7 @@
                     <a:bodyPr/>
                     <a:lstStyle/>
                     <a:p>
-                      <a:pPr indent="0" marL="0">
+                      <a:pPr marL="0" indent="0">
                         <a:buNone/>
                       </a:pPr>
                       <a:r>
@@ -17013,7 +17005,7 @@
                       </a:endParaRPr>
                     </a:p>
                   </a:txBody>
-                  <a:tcPr marL="91440" marR="91440" marT="45720" marB="45720" anchor="ctr">
+                  <a:tcPr anchor="ctr">
                     <a:lnL w="6350" cap="flat" cmpd="sng" algn="ctr">
                       <a:solidFill>
                         <a:srgbClr val="D6DCEA"/>
@@ -17057,7 +17049,7 @@
                     <a:bodyPr/>
                     <a:lstStyle/>
                     <a:p>
-                      <a:pPr indent="0" marL="0">
+                      <a:pPr marL="0" indent="0">
                         <a:buNone/>
                       </a:pPr>
                       <a:r>
@@ -17078,7 +17070,7 @@
                       </a:endParaRPr>
                     </a:p>
                   </a:txBody>
-                  <a:tcPr marL="91440" marR="91440" marT="45720" marB="45720" anchor="ctr">
+                  <a:tcPr anchor="ctr">
                     <a:lnL w="6350" cap="flat" cmpd="sng" algn="ctr">
                       <a:solidFill>
                         <a:srgbClr val="D6DCEA"/>
@@ -17117,6 +17109,11 @@
                     </a:lnB>
                   </a:tcPr>
                 </a:tc>
+                <a:extLst>
+                  <a:ext uri="{0D108BD9-81ED-4DB2-BD59-A6C34878D82A}">
+                    <a16:rowId xmlns:a16="http://schemas.microsoft.com/office/drawing/2014/main" val="10004"/>
+                  </a:ext>
+                </a:extLst>
               </a:tr>
               <a:tr h="384048">
                 <a:tc>
@@ -17124,7 +17121,7 @@
                     <a:bodyPr/>
                     <a:lstStyle/>
                     <a:p>
-                      <a:pPr indent="0" marL="0">
+                      <a:pPr marL="0" indent="0">
                         <a:buNone/>
                       </a:pPr>
                       <a:r>
@@ -17145,7 +17142,7 @@
                       </a:endParaRPr>
                     </a:p>
                   </a:txBody>
-                  <a:tcPr marL="91440" marR="91440" marT="45720" marB="45720" anchor="ctr">
+                  <a:tcPr anchor="ctr">
                     <a:lnL w="6350" cap="flat" cmpd="sng" algn="ctr">
                       <a:solidFill>
                         <a:srgbClr val="D6DCEA"/>
@@ -17189,7 +17186,7 @@
                     <a:bodyPr/>
                     <a:lstStyle/>
                     <a:p>
-                      <a:pPr indent="0" marL="0">
+                      <a:pPr marL="0" indent="0">
                         <a:buNone/>
                       </a:pPr>
                       <a:r>
@@ -17210,7 +17207,7 @@
                       </a:endParaRPr>
                     </a:p>
                   </a:txBody>
-                  <a:tcPr marL="91440" marR="91440" marT="45720" marB="45720" anchor="ctr">
+                  <a:tcPr anchor="ctr">
                     <a:lnL w="6350" cap="flat" cmpd="sng" algn="ctr">
                       <a:solidFill>
                         <a:srgbClr val="D6DCEA"/>
@@ -17254,7 +17251,7 @@
                     <a:bodyPr/>
                     <a:lstStyle/>
                     <a:p>
-                      <a:pPr indent="0" marL="0">
+                      <a:pPr marL="0" indent="0">
                         <a:buNone/>
                       </a:pPr>
                       <a:r>
@@ -17275,7 +17272,7 @@
                       </a:endParaRPr>
                     </a:p>
                   </a:txBody>
-                  <a:tcPr marL="91440" marR="91440" marT="45720" marB="45720" anchor="ctr">
+                  <a:tcPr anchor="ctr">
                     <a:lnL w="6350" cap="flat" cmpd="sng" algn="ctr">
                       <a:solidFill>
                         <a:srgbClr val="D6DCEA"/>
@@ -17314,6 +17311,11 @@
                     </a:lnB>
                   </a:tcPr>
                 </a:tc>
+                <a:extLst>
+                  <a:ext uri="{0D108BD9-81ED-4DB2-BD59-A6C34878D82A}">
+                    <a16:rowId xmlns:a16="http://schemas.microsoft.com/office/drawing/2014/main" val="10005"/>
+                  </a:ext>
+                </a:extLst>
               </a:tr>
               <a:tr h="384048">
                 <a:tc>
@@ -17321,7 +17323,7 @@
                     <a:bodyPr/>
                     <a:lstStyle/>
                     <a:p>
-                      <a:pPr indent="0" marL="0">
+                      <a:pPr marL="0" indent="0">
                         <a:buNone/>
                       </a:pPr>
                       <a:r>
@@ -17342,7 +17344,7 @@
                       </a:endParaRPr>
                     </a:p>
                   </a:txBody>
-                  <a:tcPr marL="91440" marR="91440" marT="45720" marB="45720" anchor="ctr">
+                  <a:tcPr anchor="ctr">
                     <a:lnL w="6350" cap="flat" cmpd="sng" algn="ctr">
                       <a:solidFill>
                         <a:srgbClr val="D6DCEA"/>
@@ -17386,7 +17388,7 @@
                     <a:bodyPr/>
                     <a:lstStyle/>
                     <a:p>
-                      <a:pPr indent="0" marL="0">
+                      <a:pPr marL="0" indent="0">
                         <a:buNone/>
                       </a:pPr>
                       <a:r>
@@ -17407,7 +17409,7 @@
                       </a:endParaRPr>
                     </a:p>
                   </a:txBody>
-                  <a:tcPr marL="91440" marR="91440" marT="45720" marB="45720" anchor="ctr">
+                  <a:tcPr anchor="ctr">
                     <a:lnL w="6350" cap="flat" cmpd="sng" algn="ctr">
                       <a:solidFill>
                         <a:srgbClr val="D6DCEA"/>
@@ -17451,7 +17453,7 @@
                     <a:bodyPr/>
                     <a:lstStyle/>
                     <a:p>
-                      <a:pPr indent="0" marL="0">
+                      <a:pPr marL="0" indent="0">
                         <a:buNone/>
                       </a:pPr>
                       <a:r>
@@ -17472,7 +17474,7 @@
                       </a:endParaRPr>
                     </a:p>
                   </a:txBody>
-                  <a:tcPr marL="91440" marR="91440" marT="45720" marB="45720" anchor="ctr">
+                  <a:tcPr anchor="ctr">
                     <a:lnL w="6350" cap="flat" cmpd="sng" algn="ctr">
                       <a:solidFill>
                         <a:srgbClr val="D6DCEA"/>
@@ -17511,6 +17513,11 @@
                     </a:lnB>
                   </a:tcPr>
                 </a:tc>
+                <a:extLst>
+                  <a:ext uri="{0D108BD9-81ED-4DB2-BD59-A6C34878D82A}">
+                    <a16:rowId xmlns:a16="http://schemas.microsoft.com/office/drawing/2014/main" val="10006"/>
+                  </a:ext>
+                </a:extLst>
               </a:tr>
               <a:tr h="384048">
                 <a:tc>
@@ -17518,7 +17525,7 @@
                     <a:bodyPr/>
                     <a:lstStyle/>
                     <a:p>
-                      <a:pPr indent="0" marL="0">
+                      <a:pPr marL="0" indent="0">
                         <a:buNone/>
                       </a:pPr>
                       <a:r>
@@ -17539,7 +17546,7 @@
                       </a:endParaRPr>
                     </a:p>
                   </a:txBody>
-                  <a:tcPr marL="91440" marR="91440" marT="45720" marB="45720" anchor="ctr">
+                  <a:tcPr anchor="ctr">
                     <a:lnL w="6350" cap="flat" cmpd="sng" algn="ctr">
                       <a:solidFill>
                         <a:srgbClr val="D6DCEA"/>
@@ -17583,7 +17590,7 @@
                     <a:bodyPr/>
                     <a:lstStyle/>
                     <a:p>
-                      <a:pPr indent="0" marL="0">
+                      <a:pPr marL="0" indent="0">
                         <a:buNone/>
                       </a:pPr>
                       <a:r>
@@ -17604,7 +17611,7 @@
                       </a:endParaRPr>
                     </a:p>
                   </a:txBody>
-                  <a:tcPr marL="91440" marR="91440" marT="45720" marB="45720" anchor="ctr">
+                  <a:tcPr anchor="ctr">
                     <a:lnL w="6350" cap="flat" cmpd="sng" algn="ctr">
                       <a:solidFill>
                         <a:srgbClr val="D6DCEA"/>
@@ -17648,7 +17655,7 @@
                     <a:bodyPr/>
                     <a:lstStyle/>
                     <a:p>
-                      <a:pPr indent="0" marL="0">
+                      <a:pPr marL="0" indent="0">
                         <a:buNone/>
                       </a:pPr>
                       <a:r>
@@ -17669,7 +17676,7 @@
                       </a:endParaRPr>
                     </a:p>
                   </a:txBody>
-                  <a:tcPr marL="91440" marR="91440" marT="45720" marB="45720" anchor="ctr">
+                  <a:tcPr anchor="ctr">
                     <a:lnL w="6350" cap="flat" cmpd="sng" algn="ctr">
                       <a:solidFill>
                         <a:srgbClr val="D6DCEA"/>
@@ -17708,6 +17715,11 @@
                     </a:lnB>
                   </a:tcPr>
                 </a:tc>
+                <a:extLst>
+                  <a:ext uri="{0D108BD9-81ED-4DB2-BD59-A6C34878D82A}">
+                    <a16:rowId xmlns:a16="http://schemas.microsoft.com/office/drawing/2014/main" val="10007"/>
+                  </a:ext>
+                </a:extLst>
               </a:tr>
               <a:tr h="384048">
                 <a:tc>
@@ -17715,7 +17727,7 @@
                     <a:bodyPr/>
                     <a:lstStyle/>
                     <a:p>
-                      <a:pPr indent="0" marL="0">
+                      <a:pPr marL="0" indent="0">
                         <a:buNone/>
                       </a:pPr>
                       <a:r>
@@ -17736,7 +17748,7 @@
                       </a:endParaRPr>
                     </a:p>
                   </a:txBody>
-                  <a:tcPr marL="91440" marR="91440" marT="45720" marB="45720" anchor="ctr">
+                  <a:tcPr anchor="ctr">
                     <a:lnL w="6350" cap="flat" cmpd="sng" algn="ctr">
                       <a:solidFill>
                         <a:srgbClr val="D6DCEA"/>
@@ -17780,7 +17792,7 @@
                     <a:bodyPr/>
                     <a:lstStyle/>
                     <a:p>
-                      <a:pPr indent="0" marL="0">
+                      <a:pPr marL="0" indent="0">
                         <a:buNone/>
                       </a:pPr>
                       <a:r>
@@ -17801,7 +17813,7 @@
                       </a:endParaRPr>
                     </a:p>
                   </a:txBody>
-                  <a:tcPr marL="91440" marR="91440" marT="45720" marB="45720" anchor="ctr">
+                  <a:tcPr anchor="ctr">
                     <a:lnL w="6350" cap="flat" cmpd="sng" algn="ctr">
                       <a:solidFill>
                         <a:srgbClr val="D6DCEA"/>
@@ -17845,7 +17857,7 @@
                     <a:bodyPr/>
                     <a:lstStyle/>
                     <a:p>
-                      <a:pPr indent="0" marL="0">
+                      <a:pPr marL="0" indent="0">
                         <a:buNone/>
                       </a:pPr>
                       <a:r>
@@ -17866,7 +17878,7 @@
                       </a:endParaRPr>
                     </a:p>
                   </a:txBody>
-                  <a:tcPr marL="91440" marR="91440" marT="45720" marB="45720" anchor="ctr">
+                  <a:tcPr anchor="ctr">
                     <a:lnL w="6350" cap="flat" cmpd="sng" algn="ctr">
                       <a:solidFill>
                         <a:srgbClr val="D6DCEA"/>
@@ -17905,6 +17917,11 @@
                     </a:lnB>
                   </a:tcPr>
                 </a:tc>
+                <a:extLst>
+                  <a:ext uri="{0D108BD9-81ED-4DB2-BD59-A6C34878D82A}">
+                    <a16:rowId xmlns:a16="http://schemas.microsoft.com/office/drawing/2014/main" val="10008"/>
+                  </a:ext>
+                </a:extLst>
               </a:tr>
               <a:tr h="384048">
                 <a:tc>
@@ -17912,7 +17929,7 @@
                     <a:bodyPr/>
                     <a:lstStyle/>
                     <a:p>
-                      <a:pPr indent="0" marL="0">
+                      <a:pPr marL="0" indent="0">
                         <a:buNone/>
                       </a:pPr>
                       <a:r>
@@ -17933,7 +17950,7 @@
                       </a:endParaRPr>
                     </a:p>
                   </a:txBody>
-                  <a:tcPr marL="91440" marR="91440" marT="45720" marB="45720" anchor="ctr">
+                  <a:tcPr anchor="ctr">
                     <a:lnL w="6350" cap="flat" cmpd="sng" algn="ctr">
                       <a:solidFill>
                         <a:srgbClr val="D6DCEA"/>
@@ -17977,7 +17994,7 @@
                     <a:bodyPr/>
                     <a:lstStyle/>
                     <a:p>
-                      <a:pPr indent="0" marL="0">
+                      <a:pPr marL="0" indent="0">
                         <a:buNone/>
                       </a:pPr>
                       <a:r>
@@ -17998,7 +18015,7 @@
                       </a:endParaRPr>
                     </a:p>
                   </a:txBody>
-                  <a:tcPr marL="91440" marR="91440" marT="45720" marB="45720" anchor="ctr">
+                  <a:tcPr anchor="ctr">
                     <a:lnL w="6350" cap="flat" cmpd="sng" algn="ctr">
                       <a:solidFill>
                         <a:srgbClr val="D6DCEA"/>
@@ -18042,7 +18059,7 @@
                     <a:bodyPr/>
                     <a:lstStyle/>
                     <a:p>
-                      <a:pPr indent="0" marL="0">
+                      <a:pPr marL="0" indent="0">
                         <a:buNone/>
                       </a:pPr>
                       <a:r>
@@ -18063,7 +18080,7 @@
                       </a:endParaRPr>
                     </a:p>
                   </a:txBody>
-                  <a:tcPr marL="91440" marR="91440" marT="45720" marB="45720" anchor="ctr">
+                  <a:tcPr anchor="ctr">
                     <a:lnL w="6350" cap="flat" cmpd="sng" algn="ctr">
                       <a:solidFill>
                         <a:srgbClr val="D6DCEA"/>
@@ -18102,6 +18119,11 @@
                     </a:lnB>
                   </a:tcPr>
                 </a:tc>
+                <a:extLst>
+                  <a:ext uri="{0D108BD9-81ED-4DB2-BD59-A6C34878D82A}">
+                    <a16:rowId xmlns:a16="http://schemas.microsoft.com/office/drawing/2014/main" val="10009"/>
+                  </a:ext>
+                </a:extLst>
               </a:tr>
               <a:tr h="384048">
                 <a:tc>
@@ -18109,7 +18131,7 @@
                     <a:bodyPr/>
                     <a:lstStyle/>
                     <a:p>
-                      <a:pPr indent="0" marL="0">
+                      <a:pPr marL="0" indent="0">
                         <a:buNone/>
                       </a:pPr>
                       <a:r>
@@ -18130,7 +18152,7 @@
                       </a:endParaRPr>
                     </a:p>
                   </a:txBody>
-                  <a:tcPr marL="91440" marR="91440" marT="45720" marB="45720" anchor="ctr">
+                  <a:tcPr anchor="ctr">
                     <a:lnL w="6350" cap="flat" cmpd="sng" algn="ctr">
                       <a:solidFill>
                         <a:srgbClr val="D6DCEA"/>
@@ -18174,7 +18196,7 @@
                     <a:bodyPr/>
                     <a:lstStyle/>
                     <a:p>
-                      <a:pPr indent="0" marL="0">
+                      <a:pPr marL="0" indent="0">
                         <a:buNone/>
                       </a:pPr>
                       <a:r>
@@ -18195,7 +18217,7 @@
                       </a:endParaRPr>
                     </a:p>
                   </a:txBody>
-                  <a:tcPr marL="91440" marR="91440" marT="45720" marB="45720" anchor="ctr">
+                  <a:tcPr anchor="ctr">
                     <a:lnL w="6350" cap="flat" cmpd="sng" algn="ctr">
                       <a:solidFill>
                         <a:srgbClr val="D6DCEA"/>
@@ -18239,7 +18261,7 @@
                     <a:bodyPr/>
                     <a:lstStyle/>
                     <a:p>
-                      <a:pPr indent="0" marL="0">
+                      <a:pPr marL="0" indent="0">
                         <a:buNone/>
                       </a:pPr>
                       <a:r>
@@ -18260,7 +18282,7 @@
                       </a:endParaRPr>
                     </a:p>
                   </a:txBody>
-                  <a:tcPr marL="91440" marR="91440" marT="45720" marB="45720" anchor="ctr">
+                  <a:tcPr anchor="ctr">
                     <a:lnL w="6350" cap="flat" cmpd="sng" algn="ctr">
                       <a:solidFill>
                         <a:srgbClr val="D6DCEA"/>
@@ -18299,6 +18321,11 @@
                     </a:lnB>
                   </a:tcPr>
                 </a:tc>
+                <a:extLst>
+                  <a:ext uri="{0D108BD9-81ED-4DB2-BD59-A6C34878D82A}">
+                    <a16:rowId xmlns:a16="http://schemas.microsoft.com/office/drawing/2014/main" val="10010"/>
+                  </a:ext>
+                </a:extLst>
               </a:tr>
               <a:tr h="384048">
                 <a:tc>
@@ -18306,7 +18333,7 @@
                     <a:bodyPr/>
                     <a:lstStyle/>
                     <a:p>
-                      <a:pPr indent="0" marL="0">
+                      <a:pPr marL="0" indent="0">
                         <a:buNone/>
                       </a:pPr>
                       <a:r>
@@ -18327,7 +18354,7 @@
                       </a:endParaRPr>
                     </a:p>
                   </a:txBody>
-                  <a:tcPr marL="91440" marR="91440" marT="45720" marB="45720" anchor="ctr">
+                  <a:tcPr anchor="ctr">
                     <a:lnL w="6350" cap="flat" cmpd="sng" algn="ctr">
                       <a:solidFill>
                         <a:srgbClr val="D6DCEA"/>
@@ -18371,7 +18398,7 @@
                     <a:bodyPr/>
                     <a:lstStyle/>
                     <a:p>
-                      <a:pPr indent="0" marL="0">
+                      <a:pPr marL="0" indent="0">
                         <a:buNone/>
                       </a:pPr>
                       <a:r>
@@ -18392,7 +18419,7 @@
                       </a:endParaRPr>
                     </a:p>
                   </a:txBody>
-                  <a:tcPr marL="91440" marR="91440" marT="45720" marB="45720" anchor="ctr">
+                  <a:tcPr anchor="ctr">
                     <a:lnL w="6350" cap="flat" cmpd="sng" algn="ctr">
                       <a:solidFill>
                         <a:srgbClr val="D6DCEA"/>
@@ -18436,7 +18463,7 @@
                     <a:bodyPr/>
                     <a:lstStyle/>
                     <a:p>
-                      <a:pPr indent="0" marL="0">
+                      <a:pPr marL="0" indent="0">
                         <a:buNone/>
                       </a:pPr>
                       <a:r>
@@ -18457,7 +18484,7 @@
                       </a:endParaRPr>
                     </a:p>
                   </a:txBody>
-                  <a:tcPr marL="91440" marR="91440" marT="45720" marB="45720" anchor="ctr">
+                  <a:tcPr anchor="ctr">
                     <a:lnL w="6350" cap="flat" cmpd="sng" algn="ctr">
                       <a:solidFill>
                         <a:srgbClr val="D6DCEA"/>
@@ -18496,6 +18523,11 @@
                     </a:lnB>
                   </a:tcPr>
                 </a:tc>
+                <a:extLst>
+                  <a:ext uri="{0D108BD9-81ED-4DB2-BD59-A6C34878D82A}">
+                    <a16:rowId xmlns:a16="http://schemas.microsoft.com/office/drawing/2014/main" val="10011"/>
+                  </a:ext>
+                </a:extLst>
               </a:tr>
             </a:tbl>
           </a:graphicData>
@@ -18522,7 +18554,7 @@
           <a:bodyPr wrap="square" lIns="0" tIns="0" rIns="0" bIns="0" rtlCol="0" anchor="ctr"/>
           <a:lstStyle/>
           <a:p>
-            <a:pPr indent="0" marL="0">
+            <a:pPr marL="0" indent="0">
               <a:buNone/>
             </a:pPr>
             <a:r>
@@ -18556,6 +18588,7 @@
         <a:solidFill>
           <a:srgbClr val="F4F6FB"/>
         </a:solidFill>
+        <a:effectLst/>
       </p:bgPr>
     </p:bg>
     <p:spTree>
@@ -18593,7 +18626,7 @@
           <a:bodyPr wrap="square" lIns="0" tIns="0" rIns="0" bIns="0" rtlCol="0" anchor="ctr"/>
           <a:lstStyle/>
           <a:p>
-            <a:pPr indent="0" marL="0">
+            <a:pPr marL="0" indent="0">
               <a:buNone/>
             </a:pPr>
             <a:r>
@@ -18632,7 +18665,7 @@
           <a:bodyPr wrap="square" lIns="0" tIns="0" rIns="0" bIns="0" rtlCol="0" anchor="ctr"/>
           <a:lstStyle/>
           <a:p>
-            <a:pPr indent="0" marL="0">
+            <a:pPr marL="0" indent="0">
               <a:buNone/>
             </a:pPr>
             <a:r>
@@ -18671,7 +18704,7 @@
           <a:bodyPr wrap="square" lIns="0" tIns="0" rIns="0" bIns="0" rtlCol="0" anchor="ctr"/>
           <a:lstStyle/>
           <a:p>
-            <a:pPr algn="r" indent="0" marL="0">
+            <a:pPr marL="0" indent="0" algn="r">
               <a:buNone/>
             </a:pPr>
             <a:r>
@@ -18708,7 +18741,7 @@
           </a:solidFill>
           <a:ln/>
           <a:effectLst>
-            <a:outerShdw sx="100000" sy="100000" kx="0" ky="0" algn="bl" rotWithShape="0" blurRad="76200" dist="25400" dir="8100000">
+            <a:outerShdw blurRad="76200" dist="25400" dir="8100000" algn="bl" rotWithShape="0">
               <a:srgbClr val="000000">
                 <a:alpha val="10000"/>
               </a:srgbClr>
@@ -18757,7 +18790,7 @@
           <a:bodyPr wrap="square" lIns="0" tIns="0" rIns="0" bIns="0" rtlCol="0" anchor="ctr"/>
           <a:lstStyle/>
           <a:p>
-            <a:pPr indent="0" marL="0">
+            <a:pPr marL="0" indent="0">
               <a:buNone/>
             </a:pPr>
             <a:r>
@@ -18900,7 +18933,7 @@
           </a:solidFill>
           <a:ln/>
           <a:effectLst>
-            <a:outerShdw sx="100000" sy="100000" kx="0" ky="0" algn="bl" rotWithShape="0" blurRad="76200" dist="25400" dir="8100000">
+            <a:outerShdw blurRad="76200" dist="25400" dir="8100000" algn="bl" rotWithShape="0">
               <a:srgbClr val="000000">
                 <a:alpha val="10000"/>
               </a:srgbClr>
@@ -18949,7 +18982,7 @@
           <a:bodyPr wrap="square" lIns="0" tIns="0" rIns="0" bIns="0" rtlCol="0" anchor="ctr"/>
           <a:lstStyle/>
           <a:p>
-            <a:pPr indent="0" marL="0">
+            <a:pPr marL="0" indent="0">
               <a:buNone/>
             </a:pPr>
             <a:r>
@@ -19071,7 +19104,7 @@
           </a:solidFill>
           <a:ln/>
           <a:effectLst>
-            <a:outerShdw sx="100000" sy="100000" kx="0" ky="0" algn="bl" rotWithShape="0" blurRad="76200" dist="25400" dir="8100000">
+            <a:outerShdw blurRad="76200" dist="25400" dir="8100000" algn="bl" rotWithShape="0">
               <a:srgbClr val="000000">
                 <a:alpha val="10000"/>
               </a:srgbClr>
@@ -19120,7 +19153,7 @@
           <a:bodyPr wrap="square" lIns="0" tIns="0" rIns="0" bIns="0" rtlCol="0" anchor="ctr"/>
           <a:lstStyle/>
           <a:p>
-            <a:pPr indent="0" marL="0">
+            <a:pPr marL="0" indent="0">
               <a:buNone/>
             </a:pPr>
             <a:r>
@@ -19263,7 +19296,7 @@
           </a:solidFill>
           <a:ln/>
           <a:effectLst>
-            <a:outerShdw sx="100000" sy="100000" kx="0" ky="0" algn="bl" rotWithShape="0" blurRad="76200" dist="25400" dir="8100000">
+            <a:outerShdw blurRad="76200" dist="25400" dir="8100000" algn="bl" rotWithShape="0">
               <a:srgbClr val="000000">
                 <a:alpha val="10000"/>
               </a:srgbClr>
@@ -19312,7 +19345,7 @@
           <a:bodyPr wrap="square" lIns="0" tIns="0" rIns="0" bIns="0" rtlCol="0" anchor="ctr"/>
           <a:lstStyle/>
           <a:p>
-            <a:pPr indent="0" marL="0">
+            <a:pPr marL="0" indent="0">
               <a:buNone/>
             </a:pPr>
             <a:r>
@@ -19431,6 +19464,7 @@
         <a:solidFill>
           <a:srgbClr val="F4F6FB"/>
         </a:solidFill>
+        <a:effectLst/>
       </p:bgPr>
     </p:bg>
     <p:spTree>
@@ -19468,7 +19502,7 @@
           <a:bodyPr wrap="square" lIns="0" tIns="0" rIns="0" bIns="0" rtlCol="0" anchor="ctr"/>
           <a:lstStyle/>
           <a:p>
-            <a:pPr indent="0" marL="0">
+            <a:pPr marL="0" indent="0">
               <a:buNone/>
             </a:pPr>
             <a:r>
@@ -19507,7 +19541,7 @@
           <a:bodyPr wrap="square" lIns="0" tIns="0" rIns="0" bIns="0" rtlCol="0" anchor="ctr"/>
           <a:lstStyle/>
           <a:p>
-            <a:pPr indent="0" marL="0">
+            <a:pPr marL="0" indent="0">
               <a:buNone/>
             </a:pPr>
             <a:r>
@@ -19546,7 +19580,7 @@
           <a:bodyPr wrap="square" lIns="0" tIns="0" rIns="0" bIns="0" rtlCol="0" anchor="ctr"/>
           <a:lstStyle/>
           <a:p>
-            <a:pPr indent="0" marL="0">
+            <a:pPr marL="0" indent="0">
               <a:buNone/>
             </a:pPr>
             <a:r>
@@ -19585,7 +19619,7 @@
           <a:bodyPr wrap="square" lIns="0" tIns="0" rIns="0" bIns="0" rtlCol="0" anchor="ctr"/>
           <a:lstStyle/>
           <a:p>
-            <a:pPr algn="r" indent="0" marL="0">
+            <a:pPr marL="0" indent="0" algn="r">
               <a:buNone/>
             </a:pPr>
             <a:r>
@@ -19649,7 +19683,7 @@
           <a:bodyPr wrap="square" lIns="0" tIns="0" rIns="0" bIns="0" rtlCol="0" anchor="ctr"/>
           <a:lstStyle/>
           <a:p>
-            <a:pPr indent="0" marL="0">
+            <a:pPr marL="0" indent="0">
               <a:buNone/>
             </a:pPr>
             <a:r>
@@ -19713,7 +19747,7 @@
           <a:bodyPr wrap="square" lIns="38100" tIns="38100" rIns="38100" bIns="38100" rtlCol="0" anchor="ctr"/>
           <a:lstStyle/>
           <a:p>
-            <a:pPr algn="ctr" indent="0" marL="0">
+            <a:pPr marL="0" indent="0" algn="ctr">
               <a:buNone/>
             </a:pPr>
             <a:r>
@@ -19730,7 +19764,7 @@
             <a:endParaRPr lang="en-US" sz="1350" dirty="0"/>
           </a:p>
           <a:p>
-            <a:pPr algn="ctr" indent="0" marL="0">
+            <a:pPr marL="0" indent="0" algn="ctr">
               <a:buNone/>
             </a:pPr>
             <a:r>
@@ -19794,7 +19828,7 @@
           <a:bodyPr wrap="square" lIns="38100" tIns="38100" rIns="38100" bIns="38100" rtlCol="0" anchor="ctr"/>
           <a:lstStyle/>
           <a:p>
-            <a:pPr algn="ctr" indent="0" marL="0">
+            <a:pPr marL="0" indent="0" algn="ctr">
               <a:buNone/>
             </a:pPr>
             <a:r>
@@ -19811,7 +19845,7 @@
             <a:endParaRPr lang="en-US" sz="1350" dirty="0"/>
           </a:p>
           <a:p>
-            <a:pPr algn="ctr" indent="0" marL="0">
+            <a:pPr marL="0" indent="0" algn="ctr">
               <a:buNone/>
             </a:pPr>
             <a:r>
@@ -19875,7 +19909,7 @@
           <a:bodyPr wrap="square" lIns="38100" tIns="38100" rIns="38100" bIns="38100" rtlCol="0" anchor="ctr"/>
           <a:lstStyle/>
           <a:p>
-            <a:pPr algn="ctr" indent="0" marL="0">
+            <a:pPr marL="0" indent="0" algn="ctr">
               <a:buNone/>
             </a:pPr>
             <a:r>
@@ -19892,7 +19926,7 @@
             <a:endParaRPr lang="en-US" sz="1350" dirty="0"/>
           </a:p>
           <a:p>
-            <a:pPr algn="ctr" indent="0" marL="0">
+            <a:pPr marL="0" indent="0" algn="ctr">
               <a:buNone/>
             </a:pPr>
             <a:r>
@@ -19956,7 +19990,7 @@
           <a:bodyPr wrap="square" lIns="38100" tIns="38100" rIns="38100" bIns="38100" rtlCol="0" anchor="ctr"/>
           <a:lstStyle/>
           <a:p>
-            <a:pPr algn="ctr" indent="0" marL="0">
+            <a:pPr marL="0" indent="0" algn="ctr">
               <a:buNone/>
             </a:pPr>
             <a:r>
@@ -19973,7 +20007,7 @@
             <a:endParaRPr lang="en-US" sz="1350" dirty="0"/>
           </a:p>
           <a:p>
-            <a:pPr algn="ctr" indent="0" marL="0">
+            <a:pPr marL="0" indent="0" algn="ctr">
               <a:buNone/>
             </a:pPr>
             <a:r>
@@ -20036,7 +20070,7 @@
           <a:bodyPr wrap="square" lIns="0" tIns="0" rIns="0" bIns="0" rtlCol="0" anchor="ctr"/>
           <a:lstStyle/>
           <a:p>
-            <a:pPr indent="0" marL="0">
+            <a:pPr marL="0" indent="0">
               <a:buNone/>
             </a:pPr>
             <a:r>
@@ -20100,7 +20134,7 @@
           <a:bodyPr wrap="square" lIns="0" tIns="0" rIns="0" bIns="0" rtlCol="0" anchor="ctr"/>
           <a:lstStyle/>
           <a:p>
-            <a:pPr indent="0" marL="0">
+            <a:pPr marL="0" indent="0">
               <a:buNone/>
             </a:pPr>
             <a:r>
@@ -20164,7 +20198,7 @@
           <a:bodyPr wrap="square" lIns="38100" tIns="38100" rIns="38100" bIns="38100" rtlCol="0" anchor="ctr"/>
           <a:lstStyle/>
           <a:p>
-            <a:pPr algn="ctr" indent="0" marL="0">
+            <a:pPr marL="0" indent="0" algn="ctr">
               <a:buNone/>
             </a:pPr>
             <a:r>
@@ -20228,7 +20262,7 @@
           <a:bodyPr wrap="square" lIns="38100" tIns="38100" rIns="38100" bIns="38100" rtlCol="0" anchor="ctr"/>
           <a:lstStyle/>
           <a:p>
-            <a:pPr algn="ctr" indent="0" marL="0">
+            <a:pPr marL="0" indent="0" algn="ctr">
               <a:buNone/>
             </a:pPr>
             <a:r>
@@ -20245,7 +20279,7 @@
             <a:endParaRPr lang="en-US" sz="1350" dirty="0"/>
           </a:p>
           <a:p>
-            <a:pPr algn="ctr" indent="0" marL="0">
+            <a:pPr marL="0" indent="0" algn="ctr">
               <a:buNone/>
             </a:pPr>
             <a:r>
@@ -20309,7 +20343,7 @@
           <a:bodyPr wrap="square" lIns="38100" tIns="38100" rIns="38100" bIns="38100" rtlCol="0" anchor="ctr"/>
           <a:lstStyle/>
           <a:p>
-            <a:pPr algn="ctr" indent="0" marL="0">
+            <a:pPr marL="0" indent="0" algn="ctr">
               <a:buNone/>
             </a:pPr>
             <a:r>
@@ -20326,7 +20360,7 @@
             <a:endParaRPr lang="en-US" sz="1350" dirty="0"/>
           </a:p>
           <a:p>
-            <a:pPr algn="ctr" indent="0" marL="0">
+            <a:pPr marL="0" indent="0" algn="ctr">
               <a:buNone/>
             </a:pPr>
             <a:r>
@@ -20390,7 +20424,7 @@
           <a:bodyPr wrap="square" lIns="38100" tIns="38100" rIns="38100" bIns="38100" rtlCol="0" anchor="ctr"/>
           <a:lstStyle/>
           <a:p>
-            <a:pPr algn="ctr" indent="0" marL="0">
+            <a:pPr marL="0" indent="0" algn="ctr">
               <a:buNone/>
             </a:pPr>
             <a:r>
@@ -20407,7 +20441,7 @@
             <a:endParaRPr lang="en-US" sz="1350" dirty="0"/>
           </a:p>
           <a:p>
-            <a:pPr algn="ctr" indent="0" marL="0">
+            <a:pPr marL="0" indent="0" algn="ctr">
               <a:buNone/>
             </a:pPr>
             <a:r>
@@ -20471,7 +20505,7 @@
           <a:bodyPr wrap="square" lIns="38100" tIns="38100" rIns="38100" bIns="38100" rtlCol="0" anchor="ctr"/>
           <a:lstStyle/>
           <a:p>
-            <a:pPr algn="ctr" indent="0" marL="0">
+            <a:pPr marL="0" indent="0" algn="ctr">
               <a:buNone/>
             </a:pPr>
             <a:r>
@@ -20488,7 +20522,7 @@
             <a:endParaRPr lang="en-US" sz="1350" dirty="0"/>
           </a:p>
           <a:p>
-            <a:pPr algn="ctr" indent="0" marL="0">
+            <a:pPr marL="0" indent="0" algn="ctr">
               <a:buNone/>
             </a:pPr>
             <a:r>
@@ -20552,7 +20586,7 @@
           <a:bodyPr wrap="square" lIns="38100" tIns="38100" rIns="38100" bIns="38100" rtlCol="0" anchor="ctr"/>
           <a:lstStyle/>
           <a:p>
-            <a:pPr algn="ctr" indent="0" marL="0">
+            <a:pPr marL="0" indent="0" algn="ctr">
               <a:buNone/>
             </a:pPr>
             <a:r>
@@ -20569,7 +20603,7 @@
             <a:endParaRPr lang="en-US" sz="1350" dirty="0"/>
           </a:p>
           <a:p>
-            <a:pPr algn="ctr" indent="0" marL="0">
+            <a:pPr marL="0" indent="0" algn="ctr">
               <a:buNone/>
             </a:pPr>
             <a:r>
@@ -20633,7 +20667,7 @@
           <a:bodyPr wrap="square" lIns="38100" tIns="38100" rIns="38100" bIns="38100" rtlCol="0" anchor="ctr"/>
           <a:lstStyle/>
           <a:p>
-            <a:pPr algn="ctr" indent="0" marL="0">
+            <a:pPr marL="0" indent="0" algn="ctr">
               <a:buNone/>
             </a:pPr>
             <a:r>
@@ -20650,7 +20684,7 @@
             <a:endParaRPr lang="en-US" sz="1350" dirty="0"/>
           </a:p>
           <a:p>
-            <a:pPr algn="ctr" indent="0" marL="0">
+            <a:pPr marL="0" indent="0" algn="ctr">
               <a:buNone/>
             </a:pPr>
             <a:r>
@@ -20714,7 +20748,7 @@
           <a:bodyPr wrap="square" lIns="38100" tIns="38100" rIns="38100" bIns="38100" rtlCol="0" anchor="ctr"/>
           <a:lstStyle/>
           <a:p>
-            <a:pPr algn="ctr" indent="0" marL="0">
+            <a:pPr marL="0" indent="0" algn="ctr">
               <a:buNone/>
             </a:pPr>
             <a:r>
@@ -20731,7 +20765,7 @@
             <a:endParaRPr lang="en-US" sz="1350" dirty="0"/>
           </a:p>
           <a:p>
-            <a:pPr algn="ctr" indent="0" marL="0">
+            <a:pPr marL="0" indent="0" algn="ctr">
               <a:buNone/>
             </a:pPr>
             <a:r>
@@ -20819,7 +20853,7 @@
           <a:bodyPr wrap="square" lIns="0" tIns="0" rIns="0" bIns="0" rtlCol="0" anchor="ctr"/>
           <a:lstStyle/>
           <a:p>
-            <a:pPr indent="0" marL="0">
+            <a:pPr marL="0" indent="0">
               <a:buNone/>
             </a:pPr>
             <a:r>
@@ -20883,7 +20917,7 @@
           <a:bodyPr wrap="square" lIns="38100" tIns="38100" rIns="38100" bIns="38100" rtlCol="0" anchor="ctr"/>
           <a:lstStyle/>
           <a:p>
-            <a:pPr algn="ctr" indent="0" marL="0">
+            <a:pPr marL="0" indent="0" algn="ctr">
               <a:buNone/>
             </a:pPr>
             <a:r>
@@ -20900,7 +20934,7 @@
             <a:endParaRPr lang="en-US" sz="1350" dirty="0"/>
           </a:p>
           <a:p>
-            <a:pPr algn="ctr" indent="0" marL="0">
+            <a:pPr marL="0" indent="0" algn="ctr">
               <a:buNone/>
             </a:pPr>
             <a:r>
@@ -20964,7 +20998,7 @@
           <a:bodyPr wrap="square" lIns="38100" tIns="38100" rIns="38100" bIns="38100" rtlCol="0" anchor="ctr"/>
           <a:lstStyle/>
           <a:p>
-            <a:pPr algn="ctr" indent="0" marL="0">
+            <a:pPr marL="0" indent="0" algn="ctr">
               <a:buNone/>
             </a:pPr>
             <a:r>
@@ -20981,7 +21015,7 @@
             <a:endParaRPr lang="en-US" sz="1350" dirty="0"/>
           </a:p>
           <a:p>
-            <a:pPr algn="ctr" indent="0" marL="0">
+            <a:pPr marL="0" indent="0" algn="ctr">
               <a:buNone/>
             </a:pPr>
             <a:r>
@@ -21045,7 +21079,7 @@
           <a:bodyPr wrap="square" lIns="38100" tIns="38100" rIns="38100" bIns="38100" rtlCol="0" anchor="ctr"/>
           <a:lstStyle/>
           <a:p>
-            <a:pPr algn="ctr" indent="0" marL="0">
+            <a:pPr marL="0" indent="0" algn="ctr">
               <a:buNone/>
             </a:pPr>
             <a:r>
@@ -21062,7 +21096,7 @@
             <a:endParaRPr lang="en-US" sz="1350" dirty="0"/>
           </a:p>
           <a:p>
-            <a:pPr algn="ctr" indent="0" marL="0">
+            <a:pPr marL="0" indent="0" algn="ctr">
               <a:buNone/>
             </a:pPr>
             <a:r>
@@ -21126,7 +21160,7 @@
           <a:bodyPr wrap="square" lIns="38100" tIns="38100" rIns="38100" bIns="38100" rtlCol="0" anchor="ctr"/>
           <a:lstStyle/>
           <a:p>
-            <a:pPr algn="ctr" indent="0" marL="0">
+            <a:pPr marL="0" indent="0" algn="ctr">
               <a:buNone/>
             </a:pPr>
             <a:r>
@@ -21143,7 +21177,7 @@
             <a:endParaRPr lang="en-US" sz="1350" dirty="0"/>
           </a:p>
           <a:p>
-            <a:pPr algn="ctr" indent="0" marL="0">
+            <a:pPr marL="0" indent="0" algn="ctr">
               <a:buNone/>
             </a:pPr>
             <a:r>
@@ -21207,7 +21241,7 @@
           <a:bodyPr wrap="square" lIns="0" tIns="0" rIns="0" bIns="0" rtlCol="0" anchor="ctr"/>
           <a:lstStyle/>
           <a:p>
-            <a:pPr indent="0" marL="0">
+            <a:pPr marL="0" indent="0">
               <a:buNone/>
             </a:pPr>
             <a:r>
@@ -21241,6 +21275,7 @@
         <a:solidFill>
           <a:srgbClr val="F4F6FB"/>
         </a:solidFill>
+        <a:effectLst/>
       </p:bgPr>
     </p:bg>
     <p:spTree>
@@ -21278,7 +21313,7 @@
           <a:bodyPr wrap="square" lIns="0" tIns="0" rIns="0" bIns="0" rtlCol="0" anchor="ctr"/>
           <a:lstStyle/>
           <a:p>
-            <a:pPr indent="0" marL="0">
+            <a:pPr marL="0" indent="0">
               <a:buNone/>
             </a:pPr>
             <a:r>
@@ -21317,7 +21352,7 @@
           <a:bodyPr wrap="square" lIns="0" tIns="0" rIns="0" bIns="0" rtlCol="0" anchor="ctr"/>
           <a:lstStyle/>
           <a:p>
-            <a:pPr indent="0" marL="0">
+            <a:pPr marL="0" indent="0">
               <a:buNone/>
             </a:pPr>
             <a:r>
@@ -21356,7 +21391,7 @@
           <a:bodyPr wrap="square" lIns="0" tIns="0" rIns="0" bIns="0" rtlCol="0" anchor="ctr"/>
           <a:lstStyle/>
           <a:p>
-            <a:pPr indent="0" marL="0">
+            <a:pPr marL="0" indent="0">
               <a:buNone/>
             </a:pPr>
             <a:r>
@@ -21395,7 +21430,7 @@
           <a:bodyPr wrap="square" lIns="0" tIns="0" rIns="0" bIns="0" rtlCol="0" anchor="ctr"/>
           <a:lstStyle/>
           <a:p>
-            <a:pPr algn="r" indent="0" marL="0">
+            <a:pPr marL="0" indent="0" algn="r">
               <a:buNone/>
             </a:pPr>
             <a:r>
@@ -21432,7 +21467,7 @@
           </a:solidFill>
           <a:ln/>
           <a:effectLst>
-            <a:outerShdw sx="100000" sy="100000" kx="0" ky="0" algn="bl" rotWithShape="0" blurRad="76200" dist="25400" dir="8100000">
+            <a:outerShdw blurRad="76200" dist="25400" dir="8100000" algn="bl" rotWithShape="0">
               <a:srgbClr val="000000">
                 <a:alpha val="10000"/>
               </a:srgbClr>
@@ -21442,14 +21477,14 @@
       </p:sp>
       <p:pic>
         <p:nvPicPr>
-          <p:cNvPr id="7" name="Image 0" descr="C:\Users\Asus\projects\DreamOS\docs\diagrams\02_module_design.png">    </p:cNvPr>
+          <p:cNvPr id="7" name="Image 0" descr="C:\Users\Asus\projects\DreamOS\docs\diagrams\02_module_design.png"/>
           <p:cNvPicPr>
             <a:picLocks noChangeAspect="1"/>
           </p:cNvPicPr>
           <p:nvPr/>
         </p:nvPicPr>
         <p:blipFill>
-          <a:blip r:embed="rId1"/>
+          <a:blip r:embed="rId3"/>
           <a:stretch>
             <a:fillRect/>
           </a:stretch>
@@ -21480,16 +21515,34 @@
         </p:nvGraphicFramePr>
         <p:xfrm>
           <a:off x="548640" y="3246120"/>
-          <a:ext cx="11109960" cy="914400"/>
+          <a:ext cx="11109960" cy="2996184"/>
         </p:xfrm>
         <a:graphic>
           <a:graphicData uri="http://schemas.openxmlformats.org/drawingml/2006/table">
             <a:tbl>
               <a:tblPr/>
               <a:tblGrid>
-                <a:gridCol w="2743200"/>
-                <a:gridCol w="7086600"/>
-                <a:gridCol w="1280160"/>
+                <a:gridCol w="2743200">
+                  <a:extLst>
+                    <a:ext uri="{9D8B030D-6E8A-4147-A177-3AD203B41FA5}">
+                      <a16:colId xmlns:a16="http://schemas.microsoft.com/office/drawing/2014/main" val="20000"/>
+                    </a:ext>
+                  </a:extLst>
+                </a:gridCol>
+                <a:gridCol w="7086600">
+                  <a:extLst>
+                    <a:ext uri="{9D8B030D-6E8A-4147-A177-3AD203B41FA5}">
+                      <a16:colId xmlns:a16="http://schemas.microsoft.com/office/drawing/2014/main" val="20001"/>
+                    </a:ext>
+                  </a:extLst>
+                </a:gridCol>
+                <a:gridCol w="1280160">
+                  <a:extLst>
+                    <a:ext uri="{9D8B030D-6E8A-4147-A177-3AD203B41FA5}">
+                      <a16:colId xmlns:a16="http://schemas.microsoft.com/office/drawing/2014/main" val="20002"/>
+                    </a:ext>
+                  </a:extLst>
+                </a:gridCol>
               </a:tblGrid>
               <a:tr h="420624">
                 <a:tc>
@@ -21497,7 +21550,7 @@
                     <a:bodyPr/>
                     <a:lstStyle/>
                     <a:p>
-                      <a:pPr indent="0" marL="0">
+                      <a:pPr marL="0" indent="0">
                         <a:buNone/>
                       </a:pPr>
                       <a:r>
@@ -21518,7 +21571,7 @@
                       </a:endParaRPr>
                     </a:p>
                   </a:txBody>
-                  <a:tcPr marL="91440" marR="91440" marT="45720" marB="45720" anchor="ctr">
+                  <a:tcPr anchor="ctr">
                     <a:lnL w="6350" cap="flat" cmpd="sng" algn="ctr">
                       <a:solidFill>
                         <a:srgbClr val="D6DCEA"/>
@@ -21565,7 +21618,7 @@
                     <a:bodyPr/>
                     <a:lstStyle/>
                     <a:p>
-                      <a:pPr indent="0" marL="0">
+                      <a:pPr marL="0" indent="0">
                         <a:buNone/>
                       </a:pPr>
                       <a:r>
@@ -21586,7 +21639,7 @@
                       </a:endParaRPr>
                     </a:p>
                   </a:txBody>
-                  <a:tcPr marL="91440" marR="91440" marT="45720" marB="45720" anchor="ctr">
+                  <a:tcPr anchor="ctr">
                     <a:lnL w="6350" cap="flat" cmpd="sng" algn="ctr">
                       <a:solidFill>
                         <a:srgbClr val="D6DCEA"/>
@@ -21633,7 +21686,7 @@
                     <a:bodyPr/>
                     <a:lstStyle/>
                     <a:p>
-                      <a:pPr indent="0" marL="0">
+                      <a:pPr marL="0" indent="0">
                         <a:buNone/>
                       </a:pPr>
                       <a:r>
@@ -21654,7 +21707,7 @@
                       </a:endParaRPr>
                     </a:p>
                   </a:txBody>
-                  <a:tcPr marL="91440" marR="91440" marT="45720" marB="45720" anchor="ctr">
+                  <a:tcPr anchor="ctr">
                     <a:lnL w="6350" cap="flat" cmpd="sng" algn="ctr">
                       <a:solidFill>
                         <a:srgbClr val="D6DCEA"/>
@@ -21696,6 +21749,11 @@
                     </a:solidFill>
                   </a:tcPr>
                 </a:tc>
+                <a:extLst>
+                  <a:ext uri="{0D108BD9-81ED-4DB2-BD59-A6C34878D82A}">
+                    <a16:rowId xmlns:a16="http://schemas.microsoft.com/office/drawing/2014/main" val="10000"/>
+                  </a:ext>
+                </a:extLst>
               </a:tr>
               <a:tr h="420624">
                 <a:tc>
@@ -21703,7 +21761,7 @@
                     <a:bodyPr/>
                     <a:lstStyle/>
                     <a:p>
-                      <a:pPr indent="0" marL="0">
+                      <a:pPr marL="0" indent="0">
                         <a:buNone/>
                       </a:pPr>
                       <a:r>
@@ -21724,7 +21782,7 @@
                       </a:endParaRPr>
                     </a:p>
                   </a:txBody>
-                  <a:tcPr marL="91440" marR="91440" marT="45720" marB="45720" anchor="ctr">
+                  <a:tcPr anchor="ctr">
                     <a:lnL w="6350" cap="flat" cmpd="sng" algn="ctr">
                       <a:solidFill>
                         <a:srgbClr val="D6DCEA"/>
@@ -21768,7 +21826,7 @@
                     <a:bodyPr/>
                     <a:lstStyle/>
                     <a:p>
-                      <a:pPr indent="0" marL="0">
+                      <a:pPr marL="0" indent="0">
                         <a:buNone/>
                       </a:pPr>
                       <a:r>
@@ -21789,7 +21847,7 @@
                       </a:endParaRPr>
                     </a:p>
                   </a:txBody>
-                  <a:tcPr marL="91440" marR="91440" marT="45720" marB="45720" anchor="ctr">
+                  <a:tcPr anchor="ctr">
                     <a:lnL w="6350" cap="flat" cmpd="sng" algn="ctr">
                       <a:solidFill>
                         <a:srgbClr val="D6DCEA"/>
@@ -21833,7 +21891,7 @@
                     <a:bodyPr/>
                     <a:lstStyle/>
                     <a:p>
-                      <a:pPr indent="0" marL="0">
+                      <a:pPr marL="0" indent="0">
                         <a:buNone/>
                       </a:pPr>
                       <a:r>
@@ -21854,7 +21912,7 @@
                       </a:endParaRPr>
                     </a:p>
                   </a:txBody>
-                  <a:tcPr marL="91440" marR="91440" marT="45720" marB="45720" anchor="ctr">
+                  <a:tcPr anchor="ctr">
                     <a:lnL w="6350" cap="flat" cmpd="sng" algn="ctr">
                       <a:solidFill>
                         <a:srgbClr val="D6DCEA"/>
@@ -21893,6 +21951,11 @@
                     </a:lnB>
                   </a:tcPr>
                 </a:tc>
+                <a:extLst>
+                  <a:ext uri="{0D108BD9-81ED-4DB2-BD59-A6C34878D82A}">
+                    <a16:rowId xmlns:a16="http://schemas.microsoft.com/office/drawing/2014/main" val="10001"/>
+                  </a:ext>
+                </a:extLst>
               </a:tr>
               <a:tr h="420624">
                 <a:tc>
@@ -21900,7 +21963,7 @@
                     <a:bodyPr/>
                     <a:lstStyle/>
                     <a:p>
-                      <a:pPr indent="0" marL="0">
+                      <a:pPr marL="0" indent="0">
                         <a:buNone/>
                       </a:pPr>
                       <a:r>
@@ -21921,7 +21984,7 @@
                       </a:endParaRPr>
                     </a:p>
                   </a:txBody>
-                  <a:tcPr marL="91440" marR="91440" marT="45720" marB="45720" anchor="ctr">
+                  <a:tcPr anchor="ctr">
                     <a:lnL w="6350" cap="flat" cmpd="sng" algn="ctr">
                       <a:solidFill>
                         <a:srgbClr val="D6DCEA"/>
@@ -21965,7 +22028,7 @@
                     <a:bodyPr/>
                     <a:lstStyle/>
                     <a:p>
-                      <a:pPr indent="0" marL="0">
+                      <a:pPr marL="0" indent="0">
                         <a:buNone/>
                       </a:pPr>
                       <a:r>
@@ -21986,7 +22049,7 @@
                       </a:endParaRPr>
                     </a:p>
                   </a:txBody>
-                  <a:tcPr marL="91440" marR="91440" marT="45720" marB="45720" anchor="ctr">
+                  <a:tcPr anchor="ctr">
                     <a:lnL w="6350" cap="flat" cmpd="sng" algn="ctr">
                       <a:solidFill>
                         <a:srgbClr val="D6DCEA"/>
@@ -22030,7 +22093,7 @@
                     <a:bodyPr/>
                     <a:lstStyle/>
                     <a:p>
-                      <a:pPr indent="0" marL="0">
+                      <a:pPr marL="0" indent="0">
                         <a:buNone/>
                       </a:pPr>
                       <a:r>
@@ -22051,7 +22114,7 @@
                       </a:endParaRPr>
                     </a:p>
                   </a:txBody>
-                  <a:tcPr marL="91440" marR="91440" marT="45720" marB="45720" anchor="ctr">
+                  <a:tcPr anchor="ctr">
                     <a:lnL w="6350" cap="flat" cmpd="sng" algn="ctr">
                       <a:solidFill>
                         <a:srgbClr val="D6DCEA"/>
@@ -22090,6 +22153,11 @@
                     </a:lnB>
                   </a:tcPr>
                 </a:tc>
+                <a:extLst>
+                  <a:ext uri="{0D108BD9-81ED-4DB2-BD59-A6C34878D82A}">
+                    <a16:rowId xmlns:a16="http://schemas.microsoft.com/office/drawing/2014/main" val="10002"/>
+                  </a:ext>
+                </a:extLst>
               </a:tr>
               <a:tr h="420624">
                 <a:tc>
@@ -22097,7 +22165,7 @@
                     <a:bodyPr/>
                     <a:lstStyle/>
                     <a:p>
-                      <a:pPr indent="0" marL="0">
+                      <a:pPr marL="0" indent="0">
                         <a:buNone/>
                       </a:pPr>
                       <a:r>
@@ -22118,7 +22186,7 @@
                       </a:endParaRPr>
                     </a:p>
                   </a:txBody>
-                  <a:tcPr marL="91440" marR="91440" marT="45720" marB="45720" anchor="ctr">
+                  <a:tcPr anchor="ctr">
                     <a:lnL w="6350" cap="flat" cmpd="sng" algn="ctr">
                       <a:solidFill>
                         <a:srgbClr val="D6DCEA"/>
@@ -22162,7 +22230,7 @@
                     <a:bodyPr/>
                     <a:lstStyle/>
                     <a:p>
-                      <a:pPr indent="0" marL="0">
+                      <a:pPr marL="0" indent="0">
                         <a:buNone/>
                       </a:pPr>
                       <a:r>
@@ -22183,7 +22251,7 @@
                       </a:endParaRPr>
                     </a:p>
                   </a:txBody>
-                  <a:tcPr marL="91440" marR="91440" marT="45720" marB="45720" anchor="ctr">
+                  <a:tcPr anchor="ctr">
                     <a:lnL w="6350" cap="flat" cmpd="sng" algn="ctr">
                       <a:solidFill>
                         <a:srgbClr val="D6DCEA"/>
@@ -22227,7 +22295,7 @@
                     <a:bodyPr/>
                     <a:lstStyle/>
                     <a:p>
-                      <a:pPr indent="0" marL="0">
+                      <a:pPr marL="0" indent="0">
                         <a:buNone/>
                       </a:pPr>
                       <a:r>
@@ -22248,7 +22316,7 @@
                       </a:endParaRPr>
                     </a:p>
                   </a:txBody>
-                  <a:tcPr marL="91440" marR="91440" marT="45720" marB="45720" anchor="ctr">
+                  <a:tcPr anchor="ctr">
                     <a:lnL w="6350" cap="flat" cmpd="sng" algn="ctr">
                       <a:solidFill>
                         <a:srgbClr val="D6DCEA"/>
@@ -22287,6 +22355,11 @@
                     </a:lnB>
                   </a:tcPr>
                 </a:tc>
+                <a:extLst>
+                  <a:ext uri="{0D108BD9-81ED-4DB2-BD59-A6C34878D82A}">
+                    <a16:rowId xmlns:a16="http://schemas.microsoft.com/office/drawing/2014/main" val="10003"/>
+                  </a:ext>
+                </a:extLst>
               </a:tr>
               <a:tr h="420624">
                 <a:tc>
@@ -22294,7 +22367,7 @@
                     <a:bodyPr/>
                     <a:lstStyle/>
                     <a:p>
-                      <a:pPr indent="0" marL="0">
+                      <a:pPr marL="0" indent="0">
                         <a:buNone/>
                       </a:pPr>
                       <a:r>
@@ -22315,7 +22388,7 @@
                       </a:endParaRPr>
                     </a:p>
                   </a:txBody>
-                  <a:tcPr marL="91440" marR="91440" marT="45720" marB="45720" anchor="ctr">
+                  <a:tcPr anchor="ctr">
                     <a:lnL w="6350" cap="flat" cmpd="sng" algn="ctr">
                       <a:solidFill>
                         <a:srgbClr val="D6DCEA"/>
@@ -22359,7 +22432,7 @@
                     <a:bodyPr/>
                     <a:lstStyle/>
                     <a:p>
-                      <a:pPr indent="0" marL="0">
+                      <a:pPr marL="0" indent="0">
                         <a:buNone/>
                       </a:pPr>
                       <a:r>
@@ -22380,7 +22453,7 @@
                       </a:endParaRPr>
                     </a:p>
                   </a:txBody>
-                  <a:tcPr marL="91440" marR="91440" marT="45720" marB="45720" anchor="ctr">
+                  <a:tcPr anchor="ctr">
                     <a:lnL w="6350" cap="flat" cmpd="sng" algn="ctr">
                       <a:solidFill>
                         <a:srgbClr val="D6DCEA"/>
@@ -22424,7 +22497,7 @@
                     <a:bodyPr/>
                     <a:lstStyle/>
                     <a:p>
-                      <a:pPr indent="0" marL="0">
+                      <a:pPr marL="0" indent="0">
                         <a:buNone/>
                       </a:pPr>
                       <a:r>
@@ -22445,7 +22518,7 @@
                       </a:endParaRPr>
                     </a:p>
                   </a:txBody>
-                  <a:tcPr marL="91440" marR="91440" marT="45720" marB="45720" anchor="ctr">
+                  <a:tcPr anchor="ctr">
                     <a:lnL w="6350" cap="flat" cmpd="sng" algn="ctr">
                       <a:solidFill>
                         <a:srgbClr val="D6DCEA"/>
@@ -22484,6 +22557,11 @@
                     </a:lnB>
                   </a:tcPr>
                 </a:tc>
+                <a:extLst>
+                  <a:ext uri="{0D108BD9-81ED-4DB2-BD59-A6C34878D82A}">
+                    <a16:rowId xmlns:a16="http://schemas.microsoft.com/office/drawing/2014/main" val="10004"/>
+                  </a:ext>
+                </a:extLst>
               </a:tr>
               <a:tr h="420624">
                 <a:tc>
@@ -22491,7 +22569,7 @@
                     <a:bodyPr/>
                     <a:lstStyle/>
                     <a:p>
-                      <a:pPr indent="0" marL="0">
+                      <a:pPr marL="0" indent="0">
                         <a:buNone/>
                       </a:pPr>
                       <a:r>
@@ -22512,7 +22590,7 @@
                       </a:endParaRPr>
                     </a:p>
                   </a:txBody>
-                  <a:tcPr marL="91440" marR="91440" marT="45720" marB="45720" anchor="ctr">
+                  <a:tcPr anchor="ctr">
                     <a:lnL w="6350" cap="flat" cmpd="sng" algn="ctr">
                       <a:solidFill>
                         <a:srgbClr val="D6DCEA"/>
@@ -22556,7 +22634,7 @@
                     <a:bodyPr/>
                     <a:lstStyle/>
                     <a:p>
-                      <a:pPr indent="0" marL="0">
+                      <a:pPr marL="0" indent="0">
                         <a:buNone/>
                       </a:pPr>
                       <a:r>
@@ -22577,7 +22655,7 @@
                       </a:endParaRPr>
                     </a:p>
                   </a:txBody>
-                  <a:tcPr marL="91440" marR="91440" marT="45720" marB="45720" anchor="ctr">
+                  <a:tcPr anchor="ctr">
                     <a:lnL w="6350" cap="flat" cmpd="sng" algn="ctr">
                       <a:solidFill>
                         <a:srgbClr val="D6DCEA"/>
@@ -22621,7 +22699,7 @@
                     <a:bodyPr/>
                     <a:lstStyle/>
                     <a:p>
-                      <a:pPr indent="0" marL="0">
+                      <a:pPr marL="0" indent="0">
                         <a:buNone/>
                       </a:pPr>
                       <a:r>
@@ -22642,7 +22720,7 @@
                       </a:endParaRPr>
                     </a:p>
                   </a:txBody>
-                  <a:tcPr marL="91440" marR="91440" marT="45720" marB="45720" anchor="ctr">
+                  <a:tcPr anchor="ctr">
                     <a:lnL w="6350" cap="flat" cmpd="sng" algn="ctr">
                       <a:solidFill>
                         <a:srgbClr val="D6DCEA"/>
@@ -22681,6 +22759,11 @@
                     </a:lnB>
                   </a:tcPr>
                 </a:tc>
+                <a:extLst>
+                  <a:ext uri="{0D108BD9-81ED-4DB2-BD59-A6C34878D82A}">
+                    <a16:rowId xmlns:a16="http://schemas.microsoft.com/office/drawing/2014/main" val="10005"/>
+                  </a:ext>
+                </a:extLst>
               </a:tr>
               <a:tr h="420624">
                 <a:tc>
@@ -22688,7 +22771,7 @@
                     <a:bodyPr/>
                     <a:lstStyle/>
                     <a:p>
-                      <a:pPr indent="0" marL="0">
+                      <a:pPr marL="0" indent="0">
                         <a:buNone/>
                       </a:pPr>
                       <a:r>
@@ -22709,7 +22792,7 @@
                       </a:endParaRPr>
                     </a:p>
                   </a:txBody>
-                  <a:tcPr marL="91440" marR="91440" marT="45720" marB="45720" anchor="ctr">
+                  <a:tcPr anchor="ctr">
                     <a:lnL w="6350" cap="flat" cmpd="sng" algn="ctr">
                       <a:solidFill>
                         <a:srgbClr val="D6DCEA"/>
@@ -22753,7 +22836,7 @@
                     <a:bodyPr/>
                     <a:lstStyle/>
                     <a:p>
-                      <a:pPr indent="0" marL="0">
+                      <a:pPr marL="0" indent="0">
                         <a:buNone/>
                       </a:pPr>
                       <a:r>
@@ -22774,7 +22857,7 @@
                       </a:endParaRPr>
                     </a:p>
                   </a:txBody>
-                  <a:tcPr marL="91440" marR="91440" marT="45720" marB="45720" anchor="ctr">
+                  <a:tcPr anchor="ctr">
                     <a:lnL w="6350" cap="flat" cmpd="sng" algn="ctr">
                       <a:solidFill>
                         <a:srgbClr val="D6DCEA"/>
@@ -22818,7 +22901,7 @@
                     <a:bodyPr/>
                     <a:lstStyle/>
                     <a:p>
-                      <a:pPr indent="0" marL="0">
+                      <a:pPr marL="0" indent="0">
                         <a:buNone/>
                       </a:pPr>
                       <a:r>
@@ -22839,7 +22922,7 @@
                       </a:endParaRPr>
                     </a:p>
                   </a:txBody>
-                  <a:tcPr marL="91440" marR="91440" marT="45720" marB="45720" anchor="ctr">
+                  <a:tcPr anchor="ctr">
                     <a:lnL w="6350" cap="flat" cmpd="sng" algn="ctr">
                       <a:solidFill>
                         <a:srgbClr val="D6DCEA"/>
@@ -22878,6 +22961,11 @@
                     </a:lnB>
                   </a:tcPr>
                 </a:tc>
+                <a:extLst>
+                  <a:ext uri="{0D108BD9-81ED-4DB2-BD59-A6C34878D82A}">
+                    <a16:rowId xmlns:a16="http://schemas.microsoft.com/office/drawing/2014/main" val="10006"/>
+                  </a:ext>
+                </a:extLst>
               </a:tr>
             </a:tbl>
           </a:graphicData>
@@ -22899,6 +22987,7 @@
         <a:solidFill>
           <a:srgbClr val="F4F6FB"/>
         </a:solidFill>
+        <a:effectLst/>
       </p:bgPr>
     </p:bg>
     <p:spTree>
@@ -22936,7 +23025,7 @@
           <a:bodyPr wrap="square" lIns="0" tIns="0" rIns="0" bIns="0" rtlCol="0" anchor="ctr"/>
           <a:lstStyle/>
           <a:p>
-            <a:pPr indent="0" marL="0">
+            <a:pPr marL="0" indent="0">
               <a:buNone/>
             </a:pPr>
             <a:r>
@@ -22975,7 +23064,7 @@
           <a:bodyPr wrap="square" lIns="0" tIns="0" rIns="0" bIns="0" rtlCol="0" anchor="ctr"/>
           <a:lstStyle/>
           <a:p>
-            <a:pPr indent="0" marL="0">
+            <a:pPr marL="0" indent="0">
               <a:buNone/>
             </a:pPr>
             <a:r>
@@ -23014,7 +23103,7 @@
           <a:bodyPr wrap="square" lIns="0" tIns="0" rIns="0" bIns="0" rtlCol="0" anchor="ctr"/>
           <a:lstStyle/>
           <a:p>
-            <a:pPr indent="0" marL="0">
+            <a:pPr marL="0" indent="0">
               <a:buNone/>
             </a:pPr>
             <a:r>
@@ -23053,7 +23142,7 @@
           <a:bodyPr wrap="square" lIns="0" tIns="0" rIns="0" bIns="0" rtlCol="0" anchor="ctr"/>
           <a:lstStyle/>
           <a:p>
-            <a:pPr algn="r" indent="0" marL="0">
+            <a:pPr marL="0" indent="0" algn="r">
               <a:buNone/>
             </a:pPr>
             <a:r>
@@ -23090,7 +23179,7 @@
           </a:solidFill>
           <a:ln/>
           <a:effectLst>
-            <a:outerShdw sx="100000" sy="100000" kx="0" ky="0" algn="bl" rotWithShape="0" blurRad="76200" dist="25400" dir="8100000">
+            <a:outerShdw blurRad="76200" dist="25400" dir="8100000" algn="bl" rotWithShape="0">
               <a:srgbClr val="000000">
                 <a:alpha val="10000"/>
               </a:srgbClr>
@@ -23100,14 +23189,14 @@
       </p:sp>
       <p:pic>
         <p:nvPicPr>
-          <p:cNvPr id="7" name="Image 0" descr="C:\Users\Asus\projects\DreamOS\docs\diagrams\03_dfd_context.png">    </p:cNvPr>
+          <p:cNvPr id="7" name="Image 0" descr="C:\Users\Asus\projects\DreamOS\docs\diagrams\03_dfd_context.png"/>
           <p:cNvPicPr>
             <a:picLocks noChangeAspect="1"/>
           </p:cNvPicPr>
           <p:nvPr/>
         </p:nvPicPr>
         <p:blipFill>
-          <a:blip r:embed="rId1"/>
+          <a:blip r:embed="rId3"/>
           <a:stretch>
             <a:fillRect/>
           </a:stretch>
@@ -23423,4 +23512,319 @@
     </a:ext>
   </a:extLst>
 </a:theme>
+</file>
+
+<file path=ppt/theme/theme2.xml><?xml version="1.0" encoding="utf-8"?>
+<a:theme xmlns:a="http://schemas.openxmlformats.org/drawingml/2006/main" name="Office Theme">
+  <a:themeElements>
+    <a:clrScheme name="Office">
+      <a:dk1>
+        <a:sysClr val="windowText" lastClr="000000"/>
+      </a:dk1>
+      <a:lt1>
+        <a:sysClr val="window" lastClr="FFFFFF"/>
+      </a:lt1>
+      <a:dk2>
+        <a:srgbClr val="0E2841"/>
+      </a:dk2>
+      <a:lt2>
+        <a:srgbClr val="E8E8E8"/>
+      </a:lt2>
+      <a:accent1>
+        <a:srgbClr val="156082"/>
+      </a:accent1>
+      <a:accent2>
+        <a:srgbClr val="E97132"/>
+      </a:accent2>
+      <a:accent3>
+        <a:srgbClr val="196B24"/>
+      </a:accent3>
+      <a:accent4>
+        <a:srgbClr val="0F9ED5"/>
+      </a:accent4>
+      <a:accent5>
+        <a:srgbClr val="A02B93"/>
+      </a:accent5>
+      <a:accent6>
+        <a:srgbClr val="4EA72E"/>
+      </a:accent6>
+      <a:hlink>
+        <a:srgbClr val="467886"/>
+      </a:hlink>
+      <a:folHlink>
+        <a:srgbClr val="96607D"/>
+      </a:folHlink>
+    </a:clrScheme>
+    <a:fontScheme name="Office">
+      <a:majorFont>
+        <a:latin typeface="Aptos Display" panose="02110004020202020204"/>
+        <a:ea typeface=""/>
+        <a:cs typeface=""/>
+        <a:font script="Jpan" typeface="游ゴシック Light"/>
+        <a:font script="Hang" typeface="맑은 고딕"/>
+        <a:font script="Hans" typeface="等线 Light"/>
+        <a:font script="Hant" typeface="新細明體"/>
+        <a:font script="Arab" typeface="Times New Roman"/>
+        <a:font script="Hebr" typeface="Times New Roman"/>
+        <a:font script="Thai" typeface="Angsana New"/>
+        <a:font script="Ethi" typeface="Nyala"/>
+        <a:font script="Beng" typeface="Vrinda"/>
+        <a:font script="Gujr" typeface="Shruti"/>
+        <a:font script="Khmr" typeface="MoolBoran"/>
+        <a:font script="Knda" typeface="Tunga"/>
+        <a:font script="Guru" typeface="Raavi"/>
+        <a:font script="Cans" typeface="Euphemia"/>
+        <a:font script="Cher" typeface="Plantagenet Cherokee"/>
+        <a:font script="Yiii" typeface="Microsoft Yi Baiti"/>
+        <a:font script="Tibt" typeface="Microsoft Himalaya"/>
+        <a:font script="Thaa" typeface="MV Boli"/>
+        <a:font script="Deva" typeface="Mangal"/>
+        <a:font script="Telu" typeface="Gautami"/>
+        <a:font script="Taml" typeface="Latha"/>
+        <a:font script="Syrc" typeface="Estrangelo Edessa"/>
+        <a:font script="Orya" typeface="Kalinga"/>
+        <a:font script="Mlym" typeface="Kartika"/>
+        <a:font script="Laoo" typeface="DokChampa"/>
+        <a:font script="Sinh" typeface="Iskoola Pota"/>
+        <a:font script="Mong" typeface="Mongolian Baiti"/>
+        <a:font script="Viet" typeface="Times New Roman"/>
+        <a:font script="Uigh" typeface="Microsoft Uighur"/>
+        <a:font script="Geor" typeface="Sylfaen"/>
+        <a:font script="Armn" typeface="Arial"/>
+        <a:font script="Bugi" typeface="Leelawadee UI"/>
+        <a:font script="Bopo" typeface="Microsoft JhengHei"/>
+        <a:font script="Java" typeface="Javanese Text"/>
+        <a:font script="Lisu" typeface="Segoe UI"/>
+        <a:font script="Mymr" typeface="Myanmar Text"/>
+        <a:font script="Nkoo" typeface="Ebrima"/>
+        <a:font script="Olck" typeface="Nirmala UI"/>
+        <a:font script="Osma" typeface="Ebrima"/>
+        <a:font script="Phag" typeface="Phagspa"/>
+        <a:font script="Syrn" typeface="Estrangelo Edessa"/>
+        <a:font script="Syrj" typeface="Estrangelo Edessa"/>
+        <a:font script="Syre" typeface="Estrangelo Edessa"/>
+        <a:font script="Sora" typeface="Nirmala UI"/>
+        <a:font script="Tale" typeface="Microsoft Tai Le"/>
+        <a:font script="Talu" typeface="Microsoft New Tai Lue"/>
+        <a:font script="Tfng" typeface="Ebrima"/>
+      </a:majorFont>
+      <a:minorFont>
+        <a:latin typeface="Aptos" panose="02110004020202020204"/>
+        <a:ea typeface=""/>
+        <a:cs typeface=""/>
+        <a:font script="Jpan" typeface="游ゴシック"/>
+        <a:font script="Hang" typeface="맑은 고딕"/>
+        <a:font script="Hans" typeface="等线"/>
+        <a:font script="Hant" typeface="新細明體"/>
+        <a:font script="Arab" typeface="Arial"/>
+        <a:font script="Hebr" typeface="Arial"/>
+        <a:font script="Thai" typeface="Cordia New"/>
+        <a:font script="Ethi" typeface="Nyala"/>
+        <a:font script="Beng" typeface="Vrinda"/>
+        <a:font script="Gujr" typeface="Shruti"/>
+        <a:font script="Khmr" typeface="DaunPenh"/>
+        <a:font script="Knda" typeface="Tunga"/>
+        <a:font script="Guru" typeface="Raavi"/>
+        <a:font script="Cans" typeface="Euphemia"/>
+        <a:font script="Cher" typeface="Plantagenet Cherokee"/>
+        <a:font script="Yiii" typeface="Microsoft Yi Baiti"/>
+        <a:font script="Tibt" typeface="Microsoft Himalaya"/>
+        <a:font script="Thaa" typeface="MV Boli"/>
+        <a:font script="Deva" typeface="Mangal"/>
+        <a:font script="Telu" typeface="Gautami"/>
+        <a:font script="Taml" typeface="Latha"/>
+        <a:font script="Syrc" typeface="Estrangelo Edessa"/>
+        <a:font script="Orya" typeface="Kalinga"/>
+        <a:font script="Mlym" typeface="Kartika"/>
+        <a:font script="Laoo" typeface="DokChampa"/>
+        <a:font script="Sinh" typeface="Iskoola Pota"/>
+        <a:font script="Mong" typeface="Mongolian Baiti"/>
+        <a:font script="Viet" typeface="Arial"/>
+        <a:font script="Uigh" typeface="Microsoft Uighur"/>
+        <a:font script="Geor" typeface="Sylfaen"/>
+        <a:font script="Armn" typeface="Arial"/>
+        <a:font script="Bugi" typeface="Leelawadee UI"/>
+        <a:font script="Bopo" typeface="Microsoft JhengHei"/>
+        <a:font script="Java" typeface="Javanese Text"/>
+        <a:font script="Lisu" typeface="Segoe UI"/>
+        <a:font script="Mymr" typeface="Myanmar Text"/>
+        <a:font script="Nkoo" typeface="Ebrima"/>
+        <a:font script="Olck" typeface="Nirmala UI"/>
+        <a:font script="Osma" typeface="Ebrima"/>
+        <a:font script="Phag" typeface="Phagspa"/>
+        <a:font script="Syrn" typeface="Estrangelo Edessa"/>
+        <a:font script="Syrj" typeface="Estrangelo Edessa"/>
+        <a:font script="Syre" typeface="Estrangelo Edessa"/>
+        <a:font script="Sora" typeface="Nirmala UI"/>
+        <a:font script="Tale" typeface="Microsoft Tai Le"/>
+        <a:font script="Talu" typeface="Microsoft New Tai Lue"/>
+        <a:font script="Tfng" typeface="Ebrima"/>
+      </a:minorFont>
+    </a:fontScheme>
+    <a:fmtScheme name="Office">
+      <a:fillStyleLst>
+        <a:solidFill>
+          <a:schemeClr val="phClr"/>
+        </a:solidFill>
+        <a:gradFill rotWithShape="1">
+          <a:gsLst>
+            <a:gs pos="0">
+              <a:schemeClr val="phClr">
+                <a:lumMod val="110000"/>
+                <a:satMod val="105000"/>
+                <a:tint val="67000"/>
+              </a:schemeClr>
+            </a:gs>
+            <a:gs pos="50000">
+              <a:schemeClr val="phClr">
+                <a:lumMod val="105000"/>
+                <a:satMod val="103000"/>
+                <a:tint val="73000"/>
+              </a:schemeClr>
+            </a:gs>
+            <a:gs pos="100000">
+              <a:schemeClr val="phClr">
+                <a:lumMod val="105000"/>
+                <a:satMod val="109000"/>
+                <a:tint val="81000"/>
+              </a:schemeClr>
+            </a:gs>
+          </a:gsLst>
+          <a:lin ang="5400000" scaled="0"/>
+        </a:gradFill>
+        <a:gradFill rotWithShape="1">
+          <a:gsLst>
+            <a:gs pos="0">
+              <a:schemeClr val="phClr">
+                <a:satMod val="103000"/>
+                <a:lumMod val="102000"/>
+                <a:tint val="94000"/>
+              </a:schemeClr>
+            </a:gs>
+            <a:gs pos="50000">
+              <a:schemeClr val="phClr">
+                <a:satMod val="110000"/>
+                <a:lumMod val="100000"/>
+                <a:shade val="100000"/>
+              </a:schemeClr>
+            </a:gs>
+            <a:gs pos="100000">
+              <a:schemeClr val="phClr">
+                <a:lumMod val="99000"/>
+                <a:satMod val="120000"/>
+                <a:shade val="78000"/>
+              </a:schemeClr>
+            </a:gs>
+          </a:gsLst>
+          <a:lin ang="5400000" scaled="0"/>
+        </a:gradFill>
+      </a:fillStyleLst>
+      <a:lnStyleLst>
+        <a:ln w="12700" cap="flat" cmpd="sng" algn="ctr">
+          <a:solidFill>
+            <a:schemeClr val="phClr"/>
+          </a:solidFill>
+          <a:prstDash val="solid"/>
+          <a:miter lim="800000"/>
+        </a:ln>
+        <a:ln w="19050" cap="flat" cmpd="sng" algn="ctr">
+          <a:solidFill>
+            <a:schemeClr val="phClr"/>
+          </a:solidFill>
+          <a:prstDash val="solid"/>
+          <a:miter lim="800000"/>
+        </a:ln>
+        <a:ln w="25400" cap="flat" cmpd="sng" algn="ctr">
+          <a:solidFill>
+            <a:schemeClr val="phClr"/>
+          </a:solidFill>
+          <a:prstDash val="solid"/>
+          <a:miter lim="800000"/>
+        </a:ln>
+      </a:lnStyleLst>
+      <a:effectStyleLst>
+        <a:effectStyle>
+          <a:effectLst/>
+        </a:effectStyle>
+        <a:effectStyle>
+          <a:effectLst/>
+        </a:effectStyle>
+        <a:effectStyle>
+          <a:effectLst>
+            <a:outerShdw blurRad="57150" dist="19050" dir="5400000" algn="ctr" rotWithShape="0">
+              <a:srgbClr val="000000">
+                <a:alpha val="63000"/>
+              </a:srgbClr>
+            </a:outerShdw>
+          </a:effectLst>
+        </a:effectStyle>
+      </a:effectStyleLst>
+      <a:bgFillStyleLst>
+        <a:solidFill>
+          <a:schemeClr val="phClr"/>
+        </a:solidFill>
+        <a:solidFill>
+          <a:schemeClr val="phClr">
+            <a:tint val="95000"/>
+            <a:satMod val="170000"/>
+          </a:schemeClr>
+        </a:solidFill>
+        <a:gradFill rotWithShape="1">
+          <a:gsLst>
+            <a:gs pos="0">
+              <a:schemeClr val="phClr">
+                <a:tint val="93000"/>
+                <a:satMod val="150000"/>
+                <a:shade val="98000"/>
+                <a:lumMod val="102000"/>
+              </a:schemeClr>
+            </a:gs>
+            <a:gs pos="50000">
+              <a:schemeClr val="phClr">
+                <a:tint val="98000"/>
+                <a:satMod val="130000"/>
+                <a:shade val="90000"/>
+                <a:lumMod val="103000"/>
+              </a:schemeClr>
+            </a:gs>
+            <a:gs pos="100000">
+              <a:schemeClr val="phClr">
+                <a:shade val="63000"/>
+                <a:satMod val="120000"/>
+              </a:schemeClr>
+            </a:gs>
+          </a:gsLst>
+          <a:lin ang="5400000" scaled="0"/>
+        </a:gradFill>
+      </a:bgFillStyleLst>
+    </a:fmtScheme>
+  </a:themeElements>
+  <a:objectDefaults>
+    <a:lnDef>
+      <a:spPr/>
+      <a:bodyPr/>
+      <a:lstStyle/>
+      <a:style>
+        <a:lnRef idx="2">
+          <a:schemeClr val="accent1"/>
+        </a:lnRef>
+        <a:fillRef idx="0">
+          <a:schemeClr val="accent1"/>
+        </a:fillRef>
+        <a:effectRef idx="1">
+          <a:schemeClr val="accent1"/>
+        </a:effectRef>
+        <a:fontRef idx="minor">
+          <a:schemeClr val="tx1"/>
+        </a:fontRef>
+      </a:style>
+    </a:lnDef>
+  </a:objectDefaults>
+  <a:extraClrSchemeLst/>
+  <a:extLst>
+    <a:ext uri="{05A4C25C-085E-4340-85A3-A5531E510DB2}">
+      <thm15:themeFamily xmlns:thm15="http://schemas.microsoft.com/office/thememl/2012/main" name="Office Theme" id="{2E142A2C-CD16-42D6-873A-C26D2A0506FA}" vid="{1BDDFF52-6CD6-40A5-AB3C-68EB2F1E4D0A}"/>
+    </a:ext>
+  </a:extLst>
+</a:theme>
 </file>